--- a/PPTs/Ch6_ARM_Control_Flow_Exercises_ANS.pptx
+++ b/PPTs/Ch6_ARM_Control_Flow_Exercises_ANS.pptx
@@ -5,7 +5,7 @@
     <p:sldMasterId id="2147483660" r:id="rId1"/>
   </p:sldMasterIdLst>
   <p:notesMasterIdLst>
-    <p:notesMasterId r:id="rId36"/>
+    <p:notesMasterId r:id="rId39"/>
   </p:notesMasterIdLst>
   <p:sldIdLst>
     <p:sldId id="256" r:id="rId2"/>
@@ -31,17 +31,20 @@
     <p:sldId id="362" r:id="rId22"/>
     <p:sldId id="363" r:id="rId23"/>
     <p:sldId id="364" r:id="rId24"/>
-    <p:sldId id="368" r:id="rId25"/>
-    <p:sldId id="370" r:id="rId26"/>
-    <p:sldId id="372" r:id="rId27"/>
-    <p:sldId id="373" r:id="rId28"/>
-    <p:sldId id="366" r:id="rId29"/>
-    <p:sldId id="367" r:id="rId30"/>
-    <p:sldId id="287" r:id="rId31"/>
-    <p:sldId id="357" r:id="rId32"/>
-    <p:sldId id="358" r:id="rId33"/>
-    <p:sldId id="359" r:id="rId34"/>
-    <p:sldId id="360" r:id="rId35"/>
+    <p:sldId id="388" r:id="rId25"/>
+    <p:sldId id="387" r:id="rId26"/>
+    <p:sldId id="389" r:id="rId27"/>
+    <p:sldId id="368" r:id="rId28"/>
+    <p:sldId id="370" r:id="rId29"/>
+    <p:sldId id="372" r:id="rId30"/>
+    <p:sldId id="373" r:id="rId31"/>
+    <p:sldId id="366" r:id="rId32"/>
+    <p:sldId id="367" r:id="rId33"/>
+    <p:sldId id="287" r:id="rId34"/>
+    <p:sldId id="357" r:id="rId35"/>
+    <p:sldId id="358" r:id="rId36"/>
+    <p:sldId id="359" r:id="rId37"/>
+    <p:sldId id="360" r:id="rId38"/>
   </p:sldIdLst>
   <p:sldSz cx="9144000" cy="6858000" type="screen4x3"/>
   <p:notesSz cx="6950075" cy="9236075"/>
@@ -162,7 +165,7 @@
 <file path=ppt/revisionInfo.xml><?xml version="1.0" encoding="utf-8"?>
 <p1510:revInfo xmlns:a="http://schemas.openxmlformats.org/drawingml/2006/main" xmlns:r="http://schemas.openxmlformats.org/officeDocument/2006/relationships" xmlns:p1510="http://schemas.microsoft.com/office/powerpoint/2015/10/main">
   <p1510:revLst>
-    <p1510:client id="{C32B227E-31B7-4DEF-A83B-CCC0DBB48D8A}" v="244" dt="2025-09-28T19:28:54.672"/>
+    <p1510:client id="{1C1BE7D0-C766-4929-9518-A803B162FB6C}" v="15" dt="2025-11-13T22:55:10.406"/>
   </p1510:revLst>
 </p1510:revInfo>
 </file>
@@ -172,1541 +175,111 @@
   <pc:docChgLst>
     <pc:chgData name="Zonghua Gu" userId="9a7e1853e1951ef5" providerId="LiveId" clId="{CF1FAA12-072C-4ED5-BA76-0FFFAEFDB88A}"/>
     <pc:docChg chg="undo redo custSel addSld delSld modSld sldOrd">
-      <pc:chgData name="Zonghua Gu" userId="9a7e1853e1951ef5" providerId="LiveId" clId="{CF1FAA12-072C-4ED5-BA76-0FFFAEFDB88A}" dt="2025-09-28T19:29:57.870" v="4745" actId="313"/>
+      <pc:chgData name="Zonghua Gu" userId="9a7e1853e1951ef5" providerId="LiveId" clId="{CF1FAA12-072C-4ED5-BA76-0FFFAEFDB88A}" dt="2025-11-13T22:54:54.319" v="4916" actId="20577"/>
       <pc:docMkLst>
         <pc:docMk/>
       </pc:docMkLst>
-      <pc:sldChg chg="addSp modSp mod">
-        <pc:chgData name="Zonghua Gu" userId="9a7e1853e1951ef5" providerId="LiveId" clId="{CF1FAA12-072C-4ED5-BA76-0FFFAEFDB88A}" dt="2025-09-18T01:38:38.169" v="1240" actId="20577"/>
+      <pc:sldChg chg="addSp delSp modSp add mod">
+        <pc:chgData name="Zonghua Gu" userId="9a7e1853e1951ef5" providerId="LiveId" clId="{CF1FAA12-072C-4ED5-BA76-0FFFAEFDB88A}" dt="2025-11-13T22:51:00.514" v="4840" actId="478"/>
         <pc:sldMkLst>
           <pc:docMk/>
-          <pc:sldMk cId="1683281344" sldId="256"/>
+          <pc:sldMk cId="3309958526" sldId="387"/>
         </pc:sldMkLst>
-        <pc:spChg chg="mod">
-          <ac:chgData name="Zonghua Gu" userId="9a7e1853e1951ef5" providerId="LiveId" clId="{CF1FAA12-072C-4ED5-BA76-0FFFAEFDB88A}" dt="2025-09-18T01:38:30.800" v="1220" actId="20577"/>
+        <pc:spChg chg="del">
+          <ac:chgData name="Zonghua Gu" userId="9a7e1853e1951ef5" providerId="LiveId" clId="{CF1FAA12-072C-4ED5-BA76-0FFFAEFDB88A}" dt="2025-11-13T22:51:00.514" v="4840" actId="478"/>
           <ac:spMkLst>
             <pc:docMk/>
-            <pc:sldMk cId="1683281344" sldId="256"/>
-            <ac:spMk id="2" creationId="{00000000-0000-0000-0000-000000000000}"/>
+            <pc:sldMk cId="3309958526" sldId="387"/>
+            <ac:spMk id="3" creationId="{0AF0EAA8-04DD-1DC7-2E5A-429C3CCEA4D3}"/>
           </ac:spMkLst>
         </pc:spChg>
-        <pc:spChg chg="mod">
-          <ac:chgData name="Zonghua Gu" userId="9a7e1853e1951ef5" providerId="LiveId" clId="{CF1FAA12-072C-4ED5-BA76-0FFFAEFDB88A}" dt="2025-09-17T21:21:39.717" v="1199" actId="20577"/>
+        <pc:spChg chg="del mod">
+          <ac:chgData name="Zonghua Gu" userId="9a7e1853e1951ef5" providerId="LiveId" clId="{CF1FAA12-072C-4ED5-BA76-0FFFAEFDB88A}" dt="2025-11-13T22:48:57.290" v="4820" actId="478"/>
           <ac:spMkLst>
             <pc:docMk/>
-            <pc:sldMk cId="1683281344" sldId="256"/>
-            <ac:spMk id="3" creationId="{00000000-0000-0000-0000-000000000000}"/>
+            <pc:sldMk cId="3309958526" sldId="387"/>
+            <ac:spMk id="4" creationId="{472A0D5E-3E94-6A3E-44B9-A636F96CD9A0}"/>
           </ac:spMkLst>
         </pc:spChg>
-        <pc:spChg chg="mod">
-          <ac:chgData name="Zonghua Gu" userId="9a7e1853e1951ef5" providerId="LiveId" clId="{CF1FAA12-072C-4ED5-BA76-0FFFAEFDB88A}" dt="2025-09-18T01:38:38.169" v="1240" actId="20577"/>
+        <pc:spChg chg="add del mod">
+          <ac:chgData name="Zonghua Gu" userId="9a7e1853e1951ef5" providerId="LiveId" clId="{CF1FAA12-072C-4ED5-BA76-0FFFAEFDB88A}" dt="2025-11-13T22:49:00.642" v="4821" actId="478"/>
           <ac:spMkLst>
             <pc:docMk/>
-            <pc:sldMk cId="1683281344" sldId="256"/>
-            <ac:spMk id="6" creationId="{00000000-0000-0000-0000-000000000000}"/>
+            <pc:sldMk cId="3309958526" sldId="387"/>
+            <ac:spMk id="7" creationId="{B2313784-00BF-0C3B-07C7-1568F78D49B2}"/>
           </ac:spMkLst>
         </pc:spChg>
-        <pc:spChg chg="add mod">
-          <ac:chgData name="Zonghua Gu" userId="9a7e1853e1951ef5" providerId="LiveId" clId="{CF1FAA12-072C-4ED5-BA76-0FFFAEFDB88A}" dt="2025-09-17T21:21:25.145" v="1175" actId="1076"/>
-          <ac:spMkLst>
-            <pc:docMk/>
-            <pc:sldMk cId="1683281344" sldId="256"/>
-            <ac:spMk id="7" creationId="{CDF938EB-593A-3F78-8471-70DE26383963}"/>
-          </ac:spMkLst>
-        </pc:spChg>
-      </pc:sldChg>
-      <pc:sldChg chg="addSp modSp new mod">
-        <pc:chgData name="Zonghua Gu" userId="9a7e1853e1951ef5" providerId="LiveId" clId="{CF1FAA12-072C-4ED5-BA76-0FFFAEFDB88A}" dt="2025-09-28T19:28:54.672" v="4695"/>
-        <pc:sldMkLst>
-          <pc:docMk/>
-          <pc:sldMk cId="407878083" sldId="257"/>
-        </pc:sldMkLst>
-        <pc:spChg chg="mod">
-          <ac:chgData name="Zonghua Gu" userId="9a7e1853e1951ef5" providerId="LiveId" clId="{CF1FAA12-072C-4ED5-BA76-0FFFAEFDB88A}" dt="2025-09-28T17:49:10.180" v="4517"/>
-          <ac:spMkLst>
-            <pc:docMk/>
-            <pc:sldMk cId="407878083" sldId="257"/>
-            <ac:spMk id="2" creationId="{CCBEC3D6-5403-5D32-35E4-EA516530217B}"/>
-          </ac:spMkLst>
-        </pc:spChg>
-        <pc:spChg chg="mod">
-          <ac:chgData name="Zonghua Gu" userId="9a7e1853e1951ef5" providerId="LiveId" clId="{CF1FAA12-072C-4ED5-BA76-0FFFAEFDB88A}" dt="2025-09-28T17:54:50.470" v="4596" actId="20577"/>
-          <ac:spMkLst>
-            <pc:docMk/>
-            <pc:sldMk cId="407878083" sldId="257"/>
-            <ac:spMk id="4" creationId="{6E242E21-1FD3-CB05-AD91-461DFAA4741E}"/>
-          </ac:spMkLst>
-        </pc:spChg>
-        <pc:graphicFrameChg chg="add mod">
-          <ac:chgData name="Zonghua Gu" userId="9a7e1853e1951ef5" providerId="LiveId" clId="{CF1FAA12-072C-4ED5-BA76-0FFFAEFDB88A}" dt="2025-09-28T17:36:04.121" v="4450"/>
+        <pc:graphicFrameChg chg="mod modGraphic">
+          <ac:chgData name="Zonghua Gu" userId="9a7e1853e1951ef5" providerId="LiveId" clId="{CF1FAA12-072C-4ED5-BA76-0FFFAEFDB88A}" dt="2025-11-13T22:50:54.790" v="4839" actId="1035"/>
           <ac:graphicFrameMkLst>
             <pc:docMk/>
-            <pc:sldMk cId="407878083" sldId="257"/>
-            <ac:graphicFrameMk id="5" creationId="{23238D8F-8F3F-1B72-AC46-46CAFF2F8B61}"/>
+            <pc:sldMk cId="3309958526" sldId="387"/>
+            <ac:graphicFrameMk id="5" creationId="{6D8366BD-4DE5-0E68-4E8C-960C4C8810E9}"/>
           </ac:graphicFrameMkLst>
         </pc:graphicFrameChg>
         <pc:graphicFrameChg chg="add mod modGraphic">
-          <ac:chgData name="Zonghua Gu" userId="9a7e1853e1951ef5" providerId="LiveId" clId="{CF1FAA12-072C-4ED5-BA76-0FFFAEFDB88A}" dt="2025-09-28T19:28:54.672" v="4695"/>
+          <ac:chgData name="Zonghua Gu" userId="9a7e1853e1951ef5" providerId="LiveId" clId="{CF1FAA12-072C-4ED5-BA76-0FFFAEFDB88A}" dt="2025-11-13T22:50:48.394" v="4838" actId="1035"/>
           <ac:graphicFrameMkLst>
             <pc:docMk/>
-            <pc:sldMk cId="407878083" sldId="257"/>
-            <ac:graphicFrameMk id="6" creationId="{5BB421C2-3A8D-7BE1-41D7-8E20F0B1E99D}"/>
+            <pc:sldMk cId="3309958526" sldId="387"/>
+            <ac:graphicFrameMk id="8" creationId="{4EFCA94F-BDFA-FAB8-7F7B-C145EFA53CC9}"/>
           </ac:graphicFrameMkLst>
         </pc:graphicFrameChg>
       </pc:sldChg>
-      <pc:sldChg chg="del">
-        <pc:chgData name="Zonghua Gu" userId="9a7e1853e1951ef5" providerId="LiveId" clId="{CF1FAA12-072C-4ED5-BA76-0FFFAEFDB88A}" dt="2025-09-18T01:38:44.397" v="1241" actId="47"/>
+      <pc:sldChg chg="delSp modSp add mod">
+        <pc:chgData name="Zonghua Gu" userId="9a7e1853e1951ef5" providerId="LiveId" clId="{CF1FAA12-072C-4ED5-BA76-0FFFAEFDB88A}" dt="2025-11-13T22:53:35.403" v="4845" actId="20577"/>
         <pc:sldMkLst>
           <pc:docMk/>
-          <pc:sldMk cId="166800616" sldId="269"/>
-        </pc:sldMkLst>
-      </pc:sldChg>
-      <pc:sldChg chg="del">
-        <pc:chgData name="Zonghua Gu" userId="9a7e1853e1951ef5" providerId="LiveId" clId="{CF1FAA12-072C-4ED5-BA76-0FFFAEFDB88A}" dt="2025-09-18T01:38:44.397" v="1241" actId="47"/>
-        <pc:sldMkLst>
-          <pc:docMk/>
-          <pc:sldMk cId="2502343479" sldId="275"/>
-        </pc:sldMkLst>
-      </pc:sldChg>
-      <pc:sldChg chg="del">
-        <pc:chgData name="Zonghua Gu" userId="9a7e1853e1951ef5" providerId="LiveId" clId="{CF1FAA12-072C-4ED5-BA76-0FFFAEFDB88A}" dt="2025-09-18T01:38:44.397" v="1241" actId="47"/>
-        <pc:sldMkLst>
-          <pc:docMk/>
-          <pc:sldMk cId="2086055198" sldId="277"/>
-        </pc:sldMkLst>
-      </pc:sldChg>
-      <pc:sldChg chg="del">
-        <pc:chgData name="Zonghua Gu" userId="9a7e1853e1951ef5" providerId="LiveId" clId="{CF1FAA12-072C-4ED5-BA76-0FFFAEFDB88A}" dt="2025-09-18T01:38:44.397" v="1241" actId="47"/>
-        <pc:sldMkLst>
-          <pc:docMk/>
-          <pc:sldMk cId="3146583954" sldId="282"/>
-        </pc:sldMkLst>
-      </pc:sldChg>
-      <pc:sldChg chg="addSp modSp del mod">
-        <pc:chgData name="Zonghua Gu" userId="9a7e1853e1951ef5" providerId="LiveId" clId="{CF1FAA12-072C-4ED5-BA76-0FFFAEFDB88A}" dt="2025-09-18T01:38:44.397" v="1241" actId="47"/>
-        <pc:sldMkLst>
-          <pc:docMk/>
-          <pc:sldMk cId="3856419856" sldId="284"/>
-        </pc:sldMkLst>
-      </pc:sldChg>
-      <pc:sldChg chg="addSp delSp modSp del mod">
-        <pc:chgData name="Zonghua Gu" userId="9a7e1853e1951ef5" providerId="LiveId" clId="{CF1FAA12-072C-4ED5-BA76-0FFFAEFDB88A}" dt="2025-09-18T01:38:44.397" v="1241" actId="47"/>
-        <pc:sldMkLst>
-          <pc:docMk/>
-          <pc:sldMk cId="3410570449" sldId="285"/>
-        </pc:sldMkLst>
-      </pc:sldChg>
-      <pc:sldChg chg="modSp add">
-        <pc:chgData name="Zonghua Gu" userId="9a7e1853e1951ef5" providerId="LiveId" clId="{CF1FAA12-072C-4ED5-BA76-0FFFAEFDB88A}" dt="2025-09-28T19:28:54.672" v="4695"/>
-        <pc:sldMkLst>
-          <pc:docMk/>
-          <pc:sldMk cId="2535127592" sldId="287"/>
+          <pc:sldMk cId="2076517291" sldId="388"/>
         </pc:sldMkLst>
         <pc:spChg chg="mod">
-          <ac:chgData name="Zonghua Gu" userId="9a7e1853e1951ef5" providerId="LiveId" clId="{CF1FAA12-072C-4ED5-BA76-0FFFAEFDB88A}" dt="2025-09-28T19:28:54.672" v="4695"/>
+          <ac:chgData name="Zonghua Gu" userId="9a7e1853e1951ef5" providerId="LiveId" clId="{CF1FAA12-072C-4ED5-BA76-0FFFAEFDB88A}" dt="2025-11-13T22:53:22.832" v="4842" actId="20577"/>
           <ac:spMkLst>
             <pc:docMk/>
-            <pc:sldMk cId="2535127592" sldId="287"/>
-            <ac:spMk id="4" creationId="{2E644054-91F4-1D97-9E7A-B6455D725376}"/>
+            <pc:sldMk cId="2076517291" sldId="388"/>
+            <ac:spMk id="2" creationId="{286AE22E-7014-BD8E-E9B0-11BB41A135DA}"/>
           </ac:spMkLst>
         </pc:spChg>
-      </pc:sldChg>
-      <pc:sldChg chg="modSp add del mod">
-        <pc:chgData name="Zonghua Gu" userId="9a7e1853e1951ef5" providerId="LiveId" clId="{CF1FAA12-072C-4ED5-BA76-0FFFAEFDB88A}" dt="2025-09-28T18:03:32.126" v="4634" actId="2696"/>
-        <pc:sldMkLst>
-          <pc:docMk/>
-          <pc:sldMk cId="3365210863" sldId="287"/>
-        </pc:sldMkLst>
-      </pc:sldChg>
-      <pc:sldChg chg="add del">
-        <pc:chgData name="Zonghua Gu" userId="9a7e1853e1951ef5" providerId="LiveId" clId="{CF1FAA12-072C-4ED5-BA76-0FFFAEFDB88A}" dt="2025-09-28T18:03:06.616" v="4630"/>
-        <pc:sldMkLst>
-          <pc:docMk/>
-          <pc:sldMk cId="3886997725" sldId="287"/>
-        </pc:sldMkLst>
-      </pc:sldChg>
-      <pc:sldChg chg="del modNotesTx">
-        <pc:chgData name="Zonghua Gu" userId="9a7e1853e1951ef5" providerId="LiveId" clId="{CF1FAA12-072C-4ED5-BA76-0FFFAEFDB88A}" dt="2025-09-18T01:38:44.397" v="1241" actId="47"/>
-        <pc:sldMkLst>
-          <pc:docMk/>
-          <pc:sldMk cId="1977878706" sldId="292"/>
-        </pc:sldMkLst>
-      </pc:sldChg>
-      <pc:sldChg chg="del">
-        <pc:chgData name="Zonghua Gu" userId="9a7e1853e1951ef5" providerId="LiveId" clId="{CF1FAA12-072C-4ED5-BA76-0FFFAEFDB88A}" dt="2025-09-18T01:38:44.397" v="1241" actId="47"/>
-        <pc:sldMkLst>
-          <pc:docMk/>
-          <pc:sldMk cId="2319237102" sldId="297"/>
-        </pc:sldMkLst>
-      </pc:sldChg>
-      <pc:sldChg chg="modSp del mod modNotesTx">
-        <pc:chgData name="Zonghua Gu" userId="9a7e1853e1951ef5" providerId="LiveId" clId="{CF1FAA12-072C-4ED5-BA76-0FFFAEFDB88A}" dt="2025-09-18T01:38:44.397" v="1241" actId="47"/>
-        <pc:sldMkLst>
-          <pc:docMk/>
-          <pc:sldMk cId="2121641431" sldId="298"/>
-        </pc:sldMkLst>
-      </pc:sldChg>
-      <pc:sldChg chg="del">
-        <pc:chgData name="Zonghua Gu" userId="9a7e1853e1951ef5" providerId="LiveId" clId="{CF1FAA12-072C-4ED5-BA76-0FFFAEFDB88A}" dt="2025-09-18T01:38:44.397" v="1241" actId="47"/>
-        <pc:sldMkLst>
-          <pc:docMk/>
-          <pc:sldMk cId="209600006" sldId="299"/>
-        </pc:sldMkLst>
-      </pc:sldChg>
-      <pc:sldChg chg="addSp delSp modSp del mod">
-        <pc:chgData name="Zonghua Gu" userId="9a7e1853e1951ef5" providerId="LiveId" clId="{CF1FAA12-072C-4ED5-BA76-0FFFAEFDB88A}" dt="2025-09-18T01:38:44.397" v="1241" actId="47"/>
-        <pc:sldMkLst>
-          <pc:docMk/>
-          <pc:sldMk cId="203524775" sldId="300"/>
-        </pc:sldMkLst>
-      </pc:sldChg>
-      <pc:sldChg chg="del">
-        <pc:chgData name="Zonghua Gu" userId="9a7e1853e1951ef5" providerId="LiveId" clId="{CF1FAA12-072C-4ED5-BA76-0FFFAEFDB88A}" dt="2025-09-17T18:15:27.095" v="199" actId="47"/>
-        <pc:sldMkLst>
-          <pc:docMk/>
-          <pc:sldMk cId="2550961529" sldId="301"/>
-        </pc:sldMkLst>
-      </pc:sldChg>
-      <pc:sldChg chg="del">
-        <pc:chgData name="Zonghua Gu" userId="9a7e1853e1951ef5" providerId="LiveId" clId="{CF1FAA12-072C-4ED5-BA76-0FFFAEFDB88A}" dt="2025-09-18T01:38:44.397" v="1241" actId="47"/>
-        <pc:sldMkLst>
-          <pc:docMk/>
-          <pc:sldMk cId="1735132193" sldId="303"/>
-        </pc:sldMkLst>
-      </pc:sldChg>
-      <pc:sldChg chg="del">
-        <pc:chgData name="Zonghua Gu" userId="9a7e1853e1951ef5" providerId="LiveId" clId="{CF1FAA12-072C-4ED5-BA76-0FFFAEFDB88A}" dt="2025-09-18T01:38:44.397" v="1241" actId="47"/>
-        <pc:sldMkLst>
-          <pc:docMk/>
-          <pc:sldMk cId="809613256" sldId="304"/>
-        </pc:sldMkLst>
-      </pc:sldChg>
-      <pc:sldChg chg="modSp del mod">
-        <pc:chgData name="Zonghua Gu" userId="9a7e1853e1951ef5" providerId="LiveId" clId="{CF1FAA12-072C-4ED5-BA76-0FFFAEFDB88A}" dt="2025-09-18T01:38:44.397" v="1241" actId="47"/>
-        <pc:sldMkLst>
-          <pc:docMk/>
-          <pc:sldMk cId="3184454" sldId="313"/>
-        </pc:sldMkLst>
-      </pc:sldChg>
-      <pc:sldChg chg="del">
-        <pc:chgData name="Zonghua Gu" userId="9a7e1853e1951ef5" providerId="LiveId" clId="{CF1FAA12-072C-4ED5-BA76-0FFFAEFDB88A}" dt="2025-09-17T19:56:27.968" v="1173" actId="2696"/>
-        <pc:sldMkLst>
-          <pc:docMk/>
-          <pc:sldMk cId="207599578" sldId="317"/>
-        </pc:sldMkLst>
-      </pc:sldChg>
-      <pc:sldChg chg="del">
-        <pc:chgData name="Zonghua Gu" userId="9a7e1853e1951ef5" providerId="LiveId" clId="{CF1FAA12-072C-4ED5-BA76-0FFFAEFDB88A}" dt="2025-09-17T19:56:27.968" v="1173" actId="2696"/>
-        <pc:sldMkLst>
-          <pc:docMk/>
-          <pc:sldMk cId="2069787402" sldId="318"/>
-        </pc:sldMkLst>
-      </pc:sldChg>
-      <pc:sldChg chg="addSp delSp modSp del mod">
-        <pc:chgData name="Zonghua Gu" userId="9a7e1853e1951ef5" providerId="LiveId" clId="{CF1FAA12-072C-4ED5-BA76-0FFFAEFDB88A}" dt="2025-09-18T01:38:44.397" v="1241" actId="47"/>
-        <pc:sldMkLst>
-          <pc:docMk/>
-          <pc:sldMk cId="956433268" sldId="321"/>
-        </pc:sldMkLst>
-      </pc:sldChg>
-      <pc:sldChg chg="addSp modSp del mod">
-        <pc:chgData name="Zonghua Gu" userId="9a7e1853e1951ef5" providerId="LiveId" clId="{CF1FAA12-072C-4ED5-BA76-0FFFAEFDB88A}" dt="2025-09-18T01:38:44.397" v="1241" actId="47"/>
-        <pc:sldMkLst>
-          <pc:docMk/>
-          <pc:sldMk cId="2653589447" sldId="322"/>
-        </pc:sldMkLst>
-      </pc:sldChg>
-      <pc:sldChg chg="addSp delSp modSp del mod">
-        <pc:chgData name="Zonghua Gu" userId="9a7e1853e1951ef5" providerId="LiveId" clId="{CF1FAA12-072C-4ED5-BA76-0FFFAEFDB88A}" dt="2025-09-18T01:38:44.397" v="1241" actId="47"/>
-        <pc:sldMkLst>
-          <pc:docMk/>
-          <pc:sldMk cId="2667703659" sldId="323"/>
-        </pc:sldMkLst>
-      </pc:sldChg>
-      <pc:sldChg chg="modSp del mod">
-        <pc:chgData name="Zonghua Gu" userId="9a7e1853e1951ef5" providerId="LiveId" clId="{CF1FAA12-072C-4ED5-BA76-0FFFAEFDB88A}" dt="2025-09-18T01:38:44.397" v="1241" actId="47"/>
-        <pc:sldMkLst>
-          <pc:docMk/>
-          <pc:sldMk cId="2924045303" sldId="324"/>
-        </pc:sldMkLst>
-      </pc:sldChg>
-      <pc:sldChg chg="addSp modSp del mod">
-        <pc:chgData name="Zonghua Gu" userId="9a7e1853e1951ef5" providerId="LiveId" clId="{CF1FAA12-072C-4ED5-BA76-0FFFAEFDB88A}" dt="2025-09-18T01:38:44.397" v="1241" actId="47"/>
-        <pc:sldMkLst>
-          <pc:docMk/>
-          <pc:sldMk cId="2331627715" sldId="325"/>
-        </pc:sldMkLst>
-      </pc:sldChg>
-      <pc:sldChg chg="addSp delSp modSp del mod">
-        <pc:chgData name="Zonghua Gu" userId="9a7e1853e1951ef5" providerId="LiveId" clId="{CF1FAA12-072C-4ED5-BA76-0FFFAEFDB88A}" dt="2025-09-18T01:38:44.397" v="1241" actId="47"/>
-        <pc:sldMkLst>
-          <pc:docMk/>
-          <pc:sldMk cId="3293036044" sldId="326"/>
-        </pc:sldMkLst>
-      </pc:sldChg>
-      <pc:sldChg chg="addSp delSp modSp del mod">
-        <pc:chgData name="Zonghua Gu" userId="9a7e1853e1951ef5" providerId="LiveId" clId="{CF1FAA12-072C-4ED5-BA76-0FFFAEFDB88A}" dt="2025-09-18T01:38:44.397" v="1241" actId="47"/>
-        <pc:sldMkLst>
-          <pc:docMk/>
-          <pc:sldMk cId="2322116273" sldId="327"/>
-        </pc:sldMkLst>
-      </pc:sldChg>
-      <pc:sldChg chg="del">
-        <pc:chgData name="Zonghua Gu" userId="9a7e1853e1951ef5" providerId="LiveId" clId="{CF1FAA12-072C-4ED5-BA76-0FFFAEFDB88A}" dt="2025-09-18T01:38:44.397" v="1241" actId="47"/>
-        <pc:sldMkLst>
-          <pc:docMk/>
-          <pc:sldMk cId="3601302061" sldId="331"/>
-        </pc:sldMkLst>
-      </pc:sldChg>
-      <pc:sldChg chg="del">
-        <pc:chgData name="Zonghua Gu" userId="9a7e1853e1951ef5" providerId="LiveId" clId="{CF1FAA12-072C-4ED5-BA76-0FFFAEFDB88A}" dt="2025-09-18T01:38:44.397" v="1241" actId="47"/>
-        <pc:sldMkLst>
-          <pc:docMk/>
-          <pc:sldMk cId="3102424687" sldId="332"/>
-        </pc:sldMkLst>
-      </pc:sldChg>
-      <pc:sldChg chg="del">
-        <pc:chgData name="Zonghua Gu" userId="9a7e1853e1951ef5" providerId="LiveId" clId="{CF1FAA12-072C-4ED5-BA76-0FFFAEFDB88A}" dt="2025-09-18T01:38:44.397" v="1241" actId="47"/>
-        <pc:sldMkLst>
-          <pc:docMk/>
-          <pc:sldMk cId="4291846176" sldId="334"/>
-        </pc:sldMkLst>
-      </pc:sldChg>
-      <pc:sldChg chg="addSp modSp del mod">
-        <pc:chgData name="Zonghua Gu" userId="9a7e1853e1951ef5" providerId="LiveId" clId="{CF1FAA12-072C-4ED5-BA76-0FFFAEFDB88A}" dt="2025-09-18T01:38:44.397" v="1241" actId="47"/>
-        <pc:sldMkLst>
-          <pc:docMk/>
-          <pc:sldMk cId="4015228595" sldId="335"/>
-        </pc:sldMkLst>
-      </pc:sldChg>
-      <pc:sldChg chg="addSp modSp del mod">
-        <pc:chgData name="Zonghua Gu" userId="9a7e1853e1951ef5" providerId="LiveId" clId="{CF1FAA12-072C-4ED5-BA76-0FFFAEFDB88A}" dt="2025-09-18T01:38:44.397" v="1241" actId="47"/>
-        <pc:sldMkLst>
-          <pc:docMk/>
-          <pc:sldMk cId="1520596659" sldId="336"/>
-        </pc:sldMkLst>
-      </pc:sldChg>
-      <pc:sldChg chg="addSp modSp del mod">
-        <pc:chgData name="Zonghua Gu" userId="9a7e1853e1951ef5" providerId="LiveId" clId="{CF1FAA12-072C-4ED5-BA76-0FFFAEFDB88A}" dt="2025-09-18T01:38:44.397" v="1241" actId="47"/>
-        <pc:sldMkLst>
-          <pc:docMk/>
-          <pc:sldMk cId="1090868990" sldId="339"/>
-        </pc:sldMkLst>
-      </pc:sldChg>
-      <pc:sldChg chg="addSp delSp modSp del mod modNotesTx">
-        <pc:chgData name="Zonghua Gu" userId="9a7e1853e1951ef5" providerId="LiveId" clId="{CF1FAA12-072C-4ED5-BA76-0FFFAEFDB88A}" dt="2025-09-18T01:38:44.397" v="1241" actId="47"/>
-        <pc:sldMkLst>
-          <pc:docMk/>
-          <pc:sldMk cId="1809958305" sldId="340"/>
-        </pc:sldMkLst>
-      </pc:sldChg>
-      <pc:sldChg chg="del">
-        <pc:chgData name="Zonghua Gu" userId="9a7e1853e1951ef5" providerId="LiveId" clId="{CF1FAA12-072C-4ED5-BA76-0FFFAEFDB88A}" dt="2025-09-18T01:38:44.397" v="1241" actId="47"/>
-        <pc:sldMkLst>
-          <pc:docMk/>
-          <pc:sldMk cId="1197208543" sldId="343"/>
-        </pc:sldMkLst>
-      </pc:sldChg>
-      <pc:sldChg chg="addSp delSp modSp del mod">
-        <pc:chgData name="Zonghua Gu" userId="9a7e1853e1951ef5" providerId="LiveId" clId="{CF1FAA12-072C-4ED5-BA76-0FFFAEFDB88A}" dt="2025-09-18T01:38:44.397" v="1241" actId="47"/>
-        <pc:sldMkLst>
-          <pc:docMk/>
-          <pc:sldMk cId="2051571543" sldId="344"/>
-        </pc:sldMkLst>
-      </pc:sldChg>
-      <pc:sldChg chg="del">
-        <pc:chgData name="Zonghua Gu" userId="9a7e1853e1951ef5" providerId="LiveId" clId="{CF1FAA12-072C-4ED5-BA76-0FFFAEFDB88A}" dt="2025-09-18T01:38:44.397" v="1241" actId="47"/>
-        <pc:sldMkLst>
-          <pc:docMk/>
-          <pc:sldMk cId="548132547" sldId="345"/>
-        </pc:sldMkLst>
-      </pc:sldChg>
-      <pc:sldChg chg="modSp del mod">
-        <pc:chgData name="Zonghua Gu" userId="9a7e1853e1951ef5" providerId="LiveId" clId="{CF1FAA12-072C-4ED5-BA76-0FFFAEFDB88A}" dt="2025-09-18T01:38:44.397" v="1241" actId="47"/>
-        <pc:sldMkLst>
-          <pc:docMk/>
-          <pc:sldMk cId="2237900729" sldId="346"/>
-        </pc:sldMkLst>
-      </pc:sldChg>
-      <pc:sldChg chg="del">
-        <pc:chgData name="Zonghua Gu" userId="9a7e1853e1951ef5" providerId="LiveId" clId="{CF1FAA12-072C-4ED5-BA76-0FFFAEFDB88A}" dt="2025-09-18T01:38:44.397" v="1241" actId="47"/>
-        <pc:sldMkLst>
-          <pc:docMk/>
-          <pc:sldMk cId="3183429436" sldId="347"/>
-        </pc:sldMkLst>
-      </pc:sldChg>
-      <pc:sldChg chg="del">
-        <pc:chgData name="Zonghua Gu" userId="9a7e1853e1951ef5" providerId="LiveId" clId="{CF1FAA12-072C-4ED5-BA76-0FFFAEFDB88A}" dt="2025-09-18T01:38:44.397" v="1241" actId="47"/>
-        <pc:sldMkLst>
-          <pc:docMk/>
-          <pc:sldMk cId="1680559388" sldId="348"/>
-        </pc:sldMkLst>
-      </pc:sldChg>
-      <pc:sldChg chg="addSp modSp del mod">
-        <pc:chgData name="Zonghua Gu" userId="9a7e1853e1951ef5" providerId="LiveId" clId="{CF1FAA12-072C-4ED5-BA76-0FFFAEFDB88A}" dt="2025-09-18T01:38:44.397" v="1241" actId="47"/>
-        <pc:sldMkLst>
-          <pc:docMk/>
-          <pc:sldMk cId="2162368129" sldId="349"/>
-        </pc:sldMkLst>
-      </pc:sldChg>
-      <pc:sldChg chg="del">
-        <pc:chgData name="Zonghua Gu" userId="9a7e1853e1951ef5" providerId="LiveId" clId="{CF1FAA12-072C-4ED5-BA76-0FFFAEFDB88A}" dt="2025-09-18T01:38:44.397" v="1241" actId="47"/>
-        <pc:sldMkLst>
-          <pc:docMk/>
-          <pc:sldMk cId="3829986606" sldId="350"/>
-        </pc:sldMkLst>
-      </pc:sldChg>
-      <pc:sldChg chg="del">
-        <pc:chgData name="Zonghua Gu" userId="9a7e1853e1951ef5" providerId="LiveId" clId="{CF1FAA12-072C-4ED5-BA76-0FFFAEFDB88A}" dt="2025-09-18T01:38:44.397" v="1241" actId="47"/>
-        <pc:sldMkLst>
-          <pc:docMk/>
-          <pc:sldMk cId="1558414871" sldId="351"/>
-        </pc:sldMkLst>
-      </pc:sldChg>
-      <pc:sldChg chg="addSp modSp add mod modNotes modNotesTx">
-        <pc:chgData name="Zonghua Gu" userId="9a7e1853e1951ef5" providerId="LiveId" clId="{CF1FAA12-072C-4ED5-BA76-0FFFAEFDB88A}" dt="2025-09-28T19:28:54.672" v="4695"/>
-        <pc:sldMkLst>
-          <pc:docMk/>
-          <pc:sldMk cId="544675658" sldId="352"/>
-        </pc:sldMkLst>
-        <pc:spChg chg="mod">
-          <ac:chgData name="Zonghua Gu" userId="9a7e1853e1951ef5" providerId="LiveId" clId="{CF1FAA12-072C-4ED5-BA76-0FFFAEFDB88A}" dt="2025-09-28T17:20:58.814" v="4228" actId="20577"/>
-          <ac:spMkLst>
-            <pc:docMk/>
-            <pc:sldMk cId="544675658" sldId="352"/>
-            <ac:spMk id="2" creationId="{DD9933DF-9610-809C-11B2-6E559AD6FCAA}"/>
-          </ac:spMkLst>
-        </pc:spChg>
-        <pc:spChg chg="mod">
-          <ac:chgData name="Zonghua Gu" userId="9a7e1853e1951ef5" providerId="LiveId" clId="{CF1FAA12-072C-4ED5-BA76-0FFFAEFDB88A}" dt="2025-09-28T17:21:51.355" v="4243" actId="20577"/>
-          <ac:spMkLst>
-            <pc:docMk/>
-            <pc:sldMk cId="544675658" sldId="352"/>
-            <ac:spMk id="4" creationId="{815194D1-447C-6A4E-281D-DAB9A59A84CD}"/>
-          </ac:spMkLst>
-        </pc:spChg>
-        <pc:graphicFrameChg chg="add mod modGraphic">
-          <ac:chgData name="Zonghua Gu" userId="9a7e1853e1951ef5" providerId="LiveId" clId="{CF1FAA12-072C-4ED5-BA76-0FFFAEFDB88A}" dt="2025-09-28T17:21:55.936" v="4244" actId="1076"/>
+        <pc:graphicFrameChg chg="modGraphic">
+          <ac:chgData name="Zonghua Gu" userId="9a7e1853e1951ef5" providerId="LiveId" clId="{CF1FAA12-072C-4ED5-BA76-0FFFAEFDB88A}" dt="2025-11-13T22:53:35.403" v="4845" actId="20577"/>
           <ac:graphicFrameMkLst>
             <pc:docMk/>
-            <pc:sldMk cId="544675658" sldId="352"/>
-            <ac:graphicFrameMk id="5" creationId="{35FA2BB6-217B-C52B-5A1B-6F25A3FDBB0D}"/>
+            <pc:sldMk cId="2076517291" sldId="388"/>
+            <ac:graphicFrameMk id="5" creationId="{189D004C-3271-3ECE-4454-851923351400}"/>
           </ac:graphicFrameMkLst>
         </pc:graphicFrameChg>
-        <pc:graphicFrameChg chg="add mod modGraphic">
-          <ac:chgData name="Zonghua Gu" userId="9a7e1853e1951ef5" providerId="LiveId" clId="{CF1FAA12-072C-4ED5-BA76-0FFFAEFDB88A}" dt="2025-09-28T17:21:55.936" v="4244" actId="1076"/>
+        <pc:graphicFrameChg chg="del">
+          <ac:chgData name="Zonghua Gu" userId="9a7e1853e1951ef5" providerId="LiveId" clId="{CF1FAA12-072C-4ED5-BA76-0FFFAEFDB88A}" dt="2025-11-13T22:53:27.329" v="4843" actId="478"/>
           <ac:graphicFrameMkLst>
             <pc:docMk/>
-            <pc:sldMk cId="544675658" sldId="352"/>
-            <ac:graphicFrameMk id="6" creationId="{538E8EFF-813B-0481-15DB-FE881211C915}"/>
-          </ac:graphicFrameMkLst>
-        </pc:graphicFrameChg>
-      </pc:sldChg>
-      <pc:sldChg chg="del">
-        <pc:chgData name="Zonghua Gu" userId="9a7e1853e1951ef5" providerId="LiveId" clId="{CF1FAA12-072C-4ED5-BA76-0FFFAEFDB88A}" dt="2025-09-18T01:38:44.397" v="1241" actId="47"/>
-        <pc:sldMkLst>
-          <pc:docMk/>
-          <pc:sldMk cId="2171254142" sldId="352"/>
-        </pc:sldMkLst>
-      </pc:sldChg>
-      <pc:sldChg chg="addSp delSp modSp add mod modNotes modNotesTx">
-        <pc:chgData name="Zonghua Gu" userId="9a7e1853e1951ef5" providerId="LiveId" clId="{CF1FAA12-072C-4ED5-BA76-0FFFAEFDB88A}" dt="2025-09-28T17:33:47.142" v="4425" actId="1076"/>
-        <pc:sldMkLst>
-          <pc:docMk/>
-          <pc:sldMk cId="188395404" sldId="353"/>
-        </pc:sldMkLst>
-        <pc:spChg chg="mod">
-          <ac:chgData name="Zonghua Gu" userId="9a7e1853e1951ef5" providerId="LiveId" clId="{CF1FAA12-072C-4ED5-BA76-0FFFAEFDB88A}" dt="2025-09-28T17:21:26.632" v="4236" actId="20577"/>
-          <ac:spMkLst>
-            <pc:docMk/>
-            <pc:sldMk cId="188395404" sldId="353"/>
-            <ac:spMk id="2" creationId="{8F445031-374F-3949-2E75-E92EE2E13893}"/>
-          </ac:spMkLst>
-        </pc:spChg>
-        <pc:spChg chg="mod">
-          <ac:chgData name="Zonghua Gu" userId="9a7e1853e1951ef5" providerId="LiveId" clId="{CF1FAA12-072C-4ED5-BA76-0FFFAEFDB88A}" dt="2025-09-28T17:29:22.501" v="4323" actId="14100"/>
-          <ac:spMkLst>
-            <pc:docMk/>
-            <pc:sldMk cId="188395404" sldId="353"/>
-            <ac:spMk id="4" creationId="{B4C3D2E6-2CBC-36E7-D723-501E1827F828}"/>
-          </ac:spMkLst>
-        </pc:spChg>
-        <pc:spChg chg="add mod">
-          <ac:chgData name="Zonghua Gu" userId="9a7e1853e1951ef5" providerId="LiveId" clId="{CF1FAA12-072C-4ED5-BA76-0FFFAEFDB88A}" dt="2025-09-28T17:33:47.142" v="4425" actId="1076"/>
-          <ac:spMkLst>
-            <pc:docMk/>
-            <pc:sldMk cId="188395404" sldId="353"/>
-            <ac:spMk id="9" creationId="{098531A2-BA43-5E4B-4A07-833BA3447510}"/>
-          </ac:spMkLst>
-        </pc:spChg>
-        <pc:graphicFrameChg chg="add mod modGraphic">
-          <ac:chgData name="Zonghua Gu" userId="9a7e1853e1951ef5" providerId="LiveId" clId="{CF1FAA12-072C-4ED5-BA76-0FFFAEFDB88A}" dt="2025-09-28T17:32:05.889" v="4374" actId="20577"/>
-          <ac:graphicFrameMkLst>
-            <pc:docMk/>
-            <pc:sldMk cId="188395404" sldId="353"/>
-            <ac:graphicFrameMk id="5" creationId="{127BD2A0-832C-7F1E-86CB-33A992AE5B67}"/>
-          </ac:graphicFrameMkLst>
-        </pc:graphicFrameChg>
-        <pc:graphicFrameChg chg="add mod modGraphic">
-          <ac:chgData name="Zonghua Gu" userId="9a7e1853e1951ef5" providerId="LiveId" clId="{CF1FAA12-072C-4ED5-BA76-0FFFAEFDB88A}" dt="2025-09-28T17:29:39.501" v="4328" actId="20577"/>
-          <ac:graphicFrameMkLst>
-            <pc:docMk/>
-            <pc:sldMk cId="188395404" sldId="353"/>
-            <ac:graphicFrameMk id="8" creationId="{3C871EDF-DD88-8052-FF66-F955503E891D}"/>
-          </ac:graphicFrameMkLst>
-        </pc:graphicFrameChg>
-        <pc:picChg chg="add del mod">
-          <ac:chgData name="Zonghua Gu" userId="9a7e1853e1951ef5" providerId="LiveId" clId="{CF1FAA12-072C-4ED5-BA76-0FFFAEFDB88A}" dt="2025-09-28T17:29:13.444" v="4321" actId="478"/>
-          <ac:picMkLst>
-            <pc:docMk/>
-            <pc:sldMk cId="188395404" sldId="353"/>
-            <ac:picMk id="7" creationId="{4F40D46B-9D97-C624-E28D-1DD537700D60}"/>
-          </ac:picMkLst>
-        </pc:picChg>
-      </pc:sldChg>
-      <pc:sldChg chg="del">
-        <pc:chgData name="Zonghua Gu" userId="9a7e1853e1951ef5" providerId="LiveId" clId="{CF1FAA12-072C-4ED5-BA76-0FFFAEFDB88A}" dt="2025-09-18T01:38:44.397" v="1241" actId="47"/>
-        <pc:sldMkLst>
-          <pc:docMk/>
-          <pc:sldMk cId="1307188585" sldId="353"/>
-        </pc:sldMkLst>
-      </pc:sldChg>
-      <pc:sldChg chg="addSp delSp modSp new mod">
-        <pc:chgData name="Zonghua Gu" userId="9a7e1853e1951ef5" providerId="LiveId" clId="{CF1FAA12-072C-4ED5-BA76-0FFFAEFDB88A}" dt="2025-09-28T17:50:15.456" v="4565" actId="20577"/>
-        <pc:sldMkLst>
-          <pc:docMk/>
-          <pc:sldMk cId="1116486319" sldId="354"/>
-        </pc:sldMkLst>
-        <pc:spChg chg="mod">
-          <ac:chgData name="Zonghua Gu" userId="9a7e1853e1951ef5" providerId="LiveId" clId="{CF1FAA12-072C-4ED5-BA76-0FFFAEFDB88A}" dt="2025-09-28T17:50:15.456" v="4565" actId="20577"/>
-          <ac:spMkLst>
-            <pc:docMk/>
-            <pc:sldMk cId="1116486319" sldId="354"/>
-            <ac:spMk id="2" creationId="{283A91CE-CC77-9A35-BF4E-63E1CEF46C29}"/>
-          </ac:spMkLst>
-        </pc:spChg>
-        <pc:spChg chg="mod">
-          <ac:chgData name="Zonghua Gu" userId="9a7e1853e1951ef5" providerId="LiveId" clId="{CF1FAA12-072C-4ED5-BA76-0FFFAEFDB88A}" dt="2025-09-23T17:46:43.945" v="2575"/>
-          <ac:spMkLst>
-            <pc:docMk/>
-            <pc:sldMk cId="1116486319" sldId="354"/>
-            <ac:spMk id="4" creationId="{2A432836-5391-1803-C991-983B7660679E}"/>
-          </ac:spMkLst>
-        </pc:spChg>
-        <pc:graphicFrameChg chg="add del mod modGraphic">
-          <ac:chgData name="Zonghua Gu" userId="9a7e1853e1951ef5" providerId="LiveId" clId="{CF1FAA12-072C-4ED5-BA76-0FFFAEFDB88A}" dt="2025-09-28T17:35:01.683" v="4434" actId="478"/>
-          <ac:graphicFrameMkLst>
-            <pc:docMk/>
-            <pc:sldMk cId="1116486319" sldId="354"/>
-            <ac:graphicFrameMk id="5" creationId="{B5EDFCEB-FBD0-B996-3E8B-F1369E4A619E}"/>
-          </ac:graphicFrameMkLst>
-        </pc:graphicFrameChg>
-      </pc:sldChg>
-      <pc:sldChg chg="modSp add del mod">
-        <pc:chgData name="Zonghua Gu" userId="9a7e1853e1951ef5" providerId="LiveId" clId="{CF1FAA12-072C-4ED5-BA76-0FFFAEFDB88A}" dt="2025-09-17T19:10:46.472" v="630" actId="47"/>
-        <pc:sldMkLst>
-          <pc:docMk/>
-          <pc:sldMk cId="2652182247" sldId="354"/>
-        </pc:sldMkLst>
-      </pc:sldChg>
-      <pc:sldChg chg="modSp add del mod">
-        <pc:chgData name="Zonghua Gu" userId="9a7e1853e1951ef5" providerId="LiveId" clId="{CF1FAA12-072C-4ED5-BA76-0FFFAEFDB88A}" dt="2025-09-18T01:38:44.397" v="1241" actId="47"/>
-        <pc:sldMkLst>
-          <pc:docMk/>
-          <pc:sldMk cId="1671373347" sldId="355"/>
-        </pc:sldMkLst>
-      </pc:sldChg>
-      <pc:sldChg chg="modSp add mod modNotes">
-        <pc:chgData name="Zonghua Gu" userId="9a7e1853e1951ef5" providerId="LiveId" clId="{CF1FAA12-072C-4ED5-BA76-0FFFAEFDB88A}" dt="2025-09-28T19:28:54.672" v="4695"/>
-        <pc:sldMkLst>
-          <pc:docMk/>
-          <pc:sldMk cId="3013293955" sldId="355"/>
-        </pc:sldMkLst>
-        <pc:spChg chg="mod">
-          <ac:chgData name="Zonghua Gu" userId="9a7e1853e1951ef5" providerId="LiveId" clId="{CF1FAA12-072C-4ED5-BA76-0FFFAEFDB88A}" dt="2025-09-28T17:50:20.920" v="4567" actId="20577"/>
-          <ac:spMkLst>
-            <pc:docMk/>
-            <pc:sldMk cId="3013293955" sldId="355"/>
-            <ac:spMk id="2" creationId="{1B4EC875-5DE4-CC94-21AF-385E445F4C20}"/>
-          </ac:spMkLst>
-        </pc:spChg>
-        <pc:spChg chg="mod">
-          <ac:chgData name="Zonghua Gu" userId="9a7e1853e1951ef5" providerId="LiveId" clId="{CF1FAA12-072C-4ED5-BA76-0FFFAEFDB88A}" dt="2025-09-28T19:28:54.672" v="4695"/>
-          <ac:spMkLst>
-            <pc:docMk/>
-            <pc:sldMk cId="3013293955" sldId="355"/>
-            <ac:spMk id="4" creationId="{BDC308AC-7565-4459-9627-04CB00781A6A}"/>
-          </ac:spMkLst>
-        </pc:spChg>
-      </pc:sldChg>
-      <pc:sldChg chg="addSp delSp modSp new mod modNotes">
-        <pc:chgData name="Zonghua Gu" userId="9a7e1853e1951ef5" providerId="LiveId" clId="{CF1FAA12-072C-4ED5-BA76-0FFFAEFDB88A}" dt="2025-09-28T19:28:54.672" v="4695"/>
-        <pc:sldMkLst>
-          <pc:docMk/>
-          <pc:sldMk cId="2876358127" sldId="356"/>
-        </pc:sldMkLst>
-        <pc:spChg chg="mod">
-          <ac:chgData name="Zonghua Gu" userId="9a7e1853e1951ef5" providerId="LiveId" clId="{CF1FAA12-072C-4ED5-BA76-0FFFAEFDB88A}" dt="2025-09-28T17:49:23.700" v="4525"/>
-          <ac:spMkLst>
-            <pc:docMk/>
-            <pc:sldMk cId="2876358127" sldId="356"/>
-            <ac:spMk id="2" creationId="{06AFBCAA-DF87-B667-90C8-2F0B5CFD11BA}"/>
-          </ac:spMkLst>
-        </pc:spChg>
-        <pc:spChg chg="del mod">
-          <ac:chgData name="Zonghua Gu" userId="9a7e1853e1951ef5" providerId="LiveId" clId="{CF1FAA12-072C-4ED5-BA76-0FFFAEFDB88A}" dt="2025-09-28T17:37:02.709" v="4477" actId="478"/>
-          <ac:spMkLst>
-            <pc:docMk/>
-            <pc:sldMk cId="2876358127" sldId="356"/>
-            <ac:spMk id="4" creationId="{95056184-D4E8-1072-434C-E829F7C9B813}"/>
-          </ac:spMkLst>
-        </pc:spChg>
-        <pc:spChg chg="add del mod">
-          <ac:chgData name="Zonghua Gu" userId="9a7e1853e1951ef5" providerId="LiveId" clId="{CF1FAA12-072C-4ED5-BA76-0FFFAEFDB88A}" dt="2025-09-28T17:49:33.574" v="4528" actId="478"/>
-          <ac:spMkLst>
-            <pc:docMk/>
-            <pc:sldMk cId="2876358127" sldId="356"/>
-            <ac:spMk id="7" creationId="{8C44AA53-C947-3E41-1763-83ADF1A72D6B}"/>
-          </ac:spMkLst>
-        </pc:spChg>
-        <pc:spChg chg="add mod">
-          <ac:chgData name="Zonghua Gu" userId="9a7e1853e1951ef5" providerId="LiveId" clId="{CF1FAA12-072C-4ED5-BA76-0FFFAEFDB88A}" dt="2025-09-28T17:49:32.116" v="4527"/>
-          <ac:spMkLst>
-            <pc:docMk/>
-            <pc:sldMk cId="2876358127" sldId="356"/>
-            <ac:spMk id="8" creationId="{F20AAA02-544E-9721-763F-E687BC6884D2}"/>
-          </ac:spMkLst>
-        </pc:spChg>
-        <pc:spChg chg="add mod">
-          <ac:chgData name="Zonghua Gu" userId="9a7e1853e1951ef5" providerId="LiveId" clId="{CF1FAA12-072C-4ED5-BA76-0FFFAEFDB88A}" dt="2025-09-28T17:55:03.487" v="4601" actId="27636"/>
-          <ac:spMkLst>
-            <pc:docMk/>
-            <pc:sldMk cId="2876358127" sldId="356"/>
-            <ac:spMk id="9" creationId="{568A4D5B-16CF-C913-A366-B6CD13B41D2B}"/>
-          </ac:spMkLst>
-        </pc:spChg>
-        <pc:graphicFrameChg chg="add mod modGraphic">
-          <ac:chgData name="Zonghua Gu" userId="9a7e1853e1951ef5" providerId="LiveId" clId="{CF1FAA12-072C-4ED5-BA76-0FFFAEFDB88A}" dt="2025-09-28T19:28:54.672" v="4695"/>
-          <ac:graphicFrameMkLst>
-            <pc:docMk/>
-            <pc:sldMk cId="2876358127" sldId="356"/>
-            <ac:graphicFrameMk id="5" creationId="{B81DD544-8C21-2C0D-D8C9-39D776DE6162}"/>
-          </ac:graphicFrameMkLst>
-        </pc:graphicFrameChg>
-      </pc:sldChg>
-      <pc:sldChg chg="modSp new del mod">
-        <pc:chgData name="Zonghua Gu" userId="9a7e1853e1951ef5" providerId="LiveId" clId="{CF1FAA12-072C-4ED5-BA76-0FFFAEFDB88A}" dt="2025-09-18T01:38:44.397" v="1241" actId="47"/>
-        <pc:sldMkLst>
-          <pc:docMk/>
-          <pc:sldMk cId="3734883149" sldId="356"/>
-        </pc:sldMkLst>
-      </pc:sldChg>
-      <pc:sldChg chg="add del">
-        <pc:chgData name="Zonghua Gu" userId="9a7e1853e1951ef5" providerId="LiveId" clId="{CF1FAA12-072C-4ED5-BA76-0FFFAEFDB88A}" dt="2025-09-28T18:03:06.616" v="4630"/>
-        <pc:sldMkLst>
-          <pc:docMk/>
-          <pc:sldMk cId="2133051496" sldId="357"/>
-        </pc:sldMkLst>
-      </pc:sldChg>
-      <pc:sldChg chg="addSp modSp new add del mod">
-        <pc:chgData name="Zonghua Gu" userId="9a7e1853e1951ef5" providerId="LiveId" clId="{CF1FAA12-072C-4ED5-BA76-0FFFAEFDB88A}" dt="2025-09-28T18:03:32.126" v="4634" actId="2696"/>
-        <pc:sldMkLst>
-          <pc:docMk/>
-          <pc:sldMk cId="2809835501" sldId="357"/>
-        </pc:sldMkLst>
-      </pc:sldChg>
-      <pc:sldChg chg="add">
-        <pc:chgData name="Zonghua Gu" userId="9a7e1853e1951ef5" providerId="LiveId" clId="{CF1FAA12-072C-4ED5-BA76-0FFFAEFDB88A}" dt="2025-09-28T18:03:34.470" v="4635"/>
-        <pc:sldMkLst>
-          <pc:docMk/>
-          <pc:sldMk cId="3401324958" sldId="357"/>
-        </pc:sldMkLst>
-      </pc:sldChg>
-      <pc:sldChg chg="modSp add del mod">
-        <pc:chgData name="Zonghua Gu" userId="9a7e1853e1951ef5" providerId="LiveId" clId="{CF1FAA12-072C-4ED5-BA76-0FFFAEFDB88A}" dt="2025-09-28T18:03:32.126" v="4634" actId="2696"/>
-        <pc:sldMkLst>
-          <pc:docMk/>
-          <pc:sldMk cId="152100179" sldId="358"/>
-        </pc:sldMkLst>
-      </pc:sldChg>
-      <pc:sldChg chg="add del">
-        <pc:chgData name="Zonghua Gu" userId="9a7e1853e1951ef5" providerId="LiveId" clId="{CF1FAA12-072C-4ED5-BA76-0FFFAEFDB88A}" dt="2025-09-28T18:03:06.616" v="4630"/>
-        <pc:sldMkLst>
-          <pc:docMk/>
-          <pc:sldMk cId="2846615624" sldId="358"/>
-        </pc:sldMkLst>
-      </pc:sldChg>
-      <pc:sldChg chg="add">
-        <pc:chgData name="Zonghua Gu" userId="9a7e1853e1951ef5" providerId="LiveId" clId="{CF1FAA12-072C-4ED5-BA76-0FFFAEFDB88A}" dt="2025-09-28T18:03:34.470" v="4635"/>
-        <pc:sldMkLst>
-          <pc:docMk/>
-          <pc:sldMk cId="3066637480" sldId="358"/>
-        </pc:sldMkLst>
-      </pc:sldChg>
-      <pc:sldChg chg="add del">
-        <pc:chgData name="Zonghua Gu" userId="9a7e1853e1951ef5" providerId="LiveId" clId="{CF1FAA12-072C-4ED5-BA76-0FFFAEFDB88A}" dt="2025-09-28T18:03:06.616" v="4630"/>
-        <pc:sldMkLst>
-          <pc:docMk/>
-          <pc:sldMk cId="2908567737" sldId="359"/>
-        </pc:sldMkLst>
-      </pc:sldChg>
-      <pc:sldChg chg="delSp modSp add del mod">
-        <pc:chgData name="Zonghua Gu" userId="9a7e1853e1951ef5" providerId="LiveId" clId="{CF1FAA12-072C-4ED5-BA76-0FFFAEFDB88A}" dt="2025-09-28T18:03:32.126" v="4634" actId="2696"/>
-        <pc:sldMkLst>
-          <pc:docMk/>
-          <pc:sldMk cId="3161200706" sldId="359"/>
-        </pc:sldMkLst>
-      </pc:sldChg>
-      <pc:sldChg chg="add">
-        <pc:chgData name="Zonghua Gu" userId="9a7e1853e1951ef5" providerId="LiveId" clId="{CF1FAA12-072C-4ED5-BA76-0FFFAEFDB88A}" dt="2025-09-28T18:03:34.470" v="4635"/>
-        <pc:sldMkLst>
-          <pc:docMk/>
-          <pc:sldMk cId="3540280625" sldId="359"/>
-        </pc:sldMkLst>
-      </pc:sldChg>
-      <pc:sldChg chg="add">
-        <pc:chgData name="Zonghua Gu" userId="9a7e1853e1951ef5" providerId="LiveId" clId="{CF1FAA12-072C-4ED5-BA76-0FFFAEFDB88A}" dt="2025-09-28T18:03:34.470" v="4635"/>
-        <pc:sldMkLst>
-          <pc:docMk/>
-          <pc:sldMk cId="1016872391" sldId="360"/>
-        </pc:sldMkLst>
-      </pc:sldChg>
-      <pc:sldChg chg="modSp add del">
-        <pc:chgData name="Zonghua Gu" userId="9a7e1853e1951ef5" providerId="LiveId" clId="{CF1FAA12-072C-4ED5-BA76-0FFFAEFDB88A}" dt="2025-09-28T18:03:32.126" v="4634" actId="2696"/>
-        <pc:sldMkLst>
-          <pc:docMk/>
-          <pc:sldMk cId="1632579407" sldId="360"/>
-        </pc:sldMkLst>
-      </pc:sldChg>
-      <pc:sldChg chg="add del">
-        <pc:chgData name="Zonghua Gu" userId="9a7e1853e1951ef5" providerId="LiveId" clId="{CF1FAA12-072C-4ED5-BA76-0FFFAEFDB88A}" dt="2025-09-28T18:03:06.616" v="4630"/>
-        <pc:sldMkLst>
-          <pc:docMk/>
-          <pc:sldMk cId="2179003887" sldId="360"/>
-        </pc:sldMkLst>
-      </pc:sldChg>
-      <pc:sldChg chg="addSp modSp new mod">
-        <pc:chgData name="Zonghua Gu" userId="9a7e1853e1951ef5" providerId="LiveId" clId="{CF1FAA12-072C-4ED5-BA76-0FFFAEFDB88A}" dt="2025-09-27T19:43:29.776" v="4034" actId="6549"/>
-        <pc:sldMkLst>
-          <pc:docMk/>
-          <pc:sldMk cId="244455839" sldId="361"/>
-        </pc:sldMkLst>
-        <pc:spChg chg="mod">
-          <ac:chgData name="Zonghua Gu" userId="9a7e1853e1951ef5" providerId="LiveId" clId="{CF1FAA12-072C-4ED5-BA76-0FFFAEFDB88A}" dt="2025-09-23T17:45:40.256" v="2568" actId="20577"/>
-          <ac:spMkLst>
-            <pc:docMk/>
-            <pc:sldMk cId="244455839" sldId="361"/>
-            <ac:spMk id="2" creationId="{EF163992-2E9D-0FA5-BCCF-C587DE003427}"/>
-          </ac:spMkLst>
-        </pc:spChg>
-        <pc:spChg chg="mod">
-          <ac:chgData name="Zonghua Gu" userId="9a7e1853e1951ef5" providerId="LiveId" clId="{CF1FAA12-072C-4ED5-BA76-0FFFAEFDB88A}" dt="2025-09-23T17:42:31.992" v="2515" actId="14100"/>
-          <ac:spMkLst>
-            <pc:docMk/>
-            <pc:sldMk cId="244455839" sldId="361"/>
-            <ac:spMk id="4" creationId="{D0B04EC6-DE14-0E80-5C57-8972B043856F}"/>
-          </ac:spMkLst>
-        </pc:spChg>
-        <pc:graphicFrameChg chg="add mod modGraphic">
-          <ac:chgData name="Zonghua Gu" userId="9a7e1853e1951ef5" providerId="LiveId" clId="{CF1FAA12-072C-4ED5-BA76-0FFFAEFDB88A}" dt="2025-09-27T19:43:29.776" v="4034" actId="6549"/>
-          <ac:graphicFrameMkLst>
-            <pc:docMk/>
-            <pc:sldMk cId="244455839" sldId="361"/>
-            <ac:graphicFrameMk id="5" creationId="{E9861495-0CBB-23AF-BD88-8C94E413DCFA}"/>
-          </ac:graphicFrameMkLst>
-        </pc:graphicFrameChg>
-      </pc:sldChg>
-      <pc:sldChg chg="modSp add mod">
-        <pc:chgData name="Zonghua Gu" userId="9a7e1853e1951ef5" providerId="LiveId" clId="{CF1FAA12-072C-4ED5-BA76-0FFFAEFDB88A}" dt="2025-09-23T17:47:05.387" v="2580" actId="20577"/>
-        <pc:sldMkLst>
-          <pc:docMk/>
-          <pc:sldMk cId="1907292877" sldId="362"/>
-        </pc:sldMkLst>
-        <pc:graphicFrameChg chg="mod modGraphic">
-          <ac:chgData name="Zonghua Gu" userId="9a7e1853e1951ef5" providerId="LiveId" clId="{CF1FAA12-072C-4ED5-BA76-0FFFAEFDB88A}" dt="2025-09-23T17:47:05.387" v="2580" actId="20577"/>
-          <ac:graphicFrameMkLst>
-            <pc:docMk/>
-            <pc:sldMk cId="1907292877" sldId="362"/>
-            <ac:graphicFrameMk id="5" creationId="{CE0A734A-5388-0D64-9AF4-4B261562DC3B}"/>
-          </ac:graphicFrameMkLst>
-        </pc:graphicFrameChg>
-      </pc:sldChg>
-      <pc:sldChg chg="modSp add mod">
-        <pc:chgData name="Zonghua Gu" userId="9a7e1853e1951ef5" providerId="LiveId" clId="{CF1FAA12-072C-4ED5-BA76-0FFFAEFDB88A}" dt="2025-09-23T17:56:22.992" v="2637" actId="6549"/>
-        <pc:sldMkLst>
-          <pc:docMk/>
-          <pc:sldMk cId="796807376" sldId="363"/>
-        </pc:sldMkLst>
-        <pc:spChg chg="mod">
-          <ac:chgData name="Zonghua Gu" userId="9a7e1853e1951ef5" providerId="LiveId" clId="{CF1FAA12-072C-4ED5-BA76-0FFFAEFDB88A}" dt="2025-09-23T17:56:00.078" v="2629" actId="20577"/>
-          <ac:spMkLst>
-            <pc:docMk/>
-            <pc:sldMk cId="796807376" sldId="363"/>
-            <ac:spMk id="2" creationId="{34675490-947F-5AFD-6FE0-9CAFDE4D0FA3}"/>
-          </ac:spMkLst>
-        </pc:spChg>
-        <pc:spChg chg="mod">
-          <ac:chgData name="Zonghua Gu" userId="9a7e1853e1951ef5" providerId="LiveId" clId="{CF1FAA12-072C-4ED5-BA76-0FFFAEFDB88A}" dt="2025-09-23T17:54:26.444" v="2627" actId="20577"/>
-          <ac:spMkLst>
-            <pc:docMk/>
-            <pc:sldMk cId="796807376" sldId="363"/>
-            <ac:spMk id="4" creationId="{341D3EA2-DC46-3341-8CF9-CFCEF1A12B97}"/>
-          </ac:spMkLst>
-        </pc:spChg>
-        <pc:graphicFrameChg chg="mod modGraphic">
-          <ac:chgData name="Zonghua Gu" userId="9a7e1853e1951ef5" providerId="LiveId" clId="{CF1FAA12-072C-4ED5-BA76-0FFFAEFDB88A}" dt="2025-09-23T17:56:22.992" v="2637" actId="6549"/>
-          <ac:graphicFrameMkLst>
-            <pc:docMk/>
-            <pc:sldMk cId="796807376" sldId="363"/>
-            <ac:graphicFrameMk id="5" creationId="{F287FE73-3E90-5E25-A781-0E2805872713}"/>
-          </ac:graphicFrameMkLst>
-        </pc:graphicFrameChg>
-      </pc:sldChg>
-      <pc:sldChg chg="add">
-        <pc:chgData name="Zonghua Gu" userId="9a7e1853e1951ef5" providerId="LiveId" clId="{CF1FAA12-072C-4ED5-BA76-0FFFAEFDB88A}" dt="2025-09-23T17:55:56.207" v="2628"/>
-        <pc:sldMkLst>
-          <pc:docMk/>
-          <pc:sldMk cId="2698422353" sldId="364"/>
-        </pc:sldMkLst>
-      </pc:sldChg>
-      <pc:sldChg chg="new del">
-        <pc:chgData name="Zonghua Gu" userId="9a7e1853e1951ef5" providerId="LiveId" clId="{CF1FAA12-072C-4ED5-BA76-0FFFAEFDB88A}" dt="2025-09-25T00:28:45.206" v="3037" actId="47"/>
-        <pc:sldMkLst>
-          <pc:docMk/>
-          <pc:sldMk cId="3863137529" sldId="365"/>
-        </pc:sldMkLst>
-      </pc:sldChg>
-      <pc:sldChg chg="addSp modSp add del mod">
-        <pc:chgData name="Zonghua Gu" userId="9a7e1853e1951ef5" providerId="LiveId" clId="{CF1FAA12-072C-4ED5-BA76-0FFFAEFDB88A}" dt="2025-09-28T18:03:32.126" v="4634" actId="2696"/>
-        <pc:sldMkLst>
-          <pc:docMk/>
-          <pc:sldMk cId="2083494270" sldId="366"/>
-        </pc:sldMkLst>
-      </pc:sldChg>
-      <pc:sldChg chg="add">
-        <pc:chgData name="Zonghua Gu" userId="9a7e1853e1951ef5" providerId="LiveId" clId="{CF1FAA12-072C-4ED5-BA76-0FFFAEFDB88A}" dt="2025-09-28T18:03:34.470" v="4635"/>
-        <pc:sldMkLst>
-          <pc:docMk/>
-          <pc:sldMk cId="3022176175" sldId="366"/>
-        </pc:sldMkLst>
-      </pc:sldChg>
-      <pc:sldChg chg="add">
-        <pc:chgData name="Zonghua Gu" userId="9a7e1853e1951ef5" providerId="LiveId" clId="{CF1FAA12-072C-4ED5-BA76-0FFFAEFDB88A}" dt="2025-09-28T18:03:34.470" v="4635"/>
-        <pc:sldMkLst>
-          <pc:docMk/>
-          <pc:sldMk cId="1078046081" sldId="367"/>
-        </pc:sldMkLst>
-      </pc:sldChg>
-      <pc:sldChg chg="modSp add del mod">
-        <pc:chgData name="Zonghua Gu" userId="9a7e1853e1951ef5" providerId="LiveId" clId="{CF1FAA12-072C-4ED5-BA76-0FFFAEFDB88A}" dt="2025-09-28T18:03:32.126" v="4634" actId="2696"/>
-        <pc:sldMkLst>
-          <pc:docMk/>
-          <pc:sldMk cId="2543227050" sldId="367"/>
-        </pc:sldMkLst>
-      </pc:sldChg>
-      <pc:sldChg chg="addSp delSp modSp new mod">
-        <pc:chgData name="Zonghua Gu" userId="9a7e1853e1951ef5" providerId="LiveId" clId="{CF1FAA12-072C-4ED5-BA76-0FFFAEFDB88A}" dt="2025-09-25T00:24:20.664" v="2992" actId="20577"/>
-        <pc:sldMkLst>
-          <pc:docMk/>
-          <pc:sldMk cId="3481209508" sldId="368"/>
-        </pc:sldMkLst>
-        <pc:spChg chg="mod">
-          <ac:chgData name="Zonghua Gu" userId="9a7e1853e1951ef5" providerId="LiveId" clId="{CF1FAA12-072C-4ED5-BA76-0FFFAEFDB88A}" dt="2025-09-25T00:23:42.851" v="2977" actId="20577"/>
-          <ac:spMkLst>
-            <pc:docMk/>
-            <pc:sldMk cId="3481209508" sldId="368"/>
-            <ac:spMk id="2" creationId="{CA3881C7-467A-5E22-27C4-993FCFB9D44E}"/>
-          </ac:spMkLst>
-        </pc:spChg>
-        <pc:spChg chg="mod">
-          <ac:chgData name="Zonghua Gu" userId="9a7e1853e1951ef5" providerId="LiveId" clId="{CF1FAA12-072C-4ED5-BA76-0FFFAEFDB88A}" dt="2025-09-25T00:24:20.664" v="2992" actId="20577"/>
-          <ac:spMkLst>
-            <pc:docMk/>
-            <pc:sldMk cId="3481209508" sldId="368"/>
-            <ac:spMk id="4" creationId="{A9F41425-80C3-BB89-8E06-F17C64CA6E90}"/>
-          </ac:spMkLst>
-        </pc:spChg>
-      </pc:sldChg>
-      <pc:sldChg chg="addSp modSp add mod modNotes">
-        <pc:chgData name="Zonghua Gu" userId="9a7e1853e1951ef5" providerId="LiveId" clId="{CF1FAA12-072C-4ED5-BA76-0FFFAEFDB88A}" dt="2025-09-28T19:28:54.672" v="4695"/>
-        <pc:sldMkLst>
-          <pc:docMk/>
-          <pc:sldMk cId="464229313" sldId="369"/>
-        </pc:sldMkLst>
-        <pc:spChg chg="mod">
-          <ac:chgData name="Zonghua Gu" userId="9a7e1853e1951ef5" providerId="LiveId" clId="{CF1FAA12-072C-4ED5-BA76-0FFFAEFDB88A}" dt="2025-09-28T17:56:10.647" v="4616" actId="20577"/>
-          <ac:spMkLst>
-            <pc:docMk/>
-            <pc:sldMk cId="464229313" sldId="369"/>
-            <ac:spMk id="4" creationId="{BEB7C113-0674-6062-1A2E-1AD4971E29A6}"/>
-          </ac:spMkLst>
-        </pc:spChg>
-        <pc:graphicFrameChg chg="add mod">
-          <ac:chgData name="Zonghua Gu" userId="9a7e1853e1951ef5" providerId="LiveId" clId="{CF1FAA12-072C-4ED5-BA76-0FFFAEFDB88A}" dt="2025-09-28T17:55:32.482" v="4604"/>
-          <ac:graphicFrameMkLst>
-            <pc:docMk/>
-            <pc:sldMk cId="464229313" sldId="369"/>
-            <ac:graphicFrameMk id="5" creationId="{4329B80B-6E59-72E6-B736-4AF9A0E43803}"/>
-          </ac:graphicFrameMkLst>
-        </pc:graphicFrameChg>
-        <pc:graphicFrameChg chg="add mod modGraphic">
-          <ac:chgData name="Zonghua Gu" userId="9a7e1853e1951ef5" providerId="LiveId" clId="{CF1FAA12-072C-4ED5-BA76-0FFFAEFDB88A}" dt="2025-09-28T19:28:54.672" v="4695"/>
-          <ac:graphicFrameMkLst>
-            <pc:docMk/>
-            <pc:sldMk cId="464229313" sldId="369"/>
-            <ac:graphicFrameMk id="6" creationId="{40222894-2409-8D52-DD5B-8A904AD638EB}"/>
-          </ac:graphicFrameMkLst>
-        </pc:graphicFrameChg>
-      </pc:sldChg>
-      <pc:sldChg chg="modSp new del mod">
-        <pc:chgData name="Zonghua Gu" userId="9a7e1853e1951ef5" providerId="LiveId" clId="{CF1FAA12-072C-4ED5-BA76-0FFFAEFDB88A}" dt="2025-09-28T17:52:29.725" v="4568" actId="2696"/>
-        <pc:sldMkLst>
-          <pc:docMk/>
-          <pc:sldMk cId="1108034922" sldId="369"/>
-        </pc:sldMkLst>
-        <pc:spChg chg="mod">
-          <ac:chgData name="Zonghua Gu" userId="9a7e1853e1951ef5" providerId="LiveId" clId="{CF1FAA12-072C-4ED5-BA76-0FFFAEFDB88A}" dt="2025-09-27T19:43:01.091" v="4031" actId="20577"/>
-          <ac:spMkLst>
-            <pc:docMk/>
-            <pc:sldMk cId="1108034922" sldId="369"/>
-            <ac:spMk id="2" creationId="{07901E19-B414-84A8-4EAA-88A0BDEC7DD8}"/>
-          </ac:spMkLst>
-        </pc:spChg>
-      </pc:sldChg>
-      <pc:sldChg chg="modSp add mod">
-        <pc:chgData name="Zonghua Gu" userId="9a7e1853e1951ef5" providerId="LiveId" clId="{CF1FAA12-072C-4ED5-BA76-0FFFAEFDB88A}" dt="2025-09-28T19:28:54.763" v="4696" actId="27636"/>
-        <pc:sldMkLst>
-          <pc:docMk/>
-          <pc:sldMk cId="3866648740" sldId="370"/>
-        </pc:sldMkLst>
-        <pc:spChg chg="mod">
-          <ac:chgData name="Zonghua Gu" userId="9a7e1853e1951ef5" providerId="LiveId" clId="{CF1FAA12-072C-4ED5-BA76-0FFFAEFDB88A}" dt="2025-09-28T19:28:54.763" v="4696" actId="27636"/>
-          <ac:spMkLst>
-            <pc:docMk/>
-            <pc:sldMk cId="3866648740" sldId="370"/>
-            <ac:spMk id="4" creationId="{716C8B17-C01D-A13D-3A3B-0B0D369E641F}"/>
-          </ac:spMkLst>
-        </pc:spChg>
-      </pc:sldChg>
-      <pc:sldChg chg="modSp add del mod">
-        <pc:chgData name="Zonghua Gu" userId="9a7e1853e1951ef5" providerId="LiveId" clId="{CF1FAA12-072C-4ED5-BA76-0FFFAEFDB88A}" dt="2025-09-28T17:52:29.725" v="4568" actId="2696"/>
-        <pc:sldMkLst>
-          <pc:docMk/>
-          <pc:sldMk cId="1448637235" sldId="371"/>
-        </pc:sldMkLst>
-        <pc:spChg chg="mod">
-          <ac:chgData name="Zonghua Gu" userId="9a7e1853e1951ef5" providerId="LiveId" clId="{CF1FAA12-072C-4ED5-BA76-0FFFAEFDB88A}" dt="2025-09-27T19:43:03.837" v="4032"/>
-          <ac:spMkLst>
-            <pc:docMk/>
-            <pc:sldMk cId="1448637235" sldId="371"/>
-            <ac:spMk id="2" creationId="{89E02978-7DD8-148C-3483-99DF0FA82534}"/>
-          </ac:spMkLst>
-        </pc:spChg>
-      </pc:sldChg>
-      <pc:sldChg chg="addSp modSp add mod">
-        <pc:chgData name="Zonghua Gu" userId="9a7e1853e1951ef5" providerId="LiveId" clId="{CF1FAA12-072C-4ED5-BA76-0FFFAEFDB88A}" dt="2025-09-28T19:28:54.672" v="4695"/>
-        <pc:sldMkLst>
-          <pc:docMk/>
-          <pc:sldMk cId="3582392412" sldId="371"/>
-        </pc:sldMkLst>
-        <pc:spChg chg="mod">
-          <ac:chgData name="Zonghua Gu" userId="9a7e1853e1951ef5" providerId="LiveId" clId="{CF1FAA12-072C-4ED5-BA76-0FFFAEFDB88A}" dt="2025-09-28T17:52:48.237" v="4573" actId="20577"/>
-          <ac:spMkLst>
-            <pc:docMk/>
-            <pc:sldMk cId="3582392412" sldId="371"/>
-            <ac:spMk id="2" creationId="{89E02978-7DD8-148C-3483-99DF0FA82534}"/>
-          </ac:spMkLst>
-        </pc:spChg>
-        <pc:spChg chg="mod">
-          <ac:chgData name="Zonghua Gu" userId="9a7e1853e1951ef5" providerId="LiveId" clId="{CF1FAA12-072C-4ED5-BA76-0FFFAEFDB88A}" dt="2025-09-28T17:56:08.435" v="4615" actId="20577"/>
-          <ac:spMkLst>
-            <pc:docMk/>
-            <pc:sldMk cId="3582392412" sldId="371"/>
-            <ac:spMk id="4" creationId="{07EC282A-2699-D86B-1892-06D1691D66EC}"/>
-          </ac:spMkLst>
-        </pc:spChg>
-        <pc:graphicFrameChg chg="add mod modGraphic">
-          <ac:chgData name="Zonghua Gu" userId="9a7e1853e1951ef5" providerId="LiveId" clId="{CF1FAA12-072C-4ED5-BA76-0FFFAEFDB88A}" dt="2025-09-28T19:28:54.672" v="4695"/>
-          <ac:graphicFrameMkLst>
-            <pc:docMk/>
-            <pc:sldMk cId="3582392412" sldId="371"/>
-            <ac:graphicFrameMk id="5" creationId="{1470E29F-21CC-744B-D4B5-04038FD22801}"/>
+            <pc:sldMk cId="2076517291" sldId="388"/>
+            <ac:graphicFrameMk id="8" creationId="{23280EB1-0F59-23D3-9592-332A77667450}"/>
           </ac:graphicFrameMkLst>
         </pc:graphicFrameChg>
       </pc:sldChg>
       <pc:sldChg chg="modSp new mod">
-        <pc:chgData name="Zonghua Gu" userId="9a7e1853e1951ef5" providerId="LiveId" clId="{CF1FAA12-072C-4ED5-BA76-0FFFAEFDB88A}" dt="2025-09-25T00:30:14.140" v="3106" actId="20577"/>
+        <pc:chgData name="Zonghua Gu" userId="9a7e1853e1951ef5" providerId="LiveId" clId="{CF1FAA12-072C-4ED5-BA76-0FFFAEFDB88A}" dt="2025-11-13T22:54:54.319" v="4916" actId="20577"/>
         <pc:sldMkLst>
           <pc:docMk/>
-          <pc:sldMk cId="2897386910" sldId="372"/>
+          <pc:sldMk cId="3501330246" sldId="389"/>
         </pc:sldMkLst>
         <pc:spChg chg="mod">
-          <ac:chgData name="Zonghua Gu" userId="9a7e1853e1951ef5" providerId="LiveId" clId="{CF1FAA12-072C-4ED5-BA76-0FFFAEFDB88A}" dt="2025-09-25T00:30:10.546" v="3105" actId="20577"/>
+          <ac:chgData name="Zonghua Gu" userId="9a7e1853e1951ef5" providerId="LiveId" clId="{CF1FAA12-072C-4ED5-BA76-0FFFAEFDB88A}" dt="2025-11-13T22:53:41.921" v="4847"/>
           <ac:spMkLst>
             <pc:docMk/>
-            <pc:sldMk cId="2897386910" sldId="372"/>
-            <ac:spMk id="2" creationId="{2CAA883A-F8CE-E82A-B1A3-6EC2CD284606}"/>
+            <pc:sldMk cId="3501330246" sldId="389"/>
+            <ac:spMk id="2" creationId="{D48EBFE7-7073-C68E-2006-9970D7D5223A}"/>
           </ac:spMkLst>
         </pc:spChg>
         <pc:spChg chg="mod">
-          <ac:chgData name="Zonghua Gu" userId="9a7e1853e1951ef5" providerId="LiveId" clId="{CF1FAA12-072C-4ED5-BA76-0FFFAEFDB88A}" dt="2025-09-25T00:30:14.140" v="3106" actId="20577"/>
+          <ac:chgData name="Zonghua Gu" userId="9a7e1853e1951ef5" providerId="LiveId" clId="{CF1FAA12-072C-4ED5-BA76-0FFFAEFDB88A}" dt="2025-11-13T22:54:54.319" v="4916" actId="20577"/>
           <ac:spMkLst>
             <pc:docMk/>
-            <pc:sldMk cId="2897386910" sldId="372"/>
-            <ac:spMk id="4" creationId="{FEB16539-02BC-5FF9-955C-7C457DDED9F6}"/>
+            <pc:sldMk cId="3501330246" sldId="389"/>
+            <ac:spMk id="4" creationId="{30D573E4-08C5-4EFD-D763-43D45C86FFE0}"/>
           </ac:spMkLst>
         </pc:spChg>
       </pc:sldChg>
-      <pc:sldChg chg="modSp add">
-        <pc:chgData name="Zonghua Gu" userId="9a7e1853e1951ef5" providerId="LiveId" clId="{CF1FAA12-072C-4ED5-BA76-0FFFAEFDB88A}" dt="2025-09-28T19:28:54.672" v="4695"/>
-        <pc:sldMkLst>
-          <pc:docMk/>
-          <pc:sldMk cId="234389551" sldId="373"/>
-        </pc:sldMkLst>
-        <pc:spChg chg="mod">
-          <ac:chgData name="Zonghua Gu" userId="9a7e1853e1951ef5" providerId="LiveId" clId="{CF1FAA12-072C-4ED5-BA76-0FFFAEFDB88A}" dt="2025-09-28T19:28:54.672" v="4695"/>
-          <ac:spMkLst>
-            <pc:docMk/>
-            <pc:sldMk cId="234389551" sldId="373"/>
-            <ac:spMk id="4" creationId="{402D8EDD-ADE2-ED0A-3035-5EABE2583A7F}"/>
-          </ac:spMkLst>
-        </pc:spChg>
-      </pc:sldChg>
-      <pc:sldChg chg="addSp delSp modSp new mod modNotesTx">
-        <pc:chgData name="Zonghua Gu" userId="9a7e1853e1951ef5" providerId="LiveId" clId="{CF1FAA12-072C-4ED5-BA76-0FFFAEFDB88A}" dt="2025-09-28T19:29:44.334" v="4728" actId="313"/>
-        <pc:sldMkLst>
-          <pc:docMk/>
-          <pc:sldMk cId="824643333" sldId="374"/>
-        </pc:sldMkLst>
-        <pc:spChg chg="mod">
-          <ac:chgData name="Zonghua Gu" userId="9a7e1853e1951ef5" providerId="LiveId" clId="{CF1FAA12-072C-4ED5-BA76-0FFFAEFDB88A}" dt="2025-09-27T01:55:31.042" v="3845" actId="20577"/>
-          <ac:spMkLst>
-            <pc:docMk/>
-            <pc:sldMk cId="824643333" sldId="374"/>
-            <ac:spMk id="2" creationId="{17C6BB78-6632-8826-7CCC-63CDB859CFFB}"/>
-          </ac:spMkLst>
-        </pc:spChg>
-        <pc:spChg chg="del">
-          <ac:chgData name="Zonghua Gu" userId="9a7e1853e1951ef5" providerId="LiveId" clId="{CF1FAA12-072C-4ED5-BA76-0FFFAEFDB88A}" dt="2025-09-27T00:13:55.405" v="3110" actId="478"/>
-          <ac:spMkLst>
-            <pc:docMk/>
-            <pc:sldMk cId="824643333" sldId="374"/>
-            <ac:spMk id="4" creationId="{BC435DA7-72B1-3012-FC47-4BD2F0D8D9EC}"/>
-          </ac:spMkLst>
-        </pc:spChg>
-        <pc:graphicFrameChg chg="add mod modGraphic">
-          <ac:chgData name="Zonghua Gu" userId="9a7e1853e1951ef5" providerId="LiveId" clId="{CF1FAA12-072C-4ED5-BA76-0FFFAEFDB88A}" dt="2025-09-28T19:29:38.559" v="4720" actId="313"/>
-          <ac:graphicFrameMkLst>
-            <pc:docMk/>
-            <pc:sldMk cId="824643333" sldId="374"/>
-            <ac:graphicFrameMk id="5" creationId="{8C28BAFB-31B9-50D7-C887-1C2776C89294}"/>
-          </ac:graphicFrameMkLst>
-        </pc:graphicFrameChg>
-        <pc:graphicFrameChg chg="add mod modGraphic">
-          <ac:chgData name="Zonghua Gu" userId="9a7e1853e1951ef5" providerId="LiveId" clId="{CF1FAA12-072C-4ED5-BA76-0FFFAEFDB88A}" dt="2025-09-28T19:29:41.958" v="4724" actId="313"/>
-          <ac:graphicFrameMkLst>
-            <pc:docMk/>
-            <pc:sldMk cId="824643333" sldId="374"/>
-            <ac:graphicFrameMk id="6" creationId="{A4376573-3C10-262F-B16F-802FF655885C}"/>
-          </ac:graphicFrameMkLst>
-        </pc:graphicFrameChg>
-        <pc:graphicFrameChg chg="add mod modGraphic">
-          <ac:chgData name="Zonghua Gu" userId="9a7e1853e1951ef5" providerId="LiveId" clId="{CF1FAA12-072C-4ED5-BA76-0FFFAEFDB88A}" dt="2025-09-28T19:29:44.334" v="4728" actId="313"/>
-          <ac:graphicFrameMkLst>
-            <pc:docMk/>
-            <pc:sldMk cId="824643333" sldId="374"/>
-            <ac:graphicFrameMk id="13" creationId="{1826EA7A-8E49-2A0D-7E31-D74230DEDABD}"/>
-          </ac:graphicFrameMkLst>
-        </pc:graphicFrameChg>
-        <pc:picChg chg="add del mod">
-          <ac:chgData name="Zonghua Gu" userId="9a7e1853e1951ef5" providerId="LiveId" clId="{CF1FAA12-072C-4ED5-BA76-0FFFAEFDB88A}" dt="2025-09-27T00:26:23.588" v="3250" actId="478"/>
-          <ac:picMkLst>
-            <pc:docMk/>
-            <pc:sldMk cId="824643333" sldId="374"/>
-            <ac:picMk id="8" creationId="{88CC43C3-04E5-6AFF-83F6-81EA5F47DA6C}"/>
-          </ac:picMkLst>
-        </pc:picChg>
-        <pc:picChg chg="add del mod">
-          <ac:chgData name="Zonghua Gu" userId="9a7e1853e1951ef5" providerId="LiveId" clId="{CF1FAA12-072C-4ED5-BA76-0FFFAEFDB88A}" dt="2025-09-27T01:33:43.408" v="3661" actId="478"/>
-          <ac:picMkLst>
-            <pc:docMk/>
-            <pc:sldMk cId="824643333" sldId="374"/>
-            <ac:picMk id="10" creationId="{E29B73D9-98A1-6CA0-425F-E2F881346B69}"/>
-          </ac:picMkLst>
-        </pc:picChg>
-        <pc:picChg chg="add del mod">
-          <ac:chgData name="Zonghua Gu" userId="9a7e1853e1951ef5" providerId="LiveId" clId="{CF1FAA12-072C-4ED5-BA76-0FFFAEFDB88A}" dt="2025-09-27T01:34:35.477" v="3665" actId="478"/>
-          <ac:picMkLst>
-            <pc:docMk/>
-            <pc:sldMk cId="824643333" sldId="374"/>
-            <ac:picMk id="12" creationId="{F1FCE152-ED3E-31ED-B062-553E6661E5DE}"/>
-          </ac:picMkLst>
-        </pc:picChg>
-      </pc:sldChg>
-      <pc:sldChg chg="modSp add mod ord">
-        <pc:chgData name="Zonghua Gu" userId="9a7e1853e1951ef5" providerId="LiveId" clId="{CF1FAA12-072C-4ED5-BA76-0FFFAEFDB88A}" dt="2025-09-28T19:29:14.510" v="4700" actId="313"/>
-        <pc:sldMkLst>
-          <pc:docMk/>
-          <pc:sldMk cId="2699733170" sldId="375"/>
-        </pc:sldMkLst>
-        <pc:spChg chg="mod">
-          <ac:chgData name="Zonghua Gu" userId="9a7e1853e1951ef5" providerId="LiveId" clId="{CF1FAA12-072C-4ED5-BA76-0FFFAEFDB88A}" dt="2025-09-27T00:31:09.063" v="3349" actId="20577"/>
-          <ac:spMkLst>
-            <pc:docMk/>
-            <pc:sldMk cId="2699733170" sldId="375"/>
-            <ac:spMk id="2" creationId="{9DA4C9F1-D3D9-18E8-D429-AD38C0280B2E}"/>
-          </ac:spMkLst>
-        </pc:spChg>
-        <pc:graphicFrameChg chg="mod modGraphic">
-          <ac:chgData name="Zonghua Gu" userId="9a7e1853e1951ef5" providerId="LiveId" clId="{CF1FAA12-072C-4ED5-BA76-0FFFAEFDB88A}" dt="2025-09-27T01:47:31.458" v="3800"/>
-          <ac:graphicFrameMkLst>
-            <pc:docMk/>
-            <pc:sldMk cId="2699733170" sldId="375"/>
-            <ac:graphicFrameMk id="5" creationId="{7DB9A0A3-9301-65C3-B5C6-8AEF5723942A}"/>
-          </ac:graphicFrameMkLst>
-        </pc:graphicFrameChg>
-        <pc:graphicFrameChg chg="mod modGraphic">
-          <ac:chgData name="Zonghua Gu" userId="9a7e1853e1951ef5" providerId="LiveId" clId="{CF1FAA12-072C-4ED5-BA76-0FFFAEFDB88A}" dt="2025-09-28T19:29:14.510" v="4700" actId="313"/>
-          <ac:graphicFrameMkLst>
-            <pc:docMk/>
-            <pc:sldMk cId="2699733170" sldId="375"/>
-            <ac:graphicFrameMk id="6" creationId="{FFACABF7-FFF7-3BBF-C49F-124791C54B85}"/>
-          </ac:graphicFrameMkLst>
-        </pc:graphicFrameChg>
-      </pc:sldChg>
-      <pc:sldChg chg="addSp delSp modSp new mod ord">
-        <pc:chgData name="Zonghua Gu" userId="9a7e1853e1951ef5" providerId="LiveId" clId="{CF1FAA12-072C-4ED5-BA76-0FFFAEFDB88A}" dt="2025-09-28T19:29:54.021" v="4738" actId="313"/>
-        <pc:sldMkLst>
-          <pc:docMk/>
-          <pc:sldMk cId="3013465332" sldId="376"/>
-        </pc:sldMkLst>
-        <pc:spChg chg="mod">
-          <ac:chgData name="Zonghua Gu" userId="9a7e1853e1951ef5" providerId="LiveId" clId="{CF1FAA12-072C-4ED5-BA76-0FFFAEFDB88A}" dt="2025-09-28T19:25:07.550" v="4684" actId="20577"/>
-          <ac:spMkLst>
-            <pc:docMk/>
-            <pc:sldMk cId="3013465332" sldId="376"/>
-            <ac:spMk id="2" creationId="{5A3CCC7F-CE76-4282-D019-4CC0F724F47A}"/>
-          </ac:spMkLst>
-        </pc:spChg>
-        <pc:spChg chg="del">
-          <ac:chgData name="Zonghua Gu" userId="9a7e1853e1951ef5" providerId="LiveId" clId="{CF1FAA12-072C-4ED5-BA76-0FFFAEFDB88A}" dt="2025-09-27T01:16:01.948" v="3431" actId="478"/>
-          <ac:spMkLst>
-            <pc:docMk/>
-            <pc:sldMk cId="3013465332" sldId="376"/>
-            <ac:spMk id="4" creationId="{4AE60B6D-489C-C821-F2AB-9F8CB0B8B963}"/>
-          </ac:spMkLst>
-        </pc:spChg>
-        <pc:graphicFrameChg chg="add del mod modGraphic">
-          <ac:chgData name="Zonghua Gu" userId="9a7e1853e1951ef5" providerId="LiveId" clId="{CF1FAA12-072C-4ED5-BA76-0FFFAEFDB88A}" dt="2025-09-28T19:21:51.643" v="4650" actId="478"/>
-          <ac:graphicFrameMkLst>
-            <pc:docMk/>
-            <pc:sldMk cId="3013465332" sldId="376"/>
-            <ac:graphicFrameMk id="4" creationId="{718E3F40-9775-0D56-78DC-84E5ED1EE023}"/>
-          </ac:graphicFrameMkLst>
-        </pc:graphicFrameChg>
-        <pc:graphicFrameChg chg="add mod modGraphic">
-          <ac:chgData name="Zonghua Gu" userId="9a7e1853e1951ef5" providerId="LiveId" clId="{CF1FAA12-072C-4ED5-BA76-0FFFAEFDB88A}" dt="2025-09-28T19:29:54.021" v="4738" actId="313"/>
-          <ac:graphicFrameMkLst>
-            <pc:docMk/>
-            <pc:sldMk cId="3013465332" sldId="376"/>
-            <ac:graphicFrameMk id="5" creationId="{E3021DFD-9755-D138-E0BA-8F2BF276161E}"/>
-          </ac:graphicFrameMkLst>
-        </pc:graphicFrameChg>
-        <pc:graphicFrameChg chg="add del mod modGraphic">
-          <ac:chgData name="Zonghua Gu" userId="9a7e1853e1951ef5" providerId="LiveId" clId="{CF1FAA12-072C-4ED5-BA76-0FFFAEFDB88A}" dt="2025-09-28T19:27:11.151" v="4694" actId="478"/>
-          <ac:graphicFrameMkLst>
-            <pc:docMk/>
-            <pc:sldMk cId="3013465332" sldId="376"/>
-            <ac:graphicFrameMk id="6" creationId="{8EEBE827-983F-9275-D1F8-3DAB5C0D4D91}"/>
-          </ac:graphicFrameMkLst>
-        </pc:graphicFrameChg>
-      </pc:sldChg>
-      <pc:sldChg chg="addSp modSp add del mod">
-        <pc:chgData name="Zonghua Gu" userId="9a7e1853e1951ef5" providerId="LiveId" clId="{CF1FAA12-072C-4ED5-BA76-0FFFAEFDB88A}" dt="2025-09-27T01:27:17.120" v="3625" actId="47"/>
-        <pc:sldMkLst>
-          <pc:docMk/>
-          <pc:sldMk cId="2608932170" sldId="377"/>
-        </pc:sldMkLst>
-        <pc:graphicFrameChg chg="mod modGraphic">
-          <ac:chgData name="Zonghua Gu" userId="9a7e1853e1951ef5" providerId="LiveId" clId="{CF1FAA12-072C-4ED5-BA76-0FFFAEFDB88A}" dt="2025-09-27T01:26:32.274" v="3618" actId="14734"/>
-          <ac:graphicFrameMkLst>
-            <pc:docMk/>
-            <pc:sldMk cId="2608932170" sldId="377"/>
-            <ac:graphicFrameMk id="5" creationId="{96A9B473-BE23-7EBD-E689-941246D51606}"/>
-          </ac:graphicFrameMkLst>
-        </pc:graphicFrameChg>
-        <pc:picChg chg="add mod">
-          <ac:chgData name="Zonghua Gu" userId="9a7e1853e1951ef5" providerId="LiveId" clId="{CF1FAA12-072C-4ED5-BA76-0FFFAEFDB88A}" dt="2025-09-27T01:23:31.350" v="3572" actId="1076"/>
-          <ac:picMkLst>
-            <pc:docMk/>
-            <pc:sldMk cId="2608932170" sldId="377"/>
-            <ac:picMk id="6" creationId="{1FB50AEA-3160-2FD7-FB48-DBC35328E943}"/>
-          </ac:picMkLst>
-        </pc:picChg>
-      </pc:sldChg>
-      <pc:sldChg chg="addSp delSp modSp add del mod">
-        <pc:chgData name="Zonghua Gu" userId="9a7e1853e1951ef5" providerId="LiveId" clId="{CF1FAA12-072C-4ED5-BA76-0FFFAEFDB88A}" dt="2025-09-28T19:26:52.449" v="4692" actId="47"/>
-        <pc:sldMkLst>
-          <pc:docMk/>
-          <pc:sldMk cId="2674822730" sldId="378"/>
-        </pc:sldMkLst>
-        <pc:spChg chg="mod">
-          <ac:chgData name="Zonghua Gu" userId="9a7e1853e1951ef5" providerId="LiveId" clId="{CF1FAA12-072C-4ED5-BA76-0FFFAEFDB88A}" dt="2025-09-28T19:25:43.465" v="4690"/>
-          <ac:spMkLst>
-            <pc:docMk/>
-            <pc:sldMk cId="2674822730" sldId="378"/>
-            <ac:spMk id="2" creationId="{75D17876-6FC1-5014-9537-894EA2B399DB}"/>
-          </ac:spMkLst>
-        </pc:spChg>
-        <pc:graphicFrameChg chg="mod modGraphic">
-          <ac:chgData name="Zonghua Gu" userId="9a7e1853e1951ef5" providerId="LiveId" clId="{CF1FAA12-072C-4ED5-BA76-0FFFAEFDB88A}" dt="2025-09-28T19:22:10.798" v="4653" actId="20577"/>
-          <ac:graphicFrameMkLst>
-            <pc:docMk/>
-            <pc:sldMk cId="2674822730" sldId="378"/>
-            <ac:graphicFrameMk id="5" creationId="{B93E3B6C-D6FB-3D9D-2CBD-453096B4463A}"/>
-          </ac:graphicFrameMkLst>
-        </pc:graphicFrameChg>
-        <pc:picChg chg="add del mod">
-          <ac:chgData name="Zonghua Gu" userId="9a7e1853e1951ef5" providerId="LiveId" clId="{CF1FAA12-072C-4ED5-BA76-0FFFAEFDB88A}" dt="2025-09-27T01:27:14.471" v="3624" actId="478"/>
-          <ac:picMkLst>
-            <pc:docMk/>
-            <pc:sldMk cId="2674822730" sldId="378"/>
-            <ac:picMk id="6" creationId="{81BF6465-DF22-8F97-F23D-3B66C93B843E}"/>
-          </ac:picMkLst>
-        </pc:picChg>
-      </pc:sldChg>
-      <pc:sldChg chg="addSp delSp modSp new mod modNotesTx">
-        <pc:chgData name="Zonghua Gu" userId="9a7e1853e1951ef5" providerId="LiveId" clId="{CF1FAA12-072C-4ED5-BA76-0FFFAEFDB88A}" dt="2025-09-28T19:29:51.962" v="4736" actId="313"/>
-        <pc:sldMkLst>
-          <pc:docMk/>
-          <pc:sldMk cId="3558794685" sldId="379"/>
-        </pc:sldMkLst>
-        <pc:spChg chg="mod">
-          <ac:chgData name="Zonghua Gu" userId="9a7e1853e1951ef5" providerId="LiveId" clId="{CF1FAA12-072C-4ED5-BA76-0FFFAEFDB88A}" dt="2025-09-27T01:41:21.203" v="3744" actId="20577"/>
-          <ac:spMkLst>
-            <pc:docMk/>
-            <pc:sldMk cId="3558794685" sldId="379"/>
-            <ac:spMk id="2" creationId="{D8EC3974-FBE4-3E33-C0C7-A305FF3B39C8}"/>
-          </ac:spMkLst>
-        </pc:spChg>
-        <pc:spChg chg="del">
-          <ac:chgData name="Zonghua Gu" userId="9a7e1853e1951ef5" providerId="LiveId" clId="{CF1FAA12-072C-4ED5-BA76-0FFFAEFDB88A}" dt="2025-09-27T01:34:55.024" v="3672" actId="478"/>
-          <ac:spMkLst>
-            <pc:docMk/>
-            <pc:sldMk cId="3558794685" sldId="379"/>
-            <ac:spMk id="4" creationId="{E16D5FF3-A971-B912-F26B-80222AD82C7F}"/>
-          </ac:spMkLst>
-        </pc:spChg>
-        <pc:spChg chg="add mod">
-          <ac:chgData name="Zonghua Gu" userId="9a7e1853e1951ef5" providerId="LiveId" clId="{CF1FAA12-072C-4ED5-BA76-0FFFAEFDB88A}" dt="2025-09-27T01:48:05.845" v="3810" actId="20577"/>
-          <ac:spMkLst>
-            <pc:docMk/>
-            <pc:sldMk cId="3558794685" sldId="379"/>
-            <ac:spMk id="7" creationId="{4133C7BF-FB1E-BE65-9F1D-432DB1AEB47E}"/>
-          </ac:spMkLst>
-        </pc:spChg>
-        <pc:graphicFrameChg chg="add mod modGraphic">
-          <ac:chgData name="Zonghua Gu" userId="9a7e1853e1951ef5" providerId="LiveId" clId="{CF1FAA12-072C-4ED5-BA76-0FFFAEFDB88A}" dt="2025-09-28T19:29:51.962" v="4736" actId="313"/>
-          <ac:graphicFrameMkLst>
-            <pc:docMk/>
-            <pc:sldMk cId="3558794685" sldId="379"/>
-            <ac:graphicFrameMk id="5" creationId="{38CE71F4-FEE2-6A98-A460-FF08F5768515}"/>
-          </ac:graphicFrameMkLst>
-        </pc:graphicFrameChg>
-        <pc:graphicFrameChg chg="add del mod modGraphic">
-          <ac:chgData name="Zonghua Gu" userId="9a7e1853e1951ef5" providerId="LiveId" clId="{CF1FAA12-072C-4ED5-BA76-0FFFAEFDB88A}" dt="2025-09-27T01:41:30.447" v="3746" actId="478"/>
-          <ac:graphicFrameMkLst>
-            <pc:docMk/>
-            <pc:sldMk cId="3558794685" sldId="379"/>
-            <ac:graphicFrameMk id="6" creationId="{43234C3E-FB56-B6F2-EF83-C24A3EFC10DE}"/>
-          </ac:graphicFrameMkLst>
-        </pc:graphicFrameChg>
-      </pc:sldChg>
-      <pc:sldChg chg="modSp add mod">
-        <pc:chgData name="Zonghua Gu" userId="9a7e1853e1951ef5" providerId="LiveId" clId="{CF1FAA12-072C-4ED5-BA76-0FFFAEFDB88A}" dt="2025-09-28T19:29:34.823" v="4716" actId="313"/>
-        <pc:sldMkLst>
-          <pc:docMk/>
-          <pc:sldMk cId="1336862353" sldId="380"/>
-        </pc:sldMkLst>
-        <pc:spChg chg="mod">
-          <ac:chgData name="Zonghua Gu" userId="9a7e1853e1951ef5" providerId="LiveId" clId="{CF1FAA12-072C-4ED5-BA76-0FFFAEFDB88A}" dt="2025-09-27T01:55:48.655" v="3847" actId="20577"/>
-          <ac:spMkLst>
-            <pc:docMk/>
-            <pc:sldMk cId="1336862353" sldId="380"/>
-            <ac:spMk id="2" creationId="{26BCF7D1-587D-1B50-B854-46925DB60BFB}"/>
-          </ac:spMkLst>
-        </pc:spChg>
-        <pc:graphicFrameChg chg="modGraphic">
-          <ac:chgData name="Zonghua Gu" userId="9a7e1853e1951ef5" providerId="LiveId" clId="{CF1FAA12-072C-4ED5-BA76-0FFFAEFDB88A}" dt="2025-09-28T19:29:28.427" v="4708" actId="313"/>
-          <ac:graphicFrameMkLst>
-            <pc:docMk/>
-            <pc:sldMk cId="1336862353" sldId="380"/>
-            <ac:graphicFrameMk id="5" creationId="{BBDA7FC0-53BF-D572-93A1-622E763F068B}"/>
-          </ac:graphicFrameMkLst>
-        </pc:graphicFrameChg>
-        <pc:graphicFrameChg chg="mod modGraphic">
-          <ac:chgData name="Zonghua Gu" userId="9a7e1853e1951ef5" providerId="LiveId" clId="{CF1FAA12-072C-4ED5-BA76-0FFFAEFDB88A}" dt="2025-09-28T19:29:31.734" v="4712" actId="313"/>
-          <ac:graphicFrameMkLst>
-            <pc:docMk/>
-            <pc:sldMk cId="1336862353" sldId="380"/>
-            <ac:graphicFrameMk id="6" creationId="{708CEA76-20F8-81D0-1E3F-7401CB200181}"/>
-          </ac:graphicFrameMkLst>
-        </pc:graphicFrameChg>
-        <pc:graphicFrameChg chg="mod modGraphic">
-          <ac:chgData name="Zonghua Gu" userId="9a7e1853e1951ef5" providerId="LiveId" clId="{CF1FAA12-072C-4ED5-BA76-0FFFAEFDB88A}" dt="2025-09-28T19:29:34.823" v="4716" actId="313"/>
-          <ac:graphicFrameMkLst>
-            <pc:docMk/>
-            <pc:sldMk cId="1336862353" sldId="380"/>
-            <ac:graphicFrameMk id="13" creationId="{DE6B181D-F24A-E836-C5CF-CA3D6714347F}"/>
-          </ac:graphicFrameMkLst>
-        </pc:graphicFrameChg>
-      </pc:sldChg>
-      <pc:sldChg chg="delSp modSp add del mod">
-        <pc:chgData name="Zonghua Gu" userId="9a7e1853e1951ef5" providerId="LiveId" clId="{CF1FAA12-072C-4ED5-BA76-0FFFAEFDB88A}" dt="2025-09-27T01:50:52.407" v="3819" actId="47"/>
-        <pc:sldMkLst>
-          <pc:docMk/>
-          <pc:sldMk cId="1432864031" sldId="380"/>
-        </pc:sldMkLst>
-        <pc:spChg chg="mod">
-          <ac:chgData name="Zonghua Gu" userId="9a7e1853e1951ef5" providerId="LiveId" clId="{CF1FAA12-072C-4ED5-BA76-0FFFAEFDB88A}" dt="2025-09-27T01:45:41.525" v="3788" actId="20577"/>
-          <ac:spMkLst>
-            <pc:docMk/>
-            <pc:sldMk cId="1432864031" sldId="380"/>
-            <ac:spMk id="2" creationId="{3F061CE3-5F5E-0E20-0CE5-30C9582E9CEF}"/>
-          </ac:spMkLst>
-        </pc:spChg>
-        <pc:graphicFrameChg chg="del">
-          <ac:chgData name="Zonghua Gu" userId="9a7e1853e1951ef5" providerId="LiveId" clId="{CF1FAA12-072C-4ED5-BA76-0FFFAEFDB88A}" dt="2025-09-27T01:45:46.059" v="3789" actId="478"/>
-          <ac:graphicFrameMkLst>
-            <pc:docMk/>
-            <pc:sldMk cId="1432864031" sldId="380"/>
-            <ac:graphicFrameMk id="5" creationId="{69F2608D-5CF7-D8D5-4FC1-E90A5B010A95}"/>
-          </ac:graphicFrameMkLst>
-        </pc:graphicFrameChg>
-        <pc:graphicFrameChg chg="mod modGraphic">
-          <ac:chgData name="Zonghua Gu" userId="9a7e1853e1951ef5" providerId="LiveId" clId="{CF1FAA12-072C-4ED5-BA76-0FFFAEFDB88A}" dt="2025-09-27T01:49:43.708" v="3818" actId="20577"/>
-          <ac:graphicFrameMkLst>
-            <pc:docMk/>
-            <pc:sldMk cId="1432864031" sldId="380"/>
-            <ac:graphicFrameMk id="6" creationId="{8B48FCDD-C47C-7AAA-570A-FF7F9A60CA90}"/>
-          </ac:graphicFrameMkLst>
-        </pc:graphicFrameChg>
-      </pc:sldChg>
-      <pc:sldChg chg="addSp modSp add mod">
-        <pc:chgData name="Zonghua Gu" userId="9a7e1853e1951ef5" providerId="LiveId" clId="{CF1FAA12-072C-4ED5-BA76-0FFFAEFDB88A}" dt="2025-09-28T19:29:20.712" v="4704" actId="313"/>
-        <pc:sldMkLst>
-          <pc:docMk/>
-          <pc:sldMk cId="3938986292" sldId="381"/>
-        </pc:sldMkLst>
-        <pc:spChg chg="mod">
-          <ac:chgData name="Zonghua Gu" userId="9a7e1853e1951ef5" providerId="LiveId" clId="{CF1FAA12-072C-4ED5-BA76-0FFFAEFDB88A}" dt="2025-09-27T01:58:38.331" v="3922" actId="20577"/>
-          <ac:spMkLst>
-            <pc:docMk/>
-            <pc:sldMk cId="3938986292" sldId="381"/>
-            <ac:spMk id="2" creationId="{0A33A82F-4D13-6943-1697-5F93B36B9622}"/>
-          </ac:spMkLst>
-        </pc:spChg>
-        <pc:spChg chg="add mod">
-          <ac:chgData name="Zonghua Gu" userId="9a7e1853e1951ef5" providerId="LiveId" clId="{CF1FAA12-072C-4ED5-BA76-0FFFAEFDB88A}" dt="2025-09-27T02:00:07.706" v="4020" actId="14100"/>
-          <ac:spMkLst>
-            <pc:docMk/>
-            <pc:sldMk cId="3938986292" sldId="381"/>
-            <ac:spMk id="4" creationId="{4BF0CDF6-BA6E-533A-2208-B994A0919766}"/>
-          </ac:spMkLst>
-        </pc:spChg>
-        <pc:spChg chg="add mod">
-          <ac:chgData name="Zonghua Gu" userId="9a7e1853e1951ef5" providerId="LiveId" clId="{CF1FAA12-072C-4ED5-BA76-0FFFAEFDB88A}" dt="2025-09-27T01:59:13.360" v="3969" actId="571"/>
-          <ac:spMkLst>
-            <pc:docMk/>
-            <pc:sldMk cId="3938986292" sldId="381"/>
-            <ac:spMk id="7" creationId="{E2AFC00D-8A73-6EFC-73E3-327855EF4CC4}"/>
-          </ac:spMkLst>
-        </pc:spChg>
-        <pc:graphicFrameChg chg="modGraphic">
-          <ac:chgData name="Zonghua Gu" userId="9a7e1853e1951ef5" providerId="LiveId" clId="{CF1FAA12-072C-4ED5-BA76-0FFFAEFDB88A}" dt="2025-09-27T02:02:17.964" v="4025" actId="20577"/>
-          <ac:graphicFrameMkLst>
-            <pc:docMk/>
-            <pc:sldMk cId="3938986292" sldId="381"/>
-            <ac:graphicFrameMk id="5" creationId="{7CA5E7D5-B204-9C0A-BCB8-C59AA195F3F5}"/>
-          </ac:graphicFrameMkLst>
-        </pc:graphicFrameChg>
-        <pc:graphicFrameChg chg="modGraphic">
-          <ac:chgData name="Zonghua Gu" userId="9a7e1853e1951ef5" providerId="LiveId" clId="{CF1FAA12-072C-4ED5-BA76-0FFFAEFDB88A}" dt="2025-09-28T19:29:20.712" v="4704" actId="313"/>
-          <ac:graphicFrameMkLst>
-            <pc:docMk/>
-            <pc:sldMk cId="3938986292" sldId="381"/>
-            <ac:graphicFrameMk id="6" creationId="{3F7517C0-9626-838C-2609-AAAE742BE8CA}"/>
-          </ac:graphicFrameMkLst>
-        </pc:graphicFrameChg>
-      </pc:sldChg>
-      <pc:sldChg chg="delSp modSp add mod">
-        <pc:chgData name="Zonghua Gu" userId="9a7e1853e1951ef5" providerId="LiveId" clId="{CF1FAA12-072C-4ED5-BA76-0FFFAEFDB88A}" dt="2025-09-28T19:29:48.038" v="4732" actId="313"/>
-        <pc:sldMkLst>
-          <pc:docMk/>
-          <pc:sldMk cId="477832723" sldId="382"/>
-        </pc:sldMkLst>
-        <pc:spChg chg="mod">
-          <ac:chgData name="Zonghua Gu" userId="9a7e1853e1951ef5" providerId="LiveId" clId="{CF1FAA12-072C-4ED5-BA76-0FFFAEFDB88A}" dt="2025-09-28T17:14:02.072" v="4036" actId="20577"/>
-          <ac:spMkLst>
-            <pc:docMk/>
-            <pc:sldMk cId="477832723" sldId="382"/>
-            <ac:spMk id="2" creationId="{4A1B2C29-FAA8-E0FC-9D90-062900CD193E}"/>
-          </ac:spMkLst>
-        </pc:spChg>
-        <pc:spChg chg="del">
-          <ac:chgData name="Zonghua Gu" userId="9a7e1853e1951ef5" providerId="LiveId" clId="{CF1FAA12-072C-4ED5-BA76-0FFFAEFDB88A}" dt="2025-09-28T17:14:05.012" v="4037" actId="478"/>
-          <ac:spMkLst>
-            <pc:docMk/>
-            <pc:sldMk cId="477832723" sldId="382"/>
-            <ac:spMk id="7" creationId="{ADBBE1C5-4B0E-F572-51CD-615CE211DAF6}"/>
-          </ac:spMkLst>
-        </pc:spChg>
-        <pc:graphicFrameChg chg="modGraphic">
-          <ac:chgData name="Zonghua Gu" userId="9a7e1853e1951ef5" providerId="LiveId" clId="{CF1FAA12-072C-4ED5-BA76-0FFFAEFDB88A}" dt="2025-09-28T19:29:48.038" v="4732" actId="313"/>
-          <ac:graphicFrameMkLst>
-            <pc:docMk/>
-            <pc:sldMk cId="477832723" sldId="382"/>
-            <ac:graphicFrameMk id="5" creationId="{EE35C772-DE0B-2EAC-7244-85D4FA033251}"/>
-          </ac:graphicFrameMkLst>
-        </pc:graphicFrameChg>
-      </pc:sldChg>
-      <pc:sldChg chg="modSp add mod modNotes">
-        <pc:chgData name="Zonghua Gu" userId="9a7e1853e1951ef5" providerId="LiveId" clId="{CF1FAA12-072C-4ED5-BA76-0FFFAEFDB88A}" dt="2025-09-28T19:28:54.672" v="4695"/>
-        <pc:sldMkLst>
-          <pc:docMk/>
-          <pc:sldMk cId="3010226585" sldId="383"/>
-        </pc:sldMkLst>
-        <pc:graphicFrameChg chg="modGraphic">
-          <ac:chgData name="Zonghua Gu" userId="9a7e1853e1951ef5" providerId="LiveId" clId="{CF1FAA12-072C-4ED5-BA76-0FFFAEFDB88A}" dt="2025-09-28T17:21:10.029" v="4231" actId="14100"/>
-          <ac:graphicFrameMkLst>
-            <pc:docMk/>
-            <pc:sldMk cId="3010226585" sldId="383"/>
-            <ac:graphicFrameMk id="6" creationId="{CFC5E2AE-B706-F0FE-2E4C-ACA699A32698}"/>
-          </ac:graphicFrameMkLst>
-        </pc:graphicFrameChg>
-      </pc:sldChg>
-      <pc:sldChg chg="add del">
-        <pc:chgData name="Zonghua Gu" userId="9a7e1853e1951ef5" providerId="LiveId" clId="{CF1FAA12-072C-4ED5-BA76-0FFFAEFDB88A}" dt="2025-09-28T17:20:55.484" v="4226" actId="47"/>
-        <pc:sldMkLst>
-          <pc:docMk/>
-          <pc:sldMk cId="3964744334" sldId="383"/>
-        </pc:sldMkLst>
-      </pc:sldChg>
-      <pc:sldChg chg="add del">
-        <pc:chgData name="Zonghua Gu" userId="9a7e1853e1951ef5" providerId="LiveId" clId="{CF1FAA12-072C-4ED5-BA76-0FFFAEFDB88A}" dt="2025-09-28T17:23:29.007" v="4285" actId="47"/>
-        <pc:sldMkLst>
-          <pc:docMk/>
-          <pc:sldMk cId="2174088812" sldId="384"/>
-        </pc:sldMkLst>
-      </pc:sldChg>
-      <pc:sldChg chg="delSp modSp add mod">
-        <pc:chgData name="Zonghua Gu" userId="9a7e1853e1951ef5" providerId="LiveId" clId="{CF1FAA12-072C-4ED5-BA76-0FFFAEFDB88A}" dt="2025-09-28T17:34:10.466" v="4430" actId="6549"/>
-        <pc:sldMkLst>
-          <pc:docMk/>
-          <pc:sldMk cId="3874608027" sldId="384"/>
-        </pc:sldMkLst>
-        <pc:spChg chg="mod">
-          <ac:chgData name="Zonghua Gu" userId="9a7e1853e1951ef5" providerId="LiveId" clId="{CF1FAA12-072C-4ED5-BA76-0FFFAEFDB88A}" dt="2025-09-28T17:33:57.084" v="4427" actId="20577"/>
-          <ac:spMkLst>
-            <pc:docMk/>
-            <pc:sldMk cId="3874608027" sldId="384"/>
-            <ac:spMk id="2" creationId="{249E9D73-DFD9-5FD9-049A-AA9B1281403E}"/>
-          </ac:spMkLst>
-        </pc:spChg>
-        <pc:spChg chg="del">
-          <ac:chgData name="Zonghua Gu" userId="9a7e1853e1951ef5" providerId="LiveId" clId="{CF1FAA12-072C-4ED5-BA76-0FFFAEFDB88A}" dt="2025-09-28T17:34:02.809" v="4428" actId="478"/>
-          <ac:spMkLst>
-            <pc:docMk/>
-            <pc:sldMk cId="3874608027" sldId="384"/>
-            <ac:spMk id="9" creationId="{6D33827D-6B1E-DB35-A78E-31E300F7DB6B}"/>
-          </ac:spMkLst>
-        </pc:spChg>
-        <pc:graphicFrameChg chg="modGraphic">
-          <ac:chgData name="Zonghua Gu" userId="9a7e1853e1951ef5" providerId="LiveId" clId="{CF1FAA12-072C-4ED5-BA76-0FFFAEFDB88A}" dt="2025-09-28T17:34:10.466" v="4430" actId="6549"/>
-          <ac:graphicFrameMkLst>
-            <pc:docMk/>
-            <pc:sldMk cId="3874608027" sldId="384"/>
-            <ac:graphicFrameMk id="5" creationId="{9F085B11-F5FB-4007-9CB4-3ABD525B24B3}"/>
-          </ac:graphicFrameMkLst>
-        </pc:graphicFrameChg>
-        <pc:graphicFrameChg chg="del">
-          <ac:chgData name="Zonghua Gu" userId="9a7e1853e1951ef5" providerId="LiveId" clId="{CF1FAA12-072C-4ED5-BA76-0FFFAEFDB88A}" dt="2025-09-28T17:34:05.641" v="4429" actId="478"/>
-          <ac:graphicFrameMkLst>
-            <pc:docMk/>
-            <pc:sldMk cId="3874608027" sldId="384"/>
-            <ac:graphicFrameMk id="8" creationId="{FF8680CF-E922-2BE3-BCD1-D03D2B8B1B3A}"/>
-          </ac:graphicFrameMkLst>
-        </pc:graphicFrameChg>
-      </pc:sldChg>
-      <pc:sldChg chg="delSp modSp add del mod">
-        <pc:chgData name="Zonghua Gu" userId="9a7e1853e1951ef5" providerId="LiveId" clId="{CF1FAA12-072C-4ED5-BA76-0FFFAEFDB88A}" dt="2025-09-28T19:26:52.449" v="4692" actId="47"/>
-        <pc:sldMkLst>
-          <pc:docMk/>
-          <pc:sldMk cId="735420745" sldId="385"/>
-        </pc:sldMkLst>
-        <pc:spChg chg="mod">
-          <ac:chgData name="Zonghua Gu" userId="9a7e1853e1951ef5" providerId="LiveId" clId="{CF1FAA12-072C-4ED5-BA76-0FFFAEFDB88A}" dt="2025-09-28T19:25:15.905" v="4689"/>
-          <ac:spMkLst>
-            <pc:docMk/>
-            <pc:sldMk cId="735420745" sldId="385"/>
-            <ac:spMk id="2" creationId="{975CB743-D1CD-D3E0-B3E3-8A597EF3F759}"/>
-          </ac:spMkLst>
-        </pc:spChg>
-        <pc:graphicFrameChg chg="mod">
-          <ac:chgData name="Zonghua Gu" userId="9a7e1853e1951ef5" providerId="LiveId" clId="{CF1FAA12-072C-4ED5-BA76-0FFFAEFDB88A}" dt="2025-09-28T19:26:05.444" v="4691"/>
-          <ac:graphicFrameMkLst>
-            <pc:docMk/>
-            <pc:sldMk cId="735420745" sldId="385"/>
-            <ac:graphicFrameMk id="4" creationId="{379BF668-C225-5642-3C13-36CF3A6ED8DC}"/>
-          </ac:graphicFrameMkLst>
-        </pc:graphicFrameChg>
-        <pc:graphicFrameChg chg="del">
-          <ac:chgData name="Zonghua Gu" userId="9a7e1853e1951ef5" providerId="LiveId" clId="{CF1FAA12-072C-4ED5-BA76-0FFFAEFDB88A}" dt="2025-09-28T19:21:41.177" v="4648" actId="478"/>
-          <ac:graphicFrameMkLst>
-            <pc:docMk/>
-            <pc:sldMk cId="735420745" sldId="385"/>
-            <ac:graphicFrameMk id="5" creationId="{E577925E-F80F-A40C-A6D6-FF85A8D91D05}"/>
-          </ac:graphicFrameMkLst>
-        </pc:graphicFrameChg>
-      </pc:sldChg>
-      <pc:sldChg chg="modSp add mod">
-        <pc:chgData name="Zonghua Gu" userId="9a7e1853e1951ef5" providerId="LiveId" clId="{CF1FAA12-072C-4ED5-BA76-0FFFAEFDB88A}" dt="2025-09-28T19:29:57.870" v="4745" actId="313"/>
-        <pc:sldMkLst>
-          <pc:docMk/>
-          <pc:sldMk cId="3700392889" sldId="386"/>
-        </pc:sldMkLst>
-        <pc:spChg chg="mod">
-          <ac:chgData name="Zonghua Gu" userId="9a7e1853e1951ef5" providerId="LiveId" clId="{CF1FAA12-072C-4ED5-BA76-0FFFAEFDB88A}" dt="2025-09-28T19:25:12.474" v="4688" actId="20577"/>
-          <ac:spMkLst>
-            <pc:docMk/>
-            <pc:sldMk cId="3700392889" sldId="386"/>
-            <ac:spMk id="2" creationId="{B1CD2F78-E38C-E922-2EA0-E5855F54ED3D}"/>
-          </ac:spMkLst>
-        </pc:spChg>
-        <pc:graphicFrameChg chg="modGraphic">
-          <ac:chgData name="Zonghua Gu" userId="9a7e1853e1951ef5" providerId="LiveId" clId="{CF1FAA12-072C-4ED5-BA76-0FFFAEFDB88A}" dt="2025-09-28T19:29:57.870" v="4745" actId="313"/>
-          <ac:graphicFrameMkLst>
-            <pc:docMk/>
-            <pc:sldMk cId="3700392889" sldId="386"/>
-            <ac:graphicFrameMk id="5" creationId="{6531D947-33A4-180B-7D14-41430240EACC}"/>
-          </ac:graphicFrameMkLst>
-        </pc:graphicFrameChg>
-      </pc:sldChg>
-      <pc:sldMasterChg chg="delSldLayout">
-        <pc:chgData name="Zonghua Gu" userId="9a7e1853e1951ef5" providerId="LiveId" clId="{CF1FAA12-072C-4ED5-BA76-0FFFAEFDB88A}" dt="2025-09-18T01:38:44.397" v="1241" actId="47"/>
-        <pc:sldMasterMkLst>
-          <pc:docMk/>
-          <pc:sldMasterMk cId="0" sldId="2147483660"/>
-        </pc:sldMasterMkLst>
-        <pc:sldLayoutChg chg="del">
-          <pc:chgData name="Zonghua Gu" userId="9a7e1853e1951ef5" providerId="LiveId" clId="{CF1FAA12-072C-4ED5-BA76-0FFFAEFDB88A}" dt="2025-09-18T01:38:44.397" v="1241" actId="47"/>
-          <pc:sldLayoutMkLst>
-            <pc:docMk/>
-            <pc:sldMasterMk cId="0" sldId="2147483660"/>
-            <pc:sldLayoutMk cId="1858514557" sldId="2147483672"/>
-          </pc:sldLayoutMkLst>
-        </pc:sldLayoutChg>
-      </pc:sldMasterChg>
     </pc:docChg>
   </pc:docChgLst>
 </pc:chgInfo>
@@ -1795,7 +368,7 @@
             <a:fld id="{2AEAFE1F-9E52-45C8-9793-E819F0044A1C}" type="datetimeFigureOut">
               <a:rPr lang="en-US" smtClean="0"/>
               <a:pPr/>
-              <a:t>9/28/2025</a:t>
+              <a:t>11/13/2025</a:t>
             </a:fld>
             <a:endParaRPr lang="en-US"/>
           </a:p>
@@ -2594,6 +1167,304 @@
   <p:cSld>
     <p:spTree>
       <p:nvGrpSpPr>
+        <p:cNvPr id="1" name="">
+          <a:extLst>
+            <a:ext uri="{FF2B5EF4-FFF2-40B4-BE49-F238E27FC236}">
+              <a16:creationId xmlns:a16="http://schemas.microsoft.com/office/drawing/2014/main" id="{37A5862C-E5A2-BA8F-385A-253A9E8D46F0}"/>
+            </a:ext>
+          </a:extLst>
+        </p:cNvPr>
+        <p:cNvGrpSpPr/>
+        <p:nvPr/>
+      </p:nvGrpSpPr>
+      <p:grpSpPr>
+        <a:xfrm>
+          <a:off x="0" y="0"/>
+          <a:ext cx="0" cy="0"/>
+          <a:chOff x="0" y="0"/>
+          <a:chExt cx="0" cy="0"/>
+        </a:xfrm>
+      </p:grpSpPr>
+      <p:sp>
+        <p:nvSpPr>
+          <p:cNvPr id="2" name="Slide Image Placeholder 1">
+            <a:extLst>
+              <a:ext uri="{FF2B5EF4-FFF2-40B4-BE49-F238E27FC236}">
+                <a16:creationId xmlns:a16="http://schemas.microsoft.com/office/drawing/2014/main" id="{8B00B468-CEBE-6E74-94E0-101106D7FB39}"/>
+              </a:ext>
+            </a:extLst>
+          </p:cNvPr>
+          <p:cNvSpPr>
+            <a:spLocks noGrp="1" noRot="1" noChangeAspect="1"/>
+          </p:cNvSpPr>
+          <p:nvPr>
+            <p:ph type="sldImg"/>
+          </p:nvPr>
+        </p:nvSpPr>
+        <p:spPr/>
+      </p:sp>
+      <p:sp>
+        <p:nvSpPr>
+          <p:cNvPr id="3" name="Notes Placeholder 2">
+            <a:extLst>
+              <a:ext uri="{FF2B5EF4-FFF2-40B4-BE49-F238E27FC236}">
+                <a16:creationId xmlns:a16="http://schemas.microsoft.com/office/drawing/2014/main" id="{E3A5F83B-79B0-55F5-1F44-B30AEACB7EA7}"/>
+              </a:ext>
+            </a:extLst>
+          </p:cNvPr>
+          <p:cNvSpPr>
+            <a:spLocks noGrp="1"/>
+          </p:cNvSpPr>
+          <p:nvPr>
+            <p:ph type="body" idx="1"/>
+          </p:nvPr>
+        </p:nvSpPr>
+        <p:spPr/>
+        <p:txBody>
+          <a:bodyPr/>
+          <a:lstStyle/>
+          <a:p>
+            <a:r>
+              <a:rPr lang="pt-BR" sz="1200" i="0" dirty="0">
+                <a:effectLst/>
+                <a:latin typeface="Consolas" panose="020B0609020204030204" pitchFamily="49" charset="0"/>
+                <a:cs typeface="Consolas" panose="020B0609020204030204" pitchFamily="49" charset="0"/>
+              </a:rPr>
+              <a:t> bx lr</a:t>
+            </a:r>
+            <a:endParaRPr lang="en-US" dirty="0"/>
+          </a:p>
+        </p:txBody>
+      </p:sp>
+      <p:sp>
+        <p:nvSpPr>
+          <p:cNvPr id="4" name="Slide Number Placeholder 3">
+            <a:extLst>
+              <a:ext uri="{FF2B5EF4-FFF2-40B4-BE49-F238E27FC236}">
+                <a16:creationId xmlns:a16="http://schemas.microsoft.com/office/drawing/2014/main" id="{1B5464B3-1AF1-2B17-D44B-E2C4306384DA}"/>
+              </a:ext>
+            </a:extLst>
+          </p:cNvPr>
+          <p:cNvSpPr>
+            <a:spLocks noGrp="1"/>
+          </p:cNvSpPr>
+          <p:nvPr>
+            <p:ph type="sldNum" sz="quarter" idx="5"/>
+          </p:nvPr>
+        </p:nvSpPr>
+        <p:spPr/>
+        <p:txBody>
+          <a:bodyPr/>
+          <a:lstStyle/>
+          <a:p>
+            <a:fld id="{2D71AD5F-E36F-46B9-A99B-7B025244359D}" type="slidenum">
+              <a:rPr lang="en-US" smtClean="0"/>
+              <a:pPr/>
+              <a:t>24</a:t>
+            </a:fld>
+            <a:endParaRPr lang="en-US"/>
+          </a:p>
+        </p:txBody>
+      </p:sp>
+    </p:spTree>
+    <p:extLst>
+      <p:ext uri="{BB962C8B-B14F-4D97-AF65-F5344CB8AC3E}">
+        <p14:creationId xmlns:p14="http://schemas.microsoft.com/office/powerpoint/2010/main" val="1160230142"/>
+      </p:ext>
+    </p:extLst>
+  </p:cSld>
+  <p:clrMapOvr>
+    <a:masterClrMapping/>
+  </p:clrMapOvr>
+</p:notes>
+</file>
+
+<file path=ppt/notesSlides/notesSlide13.xml><?xml version="1.0" encoding="utf-8"?>
+<p:notes xmlns:a="http://schemas.openxmlformats.org/drawingml/2006/main" xmlns:r="http://schemas.openxmlformats.org/officeDocument/2006/relationships" xmlns:p="http://schemas.openxmlformats.org/presentationml/2006/main">
+  <p:cSld>
+    <p:spTree>
+      <p:nvGrpSpPr>
+        <p:cNvPr id="1" name=""/>
+        <p:cNvGrpSpPr/>
+        <p:nvPr/>
+      </p:nvGrpSpPr>
+      <p:grpSpPr>
+        <a:xfrm>
+          <a:off x="0" y="0"/>
+          <a:ext cx="0" cy="0"/>
+          <a:chOff x="0" y="0"/>
+          <a:chExt cx="0" cy="0"/>
+        </a:xfrm>
+      </p:grpSpPr>
+      <p:sp>
+        <p:nvSpPr>
+          <p:cNvPr id="2" name="Slide Image Placeholder 1"/>
+          <p:cNvSpPr>
+            <a:spLocks noGrp="1" noRot="1" noChangeAspect="1"/>
+          </p:cNvSpPr>
+          <p:nvPr>
+            <p:ph type="sldImg"/>
+          </p:nvPr>
+        </p:nvSpPr>
+        <p:spPr/>
+      </p:sp>
+      <p:sp>
+        <p:nvSpPr>
+          <p:cNvPr id="3" name="Notes Placeholder 2"/>
+          <p:cNvSpPr>
+            <a:spLocks noGrp="1"/>
+          </p:cNvSpPr>
+          <p:nvPr>
+            <p:ph type="body" idx="1"/>
+          </p:nvPr>
+        </p:nvSpPr>
+        <p:spPr/>
+        <p:txBody>
+          <a:bodyPr/>
+          <a:lstStyle/>
+          <a:p>
+            <a:r>
+              <a:rPr lang="pt-BR" sz="1200" i="0" dirty="0">
+                <a:effectLst/>
+                <a:latin typeface="Consolas" panose="020B0609020204030204" pitchFamily="49" charset="0"/>
+                <a:cs typeface="Consolas" panose="020B0609020204030204" pitchFamily="49" charset="0"/>
+              </a:rPr>
+              <a:t> bx lr</a:t>
+            </a:r>
+            <a:endParaRPr lang="en-US" dirty="0"/>
+          </a:p>
+        </p:txBody>
+      </p:sp>
+      <p:sp>
+        <p:nvSpPr>
+          <p:cNvPr id="4" name="Slide Number Placeholder 3"/>
+          <p:cNvSpPr>
+            <a:spLocks noGrp="1"/>
+          </p:cNvSpPr>
+          <p:nvPr>
+            <p:ph type="sldNum" sz="quarter" idx="5"/>
+          </p:nvPr>
+        </p:nvSpPr>
+        <p:spPr/>
+        <p:txBody>
+          <a:bodyPr/>
+          <a:lstStyle/>
+          <a:p>
+            <a:fld id="{2D71AD5F-E36F-46B9-A99B-7B025244359D}" type="slidenum">
+              <a:rPr lang="en-US" smtClean="0"/>
+              <a:pPr/>
+              <a:t>25</a:t>
+            </a:fld>
+            <a:endParaRPr lang="en-US"/>
+          </a:p>
+        </p:txBody>
+      </p:sp>
+    </p:spTree>
+    <p:extLst>
+      <p:ext uri="{BB962C8B-B14F-4D97-AF65-F5344CB8AC3E}">
+        <p14:creationId xmlns:p14="http://schemas.microsoft.com/office/powerpoint/2010/main" val="1438093478"/>
+      </p:ext>
+    </p:extLst>
+  </p:cSld>
+  <p:clrMapOvr>
+    <a:masterClrMapping/>
+  </p:clrMapOvr>
+</p:notes>
+</file>
+
+<file path=ppt/notesSlides/notesSlide14.xml><?xml version="1.0" encoding="utf-8"?>
+<p:notes xmlns:a="http://schemas.openxmlformats.org/drawingml/2006/main" xmlns:r="http://schemas.openxmlformats.org/officeDocument/2006/relationships" xmlns:p="http://schemas.openxmlformats.org/presentationml/2006/main">
+  <p:cSld>
+    <p:spTree>
+      <p:nvGrpSpPr>
+        <p:cNvPr id="1" name=""/>
+        <p:cNvGrpSpPr/>
+        <p:nvPr/>
+      </p:nvGrpSpPr>
+      <p:grpSpPr>
+        <a:xfrm>
+          <a:off x="0" y="0"/>
+          <a:ext cx="0" cy="0"/>
+          <a:chOff x="0" y="0"/>
+          <a:chExt cx="0" cy="0"/>
+        </a:xfrm>
+      </p:grpSpPr>
+      <p:sp>
+        <p:nvSpPr>
+          <p:cNvPr id="2" name="Slide Image Placeholder 1"/>
+          <p:cNvSpPr>
+            <a:spLocks noGrp="1" noRot="1" noChangeAspect="1"/>
+          </p:cNvSpPr>
+          <p:nvPr>
+            <p:ph type="sldImg"/>
+          </p:nvPr>
+        </p:nvSpPr>
+        <p:spPr/>
+      </p:sp>
+      <p:sp>
+        <p:nvSpPr>
+          <p:cNvPr id="3" name="Notes Placeholder 2"/>
+          <p:cNvSpPr>
+            <a:spLocks noGrp="1"/>
+          </p:cNvSpPr>
+          <p:nvPr>
+            <p:ph type="body" idx="1"/>
+          </p:nvPr>
+        </p:nvSpPr>
+        <p:spPr/>
+        <p:txBody>
+          <a:bodyPr/>
+          <a:lstStyle/>
+          <a:p>
+            <a:r>
+              <a:rPr lang="en-US" dirty="0"/>
+              <a:t>https://thinkingeek.com/2013/01/20/arm-assembler-raspberry-pi-chapter-6/</a:t>
+            </a:r>
+          </a:p>
+        </p:txBody>
+      </p:sp>
+      <p:sp>
+        <p:nvSpPr>
+          <p:cNvPr id="4" name="Slide Number Placeholder 3"/>
+          <p:cNvSpPr>
+            <a:spLocks noGrp="1"/>
+          </p:cNvSpPr>
+          <p:nvPr>
+            <p:ph type="sldNum" sz="quarter" idx="5"/>
+          </p:nvPr>
+        </p:nvSpPr>
+        <p:spPr/>
+        <p:txBody>
+          <a:bodyPr/>
+          <a:lstStyle/>
+          <a:p>
+            <a:fld id="{2D71AD5F-E36F-46B9-A99B-7B025244359D}" type="slidenum">
+              <a:rPr lang="en-US" smtClean="0"/>
+              <a:pPr/>
+              <a:t>26</a:t>
+            </a:fld>
+            <a:endParaRPr lang="en-US"/>
+          </a:p>
+        </p:txBody>
+      </p:sp>
+    </p:spTree>
+    <p:extLst>
+      <p:ext uri="{BB962C8B-B14F-4D97-AF65-F5344CB8AC3E}">
+        <p14:creationId xmlns:p14="http://schemas.microsoft.com/office/powerpoint/2010/main" val="3890697798"/>
+      </p:ext>
+    </p:extLst>
+  </p:cSld>
+  <p:clrMapOvr>
+    <a:masterClrMapping/>
+  </p:clrMapOvr>
+</p:notes>
+</file>
+
+<file path=ppt/notesSlides/notesSlide15.xml><?xml version="1.0" encoding="utf-8"?>
+<p:notes xmlns:a="http://schemas.openxmlformats.org/drawingml/2006/main" xmlns:r="http://schemas.openxmlformats.org/officeDocument/2006/relationships" xmlns:p="http://schemas.openxmlformats.org/presentationml/2006/main">
+  <p:cSld>
+    <p:spTree>
+      <p:nvGrpSpPr>
         <p:cNvPr id="1" name=""/>
         <p:cNvGrpSpPr/>
         <p:nvPr/>
@@ -2688,7 +1559,7 @@
 </p:notes>
 </file>
 
-<file path=ppt/notesSlides/notesSlide13.xml><?xml version="1.0" encoding="utf-8"?>
+<file path=ppt/notesSlides/notesSlide16.xml><?xml version="1.0" encoding="utf-8"?>
 <p:notes xmlns:a="http://schemas.openxmlformats.org/drawingml/2006/main" xmlns:r="http://schemas.openxmlformats.org/officeDocument/2006/relationships" xmlns:p="http://schemas.openxmlformats.org/presentationml/2006/main">
   <p:cSld>
     <p:spTree>
@@ -2801,7 +1672,7 @@
             <a:fld id="{2D71AD5F-E36F-46B9-A99B-7B025244359D}" type="slidenum">
               <a:rPr lang="en-US" smtClean="0"/>
               <a:pPr/>
-              <a:t>29</a:t>
+              <a:t>32</a:t>
             </a:fld>
             <a:endParaRPr lang="en-US"/>
           </a:p>
@@ -2820,7 +1691,7 @@
 </p:notes>
 </file>
 
-<file path=ppt/notesSlides/notesSlide14.xml><?xml version="1.0" encoding="utf-8"?>
+<file path=ppt/notesSlides/notesSlide17.xml><?xml version="1.0" encoding="utf-8"?>
 <p:notes xmlns:a="http://schemas.openxmlformats.org/drawingml/2006/main" xmlns:r="http://schemas.openxmlformats.org/officeDocument/2006/relationships" xmlns:p="http://schemas.openxmlformats.org/presentationml/2006/main">
   <p:cSld>
     <p:spTree>
@@ -2909,7 +1780,7 @@
             <a:fld id="{2D71AD5F-E36F-46B9-A99B-7B025244359D}" type="slidenum">
               <a:rPr lang="en-US" smtClean="0"/>
               <a:pPr/>
-              <a:t>30</a:t>
+              <a:t>33</a:t>
             </a:fld>
             <a:endParaRPr lang="en-US"/>
           </a:p>
@@ -4274,7 +3145,7 @@
             <a:fld id="{2E26774B-6488-4259-9342-6CBDB2BFD4E4}" type="datetime1">
               <a:rPr lang="en-US" smtClean="0"/>
               <a:pPr eaLnBrk="1" latinLnBrk="0" hangingPunct="1"/>
-              <a:t>9/28/2025</a:t>
+              <a:t>11/13/2025</a:t>
             </a:fld>
             <a:endParaRPr lang="en-US" sz="1600" dirty="0"/>
           </a:p>
@@ -4635,7 +3506,7 @@
             <a:fld id="{9B2E7711-0BE3-4AFC-959B-CB5C31A7AE48}" type="datetime1">
               <a:rPr lang="en-US" smtClean="0"/>
               <a:pPr eaLnBrk="1" latinLnBrk="0" hangingPunct="1"/>
-              <a:t>9/28/2025</a:t>
+              <a:t>11/13/2025</a:t>
             </a:fld>
             <a:endParaRPr lang="en-US"/>
           </a:p>
@@ -4812,7 +3683,7 @@
             <a:fld id="{825AAB62-A572-4E37-B772-B4A75ADE0B18}" type="datetime1">
               <a:rPr lang="en-US" smtClean="0"/>
               <a:pPr eaLnBrk="1" latinLnBrk="0" hangingPunct="1"/>
-              <a:t>9/28/2025</a:t>
+              <a:t>11/13/2025</a:t>
             </a:fld>
             <a:endParaRPr lang="en-US"/>
           </a:p>
@@ -5049,7 +3920,7 @@
             <a:fld id="{B0F52420-10F8-488E-969A-A9BE388BE9C4}" type="datetime1">
               <a:rPr lang="en-US" smtClean="0"/>
               <a:pPr eaLnBrk="1" latinLnBrk="0" hangingPunct="1"/>
-              <a:t>9/28/2025</a:t>
+              <a:t>11/13/2025</a:t>
             </a:fld>
             <a:endParaRPr lang="en-US" dirty="0"/>
           </a:p>
@@ -5320,7 +4191,7 @@
             <a:fld id="{96E96F24-58CF-47DA-907C-A9CD6353E425}" type="datetime1">
               <a:rPr lang="en-US" smtClean="0"/>
               <a:pPr eaLnBrk="1" latinLnBrk="0" hangingPunct="1"/>
-              <a:t>9/28/2025</a:t>
+              <a:t>11/13/2025</a:t>
             </a:fld>
             <a:endParaRPr lang="en-US" dirty="0"/>
           </a:p>
@@ -5542,7 +4413,7 @@
             <a:fld id="{53AE4463-726A-4A35-9F46-98893432A3F9}" type="datetime1">
               <a:rPr lang="en-US" smtClean="0"/>
               <a:pPr eaLnBrk="1" latinLnBrk="0" hangingPunct="1"/>
-              <a:t>9/28/2025</a:t>
+              <a:t>11/13/2025</a:t>
             </a:fld>
             <a:endParaRPr lang="en-US"/>
           </a:p>
@@ -5896,7 +4767,7 @@
             <a:fld id="{FDF404D0-E306-4E90-90E3-E44D26246FFC}" type="datetime1">
               <a:rPr lang="en-US" smtClean="0"/>
               <a:pPr eaLnBrk="1" latinLnBrk="0" hangingPunct="1"/>
-              <a:t>9/28/2025</a:t>
+              <a:t>11/13/2025</a:t>
             </a:fld>
             <a:endParaRPr lang="en-US"/>
           </a:p>
@@ -6130,7 +5001,7 @@
             <a:fld id="{1485DA14-76F0-4D93-83FB-7878C79A1986}" type="datetime1">
               <a:rPr lang="en-US" smtClean="0"/>
               <a:pPr eaLnBrk="1" latinLnBrk="0" hangingPunct="1"/>
-              <a:t>9/28/2025</a:t>
+              <a:t>11/13/2025</a:t>
             </a:fld>
             <a:endParaRPr lang="en-US"/>
           </a:p>
@@ -6273,7 +5144,7 @@
             <a:fld id="{A15E552D-49E1-496B-B79C-E100986B8B5F}" type="datetime1">
               <a:rPr lang="en-US" smtClean="0"/>
               <a:pPr eaLnBrk="1" latinLnBrk="0" hangingPunct="1"/>
-              <a:t>9/28/2025</a:t>
+              <a:t>11/13/2025</a:t>
             </a:fld>
             <a:endParaRPr lang="en-US"/>
           </a:p>
@@ -6552,7 +5423,7 @@
             <a:fld id="{CEC72505-1551-4A98-97CD-F520B07184AD}" type="datetime1">
               <a:rPr lang="en-US" smtClean="0"/>
               <a:pPr eaLnBrk="1" latinLnBrk="0" hangingPunct="1"/>
-              <a:t>9/28/2025</a:t>
+              <a:t>11/13/2025</a:t>
             </a:fld>
             <a:endParaRPr lang="en-US"/>
           </a:p>
@@ -6960,7 +5831,7 @@
             <a:fld id="{7218F47B-BA16-4F20-B5BA-73F598D94B51}" type="datetime1">
               <a:rPr lang="en-US" smtClean="0"/>
               <a:pPr eaLnBrk="1" latinLnBrk="0" hangingPunct="1"/>
-              <a:t>9/28/2025</a:t>
+              <a:t>11/13/2025</a:t>
             </a:fld>
             <a:endParaRPr lang="en-US"/>
           </a:p>
@@ -7299,7 +6170,7 @@
             <a:fld id="{4F3CB514-9CA6-4E48-9463-A430D31CFDE3}" type="datetime1">
               <a:rPr lang="en-US" smtClean="0"/>
               <a:pPr eaLnBrk="1" latinLnBrk="0" hangingPunct="1"/>
-              <a:t>9/28/2025</a:t>
+              <a:t>11/13/2025</a:t>
             </a:fld>
             <a:endParaRPr lang="en-US" sz="1400" dirty="0">
               <a:solidFill>
@@ -19122,6 +17993,1398 @@
   <p:cSld>
     <p:spTree>
       <p:nvGrpSpPr>
+        <p:cNvPr id="1" name="">
+          <a:extLst>
+            <a:ext uri="{FF2B5EF4-FFF2-40B4-BE49-F238E27FC236}">
+              <a16:creationId xmlns:a16="http://schemas.microsoft.com/office/drawing/2014/main" id="{FDB3C34C-8318-37CF-CF5A-C65D4A6D064D}"/>
+            </a:ext>
+          </a:extLst>
+        </p:cNvPr>
+        <p:cNvGrpSpPr/>
+        <p:nvPr/>
+      </p:nvGrpSpPr>
+      <p:grpSpPr>
+        <a:xfrm>
+          <a:off x="0" y="0"/>
+          <a:ext cx="0" cy="0"/>
+          <a:chOff x="0" y="0"/>
+          <a:chExt cx="0" cy="0"/>
+        </a:xfrm>
+      </p:grpSpPr>
+      <p:sp>
+        <p:nvSpPr>
+          <p:cNvPr id="2" name="Title 1">
+            <a:extLst>
+              <a:ext uri="{FF2B5EF4-FFF2-40B4-BE49-F238E27FC236}">
+                <a16:creationId xmlns:a16="http://schemas.microsoft.com/office/drawing/2014/main" id="{286AE22E-7014-BD8E-E9B0-11BB41A135DA}"/>
+              </a:ext>
+            </a:extLst>
+          </p:cNvPr>
+          <p:cNvSpPr>
+            <a:spLocks noGrp="1"/>
+          </p:cNvSpPr>
+          <p:nvPr>
+            <p:ph type="title"/>
+          </p:nvPr>
+        </p:nvSpPr>
+        <p:spPr/>
+        <p:txBody>
+          <a:bodyPr/>
+          <a:lstStyle/>
+          <a:p>
+            <a:r>
+              <a:rPr lang="en-US" dirty="0"/>
+              <a:t>C to Assembly</a:t>
+            </a:r>
+          </a:p>
+        </p:txBody>
+      </p:sp>
+      <p:graphicFrame>
+        <p:nvGraphicFramePr>
+          <p:cNvPr id="5" name="Table 4">
+            <a:extLst>
+              <a:ext uri="{FF2B5EF4-FFF2-40B4-BE49-F238E27FC236}">
+                <a16:creationId xmlns:a16="http://schemas.microsoft.com/office/drawing/2014/main" id="{189D004C-3271-3ECE-4454-851923351400}"/>
+              </a:ext>
+            </a:extLst>
+          </p:cNvPr>
+          <p:cNvGraphicFramePr>
+            <a:graphicFrameLocks noGrp="1"/>
+          </p:cNvGraphicFramePr>
+          <p:nvPr>
+            <p:extLst>
+              <p:ext uri="{D42A27DB-BD31-4B8C-83A1-F6EECF244321}">
+                <p14:modId xmlns:p14="http://schemas.microsoft.com/office/powerpoint/2010/main" val="1070709069"/>
+              </p:ext>
+            </p:extLst>
+          </p:nvPr>
+        </p:nvGraphicFramePr>
+        <p:xfrm>
+          <a:off x="457200" y="1143000"/>
+          <a:ext cx="8458200" cy="1463040"/>
+        </p:xfrm>
+        <a:graphic>
+          <a:graphicData uri="http://schemas.openxmlformats.org/drawingml/2006/table">
+            <a:tbl>
+              <a:tblPr firstRow="1" firstCol="1" bandRow="1">
+                <a:tableStyleId>{5940675A-B579-460E-94D1-54222C63F5DA}</a:tableStyleId>
+              </a:tblPr>
+              <a:tblGrid>
+                <a:gridCol w="2438400">
+                  <a:extLst>
+                    <a:ext uri="{9D8B030D-6E8A-4147-A177-3AD203B41FA5}">
+                      <a16:colId xmlns:a16="http://schemas.microsoft.com/office/drawing/2014/main" val="20000"/>
+                    </a:ext>
+                  </a:extLst>
+                </a:gridCol>
+                <a:gridCol w="6019800">
+                  <a:extLst>
+                    <a:ext uri="{9D8B030D-6E8A-4147-A177-3AD203B41FA5}">
+                      <a16:colId xmlns:a16="http://schemas.microsoft.com/office/drawing/2014/main" val="20001"/>
+                    </a:ext>
+                  </a:extLst>
+                </a:gridCol>
+              </a:tblGrid>
+              <a:tr h="217369">
+                <a:tc>
+                  <a:txBody>
+                    <a:bodyPr/>
+                    <a:lstStyle/>
+                    <a:p>
+                      <a:pPr marL="0" marR="0" algn="just">
+                        <a:spcBef>
+                          <a:spcPts val="0"/>
+                        </a:spcBef>
+                        <a:spcAft>
+                          <a:spcPts val="0"/>
+                        </a:spcAft>
+                      </a:pPr>
+                      <a:r>
+                        <a:rPr lang="en-US" sz="1600" dirty="0">
+                          <a:solidFill>
+                            <a:schemeClr val="bg1"/>
+                          </a:solidFill>
+                          <a:effectLst/>
+                          <a:latin typeface="Consolas" panose="020B0609020204030204" pitchFamily="49" charset="0"/>
+                          <a:cs typeface="Consolas" panose="020B0609020204030204" pitchFamily="49" charset="0"/>
+                        </a:rPr>
+                        <a:t>C Program</a:t>
+                      </a:r>
+                      <a:endParaRPr lang="en-US" sz="1600" dirty="0">
+                        <a:solidFill>
+                          <a:schemeClr val="bg1"/>
+                        </a:solidFill>
+                        <a:effectLst/>
+                        <a:latin typeface="Consolas" panose="020B0609020204030204" pitchFamily="49" charset="0"/>
+                        <a:ea typeface="宋体"/>
+                        <a:cs typeface="Consolas" panose="020B0609020204030204" pitchFamily="49" charset="0"/>
+                      </a:endParaRPr>
+                    </a:p>
+                  </a:txBody>
+                  <a:tcPr marL="68580" marR="68580" marT="0" marB="0">
+                    <a:solidFill>
+                      <a:schemeClr val="accent1"/>
+                    </a:solidFill>
+                  </a:tcPr>
+                </a:tc>
+                <a:tc>
+                  <a:txBody>
+                    <a:bodyPr/>
+                    <a:lstStyle/>
+                    <a:p>
+                      <a:pPr marL="0" marR="0" algn="just">
+                        <a:spcBef>
+                          <a:spcPts val="0"/>
+                        </a:spcBef>
+                        <a:spcAft>
+                          <a:spcPts val="0"/>
+                        </a:spcAft>
+                      </a:pPr>
+                      <a:r>
+                        <a:rPr lang="en-US" sz="1600" dirty="0">
+                          <a:solidFill>
+                            <a:schemeClr val="bg1"/>
+                          </a:solidFill>
+                          <a:effectLst/>
+                          <a:latin typeface="Consolas" panose="020B0609020204030204" pitchFamily="49" charset="0"/>
+                          <a:cs typeface="Consolas" panose="020B0609020204030204" pitchFamily="49" charset="0"/>
+                        </a:rPr>
+                        <a:t>Assembly Program </a:t>
+                      </a:r>
+                      <a:endParaRPr lang="en-US" sz="1600" dirty="0">
+                        <a:solidFill>
+                          <a:schemeClr val="bg1"/>
+                        </a:solidFill>
+                        <a:effectLst/>
+                        <a:latin typeface="Consolas" panose="020B0609020204030204" pitchFamily="49" charset="0"/>
+                        <a:ea typeface="宋体"/>
+                        <a:cs typeface="Consolas" panose="020B0609020204030204" pitchFamily="49" charset="0"/>
+                      </a:endParaRPr>
+                    </a:p>
+                  </a:txBody>
+                  <a:tcPr marL="68580" marR="68580" marT="0" marB="0">
+                    <a:solidFill>
+                      <a:schemeClr val="accent1"/>
+                    </a:solidFill>
+                  </a:tcPr>
+                </a:tc>
+                <a:extLst>
+                  <a:ext uri="{0D108BD9-81ED-4DB2-BD59-A6C34878D82A}">
+                    <a16:rowId xmlns:a16="http://schemas.microsoft.com/office/drawing/2014/main" val="10000"/>
+                  </a:ext>
+                </a:extLst>
+              </a:tr>
+              <a:tr h="773230">
+                <a:tc>
+                  <a:txBody>
+                    <a:bodyPr/>
+                    <a:lstStyle/>
+                    <a:p>
+                      <a:r>
+                        <a:rPr lang="nn-NO" sz="1600" b="0" dirty="0">
+                          <a:effectLst/>
+                          <a:latin typeface="Consolas" panose="020B0609020204030204" pitchFamily="49" charset="0"/>
+                          <a:ea typeface="宋体"/>
+                          <a:cs typeface="Consolas" panose="020B0609020204030204" pitchFamily="49" charset="0"/>
+                        </a:rPr>
+                        <a:t>int i;</a:t>
+                      </a:r>
+                    </a:p>
+                    <a:p>
+                      <a:r>
+                        <a:rPr lang="nn-NO" sz="1600" b="0" dirty="0">
+                          <a:effectLst/>
+                          <a:latin typeface="Consolas" panose="020B0609020204030204" pitchFamily="49" charset="0"/>
+                          <a:ea typeface="宋体"/>
+                          <a:cs typeface="Consolas" panose="020B0609020204030204" pitchFamily="49" charset="0"/>
+                        </a:rPr>
+                        <a:t>int sum = 0;</a:t>
+                      </a:r>
+                    </a:p>
+                    <a:p>
+                      <a:r>
+                        <a:rPr lang="nn-NO" sz="1600" b="0" dirty="0">
+                          <a:effectLst/>
+                          <a:latin typeface="Consolas" panose="020B0609020204030204" pitchFamily="49" charset="0"/>
+                          <a:ea typeface="宋体"/>
+                          <a:cs typeface="Consolas" panose="020B0609020204030204" pitchFamily="49" charset="0"/>
+                        </a:rPr>
+                        <a:t>for (i = </a:t>
+                      </a:r>
+                      <a:r>
+                        <a:rPr lang="en-US" altLang="zh-CN" sz="1600" b="0" dirty="0">
+                          <a:effectLst/>
+                          <a:latin typeface="Consolas" panose="020B0609020204030204" pitchFamily="49" charset="0"/>
+                          <a:ea typeface="宋体"/>
+                          <a:cs typeface="Consolas" panose="020B0609020204030204" pitchFamily="49" charset="0"/>
+                        </a:rPr>
+                        <a:t>1</a:t>
+                      </a:r>
+                      <a:r>
+                        <a:rPr lang="nn-NO" sz="1600" b="0" dirty="0">
+                          <a:effectLst/>
+                          <a:latin typeface="Consolas" panose="020B0609020204030204" pitchFamily="49" charset="0"/>
+                          <a:ea typeface="宋体"/>
+                          <a:cs typeface="Consolas" panose="020B0609020204030204" pitchFamily="49" charset="0"/>
+                        </a:rPr>
+                        <a:t>; i &lt;</a:t>
+                      </a:r>
+                      <a:r>
+                        <a:rPr lang="en-US" sz="1600" b="0" dirty="0">
+                          <a:effectLst/>
+                          <a:latin typeface="Consolas" panose="020B0609020204030204" pitchFamily="49" charset="0"/>
+                          <a:ea typeface="宋体"/>
+                          <a:cs typeface="Consolas" panose="020B0609020204030204" pitchFamily="49" charset="0"/>
+                        </a:rPr>
+                        <a:t>=</a:t>
+                      </a:r>
+                      <a:r>
+                        <a:rPr lang="nn-NO" sz="1600" b="0" dirty="0">
+                          <a:effectLst/>
+                          <a:latin typeface="Consolas" panose="020B0609020204030204" pitchFamily="49" charset="0"/>
+                          <a:ea typeface="宋体"/>
+                          <a:cs typeface="Consolas" panose="020B0609020204030204" pitchFamily="49" charset="0"/>
+                        </a:rPr>
+                        <a:t> 22; i++)</a:t>
+                      </a:r>
+                    </a:p>
+                    <a:p>
+                      <a:r>
+                        <a:rPr lang="nn-NO" sz="1600" b="0" dirty="0">
+                          <a:effectLst/>
+                          <a:latin typeface="Consolas" panose="020B0609020204030204" pitchFamily="49" charset="0"/>
+                          <a:ea typeface="宋体"/>
+                          <a:cs typeface="Consolas" panose="020B0609020204030204" pitchFamily="49" charset="0"/>
+                        </a:rPr>
+                        <a:t>  sum += i;</a:t>
+                      </a:r>
+                      <a:endParaRPr lang="en-US" sz="1600" b="0" dirty="0">
+                        <a:effectLst/>
+                        <a:latin typeface="Consolas" panose="020B0609020204030204" pitchFamily="49" charset="0"/>
+                        <a:ea typeface="宋体"/>
+                        <a:cs typeface="Consolas" panose="020B0609020204030204" pitchFamily="49" charset="0"/>
+                      </a:endParaRPr>
+                    </a:p>
+                  </a:txBody>
+                  <a:tcPr marL="68580" marR="68580" marT="0" marB="0"/>
+                </a:tc>
+                <a:tc>
+                  <a:txBody>
+                    <a:bodyPr/>
+                    <a:lstStyle/>
+                    <a:p>
+                      <a:pPr marL="0" marR="0" algn="just">
+                        <a:spcBef>
+                          <a:spcPts val="0"/>
+                        </a:spcBef>
+                        <a:spcAft>
+                          <a:spcPts val="0"/>
+                        </a:spcAft>
+                      </a:pPr>
+                      <a:endParaRPr lang="pt-BR" sz="1600" i="0" dirty="0">
+                        <a:effectLst/>
+                        <a:latin typeface="Consolas" panose="020B0609020204030204" pitchFamily="49" charset="0"/>
+                        <a:cs typeface="Consolas" panose="020B0609020204030204" pitchFamily="49" charset="0"/>
+                      </a:endParaRPr>
+                    </a:p>
+                  </a:txBody>
+                  <a:tcPr marL="68580" marR="68580" marT="0" marB="0"/>
+                </a:tc>
+                <a:extLst>
+                  <a:ext uri="{0D108BD9-81ED-4DB2-BD59-A6C34878D82A}">
+                    <a16:rowId xmlns:a16="http://schemas.microsoft.com/office/drawing/2014/main" val="10001"/>
+                  </a:ext>
+                </a:extLst>
+              </a:tr>
+            </a:tbl>
+          </a:graphicData>
+        </a:graphic>
+      </p:graphicFrame>
+    </p:spTree>
+    <p:extLst>
+      <p:ext uri="{BB962C8B-B14F-4D97-AF65-F5344CB8AC3E}">
+        <p14:creationId xmlns:p14="http://schemas.microsoft.com/office/powerpoint/2010/main" val="2076517291"/>
+      </p:ext>
+    </p:extLst>
+  </p:cSld>
+  <p:clrMapOvr>
+    <a:masterClrMapping/>
+  </p:clrMapOvr>
+</p:sld>
+</file>
+
+<file path=ppt/slides/slide25.xml><?xml version="1.0" encoding="utf-8"?>
+<p:sld xmlns:a="http://schemas.openxmlformats.org/drawingml/2006/main" xmlns:r="http://schemas.openxmlformats.org/officeDocument/2006/relationships" xmlns:p="http://schemas.openxmlformats.org/presentationml/2006/main">
+  <p:cSld>
+    <p:spTree>
+      <p:nvGrpSpPr>
+        <p:cNvPr id="1" name="">
+          <a:extLst>
+            <a:ext uri="{FF2B5EF4-FFF2-40B4-BE49-F238E27FC236}">
+              <a16:creationId xmlns:a16="http://schemas.microsoft.com/office/drawing/2014/main" id="{C8941461-8515-067B-55F4-32C107B5E08A}"/>
+            </a:ext>
+          </a:extLst>
+        </p:cNvPr>
+        <p:cNvGrpSpPr/>
+        <p:nvPr/>
+      </p:nvGrpSpPr>
+      <p:grpSpPr>
+        <a:xfrm>
+          <a:off x="0" y="0"/>
+          <a:ext cx="0" cy="0"/>
+          <a:chOff x="0" y="0"/>
+          <a:chExt cx="0" cy="0"/>
+        </a:xfrm>
+      </p:grpSpPr>
+      <p:sp>
+        <p:nvSpPr>
+          <p:cNvPr id="2" name="Title 1">
+            <a:extLst>
+              <a:ext uri="{FF2B5EF4-FFF2-40B4-BE49-F238E27FC236}">
+                <a16:creationId xmlns:a16="http://schemas.microsoft.com/office/drawing/2014/main" id="{369A4E9F-FC0A-B769-C493-7D11B617207F}"/>
+              </a:ext>
+            </a:extLst>
+          </p:cNvPr>
+          <p:cNvSpPr>
+            <a:spLocks noGrp="1"/>
+          </p:cNvSpPr>
+          <p:nvPr>
+            <p:ph type="title"/>
+          </p:nvPr>
+        </p:nvSpPr>
+        <p:spPr/>
+        <p:txBody>
+          <a:bodyPr/>
+          <a:lstStyle/>
+          <a:p>
+            <a:r>
+              <a:rPr lang="en-US" dirty="0"/>
+              <a:t>C to Assembly ANS </a:t>
+            </a:r>
+          </a:p>
+        </p:txBody>
+      </p:sp>
+      <p:graphicFrame>
+        <p:nvGraphicFramePr>
+          <p:cNvPr id="5" name="Table 4">
+            <a:extLst>
+              <a:ext uri="{FF2B5EF4-FFF2-40B4-BE49-F238E27FC236}">
+                <a16:creationId xmlns:a16="http://schemas.microsoft.com/office/drawing/2014/main" id="{6D8366BD-4DE5-0E68-4E8C-960C4C8810E9}"/>
+              </a:ext>
+            </a:extLst>
+          </p:cNvPr>
+          <p:cNvGraphicFramePr>
+            <a:graphicFrameLocks noGrp="1"/>
+          </p:cNvGraphicFramePr>
+          <p:nvPr>
+            <p:extLst>
+              <p:ext uri="{D42A27DB-BD31-4B8C-83A1-F6EECF244321}">
+                <p14:modId xmlns:p14="http://schemas.microsoft.com/office/powerpoint/2010/main" val="2193847100"/>
+              </p:ext>
+            </p:extLst>
+          </p:nvPr>
+        </p:nvGraphicFramePr>
+        <p:xfrm>
+          <a:off x="457200" y="1143000"/>
+          <a:ext cx="8458200" cy="2438400"/>
+        </p:xfrm>
+        <a:graphic>
+          <a:graphicData uri="http://schemas.openxmlformats.org/drawingml/2006/table">
+            <a:tbl>
+              <a:tblPr firstRow="1" firstCol="1" bandRow="1">
+                <a:tableStyleId>{5940675A-B579-460E-94D1-54222C63F5DA}</a:tableStyleId>
+              </a:tblPr>
+              <a:tblGrid>
+                <a:gridCol w="2438400">
+                  <a:extLst>
+                    <a:ext uri="{9D8B030D-6E8A-4147-A177-3AD203B41FA5}">
+                      <a16:colId xmlns:a16="http://schemas.microsoft.com/office/drawing/2014/main" val="20000"/>
+                    </a:ext>
+                  </a:extLst>
+                </a:gridCol>
+                <a:gridCol w="6019800">
+                  <a:extLst>
+                    <a:ext uri="{9D8B030D-6E8A-4147-A177-3AD203B41FA5}">
+                      <a16:colId xmlns:a16="http://schemas.microsoft.com/office/drawing/2014/main" val="20001"/>
+                    </a:ext>
+                  </a:extLst>
+                </a:gridCol>
+              </a:tblGrid>
+              <a:tr h="217369">
+                <a:tc>
+                  <a:txBody>
+                    <a:bodyPr/>
+                    <a:lstStyle/>
+                    <a:p>
+                      <a:pPr marL="0" marR="0" algn="just">
+                        <a:spcBef>
+                          <a:spcPts val="0"/>
+                        </a:spcBef>
+                        <a:spcAft>
+                          <a:spcPts val="0"/>
+                        </a:spcAft>
+                      </a:pPr>
+                      <a:r>
+                        <a:rPr lang="en-US" sz="1600" dirty="0">
+                          <a:solidFill>
+                            <a:schemeClr val="bg1"/>
+                          </a:solidFill>
+                          <a:effectLst/>
+                          <a:latin typeface="Consolas" panose="020B0609020204030204" pitchFamily="49" charset="0"/>
+                          <a:cs typeface="Consolas" panose="020B0609020204030204" pitchFamily="49" charset="0"/>
+                        </a:rPr>
+                        <a:t>C Program</a:t>
+                      </a:r>
+                      <a:endParaRPr lang="en-US" sz="1600" dirty="0">
+                        <a:solidFill>
+                          <a:schemeClr val="bg1"/>
+                        </a:solidFill>
+                        <a:effectLst/>
+                        <a:latin typeface="Consolas" panose="020B0609020204030204" pitchFamily="49" charset="0"/>
+                        <a:ea typeface="宋体"/>
+                        <a:cs typeface="Consolas" panose="020B0609020204030204" pitchFamily="49" charset="0"/>
+                      </a:endParaRPr>
+                    </a:p>
+                  </a:txBody>
+                  <a:tcPr marL="68580" marR="68580" marT="0" marB="0">
+                    <a:solidFill>
+                      <a:schemeClr val="accent1"/>
+                    </a:solidFill>
+                  </a:tcPr>
+                </a:tc>
+                <a:tc>
+                  <a:txBody>
+                    <a:bodyPr/>
+                    <a:lstStyle/>
+                    <a:p>
+                      <a:pPr marL="0" marR="0" algn="just">
+                        <a:spcBef>
+                          <a:spcPts val="0"/>
+                        </a:spcBef>
+                        <a:spcAft>
+                          <a:spcPts val="0"/>
+                        </a:spcAft>
+                      </a:pPr>
+                      <a:r>
+                        <a:rPr lang="en-US" sz="1600" dirty="0">
+                          <a:solidFill>
+                            <a:schemeClr val="bg1"/>
+                          </a:solidFill>
+                          <a:effectLst/>
+                          <a:latin typeface="Consolas" panose="020B0609020204030204" pitchFamily="49" charset="0"/>
+                          <a:cs typeface="Consolas" panose="020B0609020204030204" pitchFamily="49" charset="0"/>
+                        </a:rPr>
+                        <a:t>Assembly Program 1</a:t>
+                      </a:r>
+                      <a:endParaRPr lang="en-US" sz="1600" dirty="0">
+                        <a:solidFill>
+                          <a:schemeClr val="bg1"/>
+                        </a:solidFill>
+                        <a:effectLst/>
+                        <a:latin typeface="Consolas" panose="020B0609020204030204" pitchFamily="49" charset="0"/>
+                        <a:ea typeface="宋体"/>
+                        <a:cs typeface="Consolas" panose="020B0609020204030204" pitchFamily="49" charset="0"/>
+                      </a:endParaRPr>
+                    </a:p>
+                  </a:txBody>
+                  <a:tcPr marL="68580" marR="68580" marT="0" marB="0">
+                    <a:solidFill>
+                      <a:schemeClr val="accent1"/>
+                    </a:solidFill>
+                  </a:tcPr>
+                </a:tc>
+                <a:extLst>
+                  <a:ext uri="{0D108BD9-81ED-4DB2-BD59-A6C34878D82A}">
+                    <a16:rowId xmlns:a16="http://schemas.microsoft.com/office/drawing/2014/main" val="10000"/>
+                  </a:ext>
+                </a:extLst>
+              </a:tr>
+              <a:tr h="773230">
+                <a:tc>
+                  <a:txBody>
+                    <a:bodyPr/>
+                    <a:lstStyle/>
+                    <a:p>
+                      <a:r>
+                        <a:rPr lang="nn-NO" sz="1600" b="0" dirty="0">
+                          <a:effectLst/>
+                          <a:latin typeface="Consolas" panose="020B0609020204030204" pitchFamily="49" charset="0"/>
+                          <a:ea typeface="宋体"/>
+                          <a:cs typeface="Consolas" panose="020B0609020204030204" pitchFamily="49" charset="0"/>
+                        </a:rPr>
+                        <a:t>int i;</a:t>
+                      </a:r>
+                    </a:p>
+                    <a:p>
+                      <a:r>
+                        <a:rPr lang="nn-NO" sz="1600" b="0" dirty="0">
+                          <a:effectLst/>
+                          <a:latin typeface="Consolas" panose="020B0609020204030204" pitchFamily="49" charset="0"/>
+                          <a:ea typeface="宋体"/>
+                          <a:cs typeface="Consolas" panose="020B0609020204030204" pitchFamily="49" charset="0"/>
+                        </a:rPr>
+                        <a:t>int sum = 0;</a:t>
+                      </a:r>
+                    </a:p>
+                    <a:p>
+                      <a:r>
+                        <a:rPr lang="nn-NO" sz="1600" b="0" dirty="0">
+                          <a:effectLst/>
+                          <a:latin typeface="Consolas" panose="020B0609020204030204" pitchFamily="49" charset="0"/>
+                          <a:ea typeface="宋体"/>
+                          <a:cs typeface="Consolas" panose="020B0609020204030204" pitchFamily="49" charset="0"/>
+                        </a:rPr>
+                        <a:t>for (i = </a:t>
+                      </a:r>
+                      <a:r>
+                        <a:rPr lang="en-US" altLang="zh-CN" sz="1600" b="0" dirty="0">
+                          <a:effectLst/>
+                          <a:latin typeface="Consolas" panose="020B0609020204030204" pitchFamily="49" charset="0"/>
+                          <a:ea typeface="宋体"/>
+                          <a:cs typeface="Consolas" panose="020B0609020204030204" pitchFamily="49" charset="0"/>
+                        </a:rPr>
+                        <a:t>1</a:t>
+                      </a:r>
+                      <a:r>
+                        <a:rPr lang="nn-NO" sz="1600" b="0" dirty="0">
+                          <a:effectLst/>
+                          <a:latin typeface="Consolas" panose="020B0609020204030204" pitchFamily="49" charset="0"/>
+                          <a:ea typeface="宋体"/>
+                          <a:cs typeface="Consolas" panose="020B0609020204030204" pitchFamily="49" charset="0"/>
+                        </a:rPr>
+                        <a:t>; i &lt;</a:t>
+                      </a:r>
+                      <a:r>
+                        <a:rPr lang="en-US" sz="1600" b="0" dirty="0">
+                          <a:effectLst/>
+                          <a:latin typeface="Consolas" panose="020B0609020204030204" pitchFamily="49" charset="0"/>
+                          <a:ea typeface="宋体"/>
+                          <a:cs typeface="Consolas" panose="020B0609020204030204" pitchFamily="49" charset="0"/>
+                        </a:rPr>
+                        <a:t>=</a:t>
+                      </a:r>
+                      <a:r>
+                        <a:rPr lang="nn-NO" sz="1600" b="0" dirty="0">
+                          <a:effectLst/>
+                          <a:latin typeface="Consolas" panose="020B0609020204030204" pitchFamily="49" charset="0"/>
+                          <a:ea typeface="宋体"/>
+                          <a:cs typeface="Consolas" panose="020B0609020204030204" pitchFamily="49" charset="0"/>
+                        </a:rPr>
+                        <a:t> 22; i++)</a:t>
+                      </a:r>
+                    </a:p>
+                    <a:p>
+                      <a:r>
+                        <a:rPr lang="nn-NO" sz="1600" b="0" dirty="0">
+                          <a:effectLst/>
+                          <a:latin typeface="Consolas" panose="020B0609020204030204" pitchFamily="49" charset="0"/>
+                          <a:ea typeface="宋体"/>
+                          <a:cs typeface="Consolas" panose="020B0609020204030204" pitchFamily="49" charset="0"/>
+                        </a:rPr>
+                        <a:t>  sum += i;</a:t>
+                      </a:r>
+                      <a:endParaRPr lang="en-US" sz="1600" b="0" dirty="0">
+                        <a:effectLst/>
+                        <a:latin typeface="Consolas" panose="020B0609020204030204" pitchFamily="49" charset="0"/>
+                        <a:ea typeface="宋体"/>
+                        <a:cs typeface="Consolas" panose="020B0609020204030204" pitchFamily="49" charset="0"/>
+                      </a:endParaRPr>
+                    </a:p>
+                  </a:txBody>
+                  <a:tcPr marL="68580" marR="68580" marT="0" marB="0"/>
+                </a:tc>
+                <a:tc>
+                  <a:txBody>
+                    <a:bodyPr/>
+                    <a:lstStyle/>
+                    <a:p>
+                      <a:pPr marL="0" marR="0" algn="just">
+                        <a:spcBef>
+                          <a:spcPts val="0"/>
+                        </a:spcBef>
+                        <a:spcAft>
+                          <a:spcPts val="0"/>
+                        </a:spcAft>
+                      </a:pPr>
+                      <a:r>
+                        <a:rPr lang="pt-BR" sz="1600" i="0" dirty="0">
+                          <a:effectLst/>
+                          <a:latin typeface="Consolas" panose="020B0609020204030204" pitchFamily="49" charset="0"/>
+                          <a:cs typeface="Consolas" panose="020B0609020204030204" pitchFamily="49" charset="0"/>
+                        </a:rPr>
+                        <a:t>    mov r1, #0       /* r1 ← 0 */</a:t>
+                      </a:r>
+                    </a:p>
+                    <a:p>
+                      <a:pPr marL="0" marR="0" algn="just">
+                        <a:spcBef>
+                          <a:spcPts val="0"/>
+                        </a:spcBef>
+                        <a:spcAft>
+                          <a:spcPts val="0"/>
+                        </a:spcAft>
+                      </a:pPr>
+                      <a:r>
+                        <a:rPr lang="pt-BR" sz="1600" i="0" dirty="0">
+                          <a:effectLst/>
+                          <a:latin typeface="Consolas" panose="020B0609020204030204" pitchFamily="49" charset="0"/>
+                          <a:cs typeface="Consolas" panose="020B0609020204030204" pitchFamily="49" charset="0"/>
+                        </a:rPr>
+                        <a:t>    mov r2, #1       /* r2 ← 1 */</a:t>
+                      </a:r>
+                    </a:p>
+                    <a:p>
+                      <a:pPr marL="0" marR="0" algn="just">
+                        <a:spcBef>
+                          <a:spcPts val="0"/>
+                        </a:spcBef>
+                        <a:spcAft>
+                          <a:spcPts val="0"/>
+                        </a:spcAft>
+                      </a:pPr>
+                      <a:r>
+                        <a:rPr lang="pt-BR" sz="1600" i="0" dirty="0">
+                          <a:effectLst/>
+                          <a:latin typeface="Consolas" panose="020B0609020204030204" pitchFamily="49" charset="0"/>
+                          <a:cs typeface="Consolas" panose="020B0609020204030204" pitchFamily="49" charset="0"/>
+                        </a:rPr>
+                        <a:t>loop: </a:t>
+                      </a:r>
+                    </a:p>
+                    <a:p>
+                      <a:pPr marL="0" marR="0" algn="just">
+                        <a:spcBef>
+                          <a:spcPts val="0"/>
+                        </a:spcBef>
+                        <a:spcAft>
+                          <a:spcPts val="0"/>
+                        </a:spcAft>
+                      </a:pPr>
+                      <a:r>
+                        <a:rPr lang="pt-BR" sz="1600" i="0" dirty="0">
+                          <a:effectLst/>
+                          <a:latin typeface="Consolas" panose="020B0609020204030204" pitchFamily="49" charset="0"/>
+                          <a:cs typeface="Consolas" panose="020B0609020204030204" pitchFamily="49" charset="0"/>
+                        </a:rPr>
+                        <a:t>    cmp r2, #22      /* compare r2 and 22 */</a:t>
+                      </a:r>
+                    </a:p>
+                    <a:p>
+                      <a:pPr marL="0" marR="0" algn="just">
+                        <a:spcBef>
+                          <a:spcPts val="0"/>
+                        </a:spcBef>
+                        <a:spcAft>
+                          <a:spcPts val="0"/>
+                        </a:spcAft>
+                      </a:pPr>
+                      <a:r>
+                        <a:rPr lang="pt-BR" sz="1600" i="0" dirty="0">
+                          <a:effectLst/>
+                          <a:latin typeface="Consolas" panose="020B0609020204030204" pitchFamily="49" charset="0"/>
+                          <a:cs typeface="Consolas" panose="020B0609020204030204" pitchFamily="49" charset="0"/>
+                        </a:rPr>
+                        <a:t>    bgt end          /* branch if r2 &gt; 22 to end */</a:t>
+                      </a:r>
+                    </a:p>
+                    <a:p>
+                      <a:pPr marL="0" marR="0" algn="just">
+                        <a:spcBef>
+                          <a:spcPts val="0"/>
+                        </a:spcBef>
+                        <a:spcAft>
+                          <a:spcPts val="0"/>
+                        </a:spcAft>
+                      </a:pPr>
+                      <a:r>
+                        <a:rPr lang="pt-BR" sz="1600" i="0" dirty="0">
+                          <a:effectLst/>
+                          <a:latin typeface="Consolas" panose="020B0609020204030204" pitchFamily="49" charset="0"/>
+                          <a:cs typeface="Consolas" panose="020B0609020204030204" pitchFamily="49" charset="0"/>
+                        </a:rPr>
+                        <a:t>    add r1, r1, r2   /* r1 ← r1 + r2 */</a:t>
+                      </a:r>
+                    </a:p>
+                    <a:p>
+                      <a:pPr marL="0" marR="0" algn="just">
+                        <a:spcBef>
+                          <a:spcPts val="0"/>
+                        </a:spcBef>
+                        <a:spcAft>
+                          <a:spcPts val="0"/>
+                        </a:spcAft>
+                      </a:pPr>
+                      <a:r>
+                        <a:rPr lang="pt-BR" sz="1600" i="0" dirty="0">
+                          <a:effectLst/>
+                          <a:latin typeface="Consolas" panose="020B0609020204030204" pitchFamily="49" charset="0"/>
+                          <a:cs typeface="Consolas" panose="020B0609020204030204" pitchFamily="49" charset="0"/>
+                        </a:rPr>
+                        <a:t>    add r2, r2, #1   /* r2 ← r2 + 1 */</a:t>
+                      </a:r>
+                    </a:p>
+                    <a:p>
+                      <a:pPr marL="0" marR="0" algn="just">
+                        <a:spcBef>
+                          <a:spcPts val="0"/>
+                        </a:spcBef>
+                        <a:spcAft>
+                          <a:spcPts val="0"/>
+                        </a:spcAft>
+                      </a:pPr>
+                      <a:r>
+                        <a:rPr lang="pt-BR" sz="1600" i="0" dirty="0">
+                          <a:effectLst/>
+                          <a:latin typeface="Consolas" panose="020B0609020204030204" pitchFamily="49" charset="0"/>
+                          <a:cs typeface="Consolas" panose="020B0609020204030204" pitchFamily="49" charset="0"/>
+                        </a:rPr>
+                        <a:t>    b loop</a:t>
+                      </a:r>
+                    </a:p>
+                    <a:p>
+                      <a:pPr marL="0" marR="0" algn="just">
+                        <a:spcBef>
+                          <a:spcPts val="0"/>
+                        </a:spcBef>
+                        <a:spcAft>
+                          <a:spcPts val="0"/>
+                        </a:spcAft>
+                      </a:pPr>
+                      <a:r>
+                        <a:rPr lang="pt-BR" sz="1600" i="0" dirty="0">
+                          <a:effectLst/>
+                          <a:latin typeface="Consolas" panose="020B0609020204030204" pitchFamily="49" charset="0"/>
+                          <a:cs typeface="Consolas" panose="020B0609020204030204" pitchFamily="49" charset="0"/>
+                        </a:rPr>
+                        <a:t>end:</a:t>
+                      </a:r>
+                    </a:p>
+                  </a:txBody>
+                  <a:tcPr marL="68580" marR="68580" marT="0" marB="0"/>
+                </a:tc>
+                <a:extLst>
+                  <a:ext uri="{0D108BD9-81ED-4DB2-BD59-A6C34878D82A}">
+                    <a16:rowId xmlns:a16="http://schemas.microsoft.com/office/drawing/2014/main" val="10001"/>
+                  </a:ext>
+                </a:extLst>
+              </a:tr>
+            </a:tbl>
+          </a:graphicData>
+        </a:graphic>
+      </p:graphicFrame>
+      <p:graphicFrame>
+        <p:nvGraphicFramePr>
+          <p:cNvPr id="8" name="Table 7">
+            <a:extLst>
+              <a:ext uri="{FF2B5EF4-FFF2-40B4-BE49-F238E27FC236}">
+                <a16:creationId xmlns:a16="http://schemas.microsoft.com/office/drawing/2014/main" id="{4EFCA94F-BDFA-FAB8-7F7B-C145EFA53CC9}"/>
+              </a:ext>
+            </a:extLst>
+          </p:cNvPr>
+          <p:cNvGraphicFramePr>
+            <a:graphicFrameLocks noGrp="1"/>
+          </p:cNvGraphicFramePr>
+          <p:nvPr>
+            <p:extLst>
+              <p:ext uri="{D42A27DB-BD31-4B8C-83A1-F6EECF244321}">
+                <p14:modId xmlns:p14="http://schemas.microsoft.com/office/powerpoint/2010/main" val="2303050"/>
+              </p:ext>
+            </p:extLst>
+          </p:nvPr>
+        </p:nvGraphicFramePr>
+        <p:xfrm>
+          <a:off x="457200" y="3657600"/>
+          <a:ext cx="8458200" cy="3169920"/>
+        </p:xfrm>
+        <a:graphic>
+          <a:graphicData uri="http://schemas.openxmlformats.org/drawingml/2006/table">
+            <a:tbl>
+              <a:tblPr firstRow="1" firstCol="1" bandRow="1">
+                <a:tableStyleId>{5940675A-B579-460E-94D1-54222C63F5DA}</a:tableStyleId>
+              </a:tblPr>
+              <a:tblGrid>
+                <a:gridCol w="2438400">
+                  <a:extLst>
+                    <a:ext uri="{9D8B030D-6E8A-4147-A177-3AD203B41FA5}">
+                      <a16:colId xmlns:a16="http://schemas.microsoft.com/office/drawing/2014/main" val="20000"/>
+                    </a:ext>
+                  </a:extLst>
+                </a:gridCol>
+                <a:gridCol w="6019800">
+                  <a:extLst>
+                    <a:ext uri="{9D8B030D-6E8A-4147-A177-3AD203B41FA5}">
+                      <a16:colId xmlns:a16="http://schemas.microsoft.com/office/drawing/2014/main" val="20001"/>
+                    </a:ext>
+                  </a:extLst>
+                </a:gridCol>
+              </a:tblGrid>
+              <a:tr h="217369">
+                <a:tc>
+                  <a:txBody>
+                    <a:bodyPr/>
+                    <a:lstStyle/>
+                    <a:p>
+                      <a:pPr marL="0" marR="0" algn="just">
+                        <a:spcBef>
+                          <a:spcPts val="0"/>
+                        </a:spcBef>
+                        <a:spcAft>
+                          <a:spcPts val="0"/>
+                        </a:spcAft>
+                      </a:pPr>
+                      <a:r>
+                        <a:rPr lang="en-US" sz="1600" dirty="0">
+                          <a:solidFill>
+                            <a:schemeClr val="bg1"/>
+                          </a:solidFill>
+                          <a:effectLst/>
+                          <a:latin typeface="Consolas" panose="020B0609020204030204" pitchFamily="49" charset="0"/>
+                          <a:cs typeface="Consolas" panose="020B0609020204030204" pitchFamily="49" charset="0"/>
+                        </a:rPr>
+                        <a:t>C Program</a:t>
+                      </a:r>
+                      <a:endParaRPr lang="en-US" sz="1600" dirty="0">
+                        <a:solidFill>
+                          <a:schemeClr val="bg1"/>
+                        </a:solidFill>
+                        <a:effectLst/>
+                        <a:latin typeface="Consolas" panose="020B0609020204030204" pitchFamily="49" charset="0"/>
+                        <a:ea typeface="宋体"/>
+                        <a:cs typeface="Consolas" panose="020B0609020204030204" pitchFamily="49" charset="0"/>
+                      </a:endParaRPr>
+                    </a:p>
+                  </a:txBody>
+                  <a:tcPr marL="68580" marR="68580" marT="0" marB="0">
+                    <a:solidFill>
+                      <a:schemeClr val="accent1"/>
+                    </a:solidFill>
+                  </a:tcPr>
+                </a:tc>
+                <a:tc>
+                  <a:txBody>
+                    <a:bodyPr/>
+                    <a:lstStyle/>
+                    <a:p>
+                      <a:pPr marL="0" marR="0" algn="just">
+                        <a:spcBef>
+                          <a:spcPts val="0"/>
+                        </a:spcBef>
+                        <a:spcAft>
+                          <a:spcPts val="0"/>
+                        </a:spcAft>
+                      </a:pPr>
+                      <a:r>
+                        <a:rPr lang="en-US" sz="1600" dirty="0">
+                          <a:solidFill>
+                            <a:schemeClr val="bg1"/>
+                          </a:solidFill>
+                          <a:effectLst/>
+                          <a:latin typeface="Consolas" panose="020B0609020204030204" pitchFamily="49" charset="0"/>
+                          <a:cs typeface="Consolas" panose="020B0609020204030204" pitchFamily="49" charset="0"/>
+                        </a:rPr>
+                        <a:t>Assembly Program 2</a:t>
+                      </a:r>
+                      <a:endParaRPr lang="en-US" sz="1600" dirty="0">
+                        <a:solidFill>
+                          <a:schemeClr val="bg1"/>
+                        </a:solidFill>
+                        <a:effectLst/>
+                        <a:latin typeface="Consolas" panose="020B0609020204030204" pitchFamily="49" charset="0"/>
+                        <a:ea typeface="宋体"/>
+                        <a:cs typeface="Consolas" panose="020B0609020204030204" pitchFamily="49" charset="0"/>
+                      </a:endParaRPr>
+                    </a:p>
+                  </a:txBody>
+                  <a:tcPr marL="68580" marR="68580" marT="0" marB="0">
+                    <a:solidFill>
+                      <a:schemeClr val="accent1"/>
+                    </a:solidFill>
+                  </a:tcPr>
+                </a:tc>
+                <a:extLst>
+                  <a:ext uri="{0D108BD9-81ED-4DB2-BD59-A6C34878D82A}">
+                    <a16:rowId xmlns:a16="http://schemas.microsoft.com/office/drawing/2014/main" val="10000"/>
+                  </a:ext>
+                </a:extLst>
+              </a:tr>
+              <a:tr h="773230">
+                <a:tc>
+                  <a:txBody>
+                    <a:bodyPr/>
+                    <a:lstStyle/>
+                    <a:p>
+                      <a:r>
+                        <a:rPr lang="nn-NO" sz="1600" b="0" dirty="0">
+                          <a:effectLst/>
+                          <a:latin typeface="Consolas" panose="020B0609020204030204" pitchFamily="49" charset="0"/>
+                          <a:ea typeface="宋体"/>
+                          <a:cs typeface="Consolas" panose="020B0609020204030204" pitchFamily="49" charset="0"/>
+                        </a:rPr>
+                        <a:t>int i;</a:t>
+                      </a:r>
+                    </a:p>
+                    <a:p>
+                      <a:r>
+                        <a:rPr lang="nn-NO" sz="1600" b="0" dirty="0">
+                          <a:effectLst/>
+                          <a:latin typeface="Consolas" panose="020B0609020204030204" pitchFamily="49" charset="0"/>
+                          <a:ea typeface="宋体"/>
+                          <a:cs typeface="Consolas" panose="020B0609020204030204" pitchFamily="49" charset="0"/>
+                        </a:rPr>
+                        <a:t>int sum = 0;</a:t>
+                      </a:r>
+                    </a:p>
+                    <a:p>
+                      <a:r>
+                        <a:rPr lang="nn-NO" sz="1600" b="0" dirty="0">
+                          <a:effectLst/>
+                          <a:latin typeface="Consolas" panose="020B0609020204030204" pitchFamily="49" charset="0"/>
+                          <a:ea typeface="宋体"/>
+                          <a:cs typeface="Consolas" panose="020B0609020204030204" pitchFamily="49" charset="0"/>
+                        </a:rPr>
+                        <a:t>for (i = </a:t>
+                      </a:r>
+                      <a:r>
+                        <a:rPr lang="en-US" altLang="zh-CN" sz="1600" b="0" dirty="0">
+                          <a:effectLst/>
+                          <a:latin typeface="Consolas" panose="020B0609020204030204" pitchFamily="49" charset="0"/>
+                          <a:ea typeface="宋体"/>
+                          <a:cs typeface="Consolas" panose="020B0609020204030204" pitchFamily="49" charset="0"/>
+                        </a:rPr>
+                        <a:t>1</a:t>
+                      </a:r>
+                      <a:r>
+                        <a:rPr lang="nn-NO" sz="1600" b="0" dirty="0">
+                          <a:effectLst/>
+                          <a:latin typeface="Consolas" panose="020B0609020204030204" pitchFamily="49" charset="0"/>
+                          <a:ea typeface="宋体"/>
+                          <a:cs typeface="Consolas" panose="020B0609020204030204" pitchFamily="49" charset="0"/>
+                        </a:rPr>
+                        <a:t>; i &lt;</a:t>
+                      </a:r>
+                      <a:r>
+                        <a:rPr lang="en-US" sz="1600" b="0" dirty="0">
+                          <a:effectLst/>
+                          <a:latin typeface="Consolas" panose="020B0609020204030204" pitchFamily="49" charset="0"/>
+                          <a:ea typeface="宋体"/>
+                          <a:cs typeface="Consolas" panose="020B0609020204030204" pitchFamily="49" charset="0"/>
+                        </a:rPr>
+                        <a:t>=</a:t>
+                      </a:r>
+                      <a:r>
+                        <a:rPr lang="nn-NO" sz="1600" b="0" dirty="0">
+                          <a:effectLst/>
+                          <a:latin typeface="Consolas" panose="020B0609020204030204" pitchFamily="49" charset="0"/>
+                          <a:ea typeface="宋体"/>
+                          <a:cs typeface="Consolas" panose="020B0609020204030204" pitchFamily="49" charset="0"/>
+                        </a:rPr>
+                        <a:t> 22; i++)</a:t>
+                      </a:r>
+                    </a:p>
+                    <a:p>
+                      <a:r>
+                        <a:rPr lang="nn-NO" sz="1600" b="0" dirty="0">
+                          <a:effectLst/>
+                          <a:latin typeface="Consolas" panose="020B0609020204030204" pitchFamily="49" charset="0"/>
+                          <a:ea typeface="宋体"/>
+                          <a:cs typeface="Consolas" panose="020B0609020204030204" pitchFamily="49" charset="0"/>
+                        </a:rPr>
+                        <a:t>  sum += i;</a:t>
+                      </a:r>
+                      <a:endParaRPr lang="en-US" sz="1600" b="0" dirty="0">
+                        <a:effectLst/>
+                        <a:latin typeface="Consolas" panose="020B0609020204030204" pitchFamily="49" charset="0"/>
+                        <a:ea typeface="宋体"/>
+                        <a:cs typeface="Consolas" panose="020B0609020204030204" pitchFamily="49" charset="0"/>
+                      </a:endParaRPr>
+                    </a:p>
+                  </a:txBody>
+                  <a:tcPr marL="68580" marR="68580" marT="0" marB="0"/>
+                </a:tc>
+                <a:tc>
+                  <a:txBody>
+                    <a:bodyPr/>
+                    <a:lstStyle/>
+                    <a:p>
+                      <a:pPr marL="0" marR="0" algn="just">
+                        <a:spcBef>
+                          <a:spcPts val="0"/>
+                        </a:spcBef>
+                        <a:spcAft>
+                          <a:spcPts val="0"/>
+                        </a:spcAft>
+                      </a:pPr>
+                      <a:r>
+                        <a:rPr lang="pt-BR" sz="1600" i="0" dirty="0">
+                          <a:effectLst/>
+                          <a:latin typeface="Consolas" panose="020B0609020204030204" pitchFamily="49" charset="0"/>
+                          <a:cs typeface="Consolas" panose="020B0609020204030204" pitchFamily="49" charset="0"/>
+                        </a:rPr>
+                        <a:t>    mov r1, #0       /* r1 ← 0 */</a:t>
+                      </a:r>
+                    </a:p>
+                    <a:p>
+                      <a:pPr marL="0" marR="0" algn="just">
+                        <a:spcBef>
+                          <a:spcPts val="0"/>
+                        </a:spcBef>
+                        <a:spcAft>
+                          <a:spcPts val="0"/>
+                        </a:spcAft>
+                      </a:pPr>
+                      <a:r>
+                        <a:rPr lang="pt-BR" sz="1600" i="0" dirty="0">
+                          <a:effectLst/>
+                          <a:latin typeface="Consolas" panose="020B0609020204030204" pitchFamily="49" charset="0"/>
+                          <a:cs typeface="Consolas" panose="020B0609020204030204" pitchFamily="49" charset="0"/>
+                        </a:rPr>
+                        <a:t>    mov r2, #1       /* r2 ← 1 */</a:t>
+                      </a:r>
+                    </a:p>
+                    <a:p>
+                      <a:pPr marL="0" marR="0" algn="just">
+                        <a:spcBef>
+                          <a:spcPts val="0"/>
+                        </a:spcBef>
+                        <a:spcAft>
+                          <a:spcPts val="0"/>
+                        </a:spcAft>
+                      </a:pPr>
+                      <a:r>
+                        <a:rPr lang="pt-BR" sz="1600" i="0" dirty="0">
+                          <a:effectLst/>
+                          <a:latin typeface="Consolas" panose="020B0609020204030204" pitchFamily="49" charset="0"/>
+                          <a:cs typeface="Consolas" panose="020B0609020204030204" pitchFamily="49" charset="0"/>
+                        </a:rPr>
+                        <a:t>    b check_loop     /* unconditionally jump at the end of the loop */</a:t>
+                      </a:r>
+                    </a:p>
+                    <a:p>
+                      <a:pPr marL="0" marR="0" algn="just">
+                        <a:spcBef>
+                          <a:spcPts val="0"/>
+                        </a:spcBef>
+                        <a:spcAft>
+                          <a:spcPts val="0"/>
+                        </a:spcAft>
+                      </a:pPr>
+                      <a:r>
+                        <a:rPr lang="pt-BR" sz="1600" i="0" dirty="0">
+                          <a:effectLst/>
+                          <a:latin typeface="Consolas" panose="020B0609020204030204" pitchFamily="49" charset="0"/>
+                          <a:cs typeface="Consolas" panose="020B0609020204030204" pitchFamily="49" charset="0"/>
+                        </a:rPr>
+                        <a:t>loop: </a:t>
+                      </a:r>
+                    </a:p>
+                    <a:p>
+                      <a:pPr marL="0" marR="0" algn="just">
+                        <a:spcBef>
+                          <a:spcPts val="0"/>
+                        </a:spcBef>
+                        <a:spcAft>
+                          <a:spcPts val="0"/>
+                        </a:spcAft>
+                      </a:pPr>
+                      <a:r>
+                        <a:rPr lang="pt-BR" sz="1600" i="0" dirty="0">
+                          <a:effectLst/>
+                          <a:latin typeface="Consolas" panose="020B0609020204030204" pitchFamily="49" charset="0"/>
+                          <a:cs typeface="Consolas" panose="020B0609020204030204" pitchFamily="49" charset="0"/>
+                        </a:rPr>
+                        <a:t>    add r1, r1, r2   /* r1 ← r1 + r2 */</a:t>
+                      </a:r>
+                    </a:p>
+                    <a:p>
+                      <a:pPr marL="0" marR="0" algn="just">
+                        <a:spcBef>
+                          <a:spcPts val="0"/>
+                        </a:spcBef>
+                        <a:spcAft>
+                          <a:spcPts val="0"/>
+                        </a:spcAft>
+                      </a:pPr>
+                      <a:r>
+                        <a:rPr lang="pt-BR" sz="1600" i="0" dirty="0">
+                          <a:effectLst/>
+                          <a:latin typeface="Consolas" panose="020B0609020204030204" pitchFamily="49" charset="0"/>
+                          <a:cs typeface="Consolas" panose="020B0609020204030204" pitchFamily="49" charset="0"/>
+                        </a:rPr>
+                        <a:t>    add r2, r2, #1   /* r2 ← r2 + 1 */</a:t>
+                      </a:r>
+                    </a:p>
+                    <a:p>
+                      <a:pPr marL="0" marR="0" algn="just">
+                        <a:spcBef>
+                          <a:spcPts val="0"/>
+                        </a:spcBef>
+                        <a:spcAft>
+                          <a:spcPts val="0"/>
+                        </a:spcAft>
+                      </a:pPr>
+                      <a:r>
+                        <a:rPr lang="pt-BR" sz="1600" i="0" dirty="0">
+                          <a:effectLst/>
+                          <a:latin typeface="Consolas" panose="020B0609020204030204" pitchFamily="49" charset="0"/>
+                          <a:cs typeface="Consolas" panose="020B0609020204030204" pitchFamily="49" charset="0"/>
+                        </a:rPr>
+                        <a:t>check_loop:</a:t>
+                      </a:r>
+                    </a:p>
+                    <a:p>
+                      <a:pPr marL="0" marR="0" algn="just">
+                        <a:spcBef>
+                          <a:spcPts val="0"/>
+                        </a:spcBef>
+                        <a:spcAft>
+                          <a:spcPts val="0"/>
+                        </a:spcAft>
+                      </a:pPr>
+                      <a:r>
+                        <a:rPr lang="pt-BR" sz="1600" i="0" dirty="0">
+                          <a:effectLst/>
+                          <a:latin typeface="Consolas" panose="020B0609020204030204" pitchFamily="49" charset="0"/>
+                          <a:cs typeface="Consolas" panose="020B0609020204030204" pitchFamily="49" charset="0"/>
+                        </a:rPr>
+                        <a:t>    cmp r2, #22      /* compare r2 and 22 */</a:t>
+                      </a:r>
+                    </a:p>
+                    <a:p>
+                      <a:pPr marL="0" marR="0" algn="just">
+                        <a:spcBef>
+                          <a:spcPts val="0"/>
+                        </a:spcBef>
+                        <a:spcAft>
+                          <a:spcPts val="0"/>
+                        </a:spcAft>
+                      </a:pPr>
+                      <a:r>
+                        <a:rPr lang="pt-BR" sz="1600" i="0" dirty="0">
+                          <a:effectLst/>
+                          <a:latin typeface="Consolas" panose="020B0609020204030204" pitchFamily="49" charset="0"/>
+                          <a:cs typeface="Consolas" panose="020B0609020204030204" pitchFamily="49" charset="0"/>
+                        </a:rPr>
+                        <a:t>    ble loop     /* branch if r2 &lt;= 22 to the beginning of the loop */</a:t>
+                      </a:r>
+                    </a:p>
+                    <a:p>
+                      <a:pPr marL="0" marR="0" algn="just">
+                        <a:spcBef>
+                          <a:spcPts val="0"/>
+                        </a:spcBef>
+                        <a:spcAft>
+                          <a:spcPts val="0"/>
+                        </a:spcAft>
+                      </a:pPr>
+                      <a:r>
+                        <a:rPr lang="pt-BR" sz="1600" i="0" dirty="0">
+                          <a:effectLst/>
+                          <a:latin typeface="Consolas" panose="020B0609020204030204" pitchFamily="49" charset="0"/>
+                          <a:cs typeface="Consolas" panose="020B0609020204030204" pitchFamily="49" charset="0"/>
+                        </a:rPr>
+                        <a:t>end:</a:t>
+                      </a:r>
+                    </a:p>
+                  </a:txBody>
+                  <a:tcPr marL="68580" marR="68580" marT="0" marB="0"/>
+                </a:tc>
+                <a:extLst>
+                  <a:ext uri="{0D108BD9-81ED-4DB2-BD59-A6C34878D82A}">
+                    <a16:rowId xmlns:a16="http://schemas.microsoft.com/office/drawing/2014/main" val="10001"/>
+                  </a:ext>
+                </a:extLst>
+              </a:tr>
+            </a:tbl>
+          </a:graphicData>
+        </a:graphic>
+      </p:graphicFrame>
+    </p:spTree>
+    <p:extLst>
+      <p:ext uri="{BB962C8B-B14F-4D97-AF65-F5344CB8AC3E}">
+        <p14:creationId xmlns:p14="http://schemas.microsoft.com/office/powerpoint/2010/main" val="3309958526"/>
+      </p:ext>
+    </p:extLst>
+  </p:cSld>
+  <p:clrMapOvr>
+    <a:masterClrMapping/>
+  </p:clrMapOvr>
+</p:sld>
+</file>
+
+<file path=ppt/slides/slide26.xml><?xml version="1.0" encoding="utf-8"?>
+<p:sld xmlns:a="http://schemas.openxmlformats.org/drawingml/2006/main" xmlns:r="http://schemas.openxmlformats.org/officeDocument/2006/relationships" xmlns:p="http://schemas.openxmlformats.org/presentationml/2006/main">
+  <p:cSld>
+    <p:spTree>
+      <p:nvGrpSpPr>
+        <p:cNvPr id="1" name=""/>
+        <p:cNvGrpSpPr/>
+        <p:nvPr/>
+      </p:nvGrpSpPr>
+      <p:grpSpPr>
+        <a:xfrm>
+          <a:off x="0" y="0"/>
+          <a:ext cx="0" cy="0"/>
+          <a:chOff x="0" y="0"/>
+          <a:chExt cx="0" cy="0"/>
+        </a:xfrm>
+      </p:grpSpPr>
+      <p:sp>
+        <p:nvSpPr>
+          <p:cNvPr id="2" name="Title 1">
+            <a:extLst>
+              <a:ext uri="{FF2B5EF4-FFF2-40B4-BE49-F238E27FC236}">
+                <a16:creationId xmlns:a16="http://schemas.microsoft.com/office/drawing/2014/main" id="{D48EBFE7-7073-C68E-2006-9970D7D5223A}"/>
+              </a:ext>
+            </a:extLst>
+          </p:cNvPr>
+          <p:cNvSpPr>
+            <a:spLocks noGrp="1"/>
+          </p:cNvSpPr>
+          <p:nvPr>
+            <p:ph type="title"/>
+          </p:nvPr>
+        </p:nvSpPr>
+        <p:spPr/>
+        <p:txBody>
+          <a:bodyPr/>
+          <a:lstStyle/>
+          <a:p>
+            <a:r>
+              <a:rPr lang="en-US" dirty="0"/>
+              <a:t>C to Assembly ANS </a:t>
+            </a:r>
+          </a:p>
+        </p:txBody>
+      </p:sp>
+      <p:sp>
+        <p:nvSpPr>
+          <p:cNvPr id="3" name="Slide Number Placeholder 2">
+            <a:extLst>
+              <a:ext uri="{FF2B5EF4-FFF2-40B4-BE49-F238E27FC236}">
+                <a16:creationId xmlns:a16="http://schemas.microsoft.com/office/drawing/2014/main" id="{B6F34DAE-C88B-1E10-FF25-4C3EABEE4A50}"/>
+              </a:ext>
+            </a:extLst>
+          </p:cNvPr>
+          <p:cNvSpPr>
+            <a:spLocks noGrp="1"/>
+          </p:cNvSpPr>
+          <p:nvPr>
+            <p:ph type="sldNum" sz="quarter" idx="12"/>
+          </p:nvPr>
+        </p:nvSpPr>
+        <p:spPr/>
+        <p:txBody>
+          <a:bodyPr/>
+          <a:lstStyle/>
+          <a:p>
+            <a:fld id="{EA7C8D44-3667-46F6-9772-CC52308E2A7F}" type="slidenum">
+              <a:rPr kumimoji="0" lang="en-US" smtClean="0"/>
+              <a:pPr/>
+              <a:t>26</a:t>
+            </a:fld>
+            <a:endParaRPr kumimoji="0" lang="en-US" dirty="0"/>
+          </a:p>
+        </p:txBody>
+      </p:sp>
+      <p:sp>
+        <p:nvSpPr>
+          <p:cNvPr id="4" name="Content Placeholder 3">
+            <a:extLst>
+              <a:ext uri="{FF2B5EF4-FFF2-40B4-BE49-F238E27FC236}">
+                <a16:creationId xmlns:a16="http://schemas.microsoft.com/office/drawing/2014/main" id="{30D573E4-08C5-4EFD-D763-43D45C86FFE0}"/>
+              </a:ext>
+            </a:extLst>
+          </p:cNvPr>
+          <p:cNvSpPr>
+            <a:spLocks noGrp="1"/>
+          </p:cNvSpPr>
+          <p:nvPr>
+            <p:ph sz="quarter" idx="1"/>
+          </p:nvPr>
+        </p:nvSpPr>
+        <p:spPr/>
+        <p:txBody>
+          <a:bodyPr>
+            <a:normAutofit/>
+          </a:bodyPr>
+          <a:lstStyle/>
+          <a:p>
+            <a:r>
+              <a:rPr lang="en-US" dirty="0"/>
+              <a:t>Assembly Program 1:</a:t>
+            </a:r>
+          </a:p>
+          <a:p>
+            <a:pPr lvl="1"/>
+            <a:r>
+              <a:rPr lang="en-US" dirty="0"/>
+              <a:t>Two branches per iteration in the steady state: a conditional (</a:t>
+            </a:r>
+            <a:r>
+              <a:rPr lang="en-US" dirty="0" err="1"/>
+              <a:t>cmp</a:t>
+            </a:r>
+            <a:r>
+              <a:rPr lang="en-US" dirty="0"/>
+              <a:t> + </a:t>
+            </a:r>
+            <a:r>
+              <a:rPr lang="en-US" dirty="0" err="1"/>
+              <a:t>bgt</a:t>
+            </a:r>
+            <a:r>
+              <a:rPr lang="en-US" dirty="0"/>
+              <a:t>) and an unconditional b loop. That increases dynamic branch count.</a:t>
+            </a:r>
+          </a:p>
+          <a:p>
+            <a:r>
+              <a:rPr lang="en-US" dirty="0"/>
+              <a:t>Assembly Program 2:</a:t>
+            </a:r>
+          </a:p>
+          <a:p>
+            <a:pPr lvl="1"/>
+            <a:r>
+              <a:rPr lang="en-US" dirty="0"/>
+              <a:t>Only one conditional branch per iteration (the </a:t>
+            </a:r>
+            <a:r>
+              <a:rPr lang="en-US" dirty="0" err="1"/>
+              <a:t>ble</a:t>
+            </a:r>
+            <a:r>
+              <a:rPr lang="en-US" dirty="0"/>
+              <a:t>), after the body — fewer dynamic branches overall. In steady-state this is usually faster. </a:t>
+            </a:r>
+          </a:p>
+          <a:p>
+            <a:pPr lvl="1"/>
+            <a:r>
+              <a:rPr lang="en-US" dirty="0"/>
+              <a:t>Better steady-state throughput and fewer branch misprediction opportunities in hot loops (one backward taken conditional is a canonical, well-predicted pattern).</a:t>
+            </a:r>
+          </a:p>
+        </p:txBody>
+      </p:sp>
+    </p:spTree>
+    <p:extLst>
+      <p:ext uri="{BB962C8B-B14F-4D97-AF65-F5344CB8AC3E}">
+        <p14:creationId xmlns:p14="http://schemas.microsoft.com/office/powerpoint/2010/main" val="3501330246"/>
+      </p:ext>
+    </p:extLst>
+  </p:cSld>
+  <p:clrMapOvr>
+    <a:masterClrMapping/>
+  </p:clrMapOvr>
+</p:sld>
+</file>
+
+<file path=ppt/slides/slide27.xml><?xml version="1.0" encoding="utf-8"?>
+<p:sld xmlns:a="http://schemas.openxmlformats.org/drawingml/2006/main" xmlns:r="http://schemas.openxmlformats.org/officeDocument/2006/relationships" xmlns:p="http://schemas.openxmlformats.org/presentationml/2006/main">
+  <p:cSld>
+    <p:spTree>
+      <p:nvGrpSpPr>
         <p:cNvPr id="1" name=""/>
         <p:cNvGrpSpPr/>
         <p:nvPr/>
@@ -19186,7 +19449,7 @@
             <a:fld id="{EA7C8D44-3667-46F6-9772-CC52308E2A7F}" type="slidenum">
               <a:rPr kumimoji="0" lang="en-US" smtClean="0"/>
               <a:pPr/>
-              <a:t>24</a:t>
+              <a:t>27</a:t>
             </a:fld>
             <a:endParaRPr kumimoji="0" lang="en-US" dirty="0"/>
           </a:p>
@@ -19240,7 +19503,7 @@
 </p:sld>
 </file>
 
-<file path=ppt/slides/slide25.xml><?xml version="1.0" encoding="utf-8"?>
+<file path=ppt/slides/slide28.xml><?xml version="1.0" encoding="utf-8"?>
 <p:sld xmlns:a="http://schemas.openxmlformats.org/drawingml/2006/main" xmlns:r="http://schemas.openxmlformats.org/officeDocument/2006/relationships" xmlns:p="http://schemas.openxmlformats.org/presentationml/2006/main">
   <p:cSld>
     <p:spTree>
@@ -19315,7 +19578,7 @@
             <a:fld id="{EA7C8D44-3667-46F6-9772-CC52308E2A7F}" type="slidenum">
               <a:rPr kumimoji="0" lang="en-US" smtClean="0"/>
               <a:pPr/>
-              <a:t>25</a:t>
+              <a:t>28</a:t>
             </a:fld>
             <a:endParaRPr kumimoji="0" lang="en-US" dirty="0"/>
           </a:p>
@@ -19809,7 +20072,7 @@
 </p:sld>
 </file>
 
-<file path=ppt/slides/slide26.xml><?xml version="1.0" encoding="utf-8"?>
+<file path=ppt/slides/slide29.xml><?xml version="1.0" encoding="utf-8"?>
 <p:sld xmlns:a="http://schemas.openxmlformats.org/drawingml/2006/main" xmlns:r="http://schemas.openxmlformats.org/officeDocument/2006/relationships" xmlns:p="http://schemas.openxmlformats.org/presentationml/2006/main">
   <p:cSld>
     <p:spTree>
@@ -19878,7 +20141,7 @@
             <a:fld id="{EA7C8D44-3667-46F6-9772-CC52308E2A7F}" type="slidenum">
               <a:rPr kumimoji="0" lang="en-US" smtClean="0"/>
               <a:pPr/>
-              <a:t>26</a:t>
+              <a:t>29</a:t>
             </a:fld>
             <a:endParaRPr kumimoji="0" lang="en-US" dirty="0"/>
           </a:p>
@@ -19930,7 +20193,592 @@
 </p:sld>
 </file>
 
-<file path=ppt/slides/slide27.xml><?xml version="1.0" encoding="utf-8"?>
+<file path=ppt/slides/slide3.xml><?xml version="1.0" encoding="utf-8"?>
+<p:sld xmlns:a="http://schemas.openxmlformats.org/drawingml/2006/main" xmlns:r="http://schemas.openxmlformats.org/officeDocument/2006/relationships" xmlns:p="http://schemas.openxmlformats.org/presentationml/2006/main">
+  <p:cSld>
+    <p:spTree>
+      <p:nvGrpSpPr>
+        <p:cNvPr id="1" name="">
+          <a:extLst>
+            <a:ext uri="{FF2B5EF4-FFF2-40B4-BE49-F238E27FC236}">
+              <a16:creationId xmlns:a16="http://schemas.microsoft.com/office/drawing/2014/main" id="{CBFBD9E7-84B5-4307-1E18-361E6490604C}"/>
+            </a:ext>
+          </a:extLst>
+        </p:cNvPr>
+        <p:cNvGrpSpPr/>
+        <p:nvPr/>
+      </p:nvGrpSpPr>
+      <p:grpSpPr>
+        <a:xfrm>
+          <a:off x="0" y="0"/>
+          <a:ext cx="0" cy="0"/>
+          <a:chOff x="0" y="0"/>
+          <a:chExt cx="0" cy="0"/>
+        </a:xfrm>
+      </p:grpSpPr>
+      <p:sp>
+        <p:nvSpPr>
+          <p:cNvPr id="2" name="Title 1">
+            <a:extLst>
+              <a:ext uri="{FF2B5EF4-FFF2-40B4-BE49-F238E27FC236}">
+                <a16:creationId xmlns:a16="http://schemas.microsoft.com/office/drawing/2014/main" id="{DA89C519-78F4-265A-28F8-A7F91940F445}"/>
+              </a:ext>
+            </a:extLst>
+          </p:cNvPr>
+          <p:cNvSpPr>
+            <a:spLocks noGrp="1"/>
+          </p:cNvSpPr>
+          <p:nvPr>
+            <p:ph type="title"/>
+          </p:nvPr>
+        </p:nvSpPr>
+        <p:spPr/>
+        <p:txBody>
+          <a:bodyPr/>
+          <a:lstStyle/>
+          <a:p>
+            <a:r>
+              <a:rPr lang="en-US" dirty="0"/>
+              <a:t>Pseudocode to Assembly ANS</a:t>
+            </a:r>
+          </a:p>
+        </p:txBody>
+      </p:sp>
+      <p:sp>
+        <p:nvSpPr>
+          <p:cNvPr id="3" name="Slide Number Placeholder 2">
+            <a:extLst>
+              <a:ext uri="{FF2B5EF4-FFF2-40B4-BE49-F238E27FC236}">
+                <a16:creationId xmlns:a16="http://schemas.microsoft.com/office/drawing/2014/main" id="{8DDE8256-3107-F915-1F0D-F420E2BB8927}"/>
+              </a:ext>
+            </a:extLst>
+          </p:cNvPr>
+          <p:cNvSpPr>
+            <a:spLocks noGrp="1"/>
+          </p:cNvSpPr>
+          <p:nvPr>
+            <p:ph type="sldNum" sz="quarter" idx="12"/>
+          </p:nvPr>
+        </p:nvSpPr>
+        <p:spPr/>
+        <p:txBody>
+          <a:bodyPr/>
+          <a:lstStyle/>
+          <a:p>
+            <a:fld id="{EA7C8D44-3667-46F6-9772-CC52308E2A7F}" type="slidenum">
+              <a:rPr kumimoji="0" lang="en-US" smtClean="0"/>
+              <a:pPr/>
+              <a:t>3</a:t>
+            </a:fld>
+            <a:endParaRPr kumimoji="0" lang="en-US" dirty="0"/>
+          </a:p>
+        </p:txBody>
+      </p:sp>
+      <p:sp>
+        <p:nvSpPr>
+          <p:cNvPr id="4" name="Content Placeholder 3">
+            <a:extLst>
+              <a:ext uri="{FF2B5EF4-FFF2-40B4-BE49-F238E27FC236}">
+                <a16:creationId xmlns:a16="http://schemas.microsoft.com/office/drawing/2014/main" id="{41C09B8C-E7BF-18F9-4DF3-E7B8AB108D12}"/>
+              </a:ext>
+            </a:extLst>
+          </p:cNvPr>
+          <p:cNvSpPr>
+            <a:spLocks noGrp="1"/>
+          </p:cNvSpPr>
+          <p:nvPr>
+            <p:ph sz="quarter" idx="1"/>
+          </p:nvPr>
+        </p:nvSpPr>
+        <p:spPr>
+          <a:xfrm>
+            <a:off x="457200" y="1219200"/>
+            <a:ext cx="8229600" cy="2057400"/>
+          </a:xfrm>
+        </p:spPr>
+        <p:txBody>
+          <a:bodyPr>
+            <a:normAutofit/>
+          </a:bodyPr>
+          <a:lstStyle/>
+          <a:p>
+            <a:r>
+              <a:rPr lang="en-US" dirty="0"/>
+              <a:t>Write assembly program for pseudocode, one version without Conditional Execution instructions, one version with Conditional Execution.</a:t>
+            </a:r>
+          </a:p>
+          <a:p>
+            <a:pPr lvl="1"/>
+            <a:r>
+              <a:rPr lang="pt-BR" dirty="0"/>
+              <a:t>if (r0 != r1) r2 = r2 + r2</a:t>
+            </a:r>
+            <a:endParaRPr lang="en-US" dirty="0"/>
+          </a:p>
+          <a:p>
+            <a:pPr lvl="1"/>
+            <a:endParaRPr lang="en-US" dirty="0"/>
+          </a:p>
+        </p:txBody>
+      </p:sp>
+      <p:graphicFrame>
+        <p:nvGraphicFramePr>
+          <p:cNvPr id="5" name="Table 4">
+            <a:extLst>
+              <a:ext uri="{FF2B5EF4-FFF2-40B4-BE49-F238E27FC236}">
+                <a16:creationId xmlns:a16="http://schemas.microsoft.com/office/drawing/2014/main" id="{640F863F-ED16-DF22-3E32-4C03C5CD0E8B}"/>
+              </a:ext>
+            </a:extLst>
+          </p:cNvPr>
+          <p:cNvGraphicFramePr>
+            <a:graphicFrameLocks noGrp="1"/>
+          </p:cNvGraphicFramePr>
+          <p:nvPr/>
+        </p:nvGraphicFramePr>
+        <p:xfrm>
+          <a:off x="876300" y="3123036"/>
+          <a:ext cx="7391400" cy="1219200"/>
+        </p:xfrm>
+        <a:graphic>
+          <a:graphicData uri="http://schemas.openxmlformats.org/drawingml/2006/table">
+            <a:tbl>
+              <a:tblPr firstRow="1" firstCol="1" bandRow="1">
+                <a:tableStyleId>{5940675A-B579-460E-94D1-54222C63F5DA}</a:tableStyleId>
+              </a:tblPr>
+              <a:tblGrid>
+                <a:gridCol w="3657600">
+                  <a:extLst>
+                    <a:ext uri="{9D8B030D-6E8A-4147-A177-3AD203B41FA5}">
+                      <a16:colId xmlns:a16="http://schemas.microsoft.com/office/drawing/2014/main" val="20000"/>
+                    </a:ext>
+                  </a:extLst>
+                </a:gridCol>
+                <a:gridCol w="3733800">
+                  <a:extLst>
+                    <a:ext uri="{9D8B030D-6E8A-4147-A177-3AD203B41FA5}">
+                      <a16:colId xmlns:a16="http://schemas.microsoft.com/office/drawing/2014/main" val="20001"/>
+                    </a:ext>
+                  </a:extLst>
+                </a:gridCol>
+              </a:tblGrid>
+              <a:tr h="217369">
+                <a:tc>
+                  <a:txBody>
+                    <a:bodyPr/>
+                    <a:lstStyle/>
+                    <a:p>
+                      <a:pPr marL="0" marR="0" algn="just">
+                        <a:spcBef>
+                          <a:spcPts val="0"/>
+                        </a:spcBef>
+                        <a:spcAft>
+                          <a:spcPts val="0"/>
+                        </a:spcAft>
+                      </a:pPr>
+                      <a:r>
+                        <a:rPr lang="en-US" sz="1600" dirty="0">
+                          <a:solidFill>
+                            <a:schemeClr val="bg1"/>
+                          </a:solidFill>
+                          <a:effectLst/>
+                          <a:latin typeface="Consolas" panose="020B0609020204030204" pitchFamily="49" charset="0"/>
+                          <a:ea typeface="宋体"/>
+                          <a:cs typeface="Consolas" panose="020B0609020204030204" pitchFamily="49" charset="0"/>
+                        </a:rPr>
+                        <a:t>Pseudocode</a:t>
+                      </a:r>
+                    </a:p>
+                  </a:txBody>
+                  <a:tcPr marL="68580" marR="68580" marT="0" marB="0">
+                    <a:solidFill>
+                      <a:schemeClr val="accent1"/>
+                    </a:solidFill>
+                  </a:tcPr>
+                </a:tc>
+                <a:tc>
+                  <a:txBody>
+                    <a:bodyPr/>
+                    <a:lstStyle/>
+                    <a:p>
+                      <a:pPr marL="0" marR="0" algn="just">
+                        <a:spcBef>
+                          <a:spcPts val="0"/>
+                        </a:spcBef>
+                        <a:spcAft>
+                          <a:spcPts val="0"/>
+                        </a:spcAft>
+                      </a:pPr>
+                      <a:r>
+                        <a:rPr lang="en-US" sz="1600" dirty="0">
+                          <a:solidFill>
+                            <a:schemeClr val="bg1"/>
+                          </a:solidFill>
+                          <a:effectLst/>
+                          <a:latin typeface="Consolas" panose="020B0609020204030204" pitchFamily="49" charset="0"/>
+                          <a:cs typeface="Consolas" panose="020B0609020204030204" pitchFamily="49" charset="0"/>
+                        </a:rPr>
+                        <a:t>Assembly Program</a:t>
+                      </a:r>
+                      <a:endParaRPr lang="en-US" sz="1600" dirty="0">
+                        <a:solidFill>
+                          <a:schemeClr val="bg1"/>
+                        </a:solidFill>
+                        <a:effectLst/>
+                        <a:latin typeface="Consolas" panose="020B0609020204030204" pitchFamily="49" charset="0"/>
+                        <a:ea typeface="宋体"/>
+                        <a:cs typeface="Consolas" panose="020B0609020204030204" pitchFamily="49" charset="0"/>
+                      </a:endParaRPr>
+                    </a:p>
+                  </a:txBody>
+                  <a:tcPr marL="68580" marR="68580" marT="0" marB="0">
+                    <a:solidFill>
+                      <a:schemeClr val="accent1"/>
+                    </a:solidFill>
+                  </a:tcPr>
+                </a:tc>
+                <a:extLst>
+                  <a:ext uri="{0D108BD9-81ED-4DB2-BD59-A6C34878D82A}">
+                    <a16:rowId xmlns:a16="http://schemas.microsoft.com/office/drawing/2014/main" val="10000"/>
+                  </a:ext>
+                </a:extLst>
+              </a:tr>
+              <a:tr h="773230">
+                <a:tc>
+                  <a:txBody>
+                    <a:bodyPr/>
+                    <a:lstStyle/>
+                    <a:p>
+                      <a:r>
+                        <a:rPr lang="pt-BR" sz="1600" dirty="0">
+                          <a:effectLst/>
+                          <a:latin typeface="Consolas" panose="020B0609020204030204" pitchFamily="49" charset="0"/>
+                          <a:ea typeface="宋体"/>
+                          <a:cs typeface="Consolas" panose="020B0609020204030204" pitchFamily="49" charset="0"/>
+                        </a:rPr>
+                        <a:t>if (r0 != r1) r2 = r2 + r2</a:t>
+                      </a:r>
+                    </a:p>
+                    <a:p>
+                      <a:endParaRPr lang="en-US" sz="1600" dirty="0">
+                        <a:effectLst/>
+                        <a:latin typeface="Consolas" panose="020B0609020204030204" pitchFamily="49" charset="0"/>
+                        <a:ea typeface="宋体"/>
+                        <a:cs typeface="Consolas" panose="020B0609020204030204" pitchFamily="49" charset="0"/>
+                      </a:endParaRPr>
+                    </a:p>
+                  </a:txBody>
+                  <a:tcPr marL="68580" marR="68580" marT="0" marB="0"/>
+                </a:tc>
+                <a:tc>
+                  <a:txBody>
+                    <a:bodyPr/>
+                    <a:lstStyle/>
+                    <a:p>
+                      <a:pPr marL="0" marR="0" algn="just">
+                        <a:spcBef>
+                          <a:spcPts val="0"/>
+                        </a:spcBef>
+                        <a:spcAft>
+                          <a:spcPts val="0"/>
+                        </a:spcAft>
+                      </a:pPr>
+                      <a:r>
+                        <a:rPr lang="pt-BR" sz="1600" i="0" dirty="0">
+                          <a:effectLst/>
+                          <a:latin typeface="Consolas" panose="020B0609020204030204" pitchFamily="49" charset="0"/>
+                          <a:cs typeface="Consolas" panose="020B0609020204030204" pitchFamily="49" charset="0"/>
+                        </a:rPr>
+                        <a:t>CMP r0, r1         </a:t>
+                      </a:r>
+                    </a:p>
+                    <a:p>
+                      <a:pPr marL="0" marR="0" algn="just">
+                        <a:spcBef>
+                          <a:spcPts val="0"/>
+                        </a:spcBef>
+                        <a:spcAft>
+                          <a:spcPts val="0"/>
+                        </a:spcAft>
+                      </a:pPr>
+                      <a:r>
+                        <a:rPr lang="pt-BR" sz="1600" i="0" dirty="0">
+                          <a:effectLst/>
+                          <a:latin typeface="Consolas" panose="020B0609020204030204" pitchFamily="49" charset="0"/>
+                          <a:cs typeface="Consolas" panose="020B0609020204030204" pitchFamily="49" charset="0"/>
+                        </a:rPr>
+                        <a:t>BEQ skip</a:t>
+                      </a:r>
+                    </a:p>
+                    <a:p>
+                      <a:pPr marL="0" marR="0" algn="just">
+                        <a:spcBef>
+                          <a:spcPts val="0"/>
+                        </a:spcBef>
+                        <a:spcAft>
+                          <a:spcPts val="0"/>
+                        </a:spcAft>
+                      </a:pPr>
+                      <a:r>
+                        <a:rPr lang="pt-BR" sz="1600" i="0" dirty="0">
+                          <a:effectLst/>
+                          <a:latin typeface="Consolas" panose="020B0609020204030204" pitchFamily="49" charset="0"/>
+                          <a:cs typeface="Consolas" panose="020B0609020204030204" pitchFamily="49" charset="0"/>
+                        </a:rPr>
+                        <a:t>ADD r2, r2, r2      </a:t>
+                      </a:r>
+                    </a:p>
+                    <a:p>
+                      <a:pPr marL="0" marR="0" algn="just">
+                        <a:spcBef>
+                          <a:spcPts val="0"/>
+                        </a:spcBef>
+                        <a:spcAft>
+                          <a:spcPts val="0"/>
+                        </a:spcAft>
+                      </a:pPr>
+                      <a:r>
+                        <a:rPr lang="pt-BR" sz="1600" i="0" dirty="0">
+                          <a:effectLst/>
+                          <a:latin typeface="Consolas" panose="020B0609020204030204" pitchFamily="49" charset="0"/>
+                          <a:cs typeface="Consolas" panose="020B0609020204030204" pitchFamily="49" charset="0"/>
+                        </a:rPr>
+                        <a:t>skip:</a:t>
+                      </a:r>
+                    </a:p>
+                  </a:txBody>
+                  <a:tcPr marL="68580" marR="68580" marT="0" marB="0"/>
+                </a:tc>
+                <a:extLst>
+                  <a:ext uri="{0D108BD9-81ED-4DB2-BD59-A6C34878D82A}">
+                    <a16:rowId xmlns:a16="http://schemas.microsoft.com/office/drawing/2014/main" val="10001"/>
+                  </a:ext>
+                </a:extLst>
+              </a:tr>
+            </a:tbl>
+          </a:graphicData>
+        </a:graphic>
+      </p:graphicFrame>
+      <p:graphicFrame>
+        <p:nvGraphicFramePr>
+          <p:cNvPr id="6" name="Table 5">
+            <a:extLst>
+              <a:ext uri="{FF2B5EF4-FFF2-40B4-BE49-F238E27FC236}">
+                <a16:creationId xmlns:a16="http://schemas.microsoft.com/office/drawing/2014/main" id="{CFC5E2AE-B706-F0FE-2E4C-ACA699A32698}"/>
+              </a:ext>
+            </a:extLst>
+          </p:cNvPr>
+          <p:cNvGraphicFramePr>
+            <a:graphicFrameLocks noGrp="1"/>
+          </p:cNvGraphicFramePr>
+          <p:nvPr>
+            <p:extLst>
+              <p:ext uri="{D42A27DB-BD31-4B8C-83A1-F6EECF244321}">
+                <p14:modId xmlns:p14="http://schemas.microsoft.com/office/powerpoint/2010/main" val="3795854195"/>
+              </p:ext>
+            </p:extLst>
+          </p:nvPr>
+        </p:nvGraphicFramePr>
+        <p:xfrm>
+          <a:off x="876300" y="4499081"/>
+          <a:ext cx="7391400" cy="1149308"/>
+        </p:xfrm>
+        <a:graphic>
+          <a:graphicData uri="http://schemas.openxmlformats.org/drawingml/2006/table">
+            <a:tbl>
+              <a:tblPr firstRow="1" firstCol="1" bandRow="1">
+                <a:tableStyleId>{5940675A-B579-460E-94D1-54222C63F5DA}</a:tableStyleId>
+              </a:tblPr>
+              <a:tblGrid>
+                <a:gridCol w="3657600">
+                  <a:extLst>
+                    <a:ext uri="{9D8B030D-6E8A-4147-A177-3AD203B41FA5}">
+                      <a16:colId xmlns:a16="http://schemas.microsoft.com/office/drawing/2014/main" val="20000"/>
+                    </a:ext>
+                  </a:extLst>
+                </a:gridCol>
+                <a:gridCol w="3733800">
+                  <a:extLst>
+                    <a:ext uri="{9D8B030D-6E8A-4147-A177-3AD203B41FA5}">
+                      <a16:colId xmlns:a16="http://schemas.microsoft.com/office/drawing/2014/main" val="20001"/>
+                    </a:ext>
+                  </a:extLst>
+                </a:gridCol>
+              </a:tblGrid>
+              <a:tr h="478091">
+                <a:tc>
+                  <a:txBody>
+                    <a:bodyPr/>
+                    <a:lstStyle/>
+                    <a:p>
+                      <a:pPr marL="0" marR="0" algn="just">
+                        <a:spcBef>
+                          <a:spcPts val="0"/>
+                        </a:spcBef>
+                        <a:spcAft>
+                          <a:spcPts val="0"/>
+                        </a:spcAft>
+                      </a:pPr>
+                      <a:r>
+                        <a:rPr lang="en-US" sz="1600" dirty="0">
+                          <a:solidFill>
+                            <a:schemeClr val="bg1"/>
+                          </a:solidFill>
+                          <a:effectLst/>
+                          <a:latin typeface="Consolas" panose="020B0609020204030204" pitchFamily="49" charset="0"/>
+                          <a:ea typeface="宋体"/>
+                          <a:cs typeface="Consolas" panose="020B0609020204030204" pitchFamily="49" charset="0"/>
+                        </a:rPr>
+                        <a:t>Pseudocode</a:t>
+                      </a:r>
+                    </a:p>
+                  </a:txBody>
+                  <a:tcPr marL="68580" marR="68580" marT="0" marB="0">
+                    <a:solidFill>
+                      <a:schemeClr val="accent1"/>
+                    </a:solidFill>
+                  </a:tcPr>
+                </a:tc>
+                <a:tc>
+                  <a:txBody>
+                    <a:bodyPr/>
+                    <a:lstStyle/>
+                    <a:p>
+                      <a:pPr marL="0" marR="0" algn="just">
+                        <a:spcBef>
+                          <a:spcPts val="0"/>
+                        </a:spcBef>
+                        <a:spcAft>
+                          <a:spcPts val="0"/>
+                        </a:spcAft>
+                      </a:pPr>
+                      <a:r>
+                        <a:rPr lang="en-US" sz="1600" dirty="0">
+                          <a:solidFill>
+                            <a:schemeClr val="bg1"/>
+                          </a:solidFill>
+                          <a:effectLst/>
+                          <a:latin typeface="Consolas" panose="020B0609020204030204" pitchFamily="49" charset="0"/>
+                          <a:cs typeface="Consolas" panose="020B0609020204030204" pitchFamily="49" charset="0"/>
+                        </a:rPr>
+                        <a:t>Assembly Program w/Conditional Execution</a:t>
+                      </a:r>
+                      <a:endParaRPr lang="en-US" sz="1600" dirty="0">
+                        <a:solidFill>
+                          <a:schemeClr val="bg1"/>
+                        </a:solidFill>
+                        <a:effectLst/>
+                        <a:latin typeface="Consolas" panose="020B0609020204030204" pitchFamily="49" charset="0"/>
+                        <a:ea typeface="宋体"/>
+                        <a:cs typeface="Consolas" panose="020B0609020204030204" pitchFamily="49" charset="0"/>
+                      </a:endParaRPr>
+                    </a:p>
+                  </a:txBody>
+                  <a:tcPr marL="68580" marR="68580" marT="0" marB="0">
+                    <a:solidFill>
+                      <a:schemeClr val="accent1"/>
+                    </a:solidFill>
+                  </a:tcPr>
+                </a:tc>
+                <a:extLst>
+                  <a:ext uri="{0D108BD9-81ED-4DB2-BD59-A6C34878D82A}">
+                    <a16:rowId xmlns:a16="http://schemas.microsoft.com/office/drawing/2014/main" val="10000"/>
+                  </a:ext>
+                </a:extLst>
+              </a:tr>
+              <a:tr h="661628">
+                <a:tc>
+                  <a:txBody>
+                    <a:bodyPr/>
+                    <a:lstStyle/>
+                    <a:p>
+                      <a:r>
+                        <a:rPr lang="pt-BR" sz="1600" dirty="0">
+                          <a:effectLst/>
+                          <a:latin typeface="Consolas" panose="020B0609020204030204" pitchFamily="49" charset="0"/>
+                          <a:ea typeface="宋体"/>
+                          <a:cs typeface="Consolas" panose="020B0609020204030204" pitchFamily="49" charset="0"/>
+                        </a:rPr>
+                        <a:t>if (r0 != r1) r2 = r2 + r2</a:t>
+                      </a:r>
+                    </a:p>
+                    <a:p>
+                      <a:endParaRPr lang="en-US" sz="1600" dirty="0">
+                        <a:effectLst/>
+                        <a:latin typeface="Consolas" panose="020B0609020204030204" pitchFamily="49" charset="0"/>
+                        <a:ea typeface="宋体"/>
+                        <a:cs typeface="Consolas" panose="020B0609020204030204" pitchFamily="49" charset="0"/>
+                      </a:endParaRPr>
+                    </a:p>
+                  </a:txBody>
+                  <a:tcPr marL="68580" marR="68580" marT="0" marB="0"/>
+                </a:tc>
+                <a:tc>
+                  <a:txBody>
+                    <a:bodyPr/>
+                    <a:lstStyle/>
+                    <a:p>
+                      <a:pPr marL="0" marR="0" algn="just">
+                        <a:spcBef>
+                          <a:spcPts val="0"/>
+                        </a:spcBef>
+                        <a:spcAft>
+                          <a:spcPts val="0"/>
+                        </a:spcAft>
+                      </a:pPr>
+                      <a:r>
+                        <a:rPr lang="pt-BR" sz="1600" i="0" dirty="0">
+                          <a:effectLst/>
+                          <a:latin typeface="Consolas" panose="020B0609020204030204" pitchFamily="49" charset="0"/>
+                          <a:cs typeface="Consolas" panose="020B0609020204030204" pitchFamily="49" charset="0"/>
+                        </a:rPr>
+                        <a:t>CMP r0, r1   </a:t>
+                      </a:r>
+                    </a:p>
+                    <a:p>
+                      <a:pPr marL="0" marR="0" algn="just">
+                        <a:spcBef>
+                          <a:spcPts val="0"/>
+                        </a:spcBef>
+                        <a:spcAft>
+                          <a:spcPts val="0"/>
+                        </a:spcAft>
+                      </a:pPr>
+                      <a:r>
+                        <a:rPr lang="pt-BR" sz="1600" i="0" dirty="0">
+                          <a:effectLst/>
+                          <a:latin typeface="Consolas" panose="020B0609020204030204" pitchFamily="49" charset="0"/>
+                          <a:cs typeface="Consolas" panose="020B0609020204030204" pitchFamily="49" charset="0"/>
+                        </a:rPr>
+                        <a:t>ADDNE r2, r2, r2</a:t>
+                      </a:r>
+                    </a:p>
+                  </a:txBody>
+                  <a:tcPr marL="68580" marR="68580" marT="0" marB="0"/>
+                </a:tc>
+                <a:extLst>
+                  <a:ext uri="{0D108BD9-81ED-4DB2-BD59-A6C34878D82A}">
+                    <a16:rowId xmlns:a16="http://schemas.microsoft.com/office/drawing/2014/main" val="10001"/>
+                  </a:ext>
+                </a:extLst>
+              </a:tr>
+            </a:tbl>
+          </a:graphicData>
+        </a:graphic>
+      </p:graphicFrame>
+    </p:spTree>
+    <p:extLst>
+      <p:ext uri="{BB962C8B-B14F-4D97-AF65-F5344CB8AC3E}">
+        <p14:creationId xmlns:p14="http://schemas.microsoft.com/office/powerpoint/2010/main" val="3010226585"/>
+      </p:ext>
+    </p:extLst>
+  </p:cSld>
+  <p:clrMapOvr>
+    <a:masterClrMapping/>
+  </p:clrMapOvr>
+</p:sld>
+</file>
+
+<file path=ppt/slides/slide30.xml><?xml version="1.0" encoding="utf-8"?>
 <p:sld xmlns:a="http://schemas.openxmlformats.org/drawingml/2006/main" xmlns:r="http://schemas.openxmlformats.org/officeDocument/2006/relationships" xmlns:p="http://schemas.openxmlformats.org/presentationml/2006/main">
   <p:cSld>
     <p:spTree>
@@ -20005,7 +20853,7 @@
             <a:fld id="{EA7C8D44-3667-46F6-9772-CC52308E2A7F}" type="slidenum">
               <a:rPr kumimoji="0" lang="en-US" smtClean="0"/>
               <a:pPr/>
-              <a:t>27</a:t>
+              <a:t>30</a:t>
             </a:fld>
             <a:endParaRPr kumimoji="0" lang="en-US" dirty="0"/>
           </a:p>
@@ -20105,7 +20953,7 @@
 </p:sld>
 </file>
 
-<file path=ppt/slides/slide28.xml><?xml version="1.0" encoding="utf-8"?>
+<file path=ppt/slides/slide31.xml><?xml version="1.0" encoding="utf-8"?>
 <p:sld xmlns:a="http://schemas.openxmlformats.org/drawingml/2006/main" xmlns:r="http://schemas.openxmlformats.org/officeDocument/2006/relationships" xmlns:p="http://schemas.openxmlformats.org/presentationml/2006/main">
   <p:cSld>
     <p:spTree>
@@ -20176,7 +21024,7 @@
             <a:fld id="{AEE14D4A-FE32-40AF-B06D-E9622816B101}" type="slidenum">
               <a:rPr lang="en-US" smtClean="0"/>
               <a:pPr/>
-              <a:t>28</a:t>
+              <a:t>31</a:t>
             </a:fld>
             <a:endParaRPr lang="en-US"/>
           </a:p>
@@ -22811,7 +23659,7 @@
 </p:sld>
 </file>
 
-<file path=ppt/slides/slide29.xml><?xml version="1.0" encoding="utf-8"?>
+<file path=ppt/slides/slide32.xml><?xml version="1.0" encoding="utf-8"?>
 <p:sld xmlns:a="http://schemas.openxmlformats.org/drawingml/2006/main" xmlns:r="http://schemas.openxmlformats.org/officeDocument/2006/relationships" xmlns:p="http://schemas.openxmlformats.org/presentationml/2006/main">
   <p:cSld>
     <p:spTree>
@@ -22886,7 +23734,7 @@
             <a:fld id="{EA7C8D44-3667-46F6-9772-CC52308E2A7F}" type="slidenum">
               <a:rPr kumimoji="0" lang="en-US" smtClean="0"/>
               <a:pPr/>
-              <a:t>29</a:t>
+              <a:t>32</a:t>
             </a:fld>
             <a:endParaRPr kumimoji="0" lang="en-US" dirty="0"/>
           </a:p>
@@ -22959,592 +23807,7 @@
 </p:sld>
 </file>
 
-<file path=ppt/slides/slide3.xml><?xml version="1.0" encoding="utf-8"?>
-<p:sld xmlns:a="http://schemas.openxmlformats.org/drawingml/2006/main" xmlns:r="http://schemas.openxmlformats.org/officeDocument/2006/relationships" xmlns:p="http://schemas.openxmlformats.org/presentationml/2006/main">
-  <p:cSld>
-    <p:spTree>
-      <p:nvGrpSpPr>
-        <p:cNvPr id="1" name="">
-          <a:extLst>
-            <a:ext uri="{FF2B5EF4-FFF2-40B4-BE49-F238E27FC236}">
-              <a16:creationId xmlns:a16="http://schemas.microsoft.com/office/drawing/2014/main" id="{CBFBD9E7-84B5-4307-1E18-361E6490604C}"/>
-            </a:ext>
-          </a:extLst>
-        </p:cNvPr>
-        <p:cNvGrpSpPr/>
-        <p:nvPr/>
-      </p:nvGrpSpPr>
-      <p:grpSpPr>
-        <a:xfrm>
-          <a:off x="0" y="0"/>
-          <a:ext cx="0" cy="0"/>
-          <a:chOff x="0" y="0"/>
-          <a:chExt cx="0" cy="0"/>
-        </a:xfrm>
-      </p:grpSpPr>
-      <p:sp>
-        <p:nvSpPr>
-          <p:cNvPr id="2" name="Title 1">
-            <a:extLst>
-              <a:ext uri="{FF2B5EF4-FFF2-40B4-BE49-F238E27FC236}">
-                <a16:creationId xmlns:a16="http://schemas.microsoft.com/office/drawing/2014/main" id="{DA89C519-78F4-265A-28F8-A7F91940F445}"/>
-              </a:ext>
-            </a:extLst>
-          </p:cNvPr>
-          <p:cNvSpPr>
-            <a:spLocks noGrp="1"/>
-          </p:cNvSpPr>
-          <p:nvPr>
-            <p:ph type="title"/>
-          </p:nvPr>
-        </p:nvSpPr>
-        <p:spPr/>
-        <p:txBody>
-          <a:bodyPr/>
-          <a:lstStyle/>
-          <a:p>
-            <a:r>
-              <a:rPr lang="en-US" dirty="0"/>
-              <a:t>Pseudocode to Assembly ANS</a:t>
-            </a:r>
-          </a:p>
-        </p:txBody>
-      </p:sp>
-      <p:sp>
-        <p:nvSpPr>
-          <p:cNvPr id="3" name="Slide Number Placeholder 2">
-            <a:extLst>
-              <a:ext uri="{FF2B5EF4-FFF2-40B4-BE49-F238E27FC236}">
-                <a16:creationId xmlns:a16="http://schemas.microsoft.com/office/drawing/2014/main" id="{8DDE8256-3107-F915-1F0D-F420E2BB8927}"/>
-              </a:ext>
-            </a:extLst>
-          </p:cNvPr>
-          <p:cNvSpPr>
-            <a:spLocks noGrp="1"/>
-          </p:cNvSpPr>
-          <p:nvPr>
-            <p:ph type="sldNum" sz="quarter" idx="12"/>
-          </p:nvPr>
-        </p:nvSpPr>
-        <p:spPr/>
-        <p:txBody>
-          <a:bodyPr/>
-          <a:lstStyle/>
-          <a:p>
-            <a:fld id="{EA7C8D44-3667-46F6-9772-CC52308E2A7F}" type="slidenum">
-              <a:rPr kumimoji="0" lang="en-US" smtClean="0"/>
-              <a:pPr/>
-              <a:t>3</a:t>
-            </a:fld>
-            <a:endParaRPr kumimoji="0" lang="en-US" dirty="0"/>
-          </a:p>
-        </p:txBody>
-      </p:sp>
-      <p:sp>
-        <p:nvSpPr>
-          <p:cNvPr id="4" name="Content Placeholder 3">
-            <a:extLst>
-              <a:ext uri="{FF2B5EF4-FFF2-40B4-BE49-F238E27FC236}">
-                <a16:creationId xmlns:a16="http://schemas.microsoft.com/office/drawing/2014/main" id="{41C09B8C-E7BF-18F9-4DF3-E7B8AB108D12}"/>
-              </a:ext>
-            </a:extLst>
-          </p:cNvPr>
-          <p:cNvSpPr>
-            <a:spLocks noGrp="1"/>
-          </p:cNvSpPr>
-          <p:nvPr>
-            <p:ph sz="quarter" idx="1"/>
-          </p:nvPr>
-        </p:nvSpPr>
-        <p:spPr>
-          <a:xfrm>
-            <a:off x="457200" y="1219200"/>
-            <a:ext cx="8229600" cy="2057400"/>
-          </a:xfrm>
-        </p:spPr>
-        <p:txBody>
-          <a:bodyPr>
-            <a:normAutofit/>
-          </a:bodyPr>
-          <a:lstStyle/>
-          <a:p>
-            <a:r>
-              <a:rPr lang="en-US" dirty="0"/>
-              <a:t>Write assembly program for pseudocode, one version without Conditional Execution instructions, one version with Conditional Execution.</a:t>
-            </a:r>
-          </a:p>
-          <a:p>
-            <a:pPr lvl="1"/>
-            <a:r>
-              <a:rPr lang="pt-BR" dirty="0"/>
-              <a:t>if (r0 != r1) r2 = r2 + r2</a:t>
-            </a:r>
-            <a:endParaRPr lang="en-US" dirty="0"/>
-          </a:p>
-          <a:p>
-            <a:pPr lvl="1"/>
-            <a:endParaRPr lang="en-US" dirty="0"/>
-          </a:p>
-        </p:txBody>
-      </p:sp>
-      <p:graphicFrame>
-        <p:nvGraphicFramePr>
-          <p:cNvPr id="5" name="Table 4">
-            <a:extLst>
-              <a:ext uri="{FF2B5EF4-FFF2-40B4-BE49-F238E27FC236}">
-                <a16:creationId xmlns:a16="http://schemas.microsoft.com/office/drawing/2014/main" id="{640F863F-ED16-DF22-3E32-4C03C5CD0E8B}"/>
-              </a:ext>
-            </a:extLst>
-          </p:cNvPr>
-          <p:cNvGraphicFramePr>
-            <a:graphicFrameLocks noGrp="1"/>
-          </p:cNvGraphicFramePr>
-          <p:nvPr/>
-        </p:nvGraphicFramePr>
-        <p:xfrm>
-          <a:off x="876300" y="3123036"/>
-          <a:ext cx="7391400" cy="1219200"/>
-        </p:xfrm>
-        <a:graphic>
-          <a:graphicData uri="http://schemas.openxmlformats.org/drawingml/2006/table">
-            <a:tbl>
-              <a:tblPr firstRow="1" firstCol="1" bandRow="1">
-                <a:tableStyleId>{5940675A-B579-460E-94D1-54222C63F5DA}</a:tableStyleId>
-              </a:tblPr>
-              <a:tblGrid>
-                <a:gridCol w="3657600">
-                  <a:extLst>
-                    <a:ext uri="{9D8B030D-6E8A-4147-A177-3AD203B41FA5}">
-                      <a16:colId xmlns:a16="http://schemas.microsoft.com/office/drawing/2014/main" val="20000"/>
-                    </a:ext>
-                  </a:extLst>
-                </a:gridCol>
-                <a:gridCol w="3733800">
-                  <a:extLst>
-                    <a:ext uri="{9D8B030D-6E8A-4147-A177-3AD203B41FA5}">
-                      <a16:colId xmlns:a16="http://schemas.microsoft.com/office/drawing/2014/main" val="20001"/>
-                    </a:ext>
-                  </a:extLst>
-                </a:gridCol>
-              </a:tblGrid>
-              <a:tr h="217369">
-                <a:tc>
-                  <a:txBody>
-                    <a:bodyPr/>
-                    <a:lstStyle/>
-                    <a:p>
-                      <a:pPr marL="0" marR="0" algn="just">
-                        <a:spcBef>
-                          <a:spcPts val="0"/>
-                        </a:spcBef>
-                        <a:spcAft>
-                          <a:spcPts val="0"/>
-                        </a:spcAft>
-                      </a:pPr>
-                      <a:r>
-                        <a:rPr lang="en-US" sz="1600" dirty="0">
-                          <a:solidFill>
-                            <a:schemeClr val="bg1"/>
-                          </a:solidFill>
-                          <a:effectLst/>
-                          <a:latin typeface="Consolas" panose="020B0609020204030204" pitchFamily="49" charset="0"/>
-                          <a:ea typeface="宋体"/>
-                          <a:cs typeface="Consolas" panose="020B0609020204030204" pitchFamily="49" charset="0"/>
-                        </a:rPr>
-                        <a:t>Pseudocode</a:t>
-                      </a:r>
-                    </a:p>
-                  </a:txBody>
-                  <a:tcPr marL="68580" marR="68580" marT="0" marB="0">
-                    <a:solidFill>
-                      <a:schemeClr val="accent1"/>
-                    </a:solidFill>
-                  </a:tcPr>
-                </a:tc>
-                <a:tc>
-                  <a:txBody>
-                    <a:bodyPr/>
-                    <a:lstStyle/>
-                    <a:p>
-                      <a:pPr marL="0" marR="0" algn="just">
-                        <a:spcBef>
-                          <a:spcPts val="0"/>
-                        </a:spcBef>
-                        <a:spcAft>
-                          <a:spcPts val="0"/>
-                        </a:spcAft>
-                      </a:pPr>
-                      <a:r>
-                        <a:rPr lang="en-US" sz="1600" dirty="0">
-                          <a:solidFill>
-                            <a:schemeClr val="bg1"/>
-                          </a:solidFill>
-                          <a:effectLst/>
-                          <a:latin typeface="Consolas" panose="020B0609020204030204" pitchFamily="49" charset="0"/>
-                          <a:cs typeface="Consolas" panose="020B0609020204030204" pitchFamily="49" charset="0"/>
-                        </a:rPr>
-                        <a:t>Assembly Program</a:t>
-                      </a:r>
-                      <a:endParaRPr lang="en-US" sz="1600" dirty="0">
-                        <a:solidFill>
-                          <a:schemeClr val="bg1"/>
-                        </a:solidFill>
-                        <a:effectLst/>
-                        <a:latin typeface="Consolas" panose="020B0609020204030204" pitchFamily="49" charset="0"/>
-                        <a:ea typeface="宋体"/>
-                        <a:cs typeface="Consolas" panose="020B0609020204030204" pitchFamily="49" charset="0"/>
-                      </a:endParaRPr>
-                    </a:p>
-                  </a:txBody>
-                  <a:tcPr marL="68580" marR="68580" marT="0" marB="0">
-                    <a:solidFill>
-                      <a:schemeClr val="accent1"/>
-                    </a:solidFill>
-                  </a:tcPr>
-                </a:tc>
-                <a:extLst>
-                  <a:ext uri="{0D108BD9-81ED-4DB2-BD59-A6C34878D82A}">
-                    <a16:rowId xmlns:a16="http://schemas.microsoft.com/office/drawing/2014/main" val="10000"/>
-                  </a:ext>
-                </a:extLst>
-              </a:tr>
-              <a:tr h="773230">
-                <a:tc>
-                  <a:txBody>
-                    <a:bodyPr/>
-                    <a:lstStyle/>
-                    <a:p>
-                      <a:r>
-                        <a:rPr lang="pt-BR" sz="1600" dirty="0">
-                          <a:effectLst/>
-                          <a:latin typeface="Consolas" panose="020B0609020204030204" pitchFamily="49" charset="0"/>
-                          <a:ea typeface="宋体"/>
-                          <a:cs typeface="Consolas" panose="020B0609020204030204" pitchFamily="49" charset="0"/>
-                        </a:rPr>
-                        <a:t>if (r0 != r1) r2 = r2 + r2</a:t>
-                      </a:r>
-                    </a:p>
-                    <a:p>
-                      <a:endParaRPr lang="en-US" sz="1600" dirty="0">
-                        <a:effectLst/>
-                        <a:latin typeface="Consolas" panose="020B0609020204030204" pitchFamily="49" charset="0"/>
-                        <a:ea typeface="宋体"/>
-                        <a:cs typeface="Consolas" panose="020B0609020204030204" pitchFamily="49" charset="0"/>
-                      </a:endParaRPr>
-                    </a:p>
-                  </a:txBody>
-                  <a:tcPr marL="68580" marR="68580" marT="0" marB="0"/>
-                </a:tc>
-                <a:tc>
-                  <a:txBody>
-                    <a:bodyPr/>
-                    <a:lstStyle/>
-                    <a:p>
-                      <a:pPr marL="0" marR="0" algn="just">
-                        <a:spcBef>
-                          <a:spcPts val="0"/>
-                        </a:spcBef>
-                        <a:spcAft>
-                          <a:spcPts val="0"/>
-                        </a:spcAft>
-                      </a:pPr>
-                      <a:r>
-                        <a:rPr lang="pt-BR" sz="1600" i="0" dirty="0">
-                          <a:effectLst/>
-                          <a:latin typeface="Consolas" panose="020B0609020204030204" pitchFamily="49" charset="0"/>
-                          <a:cs typeface="Consolas" panose="020B0609020204030204" pitchFamily="49" charset="0"/>
-                        </a:rPr>
-                        <a:t>CMP r0, r1         </a:t>
-                      </a:r>
-                    </a:p>
-                    <a:p>
-                      <a:pPr marL="0" marR="0" algn="just">
-                        <a:spcBef>
-                          <a:spcPts val="0"/>
-                        </a:spcBef>
-                        <a:spcAft>
-                          <a:spcPts val="0"/>
-                        </a:spcAft>
-                      </a:pPr>
-                      <a:r>
-                        <a:rPr lang="pt-BR" sz="1600" i="0" dirty="0">
-                          <a:effectLst/>
-                          <a:latin typeface="Consolas" panose="020B0609020204030204" pitchFamily="49" charset="0"/>
-                          <a:cs typeface="Consolas" panose="020B0609020204030204" pitchFamily="49" charset="0"/>
-                        </a:rPr>
-                        <a:t>BEQ skip</a:t>
-                      </a:r>
-                    </a:p>
-                    <a:p>
-                      <a:pPr marL="0" marR="0" algn="just">
-                        <a:spcBef>
-                          <a:spcPts val="0"/>
-                        </a:spcBef>
-                        <a:spcAft>
-                          <a:spcPts val="0"/>
-                        </a:spcAft>
-                      </a:pPr>
-                      <a:r>
-                        <a:rPr lang="pt-BR" sz="1600" i="0" dirty="0">
-                          <a:effectLst/>
-                          <a:latin typeface="Consolas" panose="020B0609020204030204" pitchFamily="49" charset="0"/>
-                          <a:cs typeface="Consolas" panose="020B0609020204030204" pitchFamily="49" charset="0"/>
-                        </a:rPr>
-                        <a:t>ADD r2, r2, r2      </a:t>
-                      </a:r>
-                    </a:p>
-                    <a:p>
-                      <a:pPr marL="0" marR="0" algn="just">
-                        <a:spcBef>
-                          <a:spcPts val="0"/>
-                        </a:spcBef>
-                        <a:spcAft>
-                          <a:spcPts val="0"/>
-                        </a:spcAft>
-                      </a:pPr>
-                      <a:r>
-                        <a:rPr lang="pt-BR" sz="1600" i="0" dirty="0">
-                          <a:effectLst/>
-                          <a:latin typeface="Consolas" panose="020B0609020204030204" pitchFamily="49" charset="0"/>
-                          <a:cs typeface="Consolas" panose="020B0609020204030204" pitchFamily="49" charset="0"/>
-                        </a:rPr>
-                        <a:t>skip:</a:t>
-                      </a:r>
-                    </a:p>
-                  </a:txBody>
-                  <a:tcPr marL="68580" marR="68580" marT="0" marB="0"/>
-                </a:tc>
-                <a:extLst>
-                  <a:ext uri="{0D108BD9-81ED-4DB2-BD59-A6C34878D82A}">
-                    <a16:rowId xmlns:a16="http://schemas.microsoft.com/office/drawing/2014/main" val="10001"/>
-                  </a:ext>
-                </a:extLst>
-              </a:tr>
-            </a:tbl>
-          </a:graphicData>
-        </a:graphic>
-      </p:graphicFrame>
-      <p:graphicFrame>
-        <p:nvGraphicFramePr>
-          <p:cNvPr id="6" name="Table 5">
-            <a:extLst>
-              <a:ext uri="{FF2B5EF4-FFF2-40B4-BE49-F238E27FC236}">
-                <a16:creationId xmlns:a16="http://schemas.microsoft.com/office/drawing/2014/main" id="{CFC5E2AE-B706-F0FE-2E4C-ACA699A32698}"/>
-              </a:ext>
-            </a:extLst>
-          </p:cNvPr>
-          <p:cNvGraphicFramePr>
-            <a:graphicFrameLocks noGrp="1"/>
-          </p:cNvGraphicFramePr>
-          <p:nvPr>
-            <p:extLst>
-              <p:ext uri="{D42A27DB-BD31-4B8C-83A1-F6EECF244321}">
-                <p14:modId xmlns:p14="http://schemas.microsoft.com/office/powerpoint/2010/main" val="3795854195"/>
-              </p:ext>
-            </p:extLst>
-          </p:nvPr>
-        </p:nvGraphicFramePr>
-        <p:xfrm>
-          <a:off x="876300" y="4499081"/>
-          <a:ext cx="7391400" cy="1149308"/>
-        </p:xfrm>
-        <a:graphic>
-          <a:graphicData uri="http://schemas.openxmlformats.org/drawingml/2006/table">
-            <a:tbl>
-              <a:tblPr firstRow="1" firstCol="1" bandRow="1">
-                <a:tableStyleId>{5940675A-B579-460E-94D1-54222C63F5DA}</a:tableStyleId>
-              </a:tblPr>
-              <a:tblGrid>
-                <a:gridCol w="3657600">
-                  <a:extLst>
-                    <a:ext uri="{9D8B030D-6E8A-4147-A177-3AD203B41FA5}">
-                      <a16:colId xmlns:a16="http://schemas.microsoft.com/office/drawing/2014/main" val="20000"/>
-                    </a:ext>
-                  </a:extLst>
-                </a:gridCol>
-                <a:gridCol w="3733800">
-                  <a:extLst>
-                    <a:ext uri="{9D8B030D-6E8A-4147-A177-3AD203B41FA5}">
-                      <a16:colId xmlns:a16="http://schemas.microsoft.com/office/drawing/2014/main" val="20001"/>
-                    </a:ext>
-                  </a:extLst>
-                </a:gridCol>
-              </a:tblGrid>
-              <a:tr h="478091">
-                <a:tc>
-                  <a:txBody>
-                    <a:bodyPr/>
-                    <a:lstStyle/>
-                    <a:p>
-                      <a:pPr marL="0" marR="0" algn="just">
-                        <a:spcBef>
-                          <a:spcPts val="0"/>
-                        </a:spcBef>
-                        <a:spcAft>
-                          <a:spcPts val="0"/>
-                        </a:spcAft>
-                      </a:pPr>
-                      <a:r>
-                        <a:rPr lang="en-US" sz="1600" dirty="0">
-                          <a:solidFill>
-                            <a:schemeClr val="bg1"/>
-                          </a:solidFill>
-                          <a:effectLst/>
-                          <a:latin typeface="Consolas" panose="020B0609020204030204" pitchFamily="49" charset="0"/>
-                          <a:ea typeface="宋体"/>
-                          <a:cs typeface="Consolas" panose="020B0609020204030204" pitchFamily="49" charset="0"/>
-                        </a:rPr>
-                        <a:t>Pseudocode</a:t>
-                      </a:r>
-                    </a:p>
-                  </a:txBody>
-                  <a:tcPr marL="68580" marR="68580" marT="0" marB="0">
-                    <a:solidFill>
-                      <a:schemeClr val="accent1"/>
-                    </a:solidFill>
-                  </a:tcPr>
-                </a:tc>
-                <a:tc>
-                  <a:txBody>
-                    <a:bodyPr/>
-                    <a:lstStyle/>
-                    <a:p>
-                      <a:pPr marL="0" marR="0" algn="just">
-                        <a:spcBef>
-                          <a:spcPts val="0"/>
-                        </a:spcBef>
-                        <a:spcAft>
-                          <a:spcPts val="0"/>
-                        </a:spcAft>
-                      </a:pPr>
-                      <a:r>
-                        <a:rPr lang="en-US" sz="1600" dirty="0">
-                          <a:solidFill>
-                            <a:schemeClr val="bg1"/>
-                          </a:solidFill>
-                          <a:effectLst/>
-                          <a:latin typeface="Consolas" panose="020B0609020204030204" pitchFamily="49" charset="0"/>
-                          <a:cs typeface="Consolas" panose="020B0609020204030204" pitchFamily="49" charset="0"/>
-                        </a:rPr>
-                        <a:t>Assembly Program w/Conditional Execution</a:t>
-                      </a:r>
-                      <a:endParaRPr lang="en-US" sz="1600" dirty="0">
-                        <a:solidFill>
-                          <a:schemeClr val="bg1"/>
-                        </a:solidFill>
-                        <a:effectLst/>
-                        <a:latin typeface="Consolas" panose="020B0609020204030204" pitchFamily="49" charset="0"/>
-                        <a:ea typeface="宋体"/>
-                        <a:cs typeface="Consolas" panose="020B0609020204030204" pitchFamily="49" charset="0"/>
-                      </a:endParaRPr>
-                    </a:p>
-                  </a:txBody>
-                  <a:tcPr marL="68580" marR="68580" marT="0" marB="0">
-                    <a:solidFill>
-                      <a:schemeClr val="accent1"/>
-                    </a:solidFill>
-                  </a:tcPr>
-                </a:tc>
-                <a:extLst>
-                  <a:ext uri="{0D108BD9-81ED-4DB2-BD59-A6C34878D82A}">
-                    <a16:rowId xmlns:a16="http://schemas.microsoft.com/office/drawing/2014/main" val="10000"/>
-                  </a:ext>
-                </a:extLst>
-              </a:tr>
-              <a:tr h="661628">
-                <a:tc>
-                  <a:txBody>
-                    <a:bodyPr/>
-                    <a:lstStyle/>
-                    <a:p>
-                      <a:r>
-                        <a:rPr lang="pt-BR" sz="1600" dirty="0">
-                          <a:effectLst/>
-                          <a:latin typeface="Consolas" panose="020B0609020204030204" pitchFamily="49" charset="0"/>
-                          <a:ea typeface="宋体"/>
-                          <a:cs typeface="Consolas" panose="020B0609020204030204" pitchFamily="49" charset="0"/>
-                        </a:rPr>
-                        <a:t>if (r0 != r1) r2 = r2 + r2</a:t>
-                      </a:r>
-                    </a:p>
-                    <a:p>
-                      <a:endParaRPr lang="en-US" sz="1600" dirty="0">
-                        <a:effectLst/>
-                        <a:latin typeface="Consolas" panose="020B0609020204030204" pitchFamily="49" charset="0"/>
-                        <a:ea typeface="宋体"/>
-                        <a:cs typeface="Consolas" panose="020B0609020204030204" pitchFamily="49" charset="0"/>
-                      </a:endParaRPr>
-                    </a:p>
-                  </a:txBody>
-                  <a:tcPr marL="68580" marR="68580" marT="0" marB="0"/>
-                </a:tc>
-                <a:tc>
-                  <a:txBody>
-                    <a:bodyPr/>
-                    <a:lstStyle/>
-                    <a:p>
-                      <a:pPr marL="0" marR="0" algn="just">
-                        <a:spcBef>
-                          <a:spcPts val="0"/>
-                        </a:spcBef>
-                        <a:spcAft>
-                          <a:spcPts val="0"/>
-                        </a:spcAft>
-                      </a:pPr>
-                      <a:r>
-                        <a:rPr lang="pt-BR" sz="1600" i="0" dirty="0">
-                          <a:effectLst/>
-                          <a:latin typeface="Consolas" panose="020B0609020204030204" pitchFamily="49" charset="0"/>
-                          <a:cs typeface="Consolas" panose="020B0609020204030204" pitchFamily="49" charset="0"/>
-                        </a:rPr>
-                        <a:t>CMP r0, r1   </a:t>
-                      </a:r>
-                    </a:p>
-                    <a:p>
-                      <a:pPr marL="0" marR="0" algn="just">
-                        <a:spcBef>
-                          <a:spcPts val="0"/>
-                        </a:spcBef>
-                        <a:spcAft>
-                          <a:spcPts val="0"/>
-                        </a:spcAft>
-                      </a:pPr>
-                      <a:r>
-                        <a:rPr lang="pt-BR" sz="1600" i="0" dirty="0">
-                          <a:effectLst/>
-                          <a:latin typeface="Consolas" panose="020B0609020204030204" pitchFamily="49" charset="0"/>
-                          <a:cs typeface="Consolas" panose="020B0609020204030204" pitchFamily="49" charset="0"/>
-                        </a:rPr>
-                        <a:t>ADDNE r2, r2, r2</a:t>
-                      </a:r>
-                    </a:p>
-                  </a:txBody>
-                  <a:tcPr marL="68580" marR="68580" marT="0" marB="0"/>
-                </a:tc>
-                <a:extLst>
-                  <a:ext uri="{0D108BD9-81ED-4DB2-BD59-A6C34878D82A}">
-                    <a16:rowId xmlns:a16="http://schemas.microsoft.com/office/drawing/2014/main" val="10001"/>
-                  </a:ext>
-                </a:extLst>
-              </a:tr>
-            </a:tbl>
-          </a:graphicData>
-        </a:graphic>
-      </p:graphicFrame>
-    </p:spTree>
-    <p:extLst>
-      <p:ext uri="{BB962C8B-B14F-4D97-AF65-F5344CB8AC3E}">
-        <p14:creationId xmlns:p14="http://schemas.microsoft.com/office/powerpoint/2010/main" val="3010226585"/>
-      </p:ext>
-    </p:extLst>
-  </p:cSld>
-  <p:clrMapOvr>
-    <a:masterClrMapping/>
-  </p:clrMapOvr>
-</p:sld>
-</file>
-
-<file path=ppt/slides/slide30.xml><?xml version="1.0" encoding="utf-8"?>
+<file path=ppt/slides/slide33.xml><?xml version="1.0" encoding="utf-8"?>
 <p:sld xmlns:a="http://schemas.openxmlformats.org/drawingml/2006/main" xmlns:r="http://schemas.openxmlformats.org/officeDocument/2006/relationships" xmlns:p="http://schemas.openxmlformats.org/presentationml/2006/main">
   <p:cSld>
     <p:spTree>
@@ -23613,7 +23876,7 @@
             <a:fld id="{EA7C8D44-3667-46F6-9772-CC52308E2A7F}" type="slidenum">
               <a:rPr kumimoji="0" lang="en-US" smtClean="0"/>
               <a:pPr/>
-              <a:t>30</a:t>
+              <a:t>33</a:t>
             </a:fld>
             <a:endParaRPr kumimoji="0" lang="en-US" dirty="0"/>
           </a:p>
@@ -23734,7 +23997,7 @@
 </p:sld>
 </file>
 
-<file path=ppt/slides/slide31.xml><?xml version="1.0" encoding="utf-8"?>
+<file path=ppt/slides/slide34.xml><?xml version="1.0" encoding="utf-8"?>
 <p:sld xmlns:a="http://schemas.openxmlformats.org/drawingml/2006/main" xmlns:r="http://schemas.openxmlformats.org/officeDocument/2006/relationships" xmlns:p="http://schemas.openxmlformats.org/presentationml/2006/main">
   <p:cSld>
     <p:spTree>
@@ -23803,7 +24066,7 @@
             <a:fld id="{EA7C8D44-3667-46F6-9772-CC52308E2A7F}" type="slidenum">
               <a:rPr kumimoji="0" lang="en-US" smtClean="0"/>
               <a:pPr/>
-              <a:t>31</a:t>
+              <a:t>34</a:t>
             </a:fld>
             <a:endParaRPr kumimoji="0" lang="en-US" dirty="0"/>
           </a:p>
@@ -24776,7 +25039,7 @@
 </p:sld>
 </file>
 
-<file path=ppt/slides/slide32.xml><?xml version="1.0" encoding="utf-8"?>
+<file path=ppt/slides/slide35.xml><?xml version="1.0" encoding="utf-8"?>
 <p:sld xmlns:a="http://schemas.openxmlformats.org/drawingml/2006/main" xmlns:r="http://schemas.openxmlformats.org/officeDocument/2006/relationships" xmlns:p="http://schemas.openxmlformats.org/presentationml/2006/main">
   <p:cSld>
     <p:spTree>
@@ -24851,7 +25114,7 @@
             <a:fld id="{EA7C8D44-3667-46F6-9772-CC52308E2A7F}" type="slidenum">
               <a:rPr kumimoji="0" lang="en-US" smtClean="0"/>
               <a:pPr/>
-              <a:t>32</a:t>
+              <a:t>35</a:t>
             </a:fld>
             <a:endParaRPr kumimoji="0" lang="en-US" dirty="0"/>
           </a:p>
@@ -25957,7 +26220,7 @@
 </p:sld>
 </file>
 
-<file path=ppt/slides/slide33.xml><?xml version="1.0" encoding="utf-8"?>
+<file path=ppt/slides/slide36.xml><?xml version="1.0" encoding="utf-8"?>
 <p:sld xmlns:a="http://schemas.openxmlformats.org/drawingml/2006/main" xmlns:r="http://schemas.openxmlformats.org/officeDocument/2006/relationships" xmlns:p="http://schemas.openxmlformats.org/presentationml/2006/main">
   <p:cSld>
     <p:spTree>
@@ -26032,7 +26295,7 @@
             <a:fld id="{EA7C8D44-3667-46F6-9772-CC52308E2A7F}" type="slidenum">
               <a:rPr kumimoji="0" lang="en-US" smtClean="0"/>
               <a:pPr/>
-              <a:t>33</a:t>
+              <a:t>36</a:t>
             </a:fld>
             <a:endParaRPr kumimoji="0" lang="en-US" dirty="0"/>
           </a:p>
@@ -26385,7 +26648,7 @@
 </p:sld>
 </file>
 
-<file path=ppt/slides/slide34.xml><?xml version="1.0" encoding="utf-8"?>
+<file path=ppt/slides/slide37.xml><?xml version="1.0" encoding="utf-8"?>
 <p:sld xmlns:a="http://schemas.openxmlformats.org/drawingml/2006/main" xmlns:r="http://schemas.openxmlformats.org/officeDocument/2006/relationships" xmlns:p="http://schemas.openxmlformats.org/presentationml/2006/main">
   <p:cSld>
     <p:spTree>
@@ -26460,7 +26723,7 @@
             <a:fld id="{EA7C8D44-3667-46F6-9772-CC52308E2A7F}" type="slidenum">
               <a:rPr kumimoji="0" lang="en-US" smtClean="0"/>
               <a:pPr/>
-              <a:t>34</a:t>
+              <a:t>37</a:t>
             </a:fld>
             <a:endParaRPr kumimoji="0" lang="en-US" dirty="0"/>
           </a:p>

--- a/PPTs/Ch6_ARM_Control_Flow_Exercises_ANS.pptx
+++ b/PPTs/Ch6_ARM_Control_Flow_Exercises_ANS.pptx
@@ -5,7 +5,7 @@
     <p:sldMasterId id="2147483660" r:id="rId1"/>
   </p:sldMasterIdLst>
   <p:notesMasterIdLst>
-    <p:notesMasterId r:id="rId39"/>
+    <p:notesMasterId r:id="rId40"/>
   </p:notesMasterIdLst>
   <p:sldIdLst>
     <p:sldId id="256" r:id="rId2"/>
@@ -29,22 +29,23 @@
     <p:sldId id="386" r:id="rId20"/>
     <p:sldId id="361" r:id="rId21"/>
     <p:sldId id="362" r:id="rId22"/>
-    <p:sldId id="363" r:id="rId23"/>
-    <p:sldId id="364" r:id="rId24"/>
-    <p:sldId id="388" r:id="rId25"/>
-    <p:sldId id="387" r:id="rId26"/>
-    <p:sldId id="389" r:id="rId27"/>
-    <p:sldId id="368" r:id="rId28"/>
-    <p:sldId id="370" r:id="rId29"/>
-    <p:sldId id="372" r:id="rId30"/>
-    <p:sldId id="373" r:id="rId31"/>
-    <p:sldId id="366" r:id="rId32"/>
-    <p:sldId id="367" r:id="rId33"/>
-    <p:sldId id="287" r:id="rId34"/>
-    <p:sldId id="357" r:id="rId35"/>
-    <p:sldId id="358" r:id="rId36"/>
-    <p:sldId id="359" r:id="rId37"/>
-    <p:sldId id="360" r:id="rId38"/>
+    <p:sldId id="390" r:id="rId23"/>
+    <p:sldId id="363" r:id="rId24"/>
+    <p:sldId id="364" r:id="rId25"/>
+    <p:sldId id="388" r:id="rId26"/>
+    <p:sldId id="387" r:id="rId27"/>
+    <p:sldId id="389" r:id="rId28"/>
+    <p:sldId id="368" r:id="rId29"/>
+    <p:sldId id="370" r:id="rId30"/>
+    <p:sldId id="372" r:id="rId31"/>
+    <p:sldId id="373" r:id="rId32"/>
+    <p:sldId id="366" r:id="rId33"/>
+    <p:sldId id="367" r:id="rId34"/>
+    <p:sldId id="287" r:id="rId35"/>
+    <p:sldId id="357" r:id="rId36"/>
+    <p:sldId id="358" r:id="rId37"/>
+    <p:sldId id="359" r:id="rId38"/>
+    <p:sldId id="360" r:id="rId39"/>
   </p:sldIdLst>
   <p:sldSz cx="9144000" cy="6858000" type="screen4x3"/>
   <p:notesSz cx="6950075" cy="9236075"/>
@@ -165,7 +166,7 @@
 <file path=ppt/revisionInfo.xml><?xml version="1.0" encoding="utf-8"?>
 <p1510:revInfo xmlns:a="http://schemas.openxmlformats.org/drawingml/2006/main" xmlns:r="http://schemas.openxmlformats.org/officeDocument/2006/relationships" xmlns:p1510="http://schemas.microsoft.com/office/powerpoint/2015/10/main">
   <p1510:revLst>
-    <p1510:client id="{1C1BE7D0-C766-4929-9518-A803B162FB6C}" v="15" dt="2025-11-13T22:55:10.406"/>
+    <p1510:client id="{1C1BE7D0-C766-4929-9518-A803B162FB6C}" v="26" dt="2025-11-14T00:24:15.021"/>
   </p1510:revLst>
 </p1510:revInfo>
 </file>
@@ -175,10 +176,231 @@
   <pc:docChgLst>
     <pc:chgData name="Zonghua Gu" userId="9a7e1853e1951ef5" providerId="LiveId" clId="{CF1FAA12-072C-4ED5-BA76-0FFFAEFDB88A}"/>
     <pc:docChg chg="undo redo custSel addSld delSld modSld sldOrd">
-      <pc:chgData name="Zonghua Gu" userId="9a7e1853e1951ef5" providerId="LiveId" clId="{CF1FAA12-072C-4ED5-BA76-0FFFAEFDB88A}" dt="2025-11-13T22:54:54.319" v="4916" actId="20577"/>
+      <pc:chgData name="Zonghua Gu" userId="9a7e1853e1951ef5" providerId="LiveId" clId="{CF1FAA12-072C-4ED5-BA76-0FFFAEFDB88A}" dt="2025-11-14T00:24:28.880" v="5832" actId="20577"/>
       <pc:docMkLst>
         <pc:docMk/>
       </pc:docMkLst>
+      <pc:sldChg chg="modSp mod">
+        <pc:chgData name="Zonghua Gu" userId="9a7e1853e1951ef5" providerId="LiveId" clId="{CF1FAA12-072C-4ED5-BA76-0FFFAEFDB88A}" dt="2025-11-13T23:37:16.362" v="5095" actId="6549"/>
+        <pc:sldMkLst>
+          <pc:docMk/>
+          <pc:sldMk cId="407878083" sldId="257"/>
+        </pc:sldMkLst>
+        <pc:spChg chg="mod">
+          <ac:chgData name="Zonghua Gu" userId="9a7e1853e1951ef5" providerId="LiveId" clId="{CF1FAA12-072C-4ED5-BA76-0FFFAEFDB88A}" dt="2025-11-13T23:37:16.362" v="5095" actId="6549"/>
+          <ac:spMkLst>
+            <pc:docMk/>
+            <pc:sldMk cId="407878083" sldId="257"/>
+            <ac:spMk id="4" creationId="{6E242E21-1FD3-CB05-AD91-461DFAA4741E}"/>
+          </ac:spMkLst>
+        </pc:spChg>
+      </pc:sldChg>
+      <pc:sldChg chg="modSp mod">
+        <pc:chgData name="Zonghua Gu" userId="9a7e1853e1951ef5" providerId="LiveId" clId="{CF1FAA12-072C-4ED5-BA76-0FFFAEFDB88A}" dt="2025-11-13T23:31:07.954" v="4928" actId="20577"/>
+        <pc:sldMkLst>
+          <pc:docMk/>
+          <pc:sldMk cId="188395404" sldId="353"/>
+        </pc:sldMkLst>
+        <pc:spChg chg="mod">
+          <ac:chgData name="Zonghua Gu" userId="9a7e1853e1951ef5" providerId="LiveId" clId="{CF1FAA12-072C-4ED5-BA76-0FFFAEFDB88A}" dt="2025-11-13T23:31:07.954" v="4928" actId="20577"/>
+          <ac:spMkLst>
+            <pc:docMk/>
+            <pc:sldMk cId="188395404" sldId="353"/>
+            <ac:spMk id="9" creationId="{098531A2-BA43-5E4B-4A07-833BA3447510}"/>
+          </ac:spMkLst>
+        </pc:spChg>
+        <pc:graphicFrameChg chg="modGraphic">
+          <ac:chgData name="Zonghua Gu" userId="9a7e1853e1951ef5" providerId="LiveId" clId="{CF1FAA12-072C-4ED5-BA76-0FFFAEFDB88A}" dt="2025-11-13T23:30:55.718" v="4918" actId="20577"/>
+          <ac:graphicFrameMkLst>
+            <pc:docMk/>
+            <pc:sldMk cId="188395404" sldId="353"/>
+            <ac:graphicFrameMk id="5" creationId="{127BD2A0-832C-7F1E-86CB-33A992AE5B67}"/>
+          </ac:graphicFrameMkLst>
+        </pc:graphicFrameChg>
+      </pc:sldChg>
+      <pc:sldChg chg="modSp mod">
+        <pc:chgData name="Zonghua Gu" userId="9a7e1853e1951ef5" providerId="LiveId" clId="{CF1FAA12-072C-4ED5-BA76-0FFFAEFDB88A}" dt="2025-11-13T23:36:23.780" v="5094" actId="20577"/>
+        <pc:sldMkLst>
+          <pc:docMk/>
+          <pc:sldMk cId="3013293955" sldId="355"/>
+        </pc:sldMkLst>
+        <pc:spChg chg="mod">
+          <ac:chgData name="Zonghua Gu" userId="9a7e1853e1951ef5" providerId="LiveId" clId="{CF1FAA12-072C-4ED5-BA76-0FFFAEFDB88A}" dt="2025-11-13T23:36:23.780" v="5094" actId="20577"/>
+          <ac:spMkLst>
+            <pc:docMk/>
+            <pc:sldMk cId="3013293955" sldId="355"/>
+            <ac:spMk id="4" creationId="{BDC308AC-7565-4459-9627-04CB00781A6A}"/>
+          </ac:spMkLst>
+        </pc:spChg>
+      </pc:sldChg>
+      <pc:sldChg chg="modSp mod">
+        <pc:chgData name="Zonghua Gu" userId="9a7e1853e1951ef5" providerId="LiveId" clId="{CF1FAA12-072C-4ED5-BA76-0FFFAEFDB88A}" dt="2025-11-13T23:39:59.185" v="5164" actId="20577"/>
+        <pc:sldMkLst>
+          <pc:docMk/>
+          <pc:sldMk cId="2876358127" sldId="356"/>
+        </pc:sldMkLst>
+        <pc:spChg chg="mod">
+          <ac:chgData name="Zonghua Gu" userId="9a7e1853e1951ef5" providerId="LiveId" clId="{CF1FAA12-072C-4ED5-BA76-0FFFAEFDB88A}" dt="2025-11-13T23:37:27.517" v="5097" actId="27636"/>
+          <ac:spMkLst>
+            <pc:docMk/>
+            <pc:sldMk cId="2876358127" sldId="356"/>
+            <ac:spMk id="9" creationId="{568A4D5B-16CF-C913-A366-B6CD13B41D2B}"/>
+          </ac:spMkLst>
+        </pc:spChg>
+        <pc:graphicFrameChg chg="modGraphic">
+          <ac:chgData name="Zonghua Gu" userId="9a7e1853e1951ef5" providerId="LiveId" clId="{CF1FAA12-072C-4ED5-BA76-0FFFAEFDB88A}" dt="2025-11-13T23:39:59.185" v="5164" actId="20577"/>
+          <ac:graphicFrameMkLst>
+            <pc:docMk/>
+            <pc:sldMk cId="2876358127" sldId="356"/>
+            <ac:graphicFrameMk id="5" creationId="{B81DD544-8C21-2C0D-D8C9-39D776DE6162}"/>
+          </ac:graphicFrameMkLst>
+        </pc:graphicFrameChg>
+      </pc:sldChg>
+      <pc:sldChg chg="addSp delSp modSp mod">
+        <pc:chgData name="Zonghua Gu" userId="9a7e1853e1951ef5" providerId="LiveId" clId="{CF1FAA12-072C-4ED5-BA76-0FFFAEFDB88A}" dt="2025-11-14T00:22:57.732" v="5803" actId="21"/>
+        <pc:sldMkLst>
+          <pc:docMk/>
+          <pc:sldMk cId="1907292877" sldId="362"/>
+        </pc:sldMkLst>
+        <pc:spChg chg="del">
+          <ac:chgData name="Zonghua Gu" userId="9a7e1853e1951ef5" providerId="LiveId" clId="{CF1FAA12-072C-4ED5-BA76-0FFFAEFDB88A}" dt="2025-11-14T00:20:23.672" v="5789" actId="478"/>
+          <ac:spMkLst>
+            <pc:docMk/>
+            <pc:sldMk cId="1907292877" sldId="362"/>
+            <ac:spMk id="3" creationId="{C1EDA5D2-83BD-3B87-4DC5-348EFA91B5FC}"/>
+          </ac:spMkLst>
+        </pc:spChg>
+        <pc:spChg chg="del">
+          <ac:chgData name="Zonghua Gu" userId="9a7e1853e1951ef5" providerId="LiveId" clId="{CF1FAA12-072C-4ED5-BA76-0FFFAEFDB88A}" dt="2025-11-14T00:20:10.251" v="5784" actId="478"/>
+          <ac:spMkLst>
+            <pc:docMk/>
+            <pc:sldMk cId="1907292877" sldId="362"/>
+            <ac:spMk id="4" creationId="{BEA62B72-8CD3-1C22-B422-E7966ED0294E}"/>
+          </ac:spMkLst>
+        </pc:spChg>
+        <pc:graphicFrameChg chg="modGraphic">
+          <ac:chgData name="Zonghua Gu" userId="9a7e1853e1951ef5" providerId="LiveId" clId="{CF1FAA12-072C-4ED5-BA76-0FFFAEFDB88A}" dt="2025-11-14T00:20:06.998" v="5783" actId="6549"/>
+          <ac:graphicFrameMkLst>
+            <pc:docMk/>
+            <pc:sldMk cId="1907292877" sldId="362"/>
+            <ac:graphicFrameMk id="5" creationId="{CE0A734A-5388-0D64-9AF4-4B261562DC3B}"/>
+          </ac:graphicFrameMkLst>
+        </pc:graphicFrameChg>
+        <pc:graphicFrameChg chg="add del mod modGraphic">
+          <ac:chgData name="Zonghua Gu" userId="9a7e1853e1951ef5" providerId="LiveId" clId="{CF1FAA12-072C-4ED5-BA76-0FFFAEFDB88A}" dt="2025-11-14T00:22:57.732" v="5803" actId="21"/>
+          <ac:graphicFrameMkLst>
+            <pc:docMk/>
+            <pc:sldMk cId="1907292877" sldId="362"/>
+            <ac:graphicFrameMk id="6" creationId="{B8E14D9C-0132-5D4B-D5F1-3CEDF2732D54}"/>
+          </ac:graphicFrameMkLst>
+        </pc:graphicFrameChg>
+      </pc:sldChg>
+      <pc:sldChg chg="modSp mod">
+        <pc:chgData name="Zonghua Gu" userId="9a7e1853e1951ef5" providerId="LiveId" clId="{CF1FAA12-072C-4ED5-BA76-0FFFAEFDB88A}" dt="2025-11-13T23:45:36.575" v="5228" actId="20577"/>
+        <pc:sldMkLst>
+          <pc:docMk/>
+          <pc:sldMk cId="3582392412" sldId="371"/>
+        </pc:sldMkLst>
+        <pc:graphicFrameChg chg="mod modGraphic">
+          <ac:chgData name="Zonghua Gu" userId="9a7e1853e1951ef5" providerId="LiveId" clId="{CF1FAA12-072C-4ED5-BA76-0FFFAEFDB88A}" dt="2025-11-13T23:45:36.575" v="5228" actId="20577"/>
+          <ac:graphicFrameMkLst>
+            <pc:docMk/>
+            <pc:sldMk cId="3582392412" sldId="371"/>
+            <ac:graphicFrameMk id="5" creationId="{1470E29F-21CC-744B-D4B5-04038FD22801}"/>
+          </ac:graphicFrameMkLst>
+        </pc:graphicFrameChg>
+      </pc:sldChg>
+      <pc:sldChg chg="modSp mod">
+        <pc:chgData name="Zonghua Gu" userId="9a7e1853e1951ef5" providerId="LiveId" clId="{CF1FAA12-072C-4ED5-BA76-0FFFAEFDB88A}" dt="2025-11-14T00:00:59.080" v="5472" actId="20577"/>
+        <pc:sldMkLst>
+          <pc:docMk/>
+          <pc:sldMk cId="824643333" sldId="374"/>
+        </pc:sldMkLst>
+        <pc:graphicFrameChg chg="modGraphic">
+          <ac:chgData name="Zonghua Gu" userId="9a7e1853e1951ef5" providerId="LiveId" clId="{CF1FAA12-072C-4ED5-BA76-0FFFAEFDB88A}" dt="2025-11-14T00:00:59.080" v="5472" actId="20577"/>
+          <ac:graphicFrameMkLst>
+            <pc:docMk/>
+            <pc:sldMk cId="824643333" sldId="374"/>
+            <ac:graphicFrameMk id="5" creationId="{8C28BAFB-31B9-50D7-C887-1C2776C89294}"/>
+          </ac:graphicFrameMkLst>
+        </pc:graphicFrameChg>
+      </pc:sldChg>
+      <pc:sldChg chg="modSp mod">
+        <pc:chgData name="Zonghua Gu" userId="9a7e1853e1951ef5" providerId="LiveId" clId="{CF1FAA12-072C-4ED5-BA76-0FFFAEFDB88A}" dt="2025-11-13T23:48:14.289" v="5230" actId="20577"/>
+        <pc:sldMkLst>
+          <pc:docMk/>
+          <pc:sldMk cId="2699733170" sldId="375"/>
+        </pc:sldMkLst>
+        <pc:graphicFrameChg chg="modGraphic">
+          <ac:chgData name="Zonghua Gu" userId="9a7e1853e1951ef5" providerId="LiveId" clId="{CF1FAA12-072C-4ED5-BA76-0FFFAEFDB88A}" dt="2025-11-13T23:48:14.289" v="5230" actId="20577"/>
+          <ac:graphicFrameMkLst>
+            <pc:docMk/>
+            <pc:sldMk cId="2699733170" sldId="375"/>
+            <ac:graphicFrameMk id="5" creationId="{7DB9A0A3-9301-65C3-B5C6-8AEF5723942A}"/>
+          </ac:graphicFrameMkLst>
+        </pc:graphicFrameChg>
+      </pc:sldChg>
+      <pc:sldChg chg="modSp mod">
+        <pc:chgData name="Zonghua Gu" userId="9a7e1853e1951ef5" providerId="LiveId" clId="{CF1FAA12-072C-4ED5-BA76-0FFFAEFDB88A}" dt="2025-11-14T00:14:51.942" v="5733" actId="20577"/>
+        <pc:sldMkLst>
+          <pc:docMk/>
+          <pc:sldMk cId="3558794685" sldId="379"/>
+        </pc:sldMkLst>
+        <pc:spChg chg="mod">
+          <ac:chgData name="Zonghua Gu" userId="9a7e1853e1951ef5" providerId="LiveId" clId="{CF1FAA12-072C-4ED5-BA76-0FFFAEFDB88A}" dt="2025-11-14T00:14:51.942" v="5733" actId="20577"/>
+          <ac:spMkLst>
+            <pc:docMk/>
+            <pc:sldMk cId="3558794685" sldId="379"/>
+            <ac:spMk id="7" creationId="{4133C7BF-FB1E-BE65-9F1D-432DB1AEB47E}"/>
+          </ac:spMkLst>
+        </pc:spChg>
+      </pc:sldChg>
+      <pc:sldChg chg="modSp mod">
+        <pc:chgData name="Zonghua Gu" userId="9a7e1853e1951ef5" providerId="LiveId" clId="{CF1FAA12-072C-4ED5-BA76-0FFFAEFDB88A}" dt="2025-11-13T23:59:35.536" v="5470" actId="1076"/>
+        <pc:sldMkLst>
+          <pc:docMk/>
+          <pc:sldMk cId="3938986292" sldId="381"/>
+        </pc:sldMkLst>
+        <pc:spChg chg="mod">
+          <ac:chgData name="Zonghua Gu" userId="9a7e1853e1951ef5" providerId="LiveId" clId="{CF1FAA12-072C-4ED5-BA76-0FFFAEFDB88A}" dt="2025-11-13T23:59:35.536" v="5470" actId="1076"/>
+          <ac:spMkLst>
+            <pc:docMk/>
+            <pc:sldMk cId="3938986292" sldId="381"/>
+            <ac:spMk id="7" creationId="{E2AFC00D-8A73-6EFC-73E3-327855EF4CC4}"/>
+          </ac:spMkLst>
+        </pc:spChg>
+        <pc:graphicFrameChg chg="modGraphic">
+          <ac:chgData name="Zonghua Gu" userId="9a7e1853e1951ef5" providerId="LiveId" clId="{CF1FAA12-072C-4ED5-BA76-0FFFAEFDB88A}" dt="2025-11-13T23:56:47.573" v="5329" actId="207"/>
+          <ac:graphicFrameMkLst>
+            <pc:docMk/>
+            <pc:sldMk cId="3938986292" sldId="381"/>
+            <ac:graphicFrameMk id="5" creationId="{7CA5E7D5-B204-9C0A-BCB8-C59AA195F3F5}"/>
+          </ac:graphicFrameMkLst>
+        </pc:graphicFrameChg>
+        <pc:graphicFrameChg chg="mod modGraphic">
+          <ac:chgData name="Zonghua Gu" userId="9a7e1853e1951ef5" providerId="LiveId" clId="{CF1FAA12-072C-4ED5-BA76-0FFFAEFDB88A}" dt="2025-11-13T23:59:06.910" v="5457" actId="1076"/>
+          <ac:graphicFrameMkLst>
+            <pc:docMk/>
+            <pc:sldMk cId="3938986292" sldId="381"/>
+            <ac:graphicFrameMk id="6" creationId="{3F7517C0-9626-838C-2609-AAAE742BE8CA}"/>
+          </ac:graphicFrameMkLst>
+        </pc:graphicFrameChg>
+      </pc:sldChg>
+      <pc:sldChg chg="modSp mod">
+        <pc:chgData name="Zonghua Gu" userId="9a7e1853e1951ef5" providerId="LiveId" clId="{CF1FAA12-072C-4ED5-BA76-0FFFAEFDB88A}" dt="2025-11-14T00:17:51.465" v="5782" actId="20577"/>
+        <pc:sldMkLst>
+          <pc:docMk/>
+          <pc:sldMk cId="3700392889" sldId="386"/>
+        </pc:sldMkLst>
+        <pc:graphicFrameChg chg="modGraphic">
+          <ac:chgData name="Zonghua Gu" userId="9a7e1853e1951ef5" providerId="LiveId" clId="{CF1FAA12-072C-4ED5-BA76-0FFFAEFDB88A}" dt="2025-11-14T00:17:51.465" v="5782" actId="20577"/>
+          <ac:graphicFrameMkLst>
+            <pc:docMk/>
+            <pc:sldMk cId="3700392889" sldId="386"/>
+            <ac:graphicFrameMk id="5" creationId="{6531D947-33A4-180B-7D14-41430240EACC}"/>
+          </ac:graphicFrameMkLst>
+        </pc:graphicFrameChg>
+      </pc:sldChg>
       <pc:sldChg chg="addSp delSp modSp add mod">
         <pc:chgData name="Zonghua Gu" userId="9a7e1853e1951ef5" providerId="LiveId" clId="{CF1FAA12-072C-4ED5-BA76-0FFFAEFDB88A}" dt="2025-11-13T22:51:00.514" v="4840" actId="478"/>
         <pc:sldMkLst>
@@ -279,6 +501,37 @@
             <ac:spMk id="4" creationId="{30D573E4-08C5-4EFD-D763-43D45C86FFE0}"/>
           </ac:spMkLst>
         </pc:spChg>
+      </pc:sldChg>
+      <pc:sldChg chg="addSp modSp new mod">
+        <pc:chgData name="Zonghua Gu" userId="9a7e1853e1951ef5" providerId="LiveId" clId="{CF1FAA12-072C-4ED5-BA76-0FFFAEFDB88A}" dt="2025-11-14T00:24:28.880" v="5832" actId="20577"/>
+        <pc:sldMkLst>
+          <pc:docMk/>
+          <pc:sldMk cId="490249550" sldId="390"/>
+        </pc:sldMkLst>
+        <pc:spChg chg="mod">
+          <ac:chgData name="Zonghua Gu" userId="9a7e1853e1951ef5" providerId="LiveId" clId="{CF1FAA12-072C-4ED5-BA76-0FFFAEFDB88A}" dt="2025-11-14T00:23:15.970" v="5807"/>
+          <ac:spMkLst>
+            <pc:docMk/>
+            <pc:sldMk cId="490249550" sldId="390"/>
+            <ac:spMk id="2" creationId="{1AEC2A59-F038-62BC-DB24-F3767D28666A}"/>
+          </ac:spMkLst>
+        </pc:spChg>
+        <pc:spChg chg="mod">
+          <ac:chgData name="Zonghua Gu" userId="9a7e1853e1951ef5" providerId="LiveId" clId="{CF1FAA12-072C-4ED5-BA76-0FFFAEFDB88A}" dt="2025-11-14T00:24:28.880" v="5832" actId="20577"/>
+          <ac:spMkLst>
+            <pc:docMk/>
+            <pc:sldMk cId="490249550" sldId="390"/>
+            <ac:spMk id="4" creationId="{9DEFF33C-95D3-FC49-619D-245E0019906B}"/>
+          </ac:spMkLst>
+        </pc:spChg>
+        <pc:graphicFrameChg chg="add mod">
+          <ac:chgData name="Zonghua Gu" userId="9a7e1853e1951ef5" providerId="LiveId" clId="{CF1FAA12-072C-4ED5-BA76-0FFFAEFDB88A}" dt="2025-11-14T00:23:09.153" v="5806" actId="1076"/>
+          <ac:graphicFrameMkLst>
+            <pc:docMk/>
+            <pc:sldMk cId="490249550" sldId="390"/>
+            <ac:graphicFrameMk id="6" creationId="{B8E14D9C-0132-5D4B-D5F1-3CEDF2732D54}"/>
+          </ac:graphicFrameMkLst>
+        </pc:graphicFrameChg>
       </pc:sldChg>
     </pc:docChg>
   </pc:docChgLst>
@@ -1167,6 +1420,91 @@
   <p:cSld>
     <p:spTree>
       <p:nvGrpSpPr>
+        <p:cNvPr id="1" name=""/>
+        <p:cNvGrpSpPr/>
+        <p:nvPr/>
+      </p:nvGrpSpPr>
+      <p:grpSpPr>
+        <a:xfrm>
+          <a:off x="0" y="0"/>
+          <a:ext cx="0" cy="0"/>
+          <a:chOff x="0" y="0"/>
+          <a:chExt cx="0" cy="0"/>
+        </a:xfrm>
+      </p:grpSpPr>
+      <p:sp>
+        <p:nvSpPr>
+          <p:cNvPr id="2" name="Slide Image Placeholder 1"/>
+          <p:cNvSpPr>
+            <a:spLocks noGrp="1" noRot="1" noChangeAspect="1"/>
+          </p:cNvSpPr>
+          <p:nvPr>
+            <p:ph type="sldImg"/>
+          </p:nvPr>
+        </p:nvSpPr>
+        <p:spPr/>
+      </p:sp>
+      <p:sp>
+        <p:nvSpPr>
+          <p:cNvPr id="3" name="Notes Placeholder 2"/>
+          <p:cNvSpPr>
+            <a:spLocks noGrp="1"/>
+          </p:cNvSpPr>
+          <p:nvPr>
+            <p:ph type="body" idx="1"/>
+          </p:nvPr>
+        </p:nvSpPr>
+        <p:spPr/>
+        <p:txBody>
+          <a:bodyPr/>
+          <a:lstStyle/>
+          <a:p>
+            <a:endParaRPr lang="en-US" dirty="0"/>
+          </a:p>
+        </p:txBody>
+      </p:sp>
+      <p:sp>
+        <p:nvSpPr>
+          <p:cNvPr id="4" name="Slide Number Placeholder 3"/>
+          <p:cNvSpPr>
+            <a:spLocks noGrp="1"/>
+          </p:cNvSpPr>
+          <p:nvPr>
+            <p:ph type="sldNum" sz="quarter" idx="5"/>
+          </p:nvPr>
+        </p:nvSpPr>
+        <p:spPr/>
+        <p:txBody>
+          <a:bodyPr/>
+          <a:lstStyle/>
+          <a:p>
+            <a:fld id="{2D71AD5F-E36F-46B9-A99B-7B025244359D}" type="slidenum">
+              <a:rPr lang="en-US" smtClean="0"/>
+              <a:pPr/>
+              <a:t>21</a:t>
+            </a:fld>
+            <a:endParaRPr lang="en-US"/>
+          </a:p>
+        </p:txBody>
+      </p:sp>
+    </p:spTree>
+    <p:extLst>
+      <p:ext uri="{BB962C8B-B14F-4D97-AF65-F5344CB8AC3E}">
+        <p14:creationId xmlns:p14="http://schemas.microsoft.com/office/powerpoint/2010/main" val="3754894183"/>
+      </p:ext>
+    </p:extLst>
+  </p:cSld>
+  <p:clrMapOvr>
+    <a:masterClrMapping/>
+  </p:clrMapOvr>
+</p:notes>
+</file>
+
+<file path=ppt/notesSlides/notesSlide13.xml><?xml version="1.0" encoding="utf-8"?>
+<p:notes xmlns:a="http://schemas.openxmlformats.org/drawingml/2006/main" xmlns:r="http://schemas.openxmlformats.org/officeDocument/2006/relationships" xmlns:p="http://schemas.openxmlformats.org/presentationml/2006/main">
+  <p:cSld>
+    <p:spTree>
+      <p:nvGrpSpPr>
         <p:cNvPr id="1" name="">
           <a:extLst>
             <a:ext uri="{FF2B5EF4-FFF2-40B4-BE49-F238E27FC236}">
@@ -1260,7 +1598,7 @@
             <a:fld id="{2D71AD5F-E36F-46B9-A99B-7B025244359D}" type="slidenum">
               <a:rPr lang="en-US" smtClean="0"/>
               <a:pPr/>
-              <a:t>24</a:t>
+              <a:t>25</a:t>
             </a:fld>
             <a:endParaRPr lang="en-US"/>
           </a:p>
@@ -1270,99 +1608,6 @@
     <p:extLst>
       <p:ext uri="{BB962C8B-B14F-4D97-AF65-F5344CB8AC3E}">
         <p14:creationId xmlns:p14="http://schemas.microsoft.com/office/powerpoint/2010/main" val="1160230142"/>
-      </p:ext>
-    </p:extLst>
-  </p:cSld>
-  <p:clrMapOvr>
-    <a:masterClrMapping/>
-  </p:clrMapOvr>
-</p:notes>
-</file>
-
-<file path=ppt/notesSlides/notesSlide13.xml><?xml version="1.0" encoding="utf-8"?>
-<p:notes xmlns:a="http://schemas.openxmlformats.org/drawingml/2006/main" xmlns:r="http://schemas.openxmlformats.org/officeDocument/2006/relationships" xmlns:p="http://schemas.openxmlformats.org/presentationml/2006/main">
-  <p:cSld>
-    <p:spTree>
-      <p:nvGrpSpPr>
-        <p:cNvPr id="1" name=""/>
-        <p:cNvGrpSpPr/>
-        <p:nvPr/>
-      </p:nvGrpSpPr>
-      <p:grpSpPr>
-        <a:xfrm>
-          <a:off x="0" y="0"/>
-          <a:ext cx="0" cy="0"/>
-          <a:chOff x="0" y="0"/>
-          <a:chExt cx="0" cy="0"/>
-        </a:xfrm>
-      </p:grpSpPr>
-      <p:sp>
-        <p:nvSpPr>
-          <p:cNvPr id="2" name="Slide Image Placeholder 1"/>
-          <p:cNvSpPr>
-            <a:spLocks noGrp="1" noRot="1" noChangeAspect="1"/>
-          </p:cNvSpPr>
-          <p:nvPr>
-            <p:ph type="sldImg"/>
-          </p:nvPr>
-        </p:nvSpPr>
-        <p:spPr/>
-      </p:sp>
-      <p:sp>
-        <p:nvSpPr>
-          <p:cNvPr id="3" name="Notes Placeholder 2"/>
-          <p:cNvSpPr>
-            <a:spLocks noGrp="1"/>
-          </p:cNvSpPr>
-          <p:nvPr>
-            <p:ph type="body" idx="1"/>
-          </p:nvPr>
-        </p:nvSpPr>
-        <p:spPr/>
-        <p:txBody>
-          <a:bodyPr/>
-          <a:lstStyle/>
-          <a:p>
-            <a:r>
-              <a:rPr lang="pt-BR" sz="1200" i="0" dirty="0">
-                <a:effectLst/>
-                <a:latin typeface="Consolas" panose="020B0609020204030204" pitchFamily="49" charset="0"/>
-                <a:cs typeface="Consolas" panose="020B0609020204030204" pitchFamily="49" charset="0"/>
-              </a:rPr>
-              <a:t> bx lr</a:t>
-            </a:r>
-            <a:endParaRPr lang="en-US" dirty="0"/>
-          </a:p>
-        </p:txBody>
-      </p:sp>
-      <p:sp>
-        <p:nvSpPr>
-          <p:cNvPr id="4" name="Slide Number Placeholder 3"/>
-          <p:cNvSpPr>
-            <a:spLocks noGrp="1"/>
-          </p:cNvSpPr>
-          <p:nvPr>
-            <p:ph type="sldNum" sz="quarter" idx="5"/>
-          </p:nvPr>
-        </p:nvSpPr>
-        <p:spPr/>
-        <p:txBody>
-          <a:bodyPr/>
-          <a:lstStyle/>
-          <a:p>
-            <a:fld id="{2D71AD5F-E36F-46B9-A99B-7B025244359D}" type="slidenum">
-              <a:rPr lang="en-US" smtClean="0"/>
-              <a:pPr/>
-              <a:t>25</a:t>
-            </a:fld>
-            <a:endParaRPr lang="en-US"/>
-          </a:p>
-        </p:txBody>
-      </p:sp>
-    </p:spTree>
-    <p:extLst>
-      <p:ext uri="{BB962C8B-B14F-4D97-AF65-F5344CB8AC3E}">
-        <p14:creationId xmlns:p14="http://schemas.microsoft.com/office/powerpoint/2010/main" val="1438093478"/>
       </p:ext>
     </p:extLst>
   </p:cSld>
@@ -1417,9 +1662,14 @@
           <a:lstStyle/>
           <a:p>
             <a:r>
-              <a:rPr lang="en-US" dirty="0"/>
-              <a:t>https://thinkingeek.com/2013/01/20/arm-assembler-raspberry-pi-chapter-6/</a:t>
-            </a:r>
+              <a:rPr lang="pt-BR" sz="1200" i="0" dirty="0">
+                <a:effectLst/>
+                <a:latin typeface="Consolas" panose="020B0609020204030204" pitchFamily="49" charset="0"/>
+                <a:cs typeface="Consolas" panose="020B0609020204030204" pitchFamily="49" charset="0"/>
+              </a:rPr>
+              <a:t> bx lr</a:t>
+            </a:r>
+            <a:endParaRPr lang="en-US" dirty="0"/>
           </a:p>
         </p:txBody>
       </p:sp>
@@ -1450,6 +1700,94 @@
     </p:spTree>
     <p:extLst>
       <p:ext uri="{BB962C8B-B14F-4D97-AF65-F5344CB8AC3E}">
+        <p14:creationId xmlns:p14="http://schemas.microsoft.com/office/powerpoint/2010/main" val="1438093478"/>
+      </p:ext>
+    </p:extLst>
+  </p:cSld>
+  <p:clrMapOvr>
+    <a:masterClrMapping/>
+  </p:clrMapOvr>
+</p:notes>
+</file>
+
+<file path=ppt/notesSlides/notesSlide15.xml><?xml version="1.0" encoding="utf-8"?>
+<p:notes xmlns:a="http://schemas.openxmlformats.org/drawingml/2006/main" xmlns:r="http://schemas.openxmlformats.org/officeDocument/2006/relationships" xmlns:p="http://schemas.openxmlformats.org/presentationml/2006/main">
+  <p:cSld>
+    <p:spTree>
+      <p:nvGrpSpPr>
+        <p:cNvPr id="1" name=""/>
+        <p:cNvGrpSpPr/>
+        <p:nvPr/>
+      </p:nvGrpSpPr>
+      <p:grpSpPr>
+        <a:xfrm>
+          <a:off x="0" y="0"/>
+          <a:ext cx="0" cy="0"/>
+          <a:chOff x="0" y="0"/>
+          <a:chExt cx="0" cy="0"/>
+        </a:xfrm>
+      </p:grpSpPr>
+      <p:sp>
+        <p:nvSpPr>
+          <p:cNvPr id="2" name="Slide Image Placeholder 1"/>
+          <p:cNvSpPr>
+            <a:spLocks noGrp="1" noRot="1" noChangeAspect="1"/>
+          </p:cNvSpPr>
+          <p:nvPr>
+            <p:ph type="sldImg"/>
+          </p:nvPr>
+        </p:nvSpPr>
+        <p:spPr/>
+      </p:sp>
+      <p:sp>
+        <p:nvSpPr>
+          <p:cNvPr id="3" name="Notes Placeholder 2"/>
+          <p:cNvSpPr>
+            <a:spLocks noGrp="1"/>
+          </p:cNvSpPr>
+          <p:nvPr>
+            <p:ph type="body" idx="1"/>
+          </p:nvPr>
+        </p:nvSpPr>
+        <p:spPr/>
+        <p:txBody>
+          <a:bodyPr/>
+          <a:lstStyle/>
+          <a:p>
+            <a:r>
+              <a:rPr lang="en-US" dirty="0"/>
+              <a:t>https://thinkingeek.com/2013/01/20/arm-assembler-raspberry-pi-chapter-6/</a:t>
+            </a:r>
+          </a:p>
+        </p:txBody>
+      </p:sp>
+      <p:sp>
+        <p:nvSpPr>
+          <p:cNvPr id="4" name="Slide Number Placeholder 3"/>
+          <p:cNvSpPr>
+            <a:spLocks noGrp="1"/>
+          </p:cNvSpPr>
+          <p:nvPr>
+            <p:ph type="sldNum" sz="quarter" idx="5"/>
+          </p:nvPr>
+        </p:nvSpPr>
+        <p:spPr/>
+        <p:txBody>
+          <a:bodyPr/>
+          <a:lstStyle/>
+          <a:p>
+            <a:fld id="{2D71AD5F-E36F-46B9-A99B-7B025244359D}" type="slidenum">
+              <a:rPr lang="en-US" smtClean="0"/>
+              <a:pPr/>
+              <a:t>27</a:t>
+            </a:fld>
+            <a:endParaRPr lang="en-US"/>
+          </a:p>
+        </p:txBody>
+      </p:sp>
+    </p:spTree>
+    <p:extLst>
+      <p:ext uri="{BB962C8B-B14F-4D97-AF65-F5344CB8AC3E}">
         <p14:creationId xmlns:p14="http://schemas.microsoft.com/office/powerpoint/2010/main" val="3890697798"/>
       </p:ext>
     </p:extLst>
@@ -1460,7 +1798,7 @@
 </p:notes>
 </file>
 
-<file path=ppt/notesSlides/notesSlide15.xml><?xml version="1.0" encoding="utf-8"?>
+<file path=ppt/notesSlides/notesSlide16.xml><?xml version="1.0" encoding="utf-8"?>
 <p:notes xmlns:a="http://schemas.openxmlformats.org/drawingml/2006/main" xmlns:r="http://schemas.openxmlformats.org/officeDocument/2006/relationships" xmlns:p="http://schemas.openxmlformats.org/presentationml/2006/main">
   <p:cSld>
     <p:spTree>
@@ -1559,7 +1897,7 @@
 </p:notes>
 </file>
 
-<file path=ppt/notesSlides/notesSlide16.xml><?xml version="1.0" encoding="utf-8"?>
+<file path=ppt/notesSlides/notesSlide17.xml><?xml version="1.0" encoding="utf-8"?>
 <p:notes xmlns:a="http://schemas.openxmlformats.org/drawingml/2006/main" xmlns:r="http://schemas.openxmlformats.org/officeDocument/2006/relationships" xmlns:p="http://schemas.openxmlformats.org/presentationml/2006/main">
   <p:cSld>
     <p:spTree>
@@ -1672,7 +2010,7 @@
             <a:fld id="{2D71AD5F-E36F-46B9-A99B-7B025244359D}" type="slidenum">
               <a:rPr lang="en-US" smtClean="0"/>
               <a:pPr/>
-              <a:t>32</a:t>
+              <a:t>33</a:t>
             </a:fld>
             <a:endParaRPr lang="en-US"/>
           </a:p>
@@ -1691,7 +2029,7 @@
 </p:notes>
 </file>
 
-<file path=ppt/notesSlides/notesSlide17.xml><?xml version="1.0" encoding="utf-8"?>
+<file path=ppt/notesSlides/notesSlide18.xml><?xml version="1.0" encoding="utf-8"?>
 <p:notes xmlns:a="http://schemas.openxmlformats.org/drawingml/2006/main" xmlns:r="http://schemas.openxmlformats.org/officeDocument/2006/relationships" xmlns:p="http://schemas.openxmlformats.org/presentationml/2006/main">
   <p:cSld>
     <p:spTree>
@@ -1780,7 +2118,7 @@
             <a:fld id="{2D71AD5F-E36F-46B9-A99B-7B025244359D}" type="slidenum">
               <a:rPr lang="en-US" smtClean="0"/>
               <a:pPr/>
-              <a:t>33</a:t>
+              <a:t>34</a:t>
             </a:fld>
             <a:endParaRPr lang="en-US"/>
           </a:p>
@@ -7491,14 +7829,14 @@
           <p:nvPr>
             <p:extLst>
               <p:ext uri="{D42A27DB-BD31-4B8C-83A1-F6EECF244321}">
-                <p14:modId xmlns:p14="http://schemas.microsoft.com/office/powerpoint/2010/main" val="3172665504"/>
+                <p14:modId xmlns:p14="http://schemas.microsoft.com/office/powerpoint/2010/main" val="858780681"/>
               </p:ext>
             </p:extLst>
           </p:nvPr>
         </p:nvGraphicFramePr>
         <p:xfrm>
           <a:off x="990600" y="2286000"/>
-          <a:ext cx="7391400" cy="3657600"/>
+          <a:ext cx="7391400" cy="3901440"/>
         </p:xfrm>
         <a:graphic>
           <a:graphicData uri="http://schemas.openxmlformats.org/drawingml/2006/table">
@@ -7847,7 +8185,7 @@
                           <a:latin typeface="Consolas" panose="020B0609020204030204" pitchFamily="49" charset="0"/>
                           <a:cs typeface="Consolas" panose="020B0609020204030204" pitchFamily="49" charset="0"/>
                         </a:rPr>
-                        <a:t>    LDR r4, [r1, r3, LSL#2]  ; Load b[7-i]</a:t>
+                        <a:t>    LDR r4, [r1, r3, LSL#2] ; Load b[7-i] from mem address r1 + 4*r3</a:t>
                       </a:r>
                     </a:p>
                     <a:p>
@@ -7865,7 +8203,7 @@
                           <a:latin typeface="Consolas" panose="020B0609020204030204" pitchFamily="49" charset="0"/>
                           <a:cs typeface="Consolas" panose="020B0609020204030204" pitchFamily="49" charset="0"/>
                         </a:rPr>
-                        <a:t>    STR r4, [r0, r2, LSL#2]  ; Store to a[i]</a:t>
+                        <a:t>    STR r4, [r0, r2, LSL#2] ; Store to a[i] to mem address r0 + 4*r2</a:t>
                       </a:r>
                     </a:p>
                     <a:p>
@@ -8059,7 +8397,7 @@
           <p:nvPr>
             <p:extLst>
               <p:ext uri="{D42A27DB-BD31-4B8C-83A1-F6EECF244321}">
-                <p14:modId xmlns:p14="http://schemas.microsoft.com/office/powerpoint/2010/main" val="4275003482"/>
+                <p14:modId xmlns:p14="http://schemas.microsoft.com/office/powerpoint/2010/main" val="3507726570"/>
               </p:ext>
             </p:extLst>
           </p:nvPr>
@@ -8374,7 +8712,7 @@
                           <a:ea typeface="宋体"/>
                           <a:cs typeface="+mn-cs"/>
                         </a:rPr>
-                        <a:t>   CMP r0, #10     ; Compare x0 with 10 while x0 &lt;=10</a:t>
+                        <a:t>   CMP r0, #10     ; Compare r0 with 10 while r0 &lt;=10</a:t>
                       </a:r>
                       <a:br>
                         <a:rPr kumimoji="0" lang="en-US" sz="1600" b="0" kern="1200" dirty="0">
@@ -9072,7 +9410,7 @@
           <p:nvPr>
             <p:extLst>
               <p:ext uri="{D42A27DB-BD31-4B8C-83A1-F6EECF244321}">
-                <p14:modId xmlns:p14="http://schemas.microsoft.com/office/powerpoint/2010/main" val="2834974870"/>
+                <p14:modId xmlns:p14="http://schemas.microsoft.com/office/powerpoint/2010/main" val="1285287610"/>
               </p:ext>
             </p:extLst>
           </p:nvPr>
@@ -9387,7 +9725,31 @@
                           <a:ea typeface="宋体"/>
                           <a:cs typeface="+mn-cs"/>
                         </a:rPr>
-                        <a:t>   CMP r0, #10     ; Compare x0 with 10 while x0 &lt;=10</a:t>
+                        <a:t>   CMP r0, #</a:t>
+                      </a:r>
+                      <a:r>
+                        <a:rPr kumimoji="0" lang="en-US" sz="1600" b="0" kern="1200" dirty="0">
+                          <a:solidFill>
+                            <a:srgbClr val="FF0000"/>
+                          </a:solidFill>
+                          <a:effectLst/>
+                          <a:latin typeface="Consolas" panose="020B0609020204030204" pitchFamily="49" charset="0"/>
+                          <a:ea typeface="宋体"/>
+                          <a:cs typeface="+mn-cs"/>
+                        </a:rPr>
+                        <a:t>11</a:t>
+                      </a:r>
+                      <a:r>
+                        <a:rPr kumimoji="0" lang="en-US" sz="1600" b="0" kern="1200" dirty="0">
+                          <a:solidFill>
+                            <a:schemeClr val="tx1"/>
+                          </a:solidFill>
+                          <a:effectLst/>
+                          <a:latin typeface="Consolas" panose="020B0609020204030204" pitchFamily="49" charset="0"/>
+                          <a:ea typeface="宋体"/>
+                          <a:cs typeface="+mn-cs"/>
+                        </a:rPr>
+                        <a:t>     ; Compare x0 with 10 while x0 &lt;=10</a:t>
                       </a:r>
                       <a:br>
                         <a:rPr kumimoji="0" lang="en-US" sz="1600" b="0" kern="1200" dirty="0">
@@ -9574,7 +9936,7 @@
           <p:nvPr>
             <p:extLst>
               <p:ext uri="{D42A27DB-BD31-4B8C-83A1-F6EECF244321}">
-                <p14:modId xmlns:p14="http://schemas.microsoft.com/office/powerpoint/2010/main" val="3918224381"/>
+                <p14:modId xmlns:p14="http://schemas.microsoft.com/office/powerpoint/2010/main" val="2478692347"/>
               </p:ext>
             </p:extLst>
           </p:nvPr>
@@ -9852,11 +10214,14 @@
                       </a:pPr>
                       <a:r>
                         <a:rPr lang="en-US" sz="1600" i="0" dirty="0">
-                          <a:effectLst/>
-                          <a:latin typeface="Consolas" panose="020B0609020204030204" pitchFamily="49" charset="0"/>
-                          <a:cs typeface="Consolas" panose="020B0609020204030204" pitchFamily="49" charset="0"/>
-                        </a:rPr>
-                        <a:t>loop:</a:t>
+                          <a:solidFill>
+                            <a:srgbClr val="FF0000"/>
+                          </a:solidFill>
+                          <a:effectLst/>
+                          <a:latin typeface="Consolas" panose="020B0609020204030204" pitchFamily="49" charset="0"/>
+                          <a:cs typeface="Consolas" panose="020B0609020204030204" pitchFamily="49" charset="0"/>
+                        </a:rPr>
+                        <a:t>B check</a:t>
                       </a:r>
                     </a:p>
                     <a:p>
@@ -9874,7 +10239,42 @@
                           <a:latin typeface="Consolas" panose="020B0609020204030204" pitchFamily="49" charset="0"/>
                           <a:cs typeface="Consolas" panose="020B0609020204030204" pitchFamily="49" charset="0"/>
                         </a:rPr>
-                        <a:t>    ; loop body</a:t>
+                        <a:t>loop:  SUB</a:t>
+                      </a:r>
+                      <a:r>
+                        <a:rPr lang="en-US" sz="1600" i="0" dirty="0">
+                          <a:solidFill>
+                            <a:srgbClr val="FF0000"/>
+                          </a:solidFill>
+                          <a:effectLst/>
+                          <a:latin typeface="Consolas" panose="020B0609020204030204" pitchFamily="49" charset="0"/>
+                          <a:cs typeface="Consolas" panose="020B0609020204030204" pitchFamily="49" charset="0"/>
+                        </a:rPr>
+                        <a:t>S</a:t>
+                      </a:r>
+                      <a:r>
+                        <a:rPr lang="en-US" sz="1600" i="0" dirty="0">
+                          <a:effectLst/>
+                          <a:latin typeface="Consolas" panose="020B0609020204030204" pitchFamily="49" charset="0"/>
+                          <a:cs typeface="Consolas" panose="020B0609020204030204" pitchFamily="49" charset="0"/>
+                        </a:rPr>
+                        <a:t> r0, r0, #1   ; </a:t>
+                      </a:r>
+                      <a:r>
+                        <a:rPr lang="en-US" sz="1600" i="0" dirty="0" err="1">
+                          <a:effectLst/>
+                          <a:latin typeface="Consolas" panose="020B0609020204030204" pitchFamily="49" charset="0"/>
+                          <a:cs typeface="Consolas" panose="020B0609020204030204" pitchFamily="49" charset="0"/>
+                        </a:rPr>
+                        <a:t>cnt</a:t>
+                      </a:r>
+                      <a:r>
+                        <a:rPr lang="en-US" sz="1600" i="0" dirty="0">
+                          <a:effectLst/>
+                          <a:latin typeface="Consolas" panose="020B0609020204030204" pitchFamily="49" charset="0"/>
+                          <a:cs typeface="Consolas" panose="020B0609020204030204" pitchFamily="49" charset="0"/>
+                        </a:rPr>
+                        <a:t>--; sets flags</a:t>
                       </a:r>
                     </a:p>
                     <a:p>
@@ -9892,41 +10292,7 @@
                           <a:latin typeface="Consolas" panose="020B0609020204030204" pitchFamily="49" charset="0"/>
                           <a:cs typeface="Consolas" panose="020B0609020204030204" pitchFamily="49" charset="0"/>
                         </a:rPr>
-                        <a:t>    SUB r0, r0, #1   ; </a:t>
-                      </a:r>
-                      <a:r>
-                        <a:rPr lang="en-US" sz="1600" i="0" dirty="0" err="1">
-                          <a:effectLst/>
-                          <a:latin typeface="Consolas" panose="020B0609020204030204" pitchFamily="49" charset="0"/>
-                          <a:cs typeface="Consolas" panose="020B0609020204030204" pitchFamily="49" charset="0"/>
-                        </a:rPr>
-                        <a:t>cnt</a:t>
-                      </a:r>
-                      <a:r>
-                        <a:rPr lang="en-US" sz="1600" i="0" dirty="0">
-                          <a:effectLst/>
-                          <a:latin typeface="Consolas" panose="020B0609020204030204" pitchFamily="49" charset="0"/>
-                          <a:cs typeface="Consolas" panose="020B0609020204030204" pitchFamily="49" charset="0"/>
-                        </a:rPr>
-                        <a:t>--; sets flags</a:t>
-                      </a:r>
-                    </a:p>
-                    <a:p>
-                      <a:pPr marL="0" marR="0" algn="just">
-                        <a:spcBef>
-                          <a:spcPts val="0"/>
-                        </a:spcBef>
-                        <a:spcAft>
-                          <a:spcPts val="0"/>
-                        </a:spcAft>
-                      </a:pPr>
-                      <a:r>
-                        <a:rPr lang="en-US" sz="1600" i="0" dirty="0">
-                          <a:effectLst/>
-                          <a:latin typeface="Consolas" panose="020B0609020204030204" pitchFamily="49" charset="0"/>
-                          <a:cs typeface="Consolas" panose="020B0609020204030204" pitchFamily="49" charset="0"/>
-                        </a:rPr>
-                        <a:t>    BNE  loop     ; repeat until </a:t>
+                        <a:t>check: BNE  loop   ; repeat until </a:t>
                       </a:r>
                       <a:r>
                         <a:rPr lang="en-US" sz="1600" i="0" dirty="0" err="1">
@@ -10043,8 +10409,8 @@
         </p:nvSpPr>
         <p:spPr>
           <a:xfrm>
-            <a:off x="2747010" y="5862756"/>
-            <a:ext cx="3200400" cy="369332"/>
+            <a:off x="1828800" y="5521781"/>
+            <a:ext cx="5715000" cy="1200329"/>
           </a:xfrm>
           <a:prstGeom prst="rect">
             <a:avLst/>
@@ -10078,6 +10444,34 @@
             <a:r>
               <a:rPr lang="en-US" dirty="0"/>
               <a:t>SUB should be SUBS to set flags</a:t>
+            </a:r>
+          </a:p>
+          <a:p>
+            <a:r>
+              <a:rPr lang="en-US" dirty="0"/>
+              <a:t>Add a B check before loop body</a:t>
+            </a:r>
+          </a:p>
+          <a:p>
+            <a:r>
+              <a:rPr lang="en-US" dirty="0"/>
+              <a:t>(program behavior the same if </a:t>
+            </a:r>
+            <a:r>
+              <a:rPr lang="en-US" dirty="0" err="1"/>
+              <a:t>cnt</a:t>
+            </a:r>
+            <a:r>
+              <a:rPr lang="en-US" dirty="0"/>
+              <a:t> = r0 = 10 initially, but different if </a:t>
+            </a:r>
+            <a:r>
+              <a:rPr lang="en-US" dirty="0" err="1"/>
+              <a:t>cnt</a:t>
+            </a:r>
+            <a:r>
+              <a:rPr lang="en-US" dirty="0"/>
+              <a:t> = r0 = 0 initially. c.f. pp 23-25 in Ch6 lecture)</a:t>
             </a:r>
           </a:p>
         </p:txBody>
@@ -11574,7 +11968,7 @@
           <p:nvPr>
             <p:extLst>
               <p:ext uri="{D42A27DB-BD31-4B8C-83A1-F6EECF244321}">
-                <p14:modId xmlns:p14="http://schemas.microsoft.com/office/powerpoint/2010/main" val="2344120420"/>
+                <p14:modId xmlns:p14="http://schemas.microsoft.com/office/powerpoint/2010/main" val="2987533987"/>
               </p:ext>
             </p:extLst>
           </p:nvPr>
@@ -11908,7 +12302,7 @@
                           <a:latin typeface="Consolas" panose="020B0609020204030204" pitchFamily="49" charset="0"/>
                           <a:cs typeface="Consolas" panose="020B0609020204030204" pitchFamily="49" charset="0"/>
                         </a:rPr>
-                        <a:t>    ADD  r0, r0, #1     ; </a:t>
+                        <a:t>    ADD r0, r0, #1     ; </a:t>
                       </a:r>
                       <a:r>
                         <a:rPr lang="en-US" sz="1600" i="0" dirty="0" err="1">
@@ -11942,7 +12336,7 @@
                           <a:latin typeface="Consolas" panose="020B0609020204030204" pitchFamily="49" charset="0"/>
                           <a:cs typeface="Consolas" panose="020B0609020204030204" pitchFamily="49" charset="0"/>
                         </a:rPr>
-                        <a:t>    CMP  r0, #10</a:t>
+                        <a:t>    CMP r0, #10</a:t>
                       </a:r>
                     </a:p>
                     <a:p>
@@ -13874,8 +14268,8 @@
         </p:nvSpPr>
         <p:spPr>
           <a:xfrm>
-            <a:off x="612648" y="3657600"/>
-            <a:ext cx="7997952" cy="1477328"/>
+            <a:off x="612648" y="3148210"/>
+            <a:ext cx="7997952" cy="3416320"/>
           </a:xfrm>
           <a:prstGeom prst="rect">
             <a:avLst/>
@@ -13916,7 +14310,50 @@
             </a:r>
             <a:r>
               <a:rPr lang="en-US" dirty="0"/>
-              <a:t> (Positive or Zero), tests the Negative flag N=0 (i.e., r0 &gt;=0). Starting from 10 and decrementing, N stays 0 for 10 down to 0, so BPL would still branch at r0=0. Then SUBS makes r0 = −1, which sets N = 1, so BPL does not branch and the loop exits. Hence BPL allows the loop to run at 0 and overshoot by one iteration.</a:t>
+              <a:t> (Positive or Zero, N = 0), tests the Negative flag N=0 (i.e., r0 &gt;=0). Starting from 10 and decrementing, N stays 0 for 10 down to 0, so BPL would still branch at r0 = 0. Then SUBS makes r0 = −1, which sets N = 1, so BPL does not branch and the loop exits. Hence BPL allows the loop to run at 0 and overshoot by one iteration.</a:t>
+            </a:r>
+          </a:p>
+          <a:p>
+            <a:r>
+              <a:rPr lang="en-US" b="1" dirty="0"/>
+              <a:t>What’s wrong:</a:t>
+            </a:r>
+            <a:r>
+              <a:rPr lang="en-US" dirty="0"/>
+              <a:t> BPL tests for ≥ 0, not &gt; 0 → extra iteration.</a:t>
+            </a:r>
+            <a:br>
+              <a:rPr lang="en-US" dirty="0"/>
+            </a:br>
+            <a:r>
+              <a:rPr lang="en-US" b="1" dirty="0"/>
+              <a:t>How to fix:</a:t>
+            </a:r>
+            <a:r>
+              <a:rPr lang="en-US" dirty="0"/>
+              <a:t> Replace BPL loop with BGT loop.</a:t>
+            </a:r>
+          </a:p>
+          <a:p>
+            <a:r>
+              <a:rPr lang="en-US" dirty="0"/>
+              <a:t>If the loop variable were unsigned, you’d instead use BHI (“branch if higher”) for the same effect.</a:t>
+            </a:r>
+          </a:p>
+          <a:p>
+            <a:r>
+              <a:rPr lang="en-US" b="1" dirty="0"/>
+              <a:t>Quiz</a:t>
+            </a:r>
+            <a:r>
+              <a:rPr lang="en-US" dirty="0"/>
+              <a:t>: is BPL same as BGE?</a:t>
+            </a:r>
+          </a:p>
+          <a:p>
+            <a:r>
+              <a:rPr lang="en-US" dirty="0"/>
+              <a:t>ANS: No. PL checks N == 0; GE checks N == V. In this program BGE and BPL have the same behavior, but in general not, c.f. p. 16 in Ch6 lecture</a:t>
             </a:r>
           </a:p>
         </p:txBody>
@@ -14589,14 +15026,14 @@
           <p:nvPr>
             <p:extLst>
               <p:ext uri="{D42A27DB-BD31-4B8C-83A1-F6EECF244321}">
-                <p14:modId xmlns:p14="http://schemas.microsoft.com/office/powerpoint/2010/main" val="665885742"/>
+                <p14:modId xmlns:p14="http://schemas.microsoft.com/office/powerpoint/2010/main" val="3357720372"/>
               </p:ext>
             </p:extLst>
           </p:nvPr>
         </p:nvGraphicFramePr>
         <p:xfrm>
           <a:off x="495300" y="1189355"/>
-          <a:ext cx="8153400" cy="2926080"/>
+          <a:ext cx="8153400" cy="3169920"/>
         </p:xfrm>
         <a:graphic>
           <a:graphicData uri="http://schemas.openxmlformats.org/drawingml/2006/table">
@@ -15216,6 +15653,24 @@
                           <a:cs typeface="Consolas" panose="020B0609020204030204" pitchFamily="49" charset="0"/>
                         </a:rPr>
                         <a:t> &gt;= 0) repeat</a:t>
+                      </a:r>
+                    </a:p>
+                    <a:p>
+                      <a:pPr marL="0" marR="0" algn="just">
+                        <a:spcBef>
+                          <a:spcPts val="0"/>
+                        </a:spcBef>
+                        <a:spcAft>
+                          <a:spcPts val="0"/>
+                        </a:spcAft>
+                      </a:pPr>
+                      <a:r>
+                        <a:rPr lang="en-US" sz="1600" i="0" dirty="0">
+                          <a:effectLst/>
+                          <a:latin typeface="Consolas" panose="020B0609020204030204" pitchFamily="49" charset="0"/>
+                          <a:cs typeface="Consolas" panose="020B0609020204030204" pitchFamily="49" charset="0"/>
+                        </a:rPr>
+                        <a:t>  %BGE  FOR            ; BGE is also OK here</a:t>
                       </a:r>
                     </a:p>
                   </a:txBody>
@@ -16333,66 +16788,6 @@
           </a:p>
         </p:txBody>
       </p:sp>
-      <p:sp>
-        <p:nvSpPr>
-          <p:cNvPr id="3" name="Slide Number Placeholder 2">
-            <a:extLst>
-              <a:ext uri="{FF2B5EF4-FFF2-40B4-BE49-F238E27FC236}">
-                <a16:creationId xmlns:a16="http://schemas.microsoft.com/office/drawing/2014/main" id="{C1EDA5D2-83BD-3B87-4DC5-348EFA91B5FC}"/>
-              </a:ext>
-            </a:extLst>
-          </p:cNvPr>
-          <p:cNvSpPr>
-            <a:spLocks noGrp="1"/>
-          </p:cNvSpPr>
-          <p:nvPr>
-            <p:ph type="sldNum" sz="quarter" idx="12"/>
-          </p:nvPr>
-        </p:nvSpPr>
-        <p:spPr/>
-        <p:txBody>
-          <a:bodyPr/>
-          <a:lstStyle/>
-          <a:p>
-            <a:fld id="{EA7C8D44-3667-46F6-9772-CC52308E2A7F}" type="slidenum">
-              <a:rPr kumimoji="0" lang="en-US" smtClean="0"/>
-              <a:pPr/>
-              <a:t>21</a:t>
-            </a:fld>
-            <a:endParaRPr kumimoji="0" lang="en-US" dirty="0"/>
-          </a:p>
-        </p:txBody>
-      </p:sp>
-      <p:sp>
-        <p:nvSpPr>
-          <p:cNvPr id="4" name="Content Placeholder 3">
-            <a:extLst>
-              <a:ext uri="{FF2B5EF4-FFF2-40B4-BE49-F238E27FC236}">
-                <a16:creationId xmlns:a16="http://schemas.microsoft.com/office/drawing/2014/main" id="{BEA62B72-8CD3-1C22-B422-E7966ED0294E}"/>
-              </a:ext>
-            </a:extLst>
-          </p:cNvPr>
-          <p:cNvSpPr>
-            <a:spLocks noGrp="1"/>
-          </p:cNvSpPr>
-          <p:nvPr>
-            <p:ph sz="quarter" idx="1"/>
-          </p:nvPr>
-        </p:nvSpPr>
-        <p:spPr>
-          <a:xfrm>
-            <a:off x="457200" y="4114800"/>
-            <a:ext cx="8229600" cy="2042160"/>
-          </a:xfrm>
-        </p:spPr>
-        <p:txBody>
-          <a:bodyPr/>
-          <a:lstStyle/>
-          <a:p>
-            <a:endParaRPr lang="en-US"/>
-          </a:p>
-        </p:txBody>
-      </p:sp>
       <p:graphicFrame>
         <p:nvGraphicFramePr>
           <p:cNvPr id="5" name="Table 4">
@@ -16408,14 +16803,14 @@
           <p:nvPr>
             <p:extLst>
               <p:ext uri="{D42A27DB-BD31-4B8C-83A1-F6EECF244321}">
-                <p14:modId xmlns:p14="http://schemas.microsoft.com/office/powerpoint/2010/main" val="2621279520"/>
+                <p14:modId xmlns:p14="http://schemas.microsoft.com/office/powerpoint/2010/main" val="752740779"/>
               </p:ext>
             </p:extLst>
           </p:nvPr>
         </p:nvGraphicFramePr>
         <p:xfrm>
           <a:off x="457200" y="1219200"/>
-          <a:ext cx="8153400" cy="2926080"/>
+          <a:ext cx="8153400" cy="2682240"/>
         </p:xfrm>
         <a:graphic>
           <a:graphicData uri="http://schemas.openxmlformats.org/drawingml/2006/table">
@@ -16718,21 +17113,6 @@
                           <a:spcPts val="0"/>
                         </a:spcAft>
                       </a:pPr>
-                      <a:endParaRPr lang="en-US" sz="1600" i="0" dirty="0">
-                        <a:effectLst/>
-                        <a:latin typeface="Consolas" panose="020B0609020204030204" pitchFamily="49" charset="0"/>
-                        <a:cs typeface="Consolas" panose="020B0609020204030204" pitchFamily="49" charset="0"/>
-                      </a:endParaRPr>
-                    </a:p>
-                    <a:p>
-                      <a:pPr marL="0" marR="0" algn="just">
-                        <a:spcBef>
-                          <a:spcPts val="0"/>
-                        </a:spcBef>
-                        <a:spcAft>
-                          <a:spcPts val="0"/>
-                        </a:spcAft>
-                      </a:pPr>
                       <a:r>
                         <a:rPr lang="en-US" sz="1600" i="0" dirty="0">
                           <a:effectLst/>
@@ -16877,6 +17257,592 @@
 </file>
 
 <file path=ppt/slides/slide22.xml><?xml version="1.0" encoding="utf-8"?>
+<p:sld xmlns:a="http://schemas.openxmlformats.org/drawingml/2006/main" xmlns:r="http://schemas.openxmlformats.org/officeDocument/2006/relationships" xmlns:p="http://schemas.openxmlformats.org/presentationml/2006/main">
+  <p:cSld>
+    <p:spTree>
+      <p:nvGrpSpPr>
+        <p:cNvPr id="1" name=""/>
+        <p:cNvGrpSpPr/>
+        <p:nvPr/>
+      </p:nvGrpSpPr>
+      <p:grpSpPr>
+        <a:xfrm>
+          <a:off x="0" y="0"/>
+          <a:ext cx="0" cy="0"/>
+          <a:chOff x="0" y="0"/>
+          <a:chExt cx="0" cy="0"/>
+        </a:xfrm>
+      </p:grpSpPr>
+      <p:sp>
+        <p:nvSpPr>
+          <p:cNvPr id="2" name="Title 1">
+            <a:extLst>
+              <a:ext uri="{FF2B5EF4-FFF2-40B4-BE49-F238E27FC236}">
+                <a16:creationId xmlns:a16="http://schemas.microsoft.com/office/drawing/2014/main" id="{1AEC2A59-F038-62BC-DB24-F3767D28666A}"/>
+              </a:ext>
+            </a:extLst>
+          </p:cNvPr>
+          <p:cNvSpPr>
+            <a:spLocks noGrp="1"/>
+          </p:cNvSpPr>
+          <p:nvPr>
+            <p:ph type="title"/>
+          </p:nvPr>
+        </p:nvSpPr>
+        <p:spPr/>
+        <p:txBody>
+          <a:bodyPr/>
+          <a:lstStyle/>
+          <a:p>
+            <a:r>
+              <a:rPr lang="en-US" dirty="0"/>
+              <a:t>C to Assembly ANS </a:t>
+            </a:r>
+          </a:p>
+        </p:txBody>
+      </p:sp>
+      <p:sp>
+        <p:nvSpPr>
+          <p:cNvPr id="3" name="Slide Number Placeholder 2">
+            <a:extLst>
+              <a:ext uri="{FF2B5EF4-FFF2-40B4-BE49-F238E27FC236}">
+                <a16:creationId xmlns:a16="http://schemas.microsoft.com/office/drawing/2014/main" id="{BAD9BA87-6233-0191-8942-402FBC346922}"/>
+              </a:ext>
+            </a:extLst>
+          </p:cNvPr>
+          <p:cNvSpPr>
+            <a:spLocks noGrp="1"/>
+          </p:cNvSpPr>
+          <p:nvPr>
+            <p:ph type="sldNum" sz="quarter" idx="12"/>
+          </p:nvPr>
+        </p:nvSpPr>
+        <p:spPr/>
+        <p:txBody>
+          <a:bodyPr/>
+          <a:lstStyle/>
+          <a:p>
+            <a:fld id="{EA7C8D44-3667-46F6-9772-CC52308E2A7F}" type="slidenum">
+              <a:rPr kumimoji="0" lang="en-US" smtClean="0"/>
+              <a:pPr/>
+              <a:t>22</a:t>
+            </a:fld>
+            <a:endParaRPr kumimoji="0" lang="en-US" dirty="0"/>
+          </a:p>
+        </p:txBody>
+      </p:sp>
+      <p:sp>
+        <p:nvSpPr>
+          <p:cNvPr id="4" name="Content Placeholder 3">
+            <a:extLst>
+              <a:ext uri="{FF2B5EF4-FFF2-40B4-BE49-F238E27FC236}">
+                <a16:creationId xmlns:a16="http://schemas.microsoft.com/office/drawing/2014/main" id="{9DEFF33C-95D3-FC49-619D-245E0019906B}"/>
+              </a:ext>
+            </a:extLst>
+          </p:cNvPr>
+          <p:cNvSpPr>
+            <a:spLocks noGrp="1"/>
+          </p:cNvSpPr>
+          <p:nvPr>
+            <p:ph sz="quarter" idx="1"/>
+          </p:nvPr>
+        </p:nvSpPr>
+        <p:spPr>
+          <a:xfrm>
+            <a:off x="457200" y="3962400"/>
+            <a:ext cx="8229600" cy="2194560"/>
+          </a:xfrm>
+        </p:spPr>
+        <p:txBody>
+          <a:bodyPr/>
+          <a:lstStyle/>
+          <a:p>
+            <a:r>
+              <a:rPr lang="en-US" b="1" dirty="0"/>
+              <a:t>Edge case:</a:t>
+            </a:r>
+            <a:r>
+              <a:rPr lang="en-US" dirty="0"/>
+              <a:t> If r0 </a:t>
+            </a:r>
+            <a:r>
+              <a:rPr lang="en-US" b="1" dirty="0"/>
+              <a:t>starts</a:t>
+            </a:r>
+            <a:r>
+              <a:rPr lang="en-US" dirty="0"/>
+              <a:t> as 128 (zero-iteration case), this version will </a:t>
+            </a:r>
+            <a:r>
+              <a:rPr lang="en-US" b="1" dirty="0"/>
+              <a:t>execute the body once</a:t>
+            </a:r>
+            <a:r>
+              <a:rPr lang="en-US" dirty="0"/>
+              <a:t> (doubling to 256 and incrementing r1) before checking — i.e., wrong for that initial condition</a:t>
+            </a:r>
+            <a:r>
+              <a:rPr lang="en-US"/>
+              <a:t>, c</a:t>
+            </a:r>
+            <a:r>
+              <a:rPr lang="en-US" dirty="0"/>
+              <a:t>.f. pp 23-25 in Ch6 lecture</a:t>
+            </a:r>
+          </a:p>
+        </p:txBody>
+      </p:sp>
+      <p:graphicFrame>
+        <p:nvGraphicFramePr>
+          <p:cNvPr id="6" name="Table 5">
+            <a:extLst>
+              <a:ext uri="{FF2B5EF4-FFF2-40B4-BE49-F238E27FC236}">
+                <a16:creationId xmlns:a16="http://schemas.microsoft.com/office/drawing/2014/main" id="{B8E14D9C-0132-5D4B-D5F1-3CEDF2732D54}"/>
+              </a:ext>
+            </a:extLst>
+          </p:cNvPr>
+          <p:cNvGraphicFramePr>
+            <a:graphicFrameLocks noGrp="1"/>
+          </p:cNvGraphicFramePr>
+          <p:nvPr>
+            <p:extLst>
+              <p:ext uri="{D42A27DB-BD31-4B8C-83A1-F6EECF244321}">
+                <p14:modId xmlns:p14="http://schemas.microsoft.com/office/powerpoint/2010/main" val="3987605743"/>
+              </p:ext>
+            </p:extLst>
+          </p:nvPr>
+        </p:nvGraphicFramePr>
+        <p:xfrm>
+          <a:off x="495300" y="1294130"/>
+          <a:ext cx="8153400" cy="2438400"/>
+        </p:xfrm>
+        <a:graphic>
+          <a:graphicData uri="http://schemas.openxmlformats.org/drawingml/2006/table">
+            <a:tbl>
+              <a:tblPr firstRow="1" firstCol="1" bandRow="1">
+                <a:tableStyleId>{5940675A-B579-460E-94D1-54222C63F5DA}</a:tableStyleId>
+              </a:tblPr>
+              <a:tblGrid>
+                <a:gridCol w="3698449">
+                  <a:extLst>
+                    <a:ext uri="{9D8B030D-6E8A-4147-A177-3AD203B41FA5}">
+                      <a16:colId xmlns:a16="http://schemas.microsoft.com/office/drawing/2014/main" val="20000"/>
+                    </a:ext>
+                  </a:extLst>
+                </a:gridCol>
+                <a:gridCol w="4454951">
+                  <a:extLst>
+                    <a:ext uri="{9D8B030D-6E8A-4147-A177-3AD203B41FA5}">
+                      <a16:colId xmlns:a16="http://schemas.microsoft.com/office/drawing/2014/main" val="20001"/>
+                    </a:ext>
+                  </a:extLst>
+                </a:gridCol>
+              </a:tblGrid>
+              <a:tr h="217369">
+                <a:tc>
+                  <a:txBody>
+                    <a:bodyPr/>
+                    <a:lstStyle/>
+                    <a:p>
+                      <a:pPr marL="0" marR="0" algn="just">
+                        <a:spcBef>
+                          <a:spcPts val="0"/>
+                        </a:spcBef>
+                        <a:spcAft>
+                          <a:spcPts val="0"/>
+                        </a:spcAft>
+                      </a:pPr>
+                      <a:r>
+                        <a:rPr lang="en-US" sz="1600" dirty="0">
+                          <a:solidFill>
+                            <a:schemeClr val="bg1"/>
+                          </a:solidFill>
+                          <a:effectLst/>
+                          <a:latin typeface="Consolas" panose="020B0609020204030204" pitchFamily="49" charset="0"/>
+                          <a:cs typeface="Consolas" panose="020B0609020204030204" pitchFamily="49" charset="0"/>
+                        </a:rPr>
+                        <a:t>C Program</a:t>
+                      </a:r>
+                      <a:endParaRPr lang="en-US" sz="1600" dirty="0">
+                        <a:solidFill>
+                          <a:schemeClr val="bg1"/>
+                        </a:solidFill>
+                        <a:effectLst/>
+                        <a:latin typeface="Consolas" panose="020B0609020204030204" pitchFamily="49" charset="0"/>
+                        <a:ea typeface="宋体"/>
+                        <a:cs typeface="Consolas" panose="020B0609020204030204" pitchFamily="49" charset="0"/>
+                      </a:endParaRPr>
+                    </a:p>
+                  </a:txBody>
+                  <a:tcPr marL="68580" marR="68580" marT="0" marB="0">
+                    <a:solidFill>
+                      <a:schemeClr val="accent1"/>
+                    </a:solidFill>
+                  </a:tcPr>
+                </a:tc>
+                <a:tc>
+                  <a:txBody>
+                    <a:bodyPr/>
+                    <a:lstStyle/>
+                    <a:p>
+                      <a:pPr marL="0" marR="0" algn="just">
+                        <a:spcBef>
+                          <a:spcPts val="0"/>
+                        </a:spcBef>
+                        <a:spcAft>
+                          <a:spcPts val="0"/>
+                        </a:spcAft>
+                      </a:pPr>
+                      <a:r>
+                        <a:rPr lang="en-US" sz="1600" dirty="0">
+                          <a:solidFill>
+                            <a:schemeClr val="bg1"/>
+                          </a:solidFill>
+                          <a:effectLst/>
+                          <a:latin typeface="Consolas" panose="020B0609020204030204" pitchFamily="49" charset="0"/>
+                          <a:cs typeface="Consolas" panose="020B0609020204030204" pitchFamily="49" charset="0"/>
+                        </a:rPr>
+                        <a:t>Assembly Program</a:t>
+                      </a:r>
+                      <a:endParaRPr lang="en-US" sz="1600" dirty="0">
+                        <a:solidFill>
+                          <a:schemeClr val="bg1"/>
+                        </a:solidFill>
+                        <a:effectLst/>
+                        <a:latin typeface="Consolas" panose="020B0609020204030204" pitchFamily="49" charset="0"/>
+                        <a:ea typeface="宋体"/>
+                        <a:cs typeface="Consolas" panose="020B0609020204030204" pitchFamily="49" charset="0"/>
+                      </a:endParaRPr>
+                    </a:p>
+                  </a:txBody>
+                  <a:tcPr marL="68580" marR="68580" marT="0" marB="0">
+                    <a:solidFill>
+                      <a:schemeClr val="accent1"/>
+                    </a:solidFill>
+                  </a:tcPr>
+                </a:tc>
+                <a:extLst>
+                  <a:ext uri="{0D108BD9-81ED-4DB2-BD59-A6C34878D82A}">
+                    <a16:rowId xmlns:a16="http://schemas.microsoft.com/office/drawing/2014/main" val="10000"/>
+                  </a:ext>
+                </a:extLst>
+              </a:tr>
+              <a:tr h="773230">
+                <a:tc>
+                  <a:txBody>
+                    <a:bodyPr/>
+                    <a:lstStyle/>
+                    <a:p>
+                      <a:r>
+                        <a:rPr kumimoji="0" lang="en-US" sz="1600" b="0" i="0" kern="1200" dirty="0">
+                          <a:solidFill>
+                            <a:schemeClr val="tx1"/>
+                          </a:solidFill>
+                          <a:effectLst/>
+                          <a:latin typeface="Consolas" panose="020B0609020204030204" pitchFamily="49" charset="0"/>
+                          <a:ea typeface="+mn-ea"/>
+                          <a:cs typeface="+mn-cs"/>
+                        </a:rPr>
+                        <a:t>//Calculate x such that 2^x = 128</a:t>
+                      </a:r>
+                    </a:p>
+                    <a:p>
+                      <a:r>
+                        <a:rPr kumimoji="0" lang="en-US" sz="1600" b="0" i="0" kern="1200" dirty="0">
+                          <a:solidFill>
+                            <a:schemeClr val="tx1"/>
+                          </a:solidFill>
+                          <a:effectLst/>
+                          <a:latin typeface="Consolas" panose="020B0609020204030204" pitchFamily="49" charset="0"/>
+                          <a:ea typeface="+mn-ea"/>
+                          <a:cs typeface="+mn-cs"/>
+                        </a:rPr>
+                        <a:t>int pow = 1;</a:t>
+                      </a:r>
+                    </a:p>
+                    <a:p>
+                      <a:r>
+                        <a:rPr kumimoji="0" lang="en-US" sz="1600" b="0" i="0" kern="1200" dirty="0">
+                          <a:solidFill>
+                            <a:schemeClr val="tx1"/>
+                          </a:solidFill>
+                          <a:effectLst/>
+                          <a:latin typeface="Consolas" panose="020B0609020204030204" pitchFamily="49" charset="0"/>
+                          <a:ea typeface="+mn-ea"/>
+                          <a:cs typeface="+mn-cs"/>
+                        </a:rPr>
+                        <a:t>int x = 0;</a:t>
+                      </a:r>
+                    </a:p>
+                    <a:p>
+                      <a:endParaRPr kumimoji="0" lang="en-US" sz="1600" b="0" i="0" kern="1200" dirty="0">
+                        <a:solidFill>
+                          <a:schemeClr val="tx1"/>
+                        </a:solidFill>
+                        <a:effectLst/>
+                        <a:latin typeface="Consolas" panose="020B0609020204030204" pitchFamily="49" charset="0"/>
+                        <a:ea typeface="+mn-ea"/>
+                        <a:cs typeface="+mn-cs"/>
+                      </a:endParaRPr>
+                    </a:p>
+                    <a:p>
+                      <a:r>
+                        <a:rPr kumimoji="0" lang="en-US" sz="1600" b="0" i="0" kern="1200" dirty="0">
+                          <a:solidFill>
+                            <a:schemeClr val="tx1"/>
+                          </a:solidFill>
+                          <a:effectLst/>
+                          <a:latin typeface="Consolas" panose="020B0609020204030204" pitchFamily="49" charset="0"/>
+                          <a:ea typeface="+mn-ea"/>
+                          <a:cs typeface="+mn-cs"/>
+                        </a:rPr>
+                        <a:t>while (pow != 128) {</a:t>
+                      </a:r>
+                    </a:p>
+                    <a:p>
+                      <a:r>
+                        <a:rPr kumimoji="0" lang="en-US" sz="1600" b="0" i="0" kern="1200" dirty="0">
+                          <a:solidFill>
+                            <a:schemeClr val="tx1"/>
+                          </a:solidFill>
+                          <a:effectLst/>
+                          <a:latin typeface="Consolas" panose="020B0609020204030204" pitchFamily="49" charset="0"/>
+                          <a:ea typeface="+mn-ea"/>
+                          <a:cs typeface="+mn-cs"/>
+                        </a:rPr>
+                        <a:t>  pow = pow * 2;</a:t>
+                      </a:r>
+                    </a:p>
+                    <a:p>
+                      <a:r>
+                        <a:rPr kumimoji="0" lang="en-US" sz="1600" b="0" i="0" kern="1200" dirty="0">
+                          <a:solidFill>
+                            <a:schemeClr val="tx1"/>
+                          </a:solidFill>
+                          <a:effectLst/>
+                          <a:latin typeface="Consolas" panose="020B0609020204030204" pitchFamily="49" charset="0"/>
+                          <a:ea typeface="+mn-ea"/>
+                          <a:cs typeface="+mn-cs"/>
+                        </a:rPr>
+                        <a:t>  x = x + 1;</a:t>
+                      </a:r>
+                    </a:p>
+                    <a:p>
+                      <a:r>
+                        <a:rPr kumimoji="0" lang="en-US" sz="1600" b="0" i="0" kern="1200" dirty="0">
+                          <a:solidFill>
+                            <a:schemeClr val="tx1"/>
+                          </a:solidFill>
+                          <a:effectLst/>
+                          <a:latin typeface="Consolas" panose="020B0609020204030204" pitchFamily="49" charset="0"/>
+                          <a:ea typeface="+mn-ea"/>
+                          <a:cs typeface="+mn-cs"/>
+                        </a:rPr>
+                        <a:t>}</a:t>
+                      </a:r>
+                      <a:endParaRPr lang="en-US" sz="1600" b="0" dirty="0">
+                        <a:effectLst/>
+                        <a:latin typeface="Consolas" panose="020B0609020204030204" pitchFamily="49" charset="0"/>
+                        <a:ea typeface="宋体"/>
+                        <a:cs typeface="Consolas" panose="020B0609020204030204" pitchFamily="49" charset="0"/>
+                      </a:endParaRPr>
+                    </a:p>
+                  </a:txBody>
+                  <a:tcPr marL="68580" marR="68580" marT="0" marB="0"/>
+                </a:tc>
+                <a:tc>
+                  <a:txBody>
+                    <a:bodyPr/>
+                    <a:lstStyle/>
+                    <a:p>
+                      <a:pPr marL="0" marR="0" algn="just">
+                        <a:spcBef>
+                          <a:spcPts val="0"/>
+                        </a:spcBef>
+                        <a:spcAft>
+                          <a:spcPts val="0"/>
+                        </a:spcAft>
+                      </a:pPr>
+                      <a:r>
+                        <a:rPr lang="en-US" sz="1600" i="0" dirty="0">
+                          <a:effectLst/>
+                          <a:latin typeface="Consolas" panose="020B0609020204030204" pitchFamily="49" charset="0"/>
+                          <a:cs typeface="Consolas" panose="020B0609020204030204" pitchFamily="49" charset="0"/>
+                        </a:rPr>
+                        <a:t>; r0 = pow, r1 = x</a:t>
+                      </a:r>
+                    </a:p>
+                    <a:p>
+                      <a:pPr marL="0" marR="0" algn="just">
+                        <a:spcBef>
+                          <a:spcPts val="0"/>
+                        </a:spcBef>
+                        <a:spcAft>
+                          <a:spcPts val="0"/>
+                        </a:spcAft>
+                      </a:pPr>
+                      <a:r>
+                        <a:rPr lang="en-US" sz="1600" i="0" dirty="0">
+                          <a:effectLst/>
+                          <a:latin typeface="Consolas" panose="020B0609020204030204" pitchFamily="49" charset="0"/>
+                          <a:cs typeface="Consolas" panose="020B0609020204030204" pitchFamily="49" charset="0"/>
+                        </a:rPr>
+                        <a:t>  MOV r0, #1 ; pow = 1</a:t>
+                      </a:r>
+                    </a:p>
+                    <a:p>
+                      <a:pPr marL="0" marR="0" algn="just">
+                        <a:spcBef>
+                          <a:spcPts val="0"/>
+                        </a:spcBef>
+                        <a:spcAft>
+                          <a:spcPts val="0"/>
+                        </a:spcAft>
+                      </a:pPr>
+                      <a:r>
+                        <a:rPr lang="en-US" sz="1600" i="0" dirty="0">
+                          <a:effectLst/>
+                          <a:latin typeface="Consolas" panose="020B0609020204030204" pitchFamily="49" charset="0"/>
+                          <a:cs typeface="Consolas" panose="020B0609020204030204" pitchFamily="49" charset="0"/>
+                        </a:rPr>
+                        <a:t>  MOV r1, #0 ; x = 0</a:t>
+                      </a:r>
+                    </a:p>
+                    <a:p>
+                      <a:pPr marL="0" marR="0" algn="just">
+                        <a:spcBef>
+                          <a:spcPts val="0"/>
+                        </a:spcBef>
+                        <a:spcAft>
+                          <a:spcPts val="0"/>
+                        </a:spcAft>
+                      </a:pPr>
+                      <a:r>
+                        <a:rPr lang="en-US" sz="1600" i="0" dirty="0">
+                          <a:effectLst/>
+                          <a:latin typeface="Consolas" panose="020B0609020204030204" pitchFamily="49" charset="0"/>
+                          <a:cs typeface="Consolas" panose="020B0609020204030204" pitchFamily="49" charset="0"/>
+                        </a:rPr>
+                        <a:t>WHILE</a:t>
+                      </a:r>
+                    </a:p>
+                    <a:p>
+                      <a:pPr marL="0" marR="0" algn="just">
+                        <a:spcBef>
+                          <a:spcPts val="0"/>
+                        </a:spcBef>
+                        <a:spcAft>
+                          <a:spcPts val="0"/>
+                        </a:spcAft>
+                      </a:pPr>
+                      <a:r>
+                        <a:rPr lang="en-US" sz="1600" i="0" dirty="0">
+                          <a:effectLst/>
+                          <a:latin typeface="Consolas" panose="020B0609020204030204" pitchFamily="49" charset="0"/>
+                          <a:cs typeface="Consolas" panose="020B0609020204030204" pitchFamily="49" charset="0"/>
+                        </a:rPr>
+                        <a:t>  LSL r0, r0, #1 ; pow = pow * 2</a:t>
+                      </a:r>
+                    </a:p>
+                    <a:p>
+                      <a:pPr marL="0" marR="0" algn="just">
+                        <a:spcBef>
+                          <a:spcPts val="0"/>
+                        </a:spcBef>
+                        <a:spcAft>
+                          <a:spcPts val="0"/>
+                        </a:spcAft>
+                      </a:pPr>
+                      <a:r>
+                        <a:rPr lang="en-US" sz="1600" i="0" dirty="0">
+                          <a:effectLst/>
+                          <a:latin typeface="Consolas" panose="020B0609020204030204" pitchFamily="49" charset="0"/>
+                          <a:cs typeface="Consolas" panose="020B0609020204030204" pitchFamily="49" charset="0"/>
+                        </a:rPr>
+                        <a:t>  ADD r1, r1, #1 ; x = x + 1</a:t>
+                      </a:r>
+                    </a:p>
+                    <a:p>
+                      <a:pPr marL="0" marR="0" algn="just">
+                        <a:spcBef>
+                          <a:spcPts val="0"/>
+                        </a:spcBef>
+                        <a:spcAft>
+                          <a:spcPts val="0"/>
+                        </a:spcAft>
+                      </a:pPr>
+                      <a:r>
+                        <a:rPr lang="en-US" sz="1600" i="0" dirty="0">
+                          <a:effectLst/>
+                          <a:latin typeface="Consolas" panose="020B0609020204030204" pitchFamily="49" charset="0"/>
+                          <a:cs typeface="Consolas" panose="020B0609020204030204" pitchFamily="49" charset="0"/>
+                        </a:rPr>
+                        <a:t>  CMP r0, #128 ; r0-128</a:t>
+                      </a:r>
+                    </a:p>
+                    <a:p>
+                      <a:pPr marL="0" marR="0" algn="just">
+                        <a:spcBef>
+                          <a:spcPts val="0"/>
+                        </a:spcBef>
+                        <a:spcAft>
+                          <a:spcPts val="0"/>
+                        </a:spcAft>
+                      </a:pPr>
+                      <a:r>
+                        <a:rPr lang="en-US" sz="1600" i="0" dirty="0">
+                          <a:effectLst/>
+                          <a:latin typeface="Consolas" panose="020B0609020204030204" pitchFamily="49" charset="0"/>
+                          <a:cs typeface="Consolas" panose="020B0609020204030204" pitchFamily="49" charset="0"/>
+                        </a:rPr>
+                        <a:t>  BNE WHILE ; repeat loop</a:t>
+                      </a:r>
+                    </a:p>
+                    <a:p>
+                      <a:pPr marL="0" marR="0" algn="just">
+                        <a:spcBef>
+                          <a:spcPts val="0"/>
+                        </a:spcBef>
+                        <a:spcAft>
+                          <a:spcPts val="0"/>
+                        </a:spcAft>
+                      </a:pPr>
+                      <a:r>
+                        <a:rPr lang="en-US" sz="1600" i="0" dirty="0">
+                          <a:effectLst/>
+                          <a:latin typeface="Consolas" panose="020B0609020204030204" pitchFamily="49" charset="0"/>
+                          <a:cs typeface="Consolas" panose="020B0609020204030204" pitchFamily="49" charset="0"/>
+                        </a:rPr>
+                        <a:t>DONE</a:t>
+                      </a:r>
+                    </a:p>
+                  </a:txBody>
+                  <a:tcPr marL="68580" marR="68580" marT="0" marB="0"/>
+                </a:tc>
+                <a:extLst>
+                  <a:ext uri="{0D108BD9-81ED-4DB2-BD59-A6C34878D82A}">
+                    <a16:rowId xmlns:a16="http://schemas.microsoft.com/office/drawing/2014/main" val="10001"/>
+                  </a:ext>
+                </a:extLst>
+              </a:tr>
+            </a:tbl>
+          </a:graphicData>
+        </a:graphic>
+      </p:graphicFrame>
+    </p:spTree>
+    <p:extLst>
+      <p:ext uri="{BB962C8B-B14F-4D97-AF65-F5344CB8AC3E}">
+        <p14:creationId xmlns:p14="http://schemas.microsoft.com/office/powerpoint/2010/main" val="490249550"/>
+      </p:ext>
+    </p:extLst>
+  </p:cSld>
+  <p:clrMapOvr>
+    <a:masterClrMapping/>
+  </p:clrMapOvr>
+</p:sld>
+</file>
+
+<file path=ppt/slides/slide23.xml><?xml version="1.0" encoding="utf-8"?>
 <p:sld xmlns:a="http://schemas.openxmlformats.org/drawingml/2006/main" xmlns:r="http://schemas.openxmlformats.org/officeDocument/2006/relationships" xmlns:p="http://schemas.openxmlformats.org/presentationml/2006/main">
   <p:cSld>
     <p:spTree>
@@ -16951,7 +17917,7 @@
             <a:fld id="{EA7C8D44-3667-46F6-9772-CC52308E2A7F}" type="slidenum">
               <a:rPr kumimoji="0" lang="en-US" smtClean="0"/>
               <a:pPr/>
-              <a:t>22</a:t>
+              <a:t>23</a:t>
             </a:fld>
             <a:endParaRPr kumimoji="0" lang="en-US" dirty="0"/>
           </a:p>
@@ -17419,7 +18385,7 @@
 </p:sld>
 </file>
 
-<file path=ppt/slides/slide23.xml><?xml version="1.0" encoding="utf-8"?>
+<file path=ppt/slides/slide24.xml><?xml version="1.0" encoding="utf-8"?>
 <p:sld xmlns:a="http://schemas.openxmlformats.org/drawingml/2006/main" xmlns:r="http://schemas.openxmlformats.org/officeDocument/2006/relationships" xmlns:p="http://schemas.openxmlformats.org/presentationml/2006/main">
   <p:cSld>
     <p:spTree>
@@ -17494,7 +18460,7 @@
             <a:fld id="{EA7C8D44-3667-46F6-9772-CC52308E2A7F}" type="slidenum">
               <a:rPr kumimoji="0" lang="en-US" smtClean="0"/>
               <a:pPr/>
-              <a:t>23</a:t>
+              <a:t>24</a:t>
             </a:fld>
             <a:endParaRPr kumimoji="0" lang="en-US" dirty="0"/>
           </a:p>
@@ -17988,7 +18954,7 @@
 </p:sld>
 </file>
 
-<file path=ppt/slides/slide24.xml><?xml version="1.0" encoding="utf-8"?>
+<file path=ppt/slides/slide25.xml><?xml version="1.0" encoding="utf-8"?>
 <p:sld xmlns:a="http://schemas.openxmlformats.org/drawingml/2006/main" xmlns:r="http://schemas.openxmlformats.org/officeDocument/2006/relationships" xmlns:p="http://schemas.openxmlformats.org/presentationml/2006/main">
   <p:cSld>
     <p:spTree>
@@ -18313,7 +19279,7 @@
 </p:sld>
 </file>
 
-<file path=ppt/slides/slide25.xml><?xml version="1.0" encoding="utf-8"?>
+<file path=ppt/slides/slide26.xml><?xml version="1.0" encoding="utf-8"?>
 <p:sld xmlns:a="http://schemas.openxmlformats.org/drawingml/2006/main" xmlns:r="http://schemas.openxmlformats.org/officeDocument/2006/relationships" xmlns:p="http://schemas.openxmlformats.org/presentationml/2006/main">
   <p:cSld>
     <p:spTree>
@@ -19211,7 +20177,7 @@
 </p:sld>
 </file>
 
-<file path=ppt/slides/slide26.xml><?xml version="1.0" encoding="utf-8"?>
+<file path=ppt/slides/slide27.xml><?xml version="1.0" encoding="utf-8"?>
 <p:sld xmlns:a="http://schemas.openxmlformats.org/drawingml/2006/main" xmlns:r="http://schemas.openxmlformats.org/officeDocument/2006/relationships" xmlns:p="http://schemas.openxmlformats.org/presentationml/2006/main">
   <p:cSld>
     <p:spTree>
@@ -19280,7 +20246,7 @@
             <a:fld id="{EA7C8D44-3667-46F6-9772-CC52308E2A7F}" type="slidenum">
               <a:rPr kumimoji="0" lang="en-US" smtClean="0"/>
               <a:pPr/>
-              <a:t>26</a:t>
+              <a:t>27</a:t>
             </a:fld>
             <a:endParaRPr kumimoji="0" lang="en-US" dirty="0"/>
           </a:p>
@@ -19380,7 +20346,7 @@
 </p:sld>
 </file>
 
-<file path=ppt/slides/slide27.xml><?xml version="1.0" encoding="utf-8"?>
+<file path=ppt/slides/slide28.xml><?xml version="1.0" encoding="utf-8"?>
 <p:sld xmlns:a="http://schemas.openxmlformats.org/drawingml/2006/main" xmlns:r="http://schemas.openxmlformats.org/officeDocument/2006/relationships" xmlns:p="http://schemas.openxmlformats.org/presentationml/2006/main">
   <p:cSld>
     <p:spTree>
@@ -19449,7 +20415,7 @@
             <a:fld id="{EA7C8D44-3667-46F6-9772-CC52308E2A7F}" type="slidenum">
               <a:rPr kumimoji="0" lang="en-US" smtClean="0"/>
               <a:pPr/>
-              <a:t>27</a:t>
+              <a:t>28</a:t>
             </a:fld>
             <a:endParaRPr kumimoji="0" lang="en-US" dirty="0"/>
           </a:p>
@@ -19503,7 +20469,7 @@
 </p:sld>
 </file>
 
-<file path=ppt/slides/slide28.xml><?xml version="1.0" encoding="utf-8"?>
+<file path=ppt/slides/slide29.xml><?xml version="1.0" encoding="utf-8"?>
 <p:sld xmlns:a="http://schemas.openxmlformats.org/drawingml/2006/main" xmlns:r="http://schemas.openxmlformats.org/officeDocument/2006/relationships" xmlns:p="http://schemas.openxmlformats.org/presentationml/2006/main">
   <p:cSld>
     <p:spTree>
@@ -19578,7 +20544,7 @@
             <a:fld id="{EA7C8D44-3667-46F6-9772-CC52308E2A7F}" type="slidenum">
               <a:rPr kumimoji="0" lang="en-US" smtClean="0"/>
               <a:pPr/>
-              <a:t>28</a:t>
+              <a:t>29</a:t>
             </a:fld>
             <a:endParaRPr kumimoji="0" lang="en-US" dirty="0"/>
           </a:p>
@@ -20072,127 +21038,6 @@
 </p:sld>
 </file>
 
-<file path=ppt/slides/slide29.xml><?xml version="1.0" encoding="utf-8"?>
-<p:sld xmlns:a="http://schemas.openxmlformats.org/drawingml/2006/main" xmlns:r="http://schemas.openxmlformats.org/officeDocument/2006/relationships" xmlns:p="http://schemas.openxmlformats.org/presentationml/2006/main">
-  <p:cSld>
-    <p:spTree>
-      <p:nvGrpSpPr>
-        <p:cNvPr id="1" name=""/>
-        <p:cNvGrpSpPr/>
-        <p:nvPr/>
-      </p:nvGrpSpPr>
-      <p:grpSpPr>
-        <a:xfrm>
-          <a:off x="0" y="0"/>
-          <a:ext cx="0" cy="0"/>
-          <a:chOff x="0" y="0"/>
-          <a:chExt cx="0" cy="0"/>
-        </a:xfrm>
-      </p:grpSpPr>
-      <p:sp>
-        <p:nvSpPr>
-          <p:cNvPr id="2" name="Title 1">
-            <a:extLst>
-              <a:ext uri="{FF2B5EF4-FFF2-40B4-BE49-F238E27FC236}">
-                <a16:creationId xmlns:a16="http://schemas.microsoft.com/office/drawing/2014/main" id="{2CAA883A-F8CE-E82A-B1A3-6EC2CD284606}"/>
-              </a:ext>
-            </a:extLst>
-          </p:cNvPr>
-          <p:cNvSpPr>
-            <a:spLocks noGrp="1"/>
-          </p:cNvSpPr>
-          <p:nvPr>
-            <p:ph type="title"/>
-          </p:nvPr>
-        </p:nvSpPr>
-        <p:spPr/>
-        <p:txBody>
-          <a:bodyPr/>
-          <a:lstStyle/>
-          <a:p>
-            <a:r>
-              <a:rPr lang="en-US" dirty="0"/>
-              <a:t>Test for Equal</a:t>
-            </a:r>
-          </a:p>
-        </p:txBody>
-      </p:sp>
-      <p:sp>
-        <p:nvSpPr>
-          <p:cNvPr id="3" name="Slide Number Placeholder 2">
-            <a:extLst>
-              <a:ext uri="{FF2B5EF4-FFF2-40B4-BE49-F238E27FC236}">
-                <a16:creationId xmlns:a16="http://schemas.microsoft.com/office/drawing/2014/main" id="{3B01EFB2-11F5-B39F-34E5-E54A841CCB3C}"/>
-              </a:ext>
-            </a:extLst>
-          </p:cNvPr>
-          <p:cNvSpPr>
-            <a:spLocks noGrp="1"/>
-          </p:cNvSpPr>
-          <p:nvPr>
-            <p:ph type="sldNum" sz="quarter" idx="12"/>
-          </p:nvPr>
-        </p:nvSpPr>
-        <p:spPr/>
-        <p:txBody>
-          <a:bodyPr/>
-          <a:lstStyle/>
-          <a:p>
-            <a:fld id="{EA7C8D44-3667-46F6-9772-CC52308E2A7F}" type="slidenum">
-              <a:rPr kumimoji="0" lang="en-US" smtClean="0"/>
-              <a:pPr/>
-              <a:t>29</a:t>
-            </a:fld>
-            <a:endParaRPr kumimoji="0" lang="en-US" dirty="0"/>
-          </a:p>
-        </p:txBody>
-      </p:sp>
-      <p:sp>
-        <p:nvSpPr>
-          <p:cNvPr id="4" name="Content Placeholder 3">
-            <a:extLst>
-              <a:ext uri="{FF2B5EF4-FFF2-40B4-BE49-F238E27FC236}">
-                <a16:creationId xmlns:a16="http://schemas.microsoft.com/office/drawing/2014/main" id="{FEB16539-02BC-5FF9-955C-7C457DDED9F6}"/>
-              </a:ext>
-            </a:extLst>
-          </p:cNvPr>
-          <p:cNvSpPr>
-            <a:spLocks noGrp="1"/>
-          </p:cNvSpPr>
-          <p:nvPr>
-            <p:ph sz="quarter" idx="1"/>
-          </p:nvPr>
-        </p:nvSpPr>
-        <p:spPr/>
-        <p:txBody>
-          <a:bodyPr>
-            <a:normAutofit/>
-          </a:bodyPr>
-          <a:lstStyle/>
-          <a:p>
-            <a:r>
-              <a:rPr lang="en-US" dirty="0"/>
-              <a:t>Give the different methods to test if two values held in registers r0 and r1 are equal.</a:t>
-            </a:r>
-          </a:p>
-          <a:p>
-            <a:endParaRPr lang="en-US" dirty="0"/>
-          </a:p>
-        </p:txBody>
-      </p:sp>
-    </p:spTree>
-    <p:extLst>
-      <p:ext uri="{BB962C8B-B14F-4D97-AF65-F5344CB8AC3E}">
-        <p14:creationId xmlns:p14="http://schemas.microsoft.com/office/powerpoint/2010/main" val="2897386910"/>
-      </p:ext>
-    </p:extLst>
-  </p:cSld>
-  <p:clrMapOvr>
-    <a:masterClrMapping/>
-  </p:clrMapOvr>
-</p:sld>
-</file>
-
 <file path=ppt/slides/slide3.xml><?xml version="1.0" encoding="utf-8"?>
 <p:sld xmlns:a="http://schemas.openxmlformats.org/drawingml/2006/main" xmlns:r="http://schemas.openxmlformats.org/officeDocument/2006/relationships" xmlns:p="http://schemas.openxmlformats.org/presentationml/2006/main">
   <p:cSld>
@@ -20783,6 +21628,127 @@
   <p:cSld>
     <p:spTree>
       <p:nvGrpSpPr>
+        <p:cNvPr id="1" name=""/>
+        <p:cNvGrpSpPr/>
+        <p:nvPr/>
+      </p:nvGrpSpPr>
+      <p:grpSpPr>
+        <a:xfrm>
+          <a:off x="0" y="0"/>
+          <a:ext cx="0" cy="0"/>
+          <a:chOff x="0" y="0"/>
+          <a:chExt cx="0" cy="0"/>
+        </a:xfrm>
+      </p:grpSpPr>
+      <p:sp>
+        <p:nvSpPr>
+          <p:cNvPr id="2" name="Title 1">
+            <a:extLst>
+              <a:ext uri="{FF2B5EF4-FFF2-40B4-BE49-F238E27FC236}">
+                <a16:creationId xmlns:a16="http://schemas.microsoft.com/office/drawing/2014/main" id="{2CAA883A-F8CE-E82A-B1A3-6EC2CD284606}"/>
+              </a:ext>
+            </a:extLst>
+          </p:cNvPr>
+          <p:cNvSpPr>
+            <a:spLocks noGrp="1"/>
+          </p:cNvSpPr>
+          <p:nvPr>
+            <p:ph type="title"/>
+          </p:nvPr>
+        </p:nvSpPr>
+        <p:spPr/>
+        <p:txBody>
+          <a:bodyPr/>
+          <a:lstStyle/>
+          <a:p>
+            <a:r>
+              <a:rPr lang="en-US" dirty="0"/>
+              <a:t>Test for Equal</a:t>
+            </a:r>
+          </a:p>
+        </p:txBody>
+      </p:sp>
+      <p:sp>
+        <p:nvSpPr>
+          <p:cNvPr id="3" name="Slide Number Placeholder 2">
+            <a:extLst>
+              <a:ext uri="{FF2B5EF4-FFF2-40B4-BE49-F238E27FC236}">
+                <a16:creationId xmlns:a16="http://schemas.microsoft.com/office/drawing/2014/main" id="{3B01EFB2-11F5-B39F-34E5-E54A841CCB3C}"/>
+              </a:ext>
+            </a:extLst>
+          </p:cNvPr>
+          <p:cNvSpPr>
+            <a:spLocks noGrp="1"/>
+          </p:cNvSpPr>
+          <p:nvPr>
+            <p:ph type="sldNum" sz="quarter" idx="12"/>
+          </p:nvPr>
+        </p:nvSpPr>
+        <p:spPr/>
+        <p:txBody>
+          <a:bodyPr/>
+          <a:lstStyle/>
+          <a:p>
+            <a:fld id="{EA7C8D44-3667-46F6-9772-CC52308E2A7F}" type="slidenum">
+              <a:rPr kumimoji="0" lang="en-US" smtClean="0"/>
+              <a:pPr/>
+              <a:t>30</a:t>
+            </a:fld>
+            <a:endParaRPr kumimoji="0" lang="en-US" dirty="0"/>
+          </a:p>
+        </p:txBody>
+      </p:sp>
+      <p:sp>
+        <p:nvSpPr>
+          <p:cNvPr id="4" name="Content Placeholder 3">
+            <a:extLst>
+              <a:ext uri="{FF2B5EF4-FFF2-40B4-BE49-F238E27FC236}">
+                <a16:creationId xmlns:a16="http://schemas.microsoft.com/office/drawing/2014/main" id="{FEB16539-02BC-5FF9-955C-7C457DDED9F6}"/>
+              </a:ext>
+            </a:extLst>
+          </p:cNvPr>
+          <p:cNvSpPr>
+            <a:spLocks noGrp="1"/>
+          </p:cNvSpPr>
+          <p:nvPr>
+            <p:ph sz="quarter" idx="1"/>
+          </p:nvPr>
+        </p:nvSpPr>
+        <p:spPr/>
+        <p:txBody>
+          <a:bodyPr>
+            <a:normAutofit/>
+          </a:bodyPr>
+          <a:lstStyle/>
+          <a:p>
+            <a:r>
+              <a:rPr lang="en-US" dirty="0"/>
+              <a:t>Give the different methods to test if two values held in registers r0 and r1 are equal.</a:t>
+            </a:r>
+          </a:p>
+          <a:p>
+            <a:endParaRPr lang="en-US" dirty="0"/>
+          </a:p>
+        </p:txBody>
+      </p:sp>
+    </p:spTree>
+    <p:extLst>
+      <p:ext uri="{BB962C8B-B14F-4D97-AF65-F5344CB8AC3E}">
+        <p14:creationId xmlns:p14="http://schemas.microsoft.com/office/powerpoint/2010/main" val="2897386910"/>
+      </p:ext>
+    </p:extLst>
+  </p:cSld>
+  <p:clrMapOvr>
+    <a:masterClrMapping/>
+  </p:clrMapOvr>
+</p:sld>
+</file>
+
+<file path=ppt/slides/slide31.xml><?xml version="1.0" encoding="utf-8"?>
+<p:sld xmlns:a="http://schemas.openxmlformats.org/drawingml/2006/main" xmlns:r="http://schemas.openxmlformats.org/officeDocument/2006/relationships" xmlns:p="http://schemas.openxmlformats.org/presentationml/2006/main">
+  <p:cSld>
+    <p:spTree>
+      <p:nvGrpSpPr>
         <p:cNvPr id="1" name="">
           <a:extLst>
             <a:ext uri="{FF2B5EF4-FFF2-40B4-BE49-F238E27FC236}">
@@ -20853,7 +21819,7 @@
             <a:fld id="{EA7C8D44-3667-46F6-9772-CC52308E2A7F}" type="slidenum">
               <a:rPr kumimoji="0" lang="en-US" smtClean="0"/>
               <a:pPr/>
-              <a:t>30</a:t>
+              <a:t>31</a:t>
             </a:fld>
             <a:endParaRPr kumimoji="0" lang="en-US" dirty="0"/>
           </a:p>
@@ -20953,7 +21919,7 @@
 </p:sld>
 </file>
 
-<file path=ppt/slides/slide31.xml><?xml version="1.0" encoding="utf-8"?>
+<file path=ppt/slides/slide32.xml><?xml version="1.0" encoding="utf-8"?>
 <p:sld xmlns:a="http://schemas.openxmlformats.org/drawingml/2006/main" xmlns:r="http://schemas.openxmlformats.org/officeDocument/2006/relationships" xmlns:p="http://schemas.openxmlformats.org/presentationml/2006/main">
   <p:cSld>
     <p:spTree>
@@ -21024,7 +21990,7 @@
             <a:fld id="{AEE14D4A-FE32-40AF-B06D-E9622816B101}" type="slidenum">
               <a:rPr lang="en-US" smtClean="0"/>
               <a:pPr/>
-              <a:t>31</a:t>
+              <a:t>32</a:t>
             </a:fld>
             <a:endParaRPr lang="en-US"/>
           </a:p>
@@ -23659,7 +24625,7 @@
 </p:sld>
 </file>
 
-<file path=ppt/slides/slide32.xml><?xml version="1.0" encoding="utf-8"?>
+<file path=ppt/slides/slide33.xml><?xml version="1.0" encoding="utf-8"?>
 <p:sld xmlns:a="http://schemas.openxmlformats.org/drawingml/2006/main" xmlns:r="http://schemas.openxmlformats.org/officeDocument/2006/relationships" xmlns:p="http://schemas.openxmlformats.org/presentationml/2006/main">
   <p:cSld>
     <p:spTree>
@@ -23734,7 +24700,7 @@
             <a:fld id="{EA7C8D44-3667-46F6-9772-CC52308E2A7F}" type="slidenum">
               <a:rPr kumimoji="0" lang="en-US" smtClean="0"/>
               <a:pPr/>
-              <a:t>32</a:t>
+              <a:t>33</a:t>
             </a:fld>
             <a:endParaRPr kumimoji="0" lang="en-US" dirty="0"/>
           </a:p>
@@ -23807,7 +24773,7 @@
 </p:sld>
 </file>
 
-<file path=ppt/slides/slide33.xml><?xml version="1.0" encoding="utf-8"?>
+<file path=ppt/slides/slide34.xml><?xml version="1.0" encoding="utf-8"?>
 <p:sld xmlns:a="http://schemas.openxmlformats.org/drawingml/2006/main" xmlns:r="http://schemas.openxmlformats.org/officeDocument/2006/relationships" xmlns:p="http://schemas.openxmlformats.org/presentationml/2006/main">
   <p:cSld>
     <p:spTree>
@@ -23876,7 +24842,7 @@
             <a:fld id="{EA7C8D44-3667-46F6-9772-CC52308E2A7F}" type="slidenum">
               <a:rPr kumimoji="0" lang="en-US" smtClean="0"/>
               <a:pPr/>
-              <a:t>33</a:t>
+              <a:t>34</a:t>
             </a:fld>
             <a:endParaRPr kumimoji="0" lang="en-US" dirty="0"/>
           </a:p>
@@ -23997,7 +24963,7 @@
 </p:sld>
 </file>
 
-<file path=ppt/slides/slide34.xml><?xml version="1.0" encoding="utf-8"?>
+<file path=ppt/slides/slide35.xml><?xml version="1.0" encoding="utf-8"?>
 <p:sld xmlns:a="http://schemas.openxmlformats.org/drawingml/2006/main" xmlns:r="http://schemas.openxmlformats.org/officeDocument/2006/relationships" xmlns:p="http://schemas.openxmlformats.org/presentationml/2006/main">
   <p:cSld>
     <p:spTree>
@@ -24066,7 +25032,7 @@
             <a:fld id="{EA7C8D44-3667-46F6-9772-CC52308E2A7F}" type="slidenum">
               <a:rPr kumimoji="0" lang="en-US" smtClean="0"/>
               <a:pPr/>
-              <a:t>34</a:t>
+              <a:t>35</a:t>
             </a:fld>
             <a:endParaRPr kumimoji="0" lang="en-US" dirty="0"/>
           </a:p>
@@ -25039,7 +26005,7 @@
 </p:sld>
 </file>
 
-<file path=ppt/slides/slide35.xml><?xml version="1.0" encoding="utf-8"?>
+<file path=ppt/slides/slide36.xml><?xml version="1.0" encoding="utf-8"?>
 <p:sld xmlns:a="http://schemas.openxmlformats.org/drawingml/2006/main" xmlns:r="http://schemas.openxmlformats.org/officeDocument/2006/relationships" xmlns:p="http://schemas.openxmlformats.org/presentationml/2006/main">
   <p:cSld>
     <p:spTree>
@@ -25114,7 +26080,7 @@
             <a:fld id="{EA7C8D44-3667-46F6-9772-CC52308E2A7F}" type="slidenum">
               <a:rPr kumimoji="0" lang="en-US" smtClean="0"/>
               <a:pPr/>
-              <a:t>35</a:t>
+              <a:t>36</a:t>
             </a:fld>
             <a:endParaRPr kumimoji="0" lang="en-US" dirty="0"/>
           </a:p>
@@ -26220,7 +27186,7 @@
 </p:sld>
 </file>
 
-<file path=ppt/slides/slide36.xml><?xml version="1.0" encoding="utf-8"?>
+<file path=ppt/slides/slide37.xml><?xml version="1.0" encoding="utf-8"?>
 <p:sld xmlns:a="http://schemas.openxmlformats.org/drawingml/2006/main" xmlns:r="http://schemas.openxmlformats.org/officeDocument/2006/relationships" xmlns:p="http://schemas.openxmlformats.org/presentationml/2006/main">
   <p:cSld>
     <p:spTree>
@@ -26295,7 +27261,7 @@
             <a:fld id="{EA7C8D44-3667-46F6-9772-CC52308E2A7F}" type="slidenum">
               <a:rPr kumimoji="0" lang="en-US" smtClean="0"/>
               <a:pPr/>
-              <a:t>36</a:t>
+              <a:t>37</a:t>
             </a:fld>
             <a:endParaRPr kumimoji="0" lang="en-US" dirty="0"/>
           </a:p>
@@ -26648,7 +27614,7 @@
 </p:sld>
 </file>
 
-<file path=ppt/slides/slide37.xml><?xml version="1.0" encoding="utf-8"?>
+<file path=ppt/slides/slide38.xml><?xml version="1.0" encoding="utf-8"?>
 <p:sld xmlns:a="http://schemas.openxmlformats.org/drawingml/2006/main" xmlns:r="http://schemas.openxmlformats.org/officeDocument/2006/relationships" xmlns:p="http://schemas.openxmlformats.org/presentationml/2006/main">
   <p:cSld>
     <p:spTree>
@@ -26723,7 +27689,7 @@
             <a:fld id="{EA7C8D44-3667-46F6-9772-CC52308E2A7F}" type="slidenum">
               <a:rPr kumimoji="0" lang="en-US" smtClean="0"/>
               <a:pPr/>
-              <a:t>37</a:t>
+              <a:t>38</a:t>
             </a:fld>
             <a:endParaRPr kumimoji="0" lang="en-US" dirty="0"/>
           </a:p>
@@ -27602,7 +28568,7 @@
           <p:nvPr>
             <p:extLst>
               <p:ext uri="{D42A27DB-BD31-4B8C-83A1-F6EECF244321}">
-                <p14:modId xmlns:p14="http://schemas.microsoft.com/office/powerpoint/2010/main" val="3652088358"/>
+                <p14:modId xmlns:p14="http://schemas.microsoft.com/office/powerpoint/2010/main" val="22643916"/>
               </p:ext>
             </p:extLst>
           </p:nvPr>
@@ -27778,7 +28744,7 @@
                           <a:latin typeface="Consolas" panose="020B0609020204030204" pitchFamily="49" charset="0"/>
                           <a:cs typeface="Consolas" panose="020B0609020204030204" pitchFamily="49" charset="0"/>
                         </a:rPr>
-                        <a:t>AND r1, r1, 0xF</a:t>
+                        <a:t>AND r1, r1, 0x0F</a:t>
                       </a:r>
                     </a:p>
                     <a:p>
@@ -28232,7 +29198,7 @@
           <a:p>
             <a:r>
               <a:rPr lang="en-US" dirty="0"/>
-              <a:t>Assembly Program 1: It computes r1 = (r0 &gt;&gt; 4) &amp; 15 shifting it down by 4 bits, then masking the low nibble (4 bits) with 0xF0.</a:t>
+              <a:t>Assembly Program 1: It computes r1 = (r0 &gt;&gt; 4) &amp; 15 shifting it down by 4 bits, then masking the low nibble (4 bits) with 0x0F (or 0xF).</a:t>
             </a:r>
           </a:p>
           <a:p>
@@ -28527,7 +29493,7 @@
         <p:spPr/>
         <p:txBody>
           <a:bodyPr>
-            <a:normAutofit/>
+            <a:normAutofit fontScale="85000" lnSpcReduction="20000"/>
           </a:bodyPr>
           <a:lstStyle/>
           <a:p>
@@ -28576,6 +29542,57 @@
               <a:rPr lang="en-US" dirty="0"/>
               <a:t>This code sets r0 to 10, compares 7 and 5. Since 7 &gt; 5, adds 100 to the base value of 10 to get 110</a:t>
             </a:r>
+          </a:p>
+          <a:p>
+            <a:r>
+              <a:rPr lang="en-US" dirty="0"/>
+              <a:t>What about:</a:t>
+            </a:r>
+          </a:p>
+          <a:p>
+            <a:pPr lvl="1"/>
+            <a:r>
+              <a:rPr lang="pt-BR" dirty="0"/>
+              <a:t>MOV r0, #10</a:t>
+            </a:r>
+          </a:p>
+          <a:p>
+            <a:pPr lvl="1"/>
+            <a:r>
+              <a:rPr lang="pt-BR" dirty="0"/>
+              <a:t>MOV r1, #7</a:t>
+            </a:r>
+          </a:p>
+          <a:p>
+            <a:pPr lvl="1"/>
+            <a:r>
+              <a:rPr lang="pt-BR" dirty="0"/>
+              <a:t>MOV r2, #5</a:t>
+            </a:r>
+          </a:p>
+          <a:p>
+            <a:pPr lvl="1"/>
+            <a:r>
+              <a:rPr lang="pt-BR" dirty="0"/>
+              <a:t>SUBS r1, r2</a:t>
+            </a:r>
+          </a:p>
+          <a:p>
+            <a:pPr lvl="1"/>
+            <a:r>
+              <a:rPr lang="pt-BR" dirty="0"/>
+              <a:t>ADDGE r0, r0, #100</a:t>
+            </a:r>
+          </a:p>
+          <a:p>
+            <a:r>
+              <a:rPr lang="pt-BR" dirty="0"/>
+              <a:t>Here r0 = 110, since SUBS sets flags and ADDGE is executed</a:t>
+            </a:r>
+          </a:p>
+          <a:p>
+            <a:pPr lvl="1"/>
+            <a:endParaRPr lang="en-US" dirty="0"/>
           </a:p>
         </p:txBody>
       </p:sp>
@@ -28687,12 +29704,6 @@
         <p:txBody>
           <a:bodyPr/>
           <a:lstStyle/>
-          <a:p>
-            <a:r>
-              <a:rPr lang="en-US" dirty="0"/>
-              <a:t>Write the equivalent assembly program for this piece of code in C.</a:t>
-            </a:r>
-          </a:p>
           <a:p>
             <a:r>
               <a:rPr lang="en-US" dirty="0"/>
@@ -29085,7 +30096,7 @@
           <p:nvPr>
             <p:extLst>
               <p:ext uri="{D42A27DB-BD31-4B8C-83A1-F6EECF244321}">
-                <p14:modId xmlns:p14="http://schemas.microsoft.com/office/powerpoint/2010/main" val="3641149413"/>
+                <p14:modId xmlns:p14="http://schemas.microsoft.com/office/powerpoint/2010/main" val="791949562"/>
               </p:ext>
             </p:extLst>
           </p:nvPr>
@@ -29397,7 +30408,7 @@
                           <a:latin typeface="Consolas" panose="020B0609020204030204" pitchFamily="49" charset="0"/>
                           <a:cs typeface="Consolas" panose="020B0609020204030204" pitchFamily="49" charset="0"/>
                         </a:rPr>
-                        <a:t>    LDR r3, [r0, r1, LSL #2] ; r3 = save[i], 32-bit loads with index scaled by 4</a:t>
+                        <a:t>    LDR r3, [r0, r1, LSL #2] ; r3 = save[i], 32-bit loads with index scaled by 4, so r3 is loaded from mem address r0+4*r1</a:t>
                       </a:r>
                     </a:p>
                     <a:p>
@@ -29433,7 +30444,7 @@
                           <a:latin typeface="Consolas" panose="020B0609020204030204" pitchFamily="49" charset="0"/>
                           <a:cs typeface="Consolas" panose="020B0609020204030204" pitchFamily="49" charset="0"/>
                         </a:rPr>
-                        <a:t>    BNE done       ; exit loop if save[i] != k</a:t>
+                        <a:t>    BNE done      ; exit loop if save[i] != k</a:t>
                       </a:r>
                     </a:p>
                     <a:p>
@@ -29451,7 +30462,7 @@
                           <a:latin typeface="Consolas" panose="020B0609020204030204" pitchFamily="49" charset="0"/>
                           <a:cs typeface="Consolas" panose="020B0609020204030204" pitchFamily="49" charset="0"/>
                         </a:rPr>
-                        <a:t>    ADD r1, r1, #1         ; i += 1</a:t>
+                        <a:t>    ADD r1, r1, #1 ; i += 1</a:t>
                       </a:r>
                     </a:p>
                     <a:p>
@@ -29469,7 +30480,7 @@
                           <a:latin typeface="Consolas" panose="020B0609020204030204" pitchFamily="49" charset="0"/>
                           <a:cs typeface="Consolas" panose="020B0609020204030204" pitchFamily="49" charset="0"/>
                         </a:rPr>
-                        <a:t>    B loop                 ; repeat</a:t>
+                        <a:t>    B loop         ; repeat</a:t>
                       </a:r>
                     </a:p>
                     <a:p>
@@ -29542,15 +30553,9 @@
         </p:spPr>
         <p:txBody>
           <a:bodyPr>
-            <a:normAutofit fontScale="85000" lnSpcReduction="20000"/>
+            <a:normAutofit fontScale="92500" lnSpcReduction="20000"/>
           </a:bodyPr>
           <a:lstStyle/>
-          <a:p>
-            <a:r>
-              <a:rPr lang="en-US" dirty="0"/>
-              <a:t>Write the equivalent assembly program for this piece of code in C.</a:t>
-            </a:r>
-          </a:p>
           <a:p>
             <a:r>
               <a:rPr lang="en-US" dirty="0"/>

--- a/PPTs/Ch6_ARM_Control_Flow_Exercises_ANS.pptx
+++ b/PPTs/Ch6_ARM_Control_Flow_Exercises_ANS.pptx
@@ -176,7 +176,7 @@
   <pc:docChgLst>
     <pc:chgData name="Zonghua Gu" userId="9a7e1853e1951ef5" providerId="LiveId" clId="{CF1FAA12-072C-4ED5-BA76-0FFFAEFDB88A}"/>
     <pc:docChg chg="undo redo custSel addSld delSld modSld sldOrd">
-      <pc:chgData name="Zonghua Gu" userId="9a7e1853e1951ef5" providerId="LiveId" clId="{CF1FAA12-072C-4ED5-BA76-0FFFAEFDB88A}" dt="2025-11-14T00:24:28.880" v="5832" actId="20577"/>
+      <pc:chgData name="Zonghua Gu" userId="9a7e1853e1951ef5" providerId="LiveId" clId="{CF1FAA12-072C-4ED5-BA76-0FFFAEFDB88A}" dt="2025-11-14T00:36:37.725" v="5838" actId="113"/>
       <pc:docMkLst>
         <pc:docMk/>
       </pc:docMkLst>
@@ -356,13 +356,13 @@
         </pc:spChg>
       </pc:sldChg>
       <pc:sldChg chg="modSp mod">
-        <pc:chgData name="Zonghua Gu" userId="9a7e1853e1951ef5" providerId="LiveId" clId="{CF1FAA12-072C-4ED5-BA76-0FFFAEFDB88A}" dt="2025-11-13T23:59:35.536" v="5470" actId="1076"/>
+        <pc:chgData name="Zonghua Gu" userId="9a7e1853e1951ef5" providerId="LiveId" clId="{CF1FAA12-072C-4ED5-BA76-0FFFAEFDB88A}" dt="2025-11-14T00:36:08.450" v="5835" actId="1035"/>
         <pc:sldMkLst>
           <pc:docMk/>
           <pc:sldMk cId="3938986292" sldId="381"/>
         </pc:sldMkLst>
         <pc:spChg chg="mod">
-          <ac:chgData name="Zonghua Gu" userId="9a7e1853e1951ef5" providerId="LiveId" clId="{CF1FAA12-072C-4ED5-BA76-0FFFAEFDB88A}" dt="2025-11-13T23:59:35.536" v="5470" actId="1076"/>
+          <ac:chgData name="Zonghua Gu" userId="9a7e1853e1951ef5" providerId="LiveId" clId="{CF1FAA12-072C-4ED5-BA76-0FFFAEFDB88A}" dt="2025-11-14T00:36:08.450" v="5835" actId="1035"/>
           <ac:spMkLst>
             <pc:docMk/>
             <pc:sldMk cId="3938986292" sldId="381"/>
@@ -503,7 +503,7 @@
         </pc:spChg>
       </pc:sldChg>
       <pc:sldChg chg="addSp modSp new mod">
-        <pc:chgData name="Zonghua Gu" userId="9a7e1853e1951ef5" providerId="LiveId" clId="{CF1FAA12-072C-4ED5-BA76-0FFFAEFDB88A}" dt="2025-11-14T00:24:28.880" v="5832" actId="20577"/>
+        <pc:chgData name="Zonghua Gu" userId="9a7e1853e1951ef5" providerId="LiveId" clId="{CF1FAA12-072C-4ED5-BA76-0FFFAEFDB88A}" dt="2025-11-14T00:36:37.725" v="5838" actId="113"/>
         <pc:sldMkLst>
           <pc:docMk/>
           <pc:sldMk cId="490249550" sldId="390"/>
@@ -517,7 +517,7 @@
           </ac:spMkLst>
         </pc:spChg>
         <pc:spChg chg="mod">
-          <ac:chgData name="Zonghua Gu" userId="9a7e1853e1951ef5" providerId="LiveId" clId="{CF1FAA12-072C-4ED5-BA76-0FFFAEFDB88A}" dt="2025-11-14T00:24:28.880" v="5832" actId="20577"/>
+          <ac:chgData name="Zonghua Gu" userId="9a7e1853e1951ef5" providerId="LiveId" clId="{CF1FAA12-072C-4ED5-BA76-0FFFAEFDB88A}" dt="2025-11-14T00:36:37.725" v="5838" actId="113"/>
           <ac:spMkLst>
             <pc:docMk/>
             <pc:sldMk cId="490249550" sldId="390"/>
@@ -10409,7 +10409,7 @@
         </p:nvSpPr>
         <p:spPr>
           <a:xfrm>
-            <a:off x="1828800" y="5521781"/>
+            <a:off x="1828800" y="5486400"/>
             <a:ext cx="5715000" cy="1200329"/>
           </a:xfrm>
           <a:prstGeom prst="rect">
@@ -10471,7 +10471,7 @@
             </a:r>
             <a:r>
               <a:rPr lang="en-US" dirty="0"/>
-              <a:t> = r0 = 0 initially. c.f. pp 23-25 in Ch6 lecture)</a:t>
+              <a:t> = r0 = 0 initially. c.f. pp 22-25 in Ch6 lecture)</a:t>
             </a:r>
           </a:p>
         </p:txBody>
@@ -17363,31 +17363,7 @@
             </a:r>
             <a:r>
               <a:rPr lang="en-US" dirty="0"/>
-              <a:t> If r0 </a:t>
-            </a:r>
-            <a:r>
-              <a:rPr lang="en-US" b="1" dirty="0"/>
-              <a:t>starts</a:t>
-            </a:r>
-            <a:r>
-              <a:rPr lang="en-US" dirty="0"/>
-              <a:t> as 128 (zero-iteration case), this version will </a:t>
-            </a:r>
-            <a:r>
-              <a:rPr lang="en-US" b="1" dirty="0"/>
-              <a:t>execute the body once</a:t>
-            </a:r>
-            <a:r>
-              <a:rPr lang="en-US" dirty="0"/>
-              <a:t> (doubling to 256 and incrementing r1) before checking — i.e., wrong for that initial condition</a:t>
-            </a:r>
-            <a:r>
-              <a:rPr lang="en-US"/>
-              <a:t>, c</a:t>
-            </a:r>
-            <a:r>
-              <a:rPr lang="en-US" dirty="0"/>
-              <a:t>.f. pp 23-25 in Ch6 lecture</a:t>
+              <a:t> If r0 starts as 128 (zero-iteration case), this version will execute the body once (doubling to 256 and incrementing r1) before checking — i.e., wrong for that initial condition, c.f. pp 22-25 in Ch6 lecture</a:t>
             </a:r>
           </a:p>
         </p:txBody>

--- a/PPTs/Ch6_ARM_Control_Flow_Exercises_ANS.pptx
+++ b/PPTs/Ch6_ARM_Control_Flow_Exercises_ANS.pptx
@@ -176,7 +176,7 @@
   <pc:docChgLst>
     <pc:chgData name="Zonghua Gu" userId="9a7e1853e1951ef5" providerId="LiveId" clId="{CF1FAA12-072C-4ED5-BA76-0FFFAEFDB88A}"/>
     <pc:docChg chg="undo redo custSel addSld delSld modSld sldOrd">
-      <pc:chgData name="Zonghua Gu" userId="9a7e1853e1951ef5" providerId="LiveId" clId="{CF1FAA12-072C-4ED5-BA76-0FFFAEFDB88A}" dt="2025-11-14T00:36:37.725" v="5838" actId="113"/>
+      <pc:chgData name="Zonghua Gu" userId="9a7e1853e1951ef5" providerId="LiveId" clId="{CF1FAA12-072C-4ED5-BA76-0FFFAEFDB88A}" dt="2025-11-14T23:32:59.112" v="5884" actId="1076"/>
       <pc:docMkLst>
         <pc:docMk/>
       </pc:docMkLst>
@@ -253,6 +253,21 @@
             <pc:docMk/>
             <pc:sldMk cId="2876358127" sldId="356"/>
             <ac:graphicFrameMk id="5" creationId="{B81DD544-8C21-2C0D-D8C9-39D776DE6162}"/>
+          </ac:graphicFrameMkLst>
+        </pc:graphicFrameChg>
+      </pc:sldChg>
+      <pc:sldChg chg="modSp mod">
+        <pc:chgData name="Zonghua Gu" userId="9a7e1853e1951ef5" providerId="LiveId" clId="{CF1FAA12-072C-4ED5-BA76-0FFFAEFDB88A}" dt="2025-11-14T23:28:03.602" v="5839" actId="6549"/>
+        <pc:sldMkLst>
+          <pc:docMk/>
+          <pc:sldMk cId="244455839" sldId="361"/>
+        </pc:sldMkLst>
+        <pc:graphicFrameChg chg="modGraphic">
+          <ac:chgData name="Zonghua Gu" userId="9a7e1853e1951ef5" providerId="LiveId" clId="{CF1FAA12-072C-4ED5-BA76-0FFFAEFDB88A}" dt="2025-11-14T23:28:03.602" v="5839" actId="6549"/>
+          <ac:graphicFrameMkLst>
+            <pc:docMk/>
+            <pc:sldMk cId="244455839" sldId="361"/>
+            <ac:graphicFrameMk id="5" creationId="{E9861495-0CBB-23AF-BD88-8C94E413DCFA}"/>
           </ac:graphicFrameMkLst>
         </pc:graphicFrameChg>
       </pc:sldChg>
@@ -356,13 +371,13 @@
         </pc:spChg>
       </pc:sldChg>
       <pc:sldChg chg="modSp mod">
-        <pc:chgData name="Zonghua Gu" userId="9a7e1853e1951ef5" providerId="LiveId" clId="{CF1FAA12-072C-4ED5-BA76-0FFFAEFDB88A}" dt="2025-11-14T00:36:08.450" v="5835" actId="1035"/>
+        <pc:chgData name="Zonghua Gu" userId="9a7e1853e1951ef5" providerId="LiveId" clId="{CF1FAA12-072C-4ED5-BA76-0FFFAEFDB88A}" dt="2025-11-14T23:32:59.112" v="5884" actId="1076"/>
         <pc:sldMkLst>
           <pc:docMk/>
           <pc:sldMk cId="3938986292" sldId="381"/>
         </pc:sldMkLst>
         <pc:spChg chg="mod">
-          <ac:chgData name="Zonghua Gu" userId="9a7e1853e1951ef5" providerId="LiveId" clId="{CF1FAA12-072C-4ED5-BA76-0FFFAEFDB88A}" dt="2025-11-14T00:36:08.450" v="5835" actId="1035"/>
+          <ac:chgData name="Zonghua Gu" userId="9a7e1853e1951ef5" providerId="LiveId" clId="{CF1FAA12-072C-4ED5-BA76-0FFFAEFDB88A}" dt="2025-11-14T23:32:59.112" v="5884" actId="1076"/>
           <ac:spMkLst>
             <pc:docMk/>
             <pc:sldMk cId="3938986292" sldId="381"/>
@@ -503,7 +518,7 @@
         </pc:spChg>
       </pc:sldChg>
       <pc:sldChg chg="addSp modSp new mod">
-        <pc:chgData name="Zonghua Gu" userId="9a7e1853e1951ef5" providerId="LiveId" clId="{CF1FAA12-072C-4ED5-BA76-0FFFAEFDB88A}" dt="2025-11-14T00:36:37.725" v="5838" actId="113"/>
+        <pc:chgData name="Zonghua Gu" userId="9a7e1853e1951ef5" providerId="LiveId" clId="{CF1FAA12-072C-4ED5-BA76-0FFFAEFDB88A}" dt="2025-11-14T23:32:14.749" v="5878" actId="20577"/>
         <pc:sldMkLst>
           <pc:docMk/>
           <pc:sldMk cId="490249550" sldId="390"/>
@@ -517,7 +532,7 @@
           </ac:spMkLst>
         </pc:spChg>
         <pc:spChg chg="mod">
-          <ac:chgData name="Zonghua Gu" userId="9a7e1853e1951ef5" providerId="LiveId" clId="{CF1FAA12-072C-4ED5-BA76-0FFFAEFDB88A}" dt="2025-11-14T00:36:37.725" v="5838" actId="113"/>
+          <ac:chgData name="Zonghua Gu" userId="9a7e1853e1951ef5" providerId="LiveId" clId="{CF1FAA12-072C-4ED5-BA76-0FFFAEFDB88A}" dt="2025-11-14T23:32:14.749" v="5878" actId="20577"/>
           <ac:spMkLst>
             <pc:docMk/>
             <pc:sldMk cId="490249550" sldId="390"/>
@@ -621,7 +636,7 @@
             <a:fld id="{2AEAFE1F-9E52-45C8-9793-E819F0044A1C}" type="datetimeFigureOut">
               <a:rPr lang="en-US" smtClean="0"/>
               <a:pPr/>
-              <a:t>11/13/2025</a:t>
+              <a:t>11/14/2025</a:t>
             </a:fld>
             <a:endParaRPr lang="en-US"/>
           </a:p>
@@ -3483,7 +3498,7 @@
             <a:fld id="{2E26774B-6488-4259-9342-6CBDB2BFD4E4}" type="datetime1">
               <a:rPr lang="en-US" smtClean="0"/>
               <a:pPr eaLnBrk="1" latinLnBrk="0" hangingPunct="1"/>
-              <a:t>11/13/2025</a:t>
+              <a:t>11/14/2025</a:t>
             </a:fld>
             <a:endParaRPr lang="en-US" sz="1600" dirty="0"/>
           </a:p>
@@ -3844,7 +3859,7 @@
             <a:fld id="{9B2E7711-0BE3-4AFC-959B-CB5C31A7AE48}" type="datetime1">
               <a:rPr lang="en-US" smtClean="0"/>
               <a:pPr eaLnBrk="1" latinLnBrk="0" hangingPunct="1"/>
-              <a:t>11/13/2025</a:t>
+              <a:t>11/14/2025</a:t>
             </a:fld>
             <a:endParaRPr lang="en-US"/>
           </a:p>
@@ -4021,7 +4036,7 @@
             <a:fld id="{825AAB62-A572-4E37-B772-B4A75ADE0B18}" type="datetime1">
               <a:rPr lang="en-US" smtClean="0"/>
               <a:pPr eaLnBrk="1" latinLnBrk="0" hangingPunct="1"/>
-              <a:t>11/13/2025</a:t>
+              <a:t>11/14/2025</a:t>
             </a:fld>
             <a:endParaRPr lang="en-US"/>
           </a:p>
@@ -4258,7 +4273,7 @@
             <a:fld id="{B0F52420-10F8-488E-969A-A9BE388BE9C4}" type="datetime1">
               <a:rPr lang="en-US" smtClean="0"/>
               <a:pPr eaLnBrk="1" latinLnBrk="0" hangingPunct="1"/>
-              <a:t>11/13/2025</a:t>
+              <a:t>11/14/2025</a:t>
             </a:fld>
             <a:endParaRPr lang="en-US" dirty="0"/>
           </a:p>
@@ -4529,7 +4544,7 @@
             <a:fld id="{96E96F24-58CF-47DA-907C-A9CD6353E425}" type="datetime1">
               <a:rPr lang="en-US" smtClean="0"/>
               <a:pPr eaLnBrk="1" latinLnBrk="0" hangingPunct="1"/>
-              <a:t>11/13/2025</a:t>
+              <a:t>11/14/2025</a:t>
             </a:fld>
             <a:endParaRPr lang="en-US" dirty="0"/>
           </a:p>
@@ -4751,7 +4766,7 @@
             <a:fld id="{53AE4463-726A-4A35-9F46-98893432A3F9}" type="datetime1">
               <a:rPr lang="en-US" smtClean="0"/>
               <a:pPr eaLnBrk="1" latinLnBrk="0" hangingPunct="1"/>
-              <a:t>11/13/2025</a:t>
+              <a:t>11/14/2025</a:t>
             </a:fld>
             <a:endParaRPr lang="en-US"/>
           </a:p>
@@ -5105,7 +5120,7 @@
             <a:fld id="{FDF404D0-E306-4E90-90E3-E44D26246FFC}" type="datetime1">
               <a:rPr lang="en-US" smtClean="0"/>
               <a:pPr eaLnBrk="1" latinLnBrk="0" hangingPunct="1"/>
-              <a:t>11/13/2025</a:t>
+              <a:t>11/14/2025</a:t>
             </a:fld>
             <a:endParaRPr lang="en-US"/>
           </a:p>
@@ -5339,7 +5354,7 @@
             <a:fld id="{1485DA14-76F0-4D93-83FB-7878C79A1986}" type="datetime1">
               <a:rPr lang="en-US" smtClean="0"/>
               <a:pPr eaLnBrk="1" latinLnBrk="0" hangingPunct="1"/>
-              <a:t>11/13/2025</a:t>
+              <a:t>11/14/2025</a:t>
             </a:fld>
             <a:endParaRPr lang="en-US"/>
           </a:p>
@@ -5482,7 +5497,7 @@
             <a:fld id="{A15E552D-49E1-496B-B79C-E100986B8B5F}" type="datetime1">
               <a:rPr lang="en-US" smtClean="0"/>
               <a:pPr eaLnBrk="1" latinLnBrk="0" hangingPunct="1"/>
-              <a:t>11/13/2025</a:t>
+              <a:t>11/14/2025</a:t>
             </a:fld>
             <a:endParaRPr lang="en-US"/>
           </a:p>
@@ -5761,7 +5776,7 @@
             <a:fld id="{CEC72505-1551-4A98-97CD-F520B07184AD}" type="datetime1">
               <a:rPr lang="en-US" smtClean="0"/>
               <a:pPr eaLnBrk="1" latinLnBrk="0" hangingPunct="1"/>
-              <a:t>11/13/2025</a:t>
+              <a:t>11/14/2025</a:t>
             </a:fld>
             <a:endParaRPr lang="en-US"/>
           </a:p>
@@ -6169,7 +6184,7 @@
             <a:fld id="{7218F47B-BA16-4F20-B5BA-73F598D94B51}" type="datetime1">
               <a:rPr lang="en-US" smtClean="0"/>
               <a:pPr eaLnBrk="1" latinLnBrk="0" hangingPunct="1"/>
-              <a:t>11/13/2025</a:t>
+              <a:t>11/14/2025</a:t>
             </a:fld>
             <a:endParaRPr lang="en-US"/>
           </a:p>
@@ -6508,7 +6523,7 @@
             <a:fld id="{4F3CB514-9CA6-4E48-9463-A430D31CFDE3}" type="datetime1">
               <a:rPr lang="en-US" smtClean="0"/>
               <a:pPr eaLnBrk="1" latinLnBrk="0" hangingPunct="1"/>
-              <a:t>11/13/2025</a:t>
+              <a:t>11/14/2025</a:t>
             </a:fld>
             <a:endParaRPr lang="en-US" sz="1400" dirty="0">
               <a:solidFill>
@@ -10409,8 +10424,8 @@
         </p:nvSpPr>
         <p:spPr>
           <a:xfrm>
-            <a:off x="1828800" y="5486400"/>
-            <a:ext cx="5715000" cy="1200329"/>
+            <a:off x="952500" y="5482427"/>
+            <a:ext cx="7239000" cy="1200329"/>
           </a:xfrm>
           <a:prstGeom prst="rect">
             <a:avLst/>
@@ -10471,7 +10486,7 @@
             </a:r>
             <a:r>
               <a:rPr lang="en-US" dirty="0"/>
-              <a:t> = r0 = 0 initially. c.f. pp 22-25 in Ch6 lecture)</a:t>
+              <a:t> = r0 = 0 initially. c.f. pp 22-25 in Ch6 lecture on while loop and do-while loop. )</a:t>
             </a:r>
           </a:p>
         </p:txBody>
@@ -16314,14 +16329,14 @@
           <p:nvPr>
             <p:extLst>
               <p:ext uri="{D42A27DB-BD31-4B8C-83A1-F6EECF244321}">
-                <p14:modId xmlns:p14="http://schemas.microsoft.com/office/powerpoint/2010/main" val="3723156626"/>
+                <p14:modId xmlns:p14="http://schemas.microsoft.com/office/powerpoint/2010/main" val="2557594624"/>
               </p:ext>
             </p:extLst>
           </p:nvPr>
         </p:nvGraphicFramePr>
         <p:xfrm>
           <a:off x="457200" y="1219200"/>
-          <a:ext cx="8153400" cy="2438400"/>
+          <a:ext cx="8153400" cy="2194560"/>
         </p:xfrm>
         <a:graphic>
           <a:graphicData uri="http://schemas.openxmlformats.org/drawingml/2006/table">
@@ -16614,21 +16629,6 @@
                         </a:rPr>
                         <a:t>  MOV r1, #0 ; x = 0</a:t>
                       </a:r>
-                    </a:p>
-                    <a:p>
-                      <a:pPr marL="0" marR="0" algn="just">
-                        <a:spcBef>
-                          <a:spcPts val="0"/>
-                        </a:spcBef>
-                        <a:spcAft>
-                          <a:spcPts val="0"/>
-                        </a:spcAft>
-                      </a:pPr>
-                      <a:endParaRPr lang="en-US" sz="1600" i="0" dirty="0">
-                        <a:effectLst/>
-                        <a:latin typeface="Consolas" panose="020B0609020204030204" pitchFamily="49" charset="0"/>
-                        <a:cs typeface="Consolas" panose="020B0609020204030204" pitchFamily="49" charset="0"/>
-                      </a:endParaRPr>
                     </a:p>
                     <a:p>
                       <a:pPr marL="0" marR="0" algn="just">
@@ -17363,7 +17363,7 @@
             </a:r>
             <a:r>
               <a:rPr lang="en-US" dirty="0"/>
-              <a:t> If r0 starts as 128 (zero-iteration case), this version will execute the body once (doubling to 256 and incrementing r1) before checking — i.e., wrong for that initial condition, c.f. pp 22-25 in Ch6 lecture</a:t>
+              <a:t> If r0 starts as 128 (zero-iteration case), this version will execute the body once (doubling to 256 and incrementing r1) before checking — i.e., wrong for that initial condition, c.f. pp 22-25 in Ch6 lecture on while loop and do-while loop.</a:t>
             </a:r>
           </a:p>
         </p:txBody>

--- a/PPTs/Ch6_ARM_Control_Flow_Exercises_ANS.pptx
+++ b/PPTs/Ch6_ARM_Control_Flow_Exercises_ANS.pptx
@@ -168,7 +168,7 @@
 <file path=ppt/revisionInfo.xml><?xml version="1.0" encoding="utf-8"?>
 <p1510:revInfo xmlns:a="http://schemas.openxmlformats.org/drawingml/2006/main" xmlns:r="http://schemas.openxmlformats.org/officeDocument/2006/relationships" xmlns:p1510="http://schemas.microsoft.com/office/powerpoint/2015/10/main">
   <p1510:revLst>
-    <p1510:client id="{1C1BE7D0-C766-4929-9518-A803B162FB6C}" v="38" dt="2025-11-19T00:26:28.581"/>
+    <p1510:client id="{1C1BE7D0-C766-4929-9518-A803B162FB6C}" v="40" dt="2025-11-20T23:18:18.836"/>
   </p1510:revLst>
 </p1510:revInfo>
 </file>
@@ -178,7 +178,7 @@
   <pc:docChgLst>
     <pc:chgData name="Zonghua Gu" userId="9a7e1853e1951ef5" providerId="LiveId" clId="{CF1FAA12-072C-4ED5-BA76-0FFFAEFDB88A}"/>
     <pc:docChg chg="undo redo custSel addSld delSld modSld sldOrd">
-      <pc:chgData name="Zonghua Gu" userId="9a7e1853e1951ef5" providerId="LiveId" clId="{CF1FAA12-072C-4ED5-BA76-0FFFAEFDB88A}" dt="2025-11-19T00:26:30.513" v="6919" actId="20577"/>
+      <pc:chgData name="Zonghua Gu" userId="9a7e1853e1951ef5" providerId="LiveId" clId="{CF1FAA12-072C-4ED5-BA76-0FFFAEFDB88A}" dt="2025-11-20T23:20:31.944" v="7125" actId="1035"/>
       <pc:docMkLst>
         <pc:docMk/>
       </pc:docMkLst>
@@ -258,6 +258,53 @@
           </ac:graphicFrameMkLst>
         </pc:graphicFrameChg>
       </pc:sldChg>
+      <pc:sldChg chg="addSp delSp modSp mod">
+        <pc:chgData name="Zonghua Gu" userId="9a7e1853e1951ef5" providerId="LiveId" clId="{CF1FAA12-072C-4ED5-BA76-0FFFAEFDB88A}" dt="2025-11-20T23:20:31.944" v="7125" actId="1035"/>
+        <pc:sldMkLst>
+          <pc:docMk/>
+          <pc:sldMk cId="3066637480" sldId="358"/>
+        </pc:sldMkLst>
+        <pc:spChg chg="del mod">
+          <ac:chgData name="Zonghua Gu" userId="9a7e1853e1951ef5" providerId="LiveId" clId="{CF1FAA12-072C-4ED5-BA76-0FFFAEFDB88A}" dt="2025-11-20T23:20:24.079" v="7121" actId="478"/>
+          <ac:spMkLst>
+            <pc:docMk/>
+            <pc:sldMk cId="3066637480" sldId="358"/>
+            <ac:spMk id="4" creationId="{DAB1A9E9-5521-A49F-71D6-A319ADEF622C}"/>
+          </ac:spMkLst>
+        </pc:spChg>
+        <pc:graphicFrameChg chg="add mod modGraphic">
+          <ac:chgData name="Zonghua Gu" userId="9a7e1853e1951ef5" providerId="LiveId" clId="{CF1FAA12-072C-4ED5-BA76-0FFFAEFDB88A}" dt="2025-11-20T23:20:31.944" v="7125" actId="1035"/>
+          <ac:graphicFrameMkLst>
+            <pc:docMk/>
+            <pc:sldMk cId="3066637480" sldId="358"/>
+            <ac:graphicFrameMk id="5" creationId="{4492F4A4-9CAB-E225-8865-5019BEAE27B9}"/>
+          </ac:graphicFrameMkLst>
+        </pc:graphicFrameChg>
+        <pc:graphicFrameChg chg="mod">
+          <ac:chgData name="Zonghua Gu" userId="9a7e1853e1951ef5" providerId="LiveId" clId="{CF1FAA12-072C-4ED5-BA76-0FFFAEFDB88A}" dt="2025-11-20T23:20:31.944" v="7125" actId="1035"/>
+          <ac:graphicFrameMkLst>
+            <pc:docMk/>
+            <pc:sldMk cId="3066637480" sldId="358"/>
+            <ac:graphicFrameMk id="6" creationId="{E28C4A95-33F3-BABE-565A-E12BD4DBAF93}"/>
+          </ac:graphicFrameMkLst>
+        </pc:graphicFrameChg>
+        <pc:graphicFrameChg chg="mod">
+          <ac:chgData name="Zonghua Gu" userId="9a7e1853e1951ef5" providerId="LiveId" clId="{CF1FAA12-072C-4ED5-BA76-0FFFAEFDB88A}" dt="2025-11-20T23:20:31.944" v="7125" actId="1035"/>
+          <ac:graphicFrameMkLst>
+            <pc:docMk/>
+            <pc:sldMk cId="3066637480" sldId="358"/>
+            <ac:graphicFrameMk id="7" creationId="{61C10A8C-B88B-BA01-723F-3EF7F7464A2A}"/>
+          </ac:graphicFrameMkLst>
+        </pc:graphicFrameChg>
+        <pc:graphicFrameChg chg="mod">
+          <ac:chgData name="Zonghua Gu" userId="9a7e1853e1951ef5" providerId="LiveId" clId="{CF1FAA12-072C-4ED5-BA76-0FFFAEFDB88A}" dt="2025-11-20T23:20:31.944" v="7125" actId="1035"/>
+          <ac:graphicFrameMkLst>
+            <pc:docMk/>
+            <pc:sldMk cId="3066637480" sldId="358"/>
+            <ac:graphicFrameMk id="8" creationId="{D1C02443-040B-0C53-44B2-CAD7E2F6C144}"/>
+          </ac:graphicFrameMkLst>
+        </pc:graphicFrameChg>
+      </pc:sldChg>
       <pc:sldChg chg="modSp mod">
         <pc:chgData name="Zonghua Gu" userId="9a7e1853e1951ef5" providerId="LiveId" clId="{CF1FAA12-072C-4ED5-BA76-0FFFAEFDB88A}" dt="2025-11-14T23:28:03.602" v="5839" actId="6549"/>
         <pc:sldMkLst>
@@ -332,13 +379,13 @@
         </pc:spChg>
       </pc:sldChg>
       <pc:sldChg chg="modSp mod">
-        <pc:chgData name="Zonghua Gu" userId="9a7e1853e1951ef5" providerId="LiveId" clId="{CF1FAA12-072C-4ED5-BA76-0FFFAEFDB88A}" dt="2025-11-19T00:21:27.246" v="6762" actId="20577"/>
+        <pc:chgData name="Zonghua Gu" userId="9a7e1853e1951ef5" providerId="LiveId" clId="{CF1FAA12-072C-4ED5-BA76-0FFFAEFDB88A}" dt="2025-11-20T23:07:42.686" v="6955" actId="207"/>
         <pc:sldMkLst>
           <pc:docMk/>
           <pc:sldMk cId="3866648740" sldId="370"/>
         </pc:sldMkLst>
         <pc:spChg chg="mod">
-          <ac:chgData name="Zonghua Gu" userId="9a7e1853e1951ef5" providerId="LiveId" clId="{CF1FAA12-072C-4ED5-BA76-0FFFAEFDB88A}" dt="2025-11-19T00:21:27.246" v="6762" actId="20577"/>
+          <ac:chgData name="Zonghua Gu" userId="9a7e1853e1951ef5" providerId="LiveId" clId="{CF1FAA12-072C-4ED5-BA76-0FFFAEFDB88A}" dt="2025-11-20T23:07:42.686" v="6955" actId="207"/>
           <ac:spMkLst>
             <pc:docMk/>
             <pc:sldMk cId="3866648740" sldId="370"/>
@@ -443,44 +490,12 @@
             <ac:spMk id="2" creationId="{0A33A82F-4D13-6943-1697-5F93B36B9622}"/>
           </ac:spMkLst>
         </pc:spChg>
-        <pc:spChg chg="del">
-          <ac:chgData name="Zonghua Gu" userId="9a7e1853e1951ef5" providerId="LiveId" clId="{CF1FAA12-072C-4ED5-BA76-0FFFAEFDB88A}" dt="2025-11-18T23:34:10.258" v="6358" actId="478"/>
-          <ac:spMkLst>
-            <pc:docMk/>
-            <pc:sldMk cId="3938986292" sldId="381"/>
-            <ac:spMk id="4" creationId="{4BF0CDF6-BA6E-533A-2208-B994A0919766}"/>
-          </ac:spMkLst>
-        </pc:spChg>
-        <pc:spChg chg="del mod">
-          <ac:chgData name="Zonghua Gu" userId="9a7e1853e1951ef5" providerId="LiveId" clId="{CF1FAA12-072C-4ED5-BA76-0FFFAEFDB88A}" dt="2025-11-18T23:29:56.249" v="6333" actId="478"/>
-          <ac:spMkLst>
-            <pc:docMk/>
-            <pc:sldMk cId="3938986292" sldId="381"/>
-            <ac:spMk id="7" creationId="{E2AFC00D-8A73-6EFC-73E3-327855EF4CC4}"/>
-          </ac:spMkLst>
-        </pc:spChg>
-        <pc:spChg chg="add del mod">
-          <ac:chgData name="Zonghua Gu" userId="9a7e1853e1951ef5" providerId="LiveId" clId="{CF1FAA12-072C-4ED5-BA76-0FFFAEFDB88A}" dt="2025-11-18T23:34:12.274" v="6359" actId="478"/>
-          <ac:spMkLst>
-            <pc:docMk/>
-            <pc:sldMk cId="3938986292" sldId="381"/>
-            <ac:spMk id="9" creationId="{D8D5CABD-9212-3D5E-0E59-277B6EC193B0}"/>
-          </ac:spMkLst>
-        </pc:spChg>
         <pc:graphicFrameChg chg="modGraphic">
           <ac:chgData name="Zonghua Gu" userId="9a7e1853e1951ef5" providerId="LiveId" clId="{CF1FAA12-072C-4ED5-BA76-0FFFAEFDB88A}" dt="2025-11-13T23:56:47.573" v="5329" actId="207"/>
           <ac:graphicFrameMkLst>
             <pc:docMk/>
             <pc:sldMk cId="3938986292" sldId="381"/>
             <ac:graphicFrameMk id="5" creationId="{7CA5E7D5-B204-9C0A-BCB8-C59AA195F3F5}"/>
-          </ac:graphicFrameMkLst>
-        </pc:graphicFrameChg>
-        <pc:graphicFrameChg chg="del mod modGraphic">
-          <ac:chgData name="Zonghua Gu" userId="9a7e1853e1951ef5" providerId="LiveId" clId="{CF1FAA12-072C-4ED5-BA76-0FFFAEFDB88A}" dt="2025-11-18T23:29:56.249" v="6333" actId="478"/>
-          <ac:graphicFrameMkLst>
-            <pc:docMk/>
-            <pc:sldMk cId="3938986292" sldId="381"/>
-            <ac:graphicFrameMk id="6" creationId="{3F7517C0-9626-838C-2609-AAAE742BE8CA}"/>
           </ac:graphicFrameMkLst>
         </pc:graphicFrameChg>
         <pc:graphicFrameChg chg="add mod modGraphic">
@@ -644,14 +659,6 @@
           <pc:docMk/>
           <pc:sldMk cId="3322525658" sldId="392"/>
         </pc:sldMkLst>
-        <pc:spChg chg="del">
-          <ac:chgData name="Zonghua Gu" userId="9a7e1853e1951ef5" providerId="LiveId" clId="{CF1FAA12-072C-4ED5-BA76-0FFFAEFDB88A}" dt="2025-11-18T23:38:05.212" v="6365" actId="478"/>
-          <ac:spMkLst>
-            <pc:docMk/>
-            <pc:sldMk cId="3322525658" sldId="392"/>
-            <ac:spMk id="4" creationId="{E5F3F8DD-D9BA-B290-70DB-5F665DDC74D9}"/>
-          </ac:spMkLst>
-        </pc:spChg>
         <pc:spChg chg="mod">
           <ac:chgData name="Zonghua Gu" userId="9a7e1853e1951ef5" providerId="LiveId" clId="{CF1FAA12-072C-4ED5-BA76-0FFFAEFDB88A}" dt="2025-11-18T23:38:57.017" v="6395" actId="313"/>
           <ac:spMkLst>
@@ -660,43 +667,12 @@
             <ac:spMk id="7" creationId="{FEFCEE76-4050-DF76-FC15-2F0C19F09623}"/>
           </ac:spMkLst>
         </pc:spChg>
-        <pc:graphicFrameChg chg="del">
-          <ac:chgData name="Zonghua Gu" userId="9a7e1853e1951ef5" providerId="LiveId" clId="{CF1FAA12-072C-4ED5-BA76-0FFFAEFDB88A}" dt="2025-11-18T23:38:05.212" v="6365" actId="478"/>
-          <ac:graphicFrameMkLst>
-            <pc:docMk/>
-            <pc:sldMk cId="3322525658" sldId="392"/>
-            <ac:graphicFrameMk id="5" creationId="{0F65938A-D91C-1E24-6FD2-698279484D9E}"/>
-          </ac:graphicFrameMkLst>
-        </pc:graphicFrameChg>
         <pc:graphicFrameChg chg="mod">
           <ac:chgData name="Zonghua Gu" userId="9a7e1853e1951ef5" providerId="LiveId" clId="{CF1FAA12-072C-4ED5-BA76-0FFFAEFDB88A}" dt="2025-11-18T23:38:14.021" v="6366" actId="1076"/>
           <ac:graphicFrameMkLst>
             <pc:docMk/>
             <pc:sldMk cId="3322525658" sldId="392"/>
             <ac:graphicFrameMk id="6" creationId="{80B7468F-F6CD-9D27-E99A-40FA8CBFEBA2}"/>
-          </ac:graphicFrameMkLst>
-        </pc:graphicFrameChg>
-      </pc:sldChg>
-      <pc:sldChg chg="addSp modSp new del">
-        <pc:chgData name="Zonghua Gu" userId="9a7e1853e1951ef5" providerId="LiveId" clId="{CF1FAA12-072C-4ED5-BA76-0FFFAEFDB88A}" dt="2025-11-18T23:37:21.314" v="6364" actId="47"/>
-        <pc:sldMkLst>
-          <pc:docMk/>
-          <pc:sldMk cId="3774558325" sldId="393"/>
-        </pc:sldMkLst>
-        <pc:spChg chg="add mod">
-          <ac:chgData name="Zonghua Gu" userId="9a7e1853e1951ef5" providerId="LiveId" clId="{CF1FAA12-072C-4ED5-BA76-0FFFAEFDB88A}" dt="2025-11-18T23:33:03.951" v="6345"/>
-          <ac:spMkLst>
-            <pc:docMk/>
-            <pc:sldMk cId="3774558325" sldId="393"/>
-            <ac:spMk id="6" creationId="{5C0C4C24-94DE-78BA-D961-5731C2BE1FA3}"/>
-          </ac:spMkLst>
-        </pc:spChg>
-        <pc:graphicFrameChg chg="add mod">
-          <ac:chgData name="Zonghua Gu" userId="9a7e1853e1951ef5" providerId="LiveId" clId="{CF1FAA12-072C-4ED5-BA76-0FFFAEFDB88A}" dt="2025-11-18T23:33:03.951" v="6345"/>
-          <ac:graphicFrameMkLst>
-            <pc:docMk/>
-            <pc:sldMk cId="3774558325" sldId="393"/>
-            <ac:graphicFrameMk id="5" creationId="{4E0044D9-9D56-7518-6B53-7D7A5791D806}"/>
           </ac:graphicFrameMkLst>
         </pc:graphicFrameChg>
       </pc:sldChg>
@@ -712,22 +688,6 @@
             <pc:docMk/>
             <pc:sldMk cId="2652154309" sldId="394"/>
             <ac:spMk id="2" creationId="{FFE1C93C-745E-921B-00A7-BDBD948FDE77}"/>
-          </ac:spMkLst>
-        </pc:spChg>
-        <pc:spChg chg="del">
-          <ac:chgData name="Zonghua Gu" userId="9a7e1853e1951ef5" providerId="LiveId" clId="{CF1FAA12-072C-4ED5-BA76-0FFFAEFDB88A}" dt="2025-11-18T23:33:46.781" v="6352" actId="478"/>
-          <ac:spMkLst>
-            <pc:docMk/>
-            <pc:sldMk cId="2652154309" sldId="394"/>
-            <ac:spMk id="4" creationId="{C861982B-54C5-F62D-6A1E-F847785A9717}"/>
-          </ac:spMkLst>
-        </pc:spChg>
-        <pc:spChg chg="del">
-          <ac:chgData name="Zonghua Gu" userId="9a7e1853e1951ef5" providerId="LiveId" clId="{CF1FAA12-072C-4ED5-BA76-0FFFAEFDB88A}" dt="2025-11-18T23:33:46.781" v="6352" actId="478"/>
-          <ac:spMkLst>
-            <pc:docMk/>
-            <pc:sldMk cId="2652154309" sldId="394"/>
-            <ac:spMk id="9" creationId="{B4BD559F-487F-3282-26C1-F3A706F1C844}"/>
           </ac:spMkLst>
         </pc:spChg>
         <pc:graphicFrameChg chg="modGraphic">
@@ -874,7 +834,7 @@
             <a:fld id="{2AEAFE1F-9E52-45C8-9793-E819F0044A1C}" type="datetimeFigureOut">
               <a:rPr lang="en-US" smtClean="0"/>
               <a:pPr/>
-              <a:t>11/18/2025</a:t>
+              <a:t>11/20/2025</a:t>
             </a:fld>
             <a:endParaRPr lang="en-US"/>
           </a:p>
@@ -4042,7 +4002,7 @@
             <a:fld id="{2E26774B-6488-4259-9342-6CBDB2BFD4E4}" type="datetime1">
               <a:rPr lang="en-US" smtClean="0"/>
               <a:pPr eaLnBrk="1" latinLnBrk="0" hangingPunct="1"/>
-              <a:t>11/18/2025</a:t>
+              <a:t>11/20/2025</a:t>
             </a:fld>
             <a:endParaRPr lang="en-US" sz="1600" dirty="0"/>
           </a:p>
@@ -4403,7 +4363,7 @@
             <a:fld id="{9B2E7711-0BE3-4AFC-959B-CB5C31A7AE48}" type="datetime1">
               <a:rPr lang="en-US" smtClean="0"/>
               <a:pPr eaLnBrk="1" latinLnBrk="0" hangingPunct="1"/>
-              <a:t>11/18/2025</a:t>
+              <a:t>11/20/2025</a:t>
             </a:fld>
             <a:endParaRPr lang="en-US"/>
           </a:p>
@@ -4580,7 +4540,7 @@
             <a:fld id="{825AAB62-A572-4E37-B772-B4A75ADE0B18}" type="datetime1">
               <a:rPr lang="en-US" smtClean="0"/>
               <a:pPr eaLnBrk="1" latinLnBrk="0" hangingPunct="1"/>
-              <a:t>11/18/2025</a:t>
+              <a:t>11/20/2025</a:t>
             </a:fld>
             <a:endParaRPr lang="en-US"/>
           </a:p>
@@ -4817,7 +4777,7 @@
             <a:fld id="{B0F52420-10F8-488E-969A-A9BE388BE9C4}" type="datetime1">
               <a:rPr lang="en-US" smtClean="0"/>
               <a:pPr eaLnBrk="1" latinLnBrk="0" hangingPunct="1"/>
-              <a:t>11/18/2025</a:t>
+              <a:t>11/20/2025</a:t>
             </a:fld>
             <a:endParaRPr lang="en-US" dirty="0"/>
           </a:p>
@@ -5088,7 +5048,7 @@
             <a:fld id="{96E96F24-58CF-47DA-907C-A9CD6353E425}" type="datetime1">
               <a:rPr lang="en-US" smtClean="0"/>
               <a:pPr eaLnBrk="1" latinLnBrk="0" hangingPunct="1"/>
-              <a:t>11/18/2025</a:t>
+              <a:t>11/20/2025</a:t>
             </a:fld>
             <a:endParaRPr lang="en-US" dirty="0"/>
           </a:p>
@@ -5310,7 +5270,7 @@
             <a:fld id="{53AE4463-726A-4A35-9F46-98893432A3F9}" type="datetime1">
               <a:rPr lang="en-US" smtClean="0"/>
               <a:pPr eaLnBrk="1" latinLnBrk="0" hangingPunct="1"/>
-              <a:t>11/18/2025</a:t>
+              <a:t>11/20/2025</a:t>
             </a:fld>
             <a:endParaRPr lang="en-US"/>
           </a:p>
@@ -5664,7 +5624,7 @@
             <a:fld id="{FDF404D0-E306-4E90-90E3-E44D26246FFC}" type="datetime1">
               <a:rPr lang="en-US" smtClean="0"/>
               <a:pPr eaLnBrk="1" latinLnBrk="0" hangingPunct="1"/>
-              <a:t>11/18/2025</a:t>
+              <a:t>11/20/2025</a:t>
             </a:fld>
             <a:endParaRPr lang="en-US"/>
           </a:p>
@@ -5898,7 +5858,7 @@
             <a:fld id="{1485DA14-76F0-4D93-83FB-7878C79A1986}" type="datetime1">
               <a:rPr lang="en-US" smtClean="0"/>
               <a:pPr eaLnBrk="1" latinLnBrk="0" hangingPunct="1"/>
-              <a:t>11/18/2025</a:t>
+              <a:t>11/20/2025</a:t>
             </a:fld>
             <a:endParaRPr lang="en-US"/>
           </a:p>
@@ -6041,7 +6001,7 @@
             <a:fld id="{A15E552D-49E1-496B-B79C-E100986B8B5F}" type="datetime1">
               <a:rPr lang="en-US" smtClean="0"/>
               <a:pPr eaLnBrk="1" latinLnBrk="0" hangingPunct="1"/>
-              <a:t>11/18/2025</a:t>
+              <a:t>11/20/2025</a:t>
             </a:fld>
             <a:endParaRPr lang="en-US"/>
           </a:p>
@@ -6320,7 +6280,7 @@
             <a:fld id="{CEC72505-1551-4A98-97CD-F520B07184AD}" type="datetime1">
               <a:rPr lang="en-US" smtClean="0"/>
               <a:pPr eaLnBrk="1" latinLnBrk="0" hangingPunct="1"/>
-              <a:t>11/18/2025</a:t>
+              <a:t>11/20/2025</a:t>
             </a:fld>
             <a:endParaRPr lang="en-US"/>
           </a:p>
@@ -6728,7 +6688,7 @@
             <a:fld id="{7218F47B-BA16-4F20-B5BA-73F598D94B51}" type="datetime1">
               <a:rPr lang="en-US" smtClean="0"/>
               <a:pPr eaLnBrk="1" latinLnBrk="0" hangingPunct="1"/>
-              <a:t>11/18/2025</a:t>
+              <a:t>11/20/2025</a:t>
             </a:fld>
             <a:endParaRPr lang="en-US"/>
           </a:p>
@@ -7067,7 +7027,7 @@
             <a:fld id="{4F3CB514-9CA6-4E48-9463-A430D31CFDE3}" type="datetime1">
               <a:rPr lang="en-US" smtClean="0"/>
               <a:pPr eaLnBrk="1" latinLnBrk="0" hangingPunct="1"/>
-              <a:t>11/18/2025</a:t>
+              <a:t>11/20/2025</a:t>
             </a:fld>
             <a:endParaRPr lang="en-US" sz="1400" dirty="0">
               <a:solidFill>
@@ -24593,7 +24553,39 @@
           <a:p>
             <a:r>
               <a:rPr lang="en-US" sz="1400" dirty="0"/>
-              <a:t>Initialize r1 = 0, r2 = 8 (bit counter), and r3 is the scratch for the extracted bit; the loop body runs 8 times.</a:t>
+              <a:t>Initialize r1 = 0,</a:t>
+            </a:r>
+            <a:r>
+              <a:rPr lang="en-US" sz="1400" dirty="0">
+                <a:solidFill>
+                  <a:srgbClr val="FF0000"/>
+                </a:solidFill>
+              </a:rPr>
+              <a:t> r2 = 8 (bit counter)</a:t>
+            </a:r>
+            <a:r>
+              <a:rPr lang="en-US" sz="1400" dirty="0"/>
+              <a:t> </a:t>
+            </a:r>
+            <a:r>
+              <a:rPr lang="en-US" altLang="zh-CN" sz="1400" dirty="0"/>
+              <a:t>for illustration purpose</a:t>
+            </a:r>
+            <a:r>
+              <a:rPr lang="en-US" sz="1400" dirty="0"/>
+              <a:t>,</a:t>
+            </a:r>
+            <a:r>
+              <a:rPr lang="en-US" sz="1400" dirty="0">
+                <a:solidFill>
+                  <a:srgbClr val="FF0000"/>
+                </a:solidFill>
+              </a:rPr>
+              <a:t> </a:t>
+            </a:r>
+            <a:r>
+              <a:rPr lang="en-US" sz="1400" dirty="0"/>
+              <a:t>and r3 is the scratch for the extracted bit; the loop body runs 8 times.</a:t>
             </a:r>
           </a:p>
           <a:p>
@@ -29171,41 +29163,6 @@
           </a:p>
         </p:txBody>
       </p:sp>
-      <p:sp>
-        <p:nvSpPr>
-          <p:cNvPr id="4" name="Content Placeholder 3">
-            <a:extLst>
-              <a:ext uri="{FF2B5EF4-FFF2-40B4-BE49-F238E27FC236}">
-                <a16:creationId xmlns:a16="http://schemas.microsoft.com/office/drawing/2014/main" id="{DAB1A9E9-5521-A49F-71D6-A319ADEF622C}"/>
-              </a:ext>
-            </a:extLst>
-          </p:cNvPr>
-          <p:cNvSpPr>
-            <a:spLocks noGrp="1"/>
-          </p:cNvSpPr>
-          <p:nvPr>
-            <p:ph sz="quarter" idx="1"/>
-          </p:nvPr>
-        </p:nvSpPr>
-        <p:spPr>
-          <a:xfrm>
-            <a:off x="457200" y="1219200"/>
-            <a:ext cx="8229600" cy="1066800"/>
-          </a:xfrm>
-        </p:spPr>
-        <p:txBody>
-          <a:bodyPr>
-            <a:normAutofit fontScale="77500" lnSpcReduction="20000"/>
-          </a:bodyPr>
-          <a:lstStyle/>
-          <a:p>
-            <a:r>
-              <a:rPr lang="en-US" dirty="0"/>
-              <a:t>Write the equivalent C program for the following assembly code, assuming registers and C variables are related as (x=r0, y=r1). ( Variables in C are in memory, and load/store assembly instructions are omitted here for brevity.)</a:t>
-            </a:r>
-          </a:p>
-        </p:txBody>
-      </p:sp>
       <p:graphicFrame>
         <p:nvGraphicFramePr>
           <p:cNvPr id="6" name="Table 5">
@@ -29218,10 +29175,16 @@
           <p:cNvGraphicFramePr>
             <a:graphicFrameLocks noGrp="1"/>
           </p:cNvGraphicFramePr>
-          <p:nvPr/>
+          <p:nvPr>
+            <p:extLst>
+              <p:ext uri="{D42A27DB-BD31-4B8C-83A1-F6EECF244321}">
+                <p14:modId xmlns:p14="http://schemas.microsoft.com/office/powerpoint/2010/main" val="538542489"/>
+              </p:ext>
+            </p:extLst>
+          </p:nvPr>
         </p:nvGraphicFramePr>
         <p:xfrm>
-          <a:off x="751114" y="2296886"/>
+          <a:off x="990600" y="1295400"/>
           <a:ext cx="7391400" cy="1219200"/>
         </p:xfrm>
         <a:graphic>
@@ -29585,10 +29548,16 @@
           <p:cNvGraphicFramePr>
             <a:graphicFrameLocks noGrp="1"/>
           </p:cNvGraphicFramePr>
-          <p:nvPr/>
+          <p:nvPr>
+            <p:extLst>
+              <p:ext uri="{D42A27DB-BD31-4B8C-83A1-F6EECF244321}">
+                <p14:modId xmlns:p14="http://schemas.microsoft.com/office/powerpoint/2010/main" val="3265769242"/>
+              </p:ext>
+            </p:extLst>
+          </p:nvPr>
         </p:nvGraphicFramePr>
         <p:xfrm>
-          <a:off x="751114" y="3559629"/>
+          <a:off x="990600" y="2558143"/>
           <a:ext cx="7391400" cy="1219200"/>
         </p:xfrm>
         <a:graphic>
@@ -29945,10 +29914,16 @@
           <p:cNvGraphicFramePr>
             <a:graphicFrameLocks noGrp="1"/>
           </p:cNvGraphicFramePr>
-          <p:nvPr/>
+          <p:nvPr>
+            <p:extLst>
+              <p:ext uri="{D42A27DB-BD31-4B8C-83A1-F6EECF244321}">
+                <p14:modId xmlns:p14="http://schemas.microsoft.com/office/powerpoint/2010/main" val="596912400"/>
+              </p:ext>
+            </p:extLst>
+          </p:nvPr>
         </p:nvGraphicFramePr>
         <p:xfrm>
-          <a:off x="751114" y="4822372"/>
+          <a:off x="990600" y="3820886"/>
           <a:ext cx="7391400" cy="1017070"/>
         </p:xfrm>
         <a:graphic>
@@ -30154,6 +30129,358 @@
                         </a:rPr>
                         <a:t>'</a:t>
                       </a:r>
+                    </a:p>
+                    <a:p>
+                      <a:r>
+                        <a:rPr kumimoji="0" lang="pt-BR" sz="1600" b="1" i="0" kern="1200" dirty="0">
+                          <a:solidFill>
+                            <a:schemeClr val="tx1"/>
+                          </a:solidFill>
+                          <a:effectLst/>
+                          <a:latin typeface="Consolas" panose="020B0609020204030204" pitchFamily="49" charset="0"/>
+                          <a:ea typeface="+mn-ea"/>
+                          <a:cs typeface="+mn-cs"/>
+                        </a:rPr>
+                        <a:t>MOVEQ</a:t>
+                      </a:r>
+                      <a:r>
+                        <a:rPr kumimoji="0" lang="pt-BR" sz="1600" b="0" i="0" kern="1200" dirty="0">
+                          <a:solidFill>
+                            <a:schemeClr val="tx1"/>
+                          </a:solidFill>
+                          <a:effectLst/>
+                          <a:latin typeface="Consolas" panose="020B0609020204030204" pitchFamily="49" charset="0"/>
+                          <a:ea typeface="+mn-ea"/>
+                          <a:cs typeface="+mn-cs"/>
+                        </a:rPr>
+                        <a:t> r1, #1 </a:t>
+                      </a:r>
+                    </a:p>
+                  </a:txBody>
+                  <a:tcPr marL="68580" marR="68580" marT="0" marB="0"/>
+                </a:tc>
+                <a:tc>
+                  <a:txBody>
+                    <a:bodyPr/>
+                    <a:lstStyle/>
+                    <a:p>
+                      <a:r>
+                        <a:rPr kumimoji="0" lang="pt-BR" sz="1600" b="0" i="0" kern="1200" dirty="0">
+                          <a:solidFill>
+                            <a:schemeClr val="tx1"/>
+                          </a:solidFill>
+                          <a:effectLst/>
+                          <a:latin typeface="Consolas" panose="020B0609020204030204" pitchFamily="49" charset="0"/>
+                          <a:ea typeface="+mn-ea"/>
+                          <a:cs typeface="+mn-cs"/>
+                        </a:rPr>
+                        <a:t>if (c == ‘A’ || c == 'B')</a:t>
+                      </a:r>
+                    </a:p>
+                    <a:p>
+                      <a:r>
+                        <a:rPr kumimoji="0" lang="en-US" sz="1600" b="0" i="0" kern="1200" dirty="0">
+                          <a:solidFill>
+                            <a:schemeClr val="tx1"/>
+                          </a:solidFill>
+                          <a:effectLst/>
+                          <a:latin typeface="Consolas" panose="020B0609020204030204" pitchFamily="49" charset="0"/>
+                          <a:ea typeface="+mn-ea"/>
+                          <a:cs typeface="+mn-cs"/>
+                        </a:rPr>
+                        <a:t>  </a:t>
+                      </a:r>
+                      <a:r>
+                        <a:rPr kumimoji="0" lang="pt-BR" sz="1600" b="0" i="0" kern="1200" dirty="0">
+                          <a:solidFill>
+                            <a:schemeClr val="tx1"/>
+                          </a:solidFill>
+                          <a:effectLst/>
+                          <a:latin typeface="Consolas" panose="020B0609020204030204" pitchFamily="49" charset="0"/>
+                          <a:ea typeface="+mn-ea"/>
+                          <a:cs typeface="+mn-cs"/>
+                        </a:rPr>
+                        <a:t>y = 1</a:t>
+                      </a:r>
+                      <a:r>
+                        <a:rPr kumimoji="0" lang="en-US" sz="1600" b="0" i="0" kern="1200" dirty="0">
+                          <a:solidFill>
+                            <a:schemeClr val="tx1"/>
+                          </a:solidFill>
+                          <a:effectLst/>
+                          <a:latin typeface="Consolas" panose="020B0609020204030204" pitchFamily="49" charset="0"/>
+                          <a:ea typeface="+mn-ea"/>
+                          <a:cs typeface="+mn-cs"/>
+                        </a:rPr>
+                        <a:t>;</a:t>
+                      </a:r>
+                      <a:endParaRPr lang="en-US" sz="1600" i="0" dirty="0">
+                        <a:effectLst/>
+                        <a:latin typeface="Consolas" panose="020B0609020204030204" pitchFamily="49" charset="0"/>
+                        <a:cs typeface="Consolas" panose="020B0609020204030204" pitchFamily="49" charset="0"/>
+                      </a:endParaRPr>
+                    </a:p>
+                  </a:txBody>
+                  <a:tcPr marL="68580" marR="68580" marT="0" marB="0"/>
+                </a:tc>
+                <a:extLst>
+                  <a:ext uri="{0D108BD9-81ED-4DB2-BD59-A6C34878D82A}">
+                    <a16:rowId xmlns:a16="http://schemas.microsoft.com/office/drawing/2014/main" val="10001"/>
+                  </a:ext>
+                </a:extLst>
+              </a:tr>
+            </a:tbl>
+          </a:graphicData>
+        </a:graphic>
+      </p:graphicFrame>
+      <p:graphicFrame>
+        <p:nvGraphicFramePr>
+          <p:cNvPr id="5" name="Table 4">
+            <a:extLst>
+              <a:ext uri="{FF2B5EF4-FFF2-40B4-BE49-F238E27FC236}">
+                <a16:creationId xmlns:a16="http://schemas.microsoft.com/office/drawing/2014/main" id="{4492F4A4-9CAB-E225-8865-5019BEAE27B9}"/>
+              </a:ext>
+            </a:extLst>
+          </p:cNvPr>
+          <p:cNvGraphicFramePr>
+            <a:graphicFrameLocks noGrp="1"/>
+          </p:cNvGraphicFramePr>
+          <p:nvPr>
+            <p:extLst>
+              <p:ext uri="{D42A27DB-BD31-4B8C-83A1-F6EECF244321}">
+                <p14:modId xmlns:p14="http://schemas.microsoft.com/office/powerpoint/2010/main" val="1912953167"/>
+              </p:ext>
+            </p:extLst>
+          </p:nvPr>
+        </p:nvGraphicFramePr>
+        <p:xfrm>
+          <a:off x="990600" y="4881499"/>
+          <a:ext cx="7391400" cy="1402080"/>
+        </p:xfrm>
+        <a:graphic>
+          <a:graphicData uri="http://schemas.openxmlformats.org/drawingml/2006/table">
+            <a:tbl>
+              <a:tblPr firstRow="1" firstCol="1" bandRow="1">
+                <a:tableStyleId>{5940675A-B579-460E-94D1-54222C63F5DA}</a:tableStyleId>
+              </a:tblPr>
+              <a:tblGrid>
+                <a:gridCol w="3951973">
+                  <a:extLst>
+                    <a:ext uri="{9D8B030D-6E8A-4147-A177-3AD203B41FA5}">
+                      <a16:colId xmlns:a16="http://schemas.microsoft.com/office/drawing/2014/main" val="20000"/>
+                    </a:ext>
+                  </a:extLst>
+                </a:gridCol>
+                <a:gridCol w="3439427">
+                  <a:extLst>
+                    <a:ext uri="{9D8B030D-6E8A-4147-A177-3AD203B41FA5}">
+                      <a16:colId xmlns:a16="http://schemas.microsoft.com/office/drawing/2014/main" val="20001"/>
+                    </a:ext>
+                  </a:extLst>
+                </a:gridCol>
+              </a:tblGrid>
+              <a:tr h="217369">
+                <a:tc>
+                  <a:txBody>
+                    <a:bodyPr/>
+                    <a:lstStyle/>
+                    <a:p>
+                      <a:pPr marL="0" marR="0" algn="just">
+                        <a:spcBef>
+                          <a:spcPts val="0"/>
+                        </a:spcBef>
+                        <a:spcAft>
+                          <a:spcPts val="0"/>
+                        </a:spcAft>
+                      </a:pPr>
+                      <a:r>
+                        <a:rPr lang="en-US" sz="1600" dirty="0">
+                          <a:solidFill>
+                            <a:schemeClr val="bg1"/>
+                          </a:solidFill>
+                          <a:effectLst/>
+                          <a:latin typeface="Consolas" panose="020B0609020204030204" pitchFamily="49" charset="0"/>
+                          <a:cs typeface="Consolas" panose="020B0609020204030204" pitchFamily="49" charset="0"/>
+                        </a:rPr>
+                        <a:t>Assembly Program</a:t>
+                      </a:r>
+                      <a:endParaRPr lang="en-US" sz="1600" dirty="0">
+                        <a:solidFill>
+                          <a:schemeClr val="bg1"/>
+                        </a:solidFill>
+                        <a:effectLst/>
+                        <a:latin typeface="Consolas" panose="020B0609020204030204" pitchFamily="49" charset="0"/>
+                        <a:ea typeface="宋体"/>
+                        <a:cs typeface="Consolas" panose="020B0609020204030204" pitchFamily="49" charset="0"/>
+                      </a:endParaRPr>
+                    </a:p>
+                  </a:txBody>
+                  <a:tcPr marL="68580" marR="68580" marT="0" marB="0">
+                    <a:solidFill>
+                      <a:schemeClr val="accent1"/>
+                    </a:solidFill>
+                  </a:tcPr>
+                </a:tc>
+                <a:tc>
+                  <a:txBody>
+                    <a:bodyPr/>
+                    <a:lstStyle/>
+                    <a:p>
+                      <a:pPr marL="0" marR="0" algn="just">
+                        <a:spcBef>
+                          <a:spcPts val="0"/>
+                        </a:spcBef>
+                        <a:spcAft>
+                          <a:spcPts val="0"/>
+                        </a:spcAft>
+                      </a:pPr>
+                      <a:r>
+                        <a:rPr lang="en-US" sz="1600" dirty="0">
+                          <a:solidFill>
+                            <a:schemeClr val="bg1"/>
+                          </a:solidFill>
+                          <a:effectLst/>
+                          <a:latin typeface="Consolas" panose="020B0609020204030204" pitchFamily="49" charset="0"/>
+                          <a:cs typeface="Consolas" panose="020B0609020204030204" pitchFamily="49" charset="0"/>
+                        </a:rPr>
+                        <a:t>C Program</a:t>
+                      </a:r>
+                      <a:endParaRPr lang="en-US" sz="1600" dirty="0">
+                        <a:solidFill>
+                          <a:schemeClr val="bg1"/>
+                        </a:solidFill>
+                        <a:effectLst/>
+                        <a:latin typeface="Consolas" panose="020B0609020204030204" pitchFamily="49" charset="0"/>
+                        <a:ea typeface="宋体"/>
+                        <a:cs typeface="Consolas" panose="020B0609020204030204" pitchFamily="49" charset="0"/>
+                      </a:endParaRPr>
+                    </a:p>
+                  </a:txBody>
+                  <a:tcPr marL="68580" marR="68580" marT="0" marB="0">
+                    <a:solidFill>
+                      <a:schemeClr val="accent1"/>
+                    </a:solidFill>
+                  </a:tcPr>
+                </a:tc>
+                <a:extLst>
+                  <a:ext uri="{0D108BD9-81ED-4DB2-BD59-A6C34878D82A}">
+                    <a16:rowId xmlns:a16="http://schemas.microsoft.com/office/drawing/2014/main" val="10000"/>
+                  </a:ext>
+                </a:extLst>
+              </a:tr>
+              <a:tr h="773230">
+                <a:tc>
+                  <a:txBody>
+                    <a:bodyPr/>
+                    <a:lstStyle/>
+                    <a:p>
+                      <a:r>
+                        <a:rPr kumimoji="0" lang="pt-BR" sz="1600" b="1" i="0" kern="1200" dirty="0">
+                          <a:solidFill>
+                            <a:schemeClr val="tx1"/>
+                          </a:solidFill>
+                          <a:effectLst/>
+                          <a:latin typeface="Consolas" panose="020B0609020204030204" pitchFamily="49" charset="0"/>
+                          <a:ea typeface="+mn-ea"/>
+                          <a:cs typeface="+mn-cs"/>
+                        </a:rPr>
+                        <a:t>CMP</a:t>
+                      </a:r>
+                      <a:r>
+                        <a:rPr kumimoji="0" lang="pt-BR" sz="1600" b="0" i="0" kern="1200" dirty="0">
+                          <a:solidFill>
+                            <a:schemeClr val="tx1"/>
+                          </a:solidFill>
+                          <a:effectLst/>
+                          <a:latin typeface="Consolas" panose="020B0609020204030204" pitchFamily="49" charset="0"/>
+                          <a:ea typeface="+mn-ea"/>
+                          <a:cs typeface="+mn-cs"/>
+                        </a:rPr>
+                        <a:t>   r0, #'A’</a:t>
+                      </a:r>
+                      <a:r>
+                        <a:rPr kumimoji="0" lang="pt-BR" sz="1600" b="0" i="1" kern="1200" dirty="0">
+                          <a:solidFill>
+                            <a:schemeClr val="tx1"/>
+                          </a:solidFill>
+                          <a:effectLst/>
+                          <a:latin typeface="Consolas" panose="020B0609020204030204" pitchFamily="49" charset="0"/>
+                          <a:ea typeface="+mn-ea"/>
+                          <a:cs typeface="+mn-cs"/>
+                        </a:rPr>
+                        <a:t> </a:t>
+                      </a:r>
+                    </a:p>
+                    <a:p>
+                      <a:r>
+                        <a:rPr kumimoji="0" lang="pt-BR" sz="1600" b="1" i="0" kern="1200" dirty="0">
+                          <a:solidFill>
+                            <a:srgbClr val="FF0000"/>
+                          </a:solidFill>
+                          <a:effectLst/>
+                          <a:latin typeface="Consolas" panose="020B0609020204030204" pitchFamily="49" charset="0"/>
+                          <a:ea typeface="+mn-ea"/>
+                          <a:cs typeface="+mn-cs"/>
+                        </a:rPr>
+                        <a:t>CMP</a:t>
+                      </a:r>
+                      <a:r>
+                        <a:rPr kumimoji="0" lang="pt-BR" sz="1600" b="0" i="0" kern="1200" dirty="0">
+                          <a:solidFill>
+                            <a:schemeClr val="tx1"/>
+                          </a:solidFill>
+                          <a:effectLst/>
+                          <a:latin typeface="Consolas" panose="020B0609020204030204" pitchFamily="49" charset="0"/>
+                          <a:ea typeface="+mn-ea"/>
+                          <a:cs typeface="+mn-cs"/>
+                        </a:rPr>
+                        <a:t>   r0, #’</a:t>
+                      </a:r>
+                      <a:r>
+                        <a:rPr kumimoji="0" lang="pt-BR" sz="1600" b="1" i="0" kern="1200" dirty="0">
+                          <a:solidFill>
+                            <a:schemeClr val="tx1"/>
+                          </a:solidFill>
+                          <a:effectLst/>
+                          <a:latin typeface="Consolas" panose="020B0609020204030204" pitchFamily="49" charset="0"/>
+                          <a:ea typeface="+mn-ea"/>
+                          <a:cs typeface="+mn-cs"/>
+                        </a:rPr>
+                        <a:t>B</a:t>
+                      </a:r>
+                      <a:r>
+                        <a:rPr kumimoji="0" lang="pt-BR" sz="1600" b="0" i="0" kern="1200" dirty="0">
+                          <a:solidFill>
+                            <a:schemeClr val="tx1"/>
+                          </a:solidFill>
+                          <a:effectLst/>
+                          <a:latin typeface="Consolas" panose="020B0609020204030204" pitchFamily="49" charset="0"/>
+                          <a:ea typeface="+mn-ea"/>
+                          <a:cs typeface="+mn-cs"/>
+                        </a:rPr>
+                        <a:t>’ </a:t>
+                      </a:r>
+                      <a:r>
+                        <a:rPr kumimoji="0" lang="pt-BR" sz="1400" b="0" i="0" kern="1200" dirty="0">
+                          <a:solidFill>
+                            <a:schemeClr val="tx1"/>
+                          </a:solidFill>
+                          <a:effectLst/>
+                          <a:latin typeface="Consolas" panose="020B0609020204030204" pitchFamily="49" charset="0"/>
+                          <a:ea typeface="+mn-ea"/>
+                          <a:cs typeface="+mn-cs"/>
+                        </a:rPr>
+                        <a:t>%incorrect, since the 1st CMP sets flags that are overwritten by the 2nd CMP</a:t>
+                      </a:r>
+                      <a:endParaRPr kumimoji="0" lang="pt-BR" sz="1600" b="0" i="0" kern="1200" dirty="0">
+                        <a:solidFill>
+                          <a:schemeClr val="tx1"/>
+                        </a:solidFill>
+                        <a:effectLst/>
+                        <a:latin typeface="Consolas" panose="020B0609020204030204" pitchFamily="49" charset="0"/>
+                        <a:ea typeface="+mn-ea"/>
+                        <a:cs typeface="+mn-cs"/>
+                      </a:endParaRPr>
                     </a:p>
                     <a:p>
                       <a:r>

--- a/PPTs/Ch6_ARM_Control_Flow_Exercises_ANS.pptx
+++ b/PPTs/Ch6_ARM_Control_Flow_Exercises_ANS.pptx
@@ -178,7 +178,7 @@
   <pc:docChgLst>
     <pc:chgData name="Zonghua Gu" userId="9a7e1853e1951ef5" providerId="LiveId" clId="{CF1FAA12-072C-4ED5-BA76-0FFFAEFDB88A}"/>
     <pc:docChg chg="undo redo custSel addSld delSld modSld sldOrd">
-      <pc:chgData name="Zonghua Gu" userId="9a7e1853e1951ef5" providerId="LiveId" clId="{CF1FAA12-072C-4ED5-BA76-0FFFAEFDB88A}" dt="2025-11-20T23:20:31.944" v="7125" actId="1035"/>
+      <pc:chgData name="Zonghua Gu" userId="9a7e1853e1951ef5" providerId="LiveId" clId="{CF1FAA12-072C-4ED5-BA76-0FFFAEFDB88A}" dt="2025-12-04T00:49:03.082" v="7129" actId="20577"/>
       <pc:docMkLst>
         <pc:docMk/>
       </pc:docMkLst>
@@ -221,13 +221,13 @@
         </pc:graphicFrameChg>
       </pc:sldChg>
       <pc:sldChg chg="modSp mod">
-        <pc:chgData name="Zonghua Gu" userId="9a7e1853e1951ef5" providerId="LiveId" clId="{CF1FAA12-072C-4ED5-BA76-0FFFAEFDB88A}" dt="2025-11-13T23:36:23.780" v="5094" actId="20577"/>
+        <pc:chgData name="Zonghua Gu" userId="9a7e1853e1951ef5" providerId="LiveId" clId="{CF1FAA12-072C-4ED5-BA76-0FFFAEFDB88A}" dt="2025-12-04T00:49:03.082" v="7129" actId="20577"/>
         <pc:sldMkLst>
           <pc:docMk/>
           <pc:sldMk cId="3013293955" sldId="355"/>
         </pc:sldMkLst>
         <pc:spChg chg="mod">
-          <ac:chgData name="Zonghua Gu" userId="9a7e1853e1951ef5" providerId="LiveId" clId="{CF1FAA12-072C-4ED5-BA76-0FFFAEFDB88A}" dt="2025-11-13T23:36:23.780" v="5094" actId="20577"/>
+          <ac:chgData name="Zonghua Gu" userId="9a7e1853e1951ef5" providerId="LiveId" clId="{CF1FAA12-072C-4ED5-BA76-0FFFAEFDB88A}" dt="2025-12-04T00:49:03.082" v="7129" actId="20577"/>
           <ac:spMkLst>
             <pc:docMk/>
             <pc:sldMk cId="3013293955" sldId="355"/>
@@ -264,14 +264,6 @@
           <pc:docMk/>
           <pc:sldMk cId="3066637480" sldId="358"/>
         </pc:sldMkLst>
-        <pc:spChg chg="del mod">
-          <ac:chgData name="Zonghua Gu" userId="9a7e1853e1951ef5" providerId="LiveId" clId="{CF1FAA12-072C-4ED5-BA76-0FFFAEFDB88A}" dt="2025-11-20T23:20:24.079" v="7121" actId="478"/>
-          <ac:spMkLst>
-            <pc:docMk/>
-            <pc:sldMk cId="3066637480" sldId="358"/>
-            <ac:spMk id="4" creationId="{DAB1A9E9-5521-A49F-71D6-A319ADEF622C}"/>
-          </ac:spMkLst>
-        </pc:spChg>
         <pc:graphicFrameChg chg="add mod modGraphic">
           <ac:chgData name="Zonghua Gu" userId="9a7e1853e1951ef5" providerId="LiveId" clId="{CF1FAA12-072C-4ED5-BA76-0FFFAEFDB88A}" dt="2025-11-20T23:20:31.944" v="7125" actId="1035"/>
           <ac:graphicFrameMkLst>
@@ -335,32 +327,11 @@
           </ac:graphicFrameMkLst>
         </pc:graphicFrameChg>
       </pc:sldChg>
-      <pc:sldChg chg="del">
-        <pc:chgData name="Zonghua Gu" userId="9a7e1853e1951ef5" providerId="LiveId" clId="{CF1FAA12-072C-4ED5-BA76-0FFFAEFDB88A}" dt="2025-11-19T00:09:08.494" v="6736" actId="2696"/>
-        <pc:sldMkLst>
-          <pc:docMk/>
-          <pc:sldMk cId="796807376" sldId="363"/>
-        </pc:sldMkLst>
-      </pc:sldChg>
-      <pc:sldChg chg="add del">
-        <pc:chgData name="Zonghua Gu" userId="9a7e1853e1951ef5" providerId="LiveId" clId="{CF1FAA12-072C-4ED5-BA76-0FFFAEFDB88A}" dt="2025-11-19T00:09:29.516" v="6738" actId="47"/>
-        <pc:sldMkLst>
-          <pc:docMk/>
-          <pc:sldMk cId="1353931948" sldId="363"/>
-        </pc:sldMkLst>
-      </pc:sldChg>
       <pc:sldChg chg="add">
         <pc:chgData name="Zonghua Gu" userId="9a7e1853e1951ef5" providerId="LiveId" clId="{CF1FAA12-072C-4ED5-BA76-0FFFAEFDB88A}" dt="2025-11-19T00:08:16.599" v="6734"/>
         <pc:sldMkLst>
           <pc:docMk/>
           <pc:sldMk cId="2150964267" sldId="364"/>
-        </pc:sldMkLst>
-      </pc:sldChg>
-      <pc:sldChg chg="del">
-        <pc:chgData name="Zonghua Gu" userId="9a7e1853e1951ef5" providerId="LiveId" clId="{CF1FAA12-072C-4ED5-BA76-0FFFAEFDB88A}" dt="2025-11-19T00:08:08.239" v="6733" actId="2696"/>
-        <pc:sldMkLst>
-          <pc:docMk/>
-          <pc:sldMk cId="2698422353" sldId="364"/>
         </pc:sldMkLst>
       </pc:sldChg>
       <pc:sldChg chg="modSp mod">
@@ -504,21 +475,6 @@
             <pc:docMk/>
             <pc:sldMk cId="3938986292" sldId="381"/>
             <ac:graphicFrameMk id="8" creationId="{B13248B5-A9EA-67F6-3118-C1F6BE8436B6}"/>
-          </ac:graphicFrameMkLst>
-        </pc:graphicFrameChg>
-      </pc:sldChg>
-      <pc:sldChg chg="modSp del mod">
-        <pc:chgData name="Zonghua Gu" userId="9a7e1853e1951ef5" providerId="LiveId" clId="{CF1FAA12-072C-4ED5-BA76-0FFFAEFDB88A}" dt="2025-11-19T00:08:46.809" v="6735" actId="47"/>
-        <pc:sldMkLst>
-          <pc:docMk/>
-          <pc:sldMk cId="3700392889" sldId="386"/>
-        </pc:sldMkLst>
-        <pc:graphicFrameChg chg="modGraphic">
-          <ac:chgData name="Zonghua Gu" userId="9a7e1853e1951ef5" providerId="LiveId" clId="{CF1FAA12-072C-4ED5-BA76-0FFFAEFDB88A}" dt="2025-11-19T00:00:33.917" v="6609" actId="20577"/>
-          <ac:graphicFrameMkLst>
-            <pc:docMk/>
-            <pc:sldMk cId="3700392889" sldId="386"/>
-            <ac:graphicFrameMk id="5" creationId="{6531D947-33A4-180B-7D14-41430240EACC}"/>
           </ac:graphicFrameMkLst>
         </pc:graphicFrameChg>
       </pc:sldChg>
@@ -834,7 +790,7 @@
             <a:fld id="{2AEAFE1F-9E52-45C8-9793-E819F0044A1C}" type="datetimeFigureOut">
               <a:rPr lang="en-US" smtClean="0"/>
               <a:pPr/>
-              <a:t>11/20/2025</a:t>
+              <a:t>12/3/2025</a:t>
             </a:fld>
             <a:endParaRPr lang="en-US"/>
           </a:p>
@@ -4002,7 +3958,7 @@
             <a:fld id="{2E26774B-6488-4259-9342-6CBDB2BFD4E4}" type="datetime1">
               <a:rPr lang="en-US" smtClean="0"/>
               <a:pPr eaLnBrk="1" latinLnBrk="0" hangingPunct="1"/>
-              <a:t>11/20/2025</a:t>
+              <a:t>12/3/2025</a:t>
             </a:fld>
             <a:endParaRPr lang="en-US" sz="1600" dirty="0"/>
           </a:p>
@@ -4363,7 +4319,7 @@
             <a:fld id="{9B2E7711-0BE3-4AFC-959B-CB5C31A7AE48}" type="datetime1">
               <a:rPr lang="en-US" smtClean="0"/>
               <a:pPr eaLnBrk="1" latinLnBrk="0" hangingPunct="1"/>
-              <a:t>11/20/2025</a:t>
+              <a:t>12/3/2025</a:t>
             </a:fld>
             <a:endParaRPr lang="en-US"/>
           </a:p>
@@ -4540,7 +4496,7 @@
             <a:fld id="{825AAB62-A572-4E37-B772-B4A75ADE0B18}" type="datetime1">
               <a:rPr lang="en-US" smtClean="0"/>
               <a:pPr eaLnBrk="1" latinLnBrk="0" hangingPunct="1"/>
-              <a:t>11/20/2025</a:t>
+              <a:t>12/3/2025</a:t>
             </a:fld>
             <a:endParaRPr lang="en-US"/>
           </a:p>
@@ -4777,7 +4733,7 @@
             <a:fld id="{B0F52420-10F8-488E-969A-A9BE388BE9C4}" type="datetime1">
               <a:rPr lang="en-US" smtClean="0"/>
               <a:pPr eaLnBrk="1" latinLnBrk="0" hangingPunct="1"/>
-              <a:t>11/20/2025</a:t>
+              <a:t>12/3/2025</a:t>
             </a:fld>
             <a:endParaRPr lang="en-US" dirty="0"/>
           </a:p>
@@ -5048,7 +5004,7 @@
             <a:fld id="{96E96F24-58CF-47DA-907C-A9CD6353E425}" type="datetime1">
               <a:rPr lang="en-US" smtClean="0"/>
               <a:pPr eaLnBrk="1" latinLnBrk="0" hangingPunct="1"/>
-              <a:t>11/20/2025</a:t>
+              <a:t>12/3/2025</a:t>
             </a:fld>
             <a:endParaRPr lang="en-US" dirty="0"/>
           </a:p>
@@ -5270,7 +5226,7 @@
             <a:fld id="{53AE4463-726A-4A35-9F46-98893432A3F9}" type="datetime1">
               <a:rPr lang="en-US" smtClean="0"/>
               <a:pPr eaLnBrk="1" latinLnBrk="0" hangingPunct="1"/>
-              <a:t>11/20/2025</a:t>
+              <a:t>12/3/2025</a:t>
             </a:fld>
             <a:endParaRPr lang="en-US"/>
           </a:p>
@@ -5624,7 +5580,7 @@
             <a:fld id="{FDF404D0-E306-4E90-90E3-E44D26246FFC}" type="datetime1">
               <a:rPr lang="en-US" smtClean="0"/>
               <a:pPr eaLnBrk="1" latinLnBrk="0" hangingPunct="1"/>
-              <a:t>11/20/2025</a:t>
+              <a:t>12/3/2025</a:t>
             </a:fld>
             <a:endParaRPr lang="en-US"/>
           </a:p>
@@ -5858,7 +5814,7 @@
             <a:fld id="{1485DA14-76F0-4D93-83FB-7878C79A1986}" type="datetime1">
               <a:rPr lang="en-US" smtClean="0"/>
               <a:pPr eaLnBrk="1" latinLnBrk="0" hangingPunct="1"/>
-              <a:t>11/20/2025</a:t>
+              <a:t>12/3/2025</a:t>
             </a:fld>
             <a:endParaRPr lang="en-US"/>
           </a:p>
@@ -6001,7 +5957,7 @@
             <a:fld id="{A15E552D-49E1-496B-B79C-E100986B8B5F}" type="datetime1">
               <a:rPr lang="en-US" smtClean="0"/>
               <a:pPr eaLnBrk="1" latinLnBrk="0" hangingPunct="1"/>
-              <a:t>11/20/2025</a:t>
+              <a:t>12/3/2025</a:t>
             </a:fld>
             <a:endParaRPr lang="en-US"/>
           </a:p>
@@ -6280,7 +6236,7 @@
             <a:fld id="{CEC72505-1551-4A98-97CD-F520B07184AD}" type="datetime1">
               <a:rPr lang="en-US" smtClean="0"/>
               <a:pPr eaLnBrk="1" latinLnBrk="0" hangingPunct="1"/>
-              <a:t>11/20/2025</a:t>
+              <a:t>12/3/2025</a:t>
             </a:fld>
             <a:endParaRPr lang="en-US"/>
           </a:p>
@@ -6688,7 +6644,7 @@
             <a:fld id="{7218F47B-BA16-4F20-B5BA-73F598D94B51}" type="datetime1">
               <a:rPr lang="en-US" smtClean="0"/>
               <a:pPr eaLnBrk="1" latinLnBrk="0" hangingPunct="1"/>
-              <a:t>11/20/2025</a:t>
+              <a:t>12/3/2025</a:t>
             </a:fld>
             <a:endParaRPr lang="en-US"/>
           </a:p>
@@ -7027,7 +6983,7 @@
             <a:fld id="{4F3CB514-9CA6-4E48-9463-A430D31CFDE3}" type="datetime1">
               <a:rPr lang="en-US" smtClean="0"/>
               <a:pPr eaLnBrk="1" latinLnBrk="0" hangingPunct="1"/>
-              <a:t>11/20/2025</a:t>
+              <a:t>12/3/2025</a:t>
             </a:fld>
             <a:endParaRPr lang="en-US" sz="1400" dirty="0">
               <a:solidFill>
@@ -32986,8 +32942,13 @@
             <a:pPr lvl="1"/>
             <a:r>
               <a:rPr lang="pt-BR" dirty="0"/>
-              <a:t>SUBS r1, r2</a:t>
-            </a:r>
+              <a:t>SUBS r1</a:t>
+            </a:r>
+            <a:r>
+              <a:rPr lang="pt-BR"/>
+              <a:t>, r1, r2</a:t>
+            </a:r>
+            <a:endParaRPr lang="pt-BR" dirty="0"/>
           </a:p>
           <a:p>
             <a:pPr lvl="1"/>
